--- a/docs/talk-users.pptx
+++ b/docs/talk-users.pptx
@@ -163,7 +163,7 @@
   <p:extLst>
     <p:ext uri="{521415D9-36F7-43E2-AB2F-B90AF26B5E84}">
       <p14:sectionLst xmlns:p14="http://schemas.microsoft.com/office/powerpoint/2010/main">
-        <p14:section name="Start" id="{1cfcc621-05f9-5a4b-9294-0938c346e167}">
+        <p14:section name="Start" id="{424b07fb-0032-0e51-b5e2-0f323ea32b43}">
           <p14:sldIdLst>
             <p14:sldId id="256"/>
             <p14:sldId id="257"/>
@@ -175,7 +175,7 @@
             <p14:sldId id="263"/>
           </p14:sldIdLst>
         </p14:section>
-        <p14:section name="Fit" id="{c394884f-1da2-073f-3255-9d31ced17d44}">
+        <p14:section name="Fit" id="{34279d1c-f868-dc05-432f-272c20e9f727}">
           <p14:sldIdLst>
             <p14:sldId id="264"/>
             <p14:sldId id="265"/>
@@ -187,7 +187,7 @@
             <p14:sldId id="271"/>
           </p14:sldIdLst>
         </p14:section>
-        <p14:section name="Editor" id="{aa0f235b-beb7-87a3-339b-dcb50b904854}">
+        <p14:section name="Editor" id="{9b9fcaef-0a80-1fb4-4a2c-1dde596342bf}">
           <p14:sldIdLst>
             <p14:sldId id="272"/>
             <p14:sldId id="273"/>
@@ -199,7 +199,7 @@
             <p14:sldId id="279"/>
           </p14:sldIdLst>
         </p14:section>
-        <p14:section name="Speed" id="{748c0b6a-8954-1eb0-b86c-e8a5e6e2e95b}">
+        <p14:section name="Speed" id="{080b8784-417f-0aaa-c239-b3bf4d5467e7}">
           <p14:sldIdLst>
             <p14:sldId id="280"/>
             <p14:sldId id="281"/>
@@ -211,7 +211,7 @@
             <p14:sldId id="287"/>
           </p14:sldIdLst>
         </p14:section>
-        <p14:section name="Operate" id="{c326f416-8933-7fbe-e380-836e5c6aebeb}">
+        <p14:section name="Operate" id="{a621d3d6-f679-5780-bd80-d71bc5d1c1fb}">
           <p14:sldIdLst>
             <p14:sldId id="288"/>
             <p14:sldId id="289"/>
@@ -222,7 +222,7 @@
             <p14:sldId id="294"/>
           </p14:sldIdLst>
         </p14:section>
-        <p14:section name="Inspect" id="{f179faad-8c21-bfd4-db3e-7c57bb38d0e4}">
+        <p14:section name="Inspect" id="{b251a9b0-5030-bce1-8084-8f6fd010c7aa}">
           <p14:sldIdLst>
             <p14:sldId id="295"/>
             <p14:sldId id="296"/>
@@ -233,7 +233,7 @@
             <p14:sldId id="301"/>
           </p14:sldIdLst>
         </p14:section>
-        <p14:section name="Reference" id="{aba25d23-17cb-4b60-ac49-3d97811921fe}">
+        <p14:section name="Reference" id="{871b2adb-3480-eef4-3899-3cf8d21afac0}">
           <p14:sldIdLst>
             <p14:sldId id="302"/>
             <p14:sldId id="303"/>
@@ -5678,7 +5678,7 @@
       </p:grpSpPr>
       <p:pic>
         <p:nvPicPr>
-          <p:cNvPr id="2" name="Image 0" descr="/private/tmp/claude-501/-Users-wizard-RustroverProjects-zshrs/2555d359-9a79-4736-9207-869cc21577b1/scratchpad/logo/logo-mark.png">    </p:cNvPr>
+          <p:cNvPr id="2" name="Image 0" descr="/Users/wizard/RustroverProjects/zshrs/docs/logo-mark.png">    </p:cNvPr>
           <p:cNvPicPr>
             <a:picLocks noChangeAspect="1"/>
           </p:cNvPicPr>
@@ -5821,7 +5821,7 @@
       </p:grpSpPr>
       <p:pic>
         <p:nvPicPr>
-          <p:cNvPr id="2" name="Image 0" descr="/private/tmp/claude-501/-Users-wizard-RustroverProjects-zshrs/2555d359-9a79-4736-9207-869cc21577b1/scratchpad/logo/logo-mark.png">    </p:cNvPr>
+          <p:cNvPr id="2" name="Image 0" descr="/Users/wizard/RustroverProjects/zshrs/docs/logo-mark.png">    </p:cNvPr>
           <p:cNvPicPr>
             <a:picLocks noChangeAspect="1"/>
           </p:cNvPicPr>
@@ -6284,7 +6284,7 @@
       </p:grpSpPr>
       <p:pic>
         <p:nvPicPr>
-          <p:cNvPr id="3" name="Image 0" descr="/private/tmp/claude-501/-Users-wizard-RustroverProjects-zshrs/2555d359-9a79-4736-9207-869cc21577b1/scratchpad/logo/logo.png">    </p:cNvPr>
+          <p:cNvPr id="3" name="Image 0" descr="/Users/wizard/RustroverProjects/zshrs/docs/logo.png">    </p:cNvPr>
           <p:cNvPicPr>
             <a:picLocks noChangeAspect="1"/>
           </p:cNvPicPr>
@@ -34692,7 +34692,7 @@
       </p:grpSpPr>
       <p:pic>
         <p:nvPicPr>
-          <p:cNvPr id="3" name="Image 0" descr="/private/tmp/claude-501/-Users-wizard-RustroverProjects-zshrs/2555d359-9a79-4736-9207-869cc21577b1/scratchpad/logo/logo.png">    </p:cNvPr>
+          <p:cNvPr id="3" name="Image 0" descr="/Users/wizard/RustroverProjects/zshrs/docs/logo.png">    </p:cNvPr>
           <p:cNvPicPr>
             <a:picLocks noChangeAspect="1"/>
           </p:cNvPicPr>

--- a/docs/talk-users.pptx
+++ b/docs/talk-users.pptx
@@ -163,7 +163,7 @@
   <p:extLst>
     <p:ext uri="{521415D9-36F7-43E2-AB2F-B90AF26B5E84}">
       <p14:sectionLst xmlns:p14="http://schemas.microsoft.com/office/powerpoint/2010/main">
-        <p14:section name="Start" id="{424b07fb-0032-0e51-b5e2-0f323ea32b43}">
+        <p14:section name="Start" id="{825535f2-8f1b-60d5-ab1b-e10d229948da}">
           <p14:sldIdLst>
             <p14:sldId id="256"/>
             <p14:sldId id="257"/>
@@ -175,7 +175,7 @@
             <p14:sldId id="263"/>
           </p14:sldIdLst>
         </p14:section>
-        <p14:section name="Fit" id="{34279d1c-f868-dc05-432f-272c20e9f727}">
+        <p14:section name="Fit" id="{d82f7a61-ad31-3043-0677-195860cc2e6e}">
           <p14:sldIdLst>
             <p14:sldId id="264"/>
             <p14:sldId id="265"/>
@@ -187,7 +187,7 @@
             <p14:sldId id="271"/>
           </p14:sldIdLst>
         </p14:section>
-        <p14:section name="Editor" id="{9b9fcaef-0a80-1fb4-4a2c-1dde596342bf}">
+        <p14:section name="Editor" id="{d871170e-42ad-66b2-b227-0fba88e16bd2}">
           <p14:sldIdLst>
             <p14:sldId id="272"/>
             <p14:sldId id="273"/>
@@ -199,7 +199,7 @@
             <p14:sldId id="279"/>
           </p14:sldIdLst>
         </p14:section>
-        <p14:section name="Speed" id="{080b8784-417f-0aaa-c239-b3bf4d5467e7}">
+        <p14:section name="Speed" id="{ee213d67-254a-1aef-b9fc-972d7a013c4d}">
           <p14:sldIdLst>
             <p14:sldId id="280"/>
             <p14:sldId id="281"/>
@@ -211,7 +211,7 @@
             <p14:sldId id="287"/>
           </p14:sldIdLst>
         </p14:section>
-        <p14:section name="Operate" id="{a621d3d6-f679-5780-bd80-d71bc5d1c1fb}">
+        <p14:section name="Operate" id="{fdb9a0bf-1230-cf6c-e81b-3819c784b7d3}">
           <p14:sldIdLst>
             <p14:sldId id="288"/>
             <p14:sldId id="289"/>
@@ -222,7 +222,7 @@
             <p14:sldId id="294"/>
           </p14:sldIdLst>
         </p14:section>
-        <p14:section name="Inspect" id="{b251a9b0-5030-bce1-8084-8f6fd010c7aa}">
+        <p14:section name="Inspect" id="{ed06bc8b-fcc4-b273-008c-4b44b1d6ef10}">
           <p14:sldIdLst>
             <p14:sldId id="295"/>
             <p14:sldId id="296"/>
@@ -233,7 +233,7 @@
             <p14:sldId id="301"/>
           </p14:sldIdLst>
         </p14:section>
-        <p14:section name="Reference" id="{871b2adb-3480-eef4-3899-3cf8d21afac0}">
+        <p14:section name="Reference" id="{90630798-9a00-78d3-c323-835a0788677c}">
           <p14:sldIdLst>
             <p14:sldId id="302"/>
             <p14:sldId id="303"/>
@@ -5869,7 +5869,7 @@
               <a:buNone/>
               <a:defRPr lang="en-US" sz="3600" b="1" dirty="0">
                 <a:solidFill>
-                  <a:schemeClr val="accent4"/>
+                  <a:schemeClr val="bg2"/>
                 </a:solidFill>
               </a:defRPr>
             </a:lvl1pPr>
@@ -5912,7 +5912,7 @@
             <a:lvl1pPr>
               <a:defRPr sz="1200">
                 <a:solidFill>
-                  <a:schemeClr val="accent6"/>
+                  <a:schemeClr val="accent5"/>
                 </a:solidFill>
                 <a:latin typeface="Courier New"/>
                 <a:ea typeface="Courier New"/>
@@ -6657,7 +6657,7 @@
           </a:solidFill>
           <a:ln w="12700">
             <a:solidFill>
-              <a:srgbClr val="2C3844"/>
+              <a:srgbClr val="4A1A5E"/>
             </a:solidFill>
             <a:prstDash val="solid"/>
           </a:ln>
@@ -6885,7 +6885,7 @@
             <a:r>
               <a:rPr lang="en-US" sz="3600" b="1" dirty="0">
                 <a:solidFill>
-                  <a:schemeClr val="accent4"/>
+                  <a:schemeClr val="bg2"/>
                 </a:solidFill>
               </a:rPr>
               <a:t>Your config keeps working</a:t>
@@ -6921,7 +6921,7 @@
             <a:r>
               <a:rPr lang="en-US" sz="1200" dirty="0">
                 <a:solidFill>
-                  <a:schemeClr val="accent6"/>
+                  <a:schemeClr val="accent5"/>
                 </a:solidFill>
                 <a:latin typeface="Courier New" pitchFamily="34" charset="0"/>
                 <a:ea typeface="Courier New" pitchFamily="34" charset="-122"/>
@@ -6960,7 +6960,7 @@
             <a:r>
               <a:rPr lang="en-US" sz="2300" dirty="0">
                 <a:solidFill>
-                  <a:schemeClr val="accent4"/>
+                  <a:schemeClr val="bg2"/>
                 </a:solidFill>
               </a:rPr>
               <a:t>The prompt engine sources .p10k.zsh unchanged. The line-editor engines honour the plugin variables you already set.</a:t>
@@ -7007,7 +7007,7 @@
                       <a:r>
                         <a:rPr lang="en-US" sz="1800" b="1" dirty="0">
                           <a:solidFill>
-                            <a:schemeClr val="accent2"/>
+                            <a:schemeClr val="accent1"/>
                           </a:solidFill>
                         </a:rPr>
                         <a:t>You have</a:t>
@@ -7018,7 +7018,7 @@
                   <a:tcPr marL="91440" marR="91440" marT="45720" marB="45720" anchor="ctr">
                     <a:lnL w="12700" cap="flat" cmpd="sng" algn="ctr">
                       <a:solidFill>
-                        <a:srgbClr val="D9D5C8"/>
+                        <a:srgbClr val="4A1A5E"/>
                       </a:solidFill>
                       <a:prstDash val="solid"/>
                       <a:round/>
@@ -7027,7 +7027,7 @@
                     </a:lnL>
                     <a:lnR w="12700" cap="flat" cmpd="sng" algn="ctr">
                       <a:solidFill>
-                        <a:srgbClr val="D9D5C8"/>
+                        <a:srgbClr val="4A1A5E"/>
                       </a:solidFill>
                       <a:prstDash val="solid"/>
                       <a:round/>
@@ -7036,7 +7036,7 @@
                     </a:lnR>
                     <a:lnT w="12700" cap="flat" cmpd="sng" algn="ctr">
                       <a:solidFill>
-                        <a:srgbClr val="D9D5C8"/>
+                        <a:srgbClr val="4A1A5E"/>
                       </a:solidFill>
                       <a:prstDash val="solid"/>
                       <a:round/>
@@ -7045,7 +7045,7 @@
                     </a:lnT>
                     <a:lnB w="12700" cap="flat" cmpd="sng" algn="ctr">
                       <a:solidFill>
-                        <a:srgbClr val="D9D5C8"/>
+                        <a:srgbClr val="4A1A5E"/>
                       </a:solidFill>
                       <a:prstDash val="solid"/>
                       <a:round/>
@@ -7065,7 +7065,7 @@
                       <a:r>
                         <a:rPr lang="en-US" sz="1800" b="1" dirty="0">
                           <a:solidFill>
-                            <a:schemeClr val="accent2"/>
+                            <a:schemeClr val="accent1"/>
                           </a:solidFill>
                         </a:rPr>
                         <a:t>What happens</a:t>
@@ -7076,7 +7076,7 @@
                   <a:tcPr marL="91440" marR="91440" marT="45720" marB="45720" anchor="ctr">
                     <a:lnL w="12700" cap="flat" cmpd="sng" algn="ctr">
                       <a:solidFill>
-                        <a:srgbClr val="D9D5C8"/>
+                        <a:srgbClr val="4A1A5E"/>
                       </a:solidFill>
                       <a:prstDash val="solid"/>
                       <a:round/>
@@ -7085,7 +7085,7 @@
                     </a:lnL>
                     <a:lnR w="12700" cap="flat" cmpd="sng" algn="ctr">
                       <a:solidFill>
-                        <a:srgbClr val="D9D5C8"/>
+                        <a:srgbClr val="4A1A5E"/>
                       </a:solidFill>
                       <a:prstDash val="solid"/>
                       <a:round/>
@@ -7094,7 +7094,7 @@
                     </a:lnR>
                     <a:lnT w="12700" cap="flat" cmpd="sng" algn="ctr">
                       <a:solidFill>
-                        <a:srgbClr val="D9D5C8"/>
+                        <a:srgbClr val="4A1A5E"/>
                       </a:solidFill>
                       <a:prstDash val="solid"/>
                       <a:round/>
@@ -7103,7 +7103,7 @@
                     </a:lnT>
                     <a:lnB w="12700" cap="flat" cmpd="sng" algn="ctr">
                       <a:solidFill>
-                        <a:srgbClr val="D9D5C8"/>
+                        <a:srgbClr val="4A1A5E"/>
                       </a:solidFill>
                       <a:prstDash val="solid"/>
                       <a:round/>
@@ -7125,7 +7125,7 @@
                       <a:r>
                         <a:rPr lang="en-US" sz="1800" dirty="0">
                           <a:solidFill>
-                            <a:schemeClr val="accent4"/>
+                            <a:schemeClr val="bg2"/>
                           </a:solidFill>
                         </a:rPr>
                         <a:t>.zshrc</a:t>
@@ -7136,7 +7136,7 @@
                   <a:tcPr marL="91440" marR="91440" marT="45720" marB="45720" anchor="ctr">
                     <a:lnL w="12700" cap="flat" cmpd="sng" algn="ctr">
                       <a:solidFill>
-                        <a:srgbClr val="D9D5C8"/>
+                        <a:srgbClr val="4A1A5E"/>
                       </a:solidFill>
                       <a:prstDash val="solid"/>
                       <a:round/>
@@ -7145,7 +7145,7 @@
                     </a:lnL>
                     <a:lnR w="12700" cap="flat" cmpd="sng" algn="ctr">
                       <a:solidFill>
-                        <a:srgbClr val="D9D5C8"/>
+                        <a:srgbClr val="4A1A5E"/>
                       </a:solidFill>
                       <a:prstDash val="solid"/>
                       <a:round/>
@@ -7154,7 +7154,7 @@
                     </a:lnR>
                     <a:lnT w="12700" cap="flat" cmpd="sng" algn="ctr">
                       <a:solidFill>
-                        <a:srgbClr val="D9D5C8"/>
+                        <a:srgbClr val="4A1A5E"/>
                       </a:solidFill>
                       <a:prstDash val="solid"/>
                       <a:round/>
@@ -7163,7 +7163,7 @@
                     </a:lnT>
                     <a:lnB w="12700" cap="flat" cmpd="sng" algn="ctr">
                       <a:solidFill>
-                        <a:srgbClr val="D9D5C8"/>
+                        <a:srgbClr val="4A1A5E"/>
                       </a:solidFill>
                       <a:prstDash val="solid"/>
                       <a:round/>
@@ -7183,7 +7183,7 @@
                       <a:r>
                         <a:rPr lang="en-US" sz="1800" dirty="0">
                           <a:solidFill>
-                            <a:schemeClr val="accent4"/>
+                            <a:schemeClr val="bg2"/>
                           </a:solidFill>
                         </a:rPr>
                         <a:t>Loads as it is</a:t>
@@ -7194,7 +7194,7 @@
                   <a:tcPr marL="91440" marR="91440" marT="45720" marB="45720" anchor="ctr">
                     <a:lnL w="12700" cap="flat" cmpd="sng" algn="ctr">
                       <a:solidFill>
-                        <a:srgbClr val="D9D5C8"/>
+                        <a:srgbClr val="4A1A5E"/>
                       </a:solidFill>
                       <a:prstDash val="solid"/>
                       <a:round/>
@@ -7203,7 +7203,7 @@
                     </a:lnL>
                     <a:lnR w="12700" cap="flat" cmpd="sng" algn="ctr">
                       <a:solidFill>
-                        <a:srgbClr val="D9D5C8"/>
+                        <a:srgbClr val="4A1A5E"/>
                       </a:solidFill>
                       <a:prstDash val="solid"/>
                       <a:round/>
@@ -7212,7 +7212,7 @@
                     </a:lnR>
                     <a:lnT w="12700" cap="flat" cmpd="sng" algn="ctr">
                       <a:solidFill>
-                        <a:srgbClr val="D9D5C8"/>
+                        <a:srgbClr val="4A1A5E"/>
                       </a:solidFill>
                       <a:prstDash val="solid"/>
                       <a:round/>
@@ -7221,7 +7221,7 @@
                     </a:lnT>
                     <a:lnB w="12700" cap="flat" cmpd="sng" algn="ctr">
                       <a:solidFill>
-                        <a:srgbClr val="D9D5C8"/>
+                        <a:srgbClr val="4A1A5E"/>
                       </a:solidFill>
                       <a:prstDash val="solid"/>
                       <a:round/>
@@ -7243,7 +7243,7 @@
                       <a:r>
                         <a:rPr lang="en-US" sz="1800" dirty="0">
                           <a:solidFill>
-                            <a:schemeClr val="accent4"/>
+                            <a:schemeClr val="bg2"/>
                           </a:solidFill>
                         </a:rPr>
                         <a:t>.p10k.zsh</a:t>
@@ -7254,7 +7254,7 @@
                   <a:tcPr marL="91440" marR="91440" marT="45720" marB="45720" anchor="ctr">
                     <a:lnL w="12700" cap="flat" cmpd="sng" algn="ctr">
                       <a:solidFill>
-                        <a:srgbClr val="D9D5C8"/>
+                        <a:srgbClr val="4A1A5E"/>
                       </a:solidFill>
                       <a:prstDash val="solid"/>
                       <a:round/>
@@ -7263,7 +7263,7 @@
                     </a:lnL>
                     <a:lnR w="12700" cap="flat" cmpd="sng" algn="ctr">
                       <a:solidFill>
-                        <a:srgbClr val="D9D5C8"/>
+                        <a:srgbClr val="4A1A5E"/>
                       </a:solidFill>
                       <a:prstDash val="solid"/>
                       <a:round/>
@@ -7272,7 +7272,7 @@
                     </a:lnR>
                     <a:lnT w="12700" cap="flat" cmpd="sng" algn="ctr">
                       <a:solidFill>
-                        <a:srgbClr val="D9D5C8"/>
+                        <a:srgbClr val="4A1A5E"/>
                       </a:solidFill>
                       <a:prstDash val="solid"/>
                       <a:round/>
@@ -7281,7 +7281,7 @@
                     </a:lnT>
                     <a:lnB w="12700" cap="flat" cmpd="sng" algn="ctr">
                       <a:solidFill>
-                        <a:srgbClr val="D9D5C8"/>
+                        <a:srgbClr val="4A1A5E"/>
                       </a:solidFill>
                       <a:prstDash val="solid"/>
                       <a:round/>
@@ -7301,7 +7301,7 @@
                       <a:r>
                         <a:rPr lang="en-US" sz="1800" dirty="0">
                           <a:solidFill>
-                            <a:schemeClr val="accent4"/>
+                            <a:schemeClr val="bg2"/>
                           </a:solidFill>
                         </a:rPr>
                         <a:t>Sourced unchanged by the native prompt engine</a:t>
@@ -7312,7 +7312,7 @@
                   <a:tcPr marL="91440" marR="91440" marT="45720" marB="45720" anchor="ctr">
                     <a:lnL w="12700" cap="flat" cmpd="sng" algn="ctr">
                       <a:solidFill>
-                        <a:srgbClr val="D9D5C8"/>
+                        <a:srgbClr val="4A1A5E"/>
                       </a:solidFill>
                       <a:prstDash val="solid"/>
                       <a:round/>
@@ -7321,7 +7321,7 @@
                     </a:lnL>
                     <a:lnR w="12700" cap="flat" cmpd="sng" algn="ctr">
                       <a:solidFill>
-                        <a:srgbClr val="D9D5C8"/>
+                        <a:srgbClr val="4A1A5E"/>
                       </a:solidFill>
                       <a:prstDash val="solid"/>
                       <a:round/>
@@ -7330,7 +7330,7 @@
                     </a:lnR>
                     <a:lnT w="12700" cap="flat" cmpd="sng" algn="ctr">
                       <a:solidFill>
-                        <a:srgbClr val="D9D5C8"/>
+                        <a:srgbClr val="4A1A5E"/>
                       </a:solidFill>
                       <a:prstDash val="solid"/>
                       <a:round/>
@@ -7339,7 +7339,7 @@
                     </a:lnT>
                     <a:lnB w="12700" cap="flat" cmpd="sng" algn="ctr">
                       <a:solidFill>
-                        <a:srgbClr val="D9D5C8"/>
+                        <a:srgbClr val="4A1A5E"/>
                       </a:solidFill>
                       <a:prstDash val="solid"/>
                       <a:round/>
@@ -7361,7 +7361,7 @@
                       <a:r>
                         <a:rPr lang="en-US" sz="1800" dirty="0">
                           <a:solidFill>
-                            <a:schemeClr val="accent4"/>
+                            <a:schemeClr val="bg2"/>
                           </a:solidFill>
                         </a:rPr>
                         <a:t>ZSH_HIGHLIGHT_STYLES</a:t>
@@ -7372,7 +7372,7 @@
                   <a:tcPr marL="91440" marR="91440" marT="45720" marB="45720" anchor="ctr">
                     <a:lnL w="12700" cap="flat" cmpd="sng" algn="ctr">
                       <a:solidFill>
-                        <a:srgbClr val="D9D5C8"/>
+                        <a:srgbClr val="4A1A5E"/>
                       </a:solidFill>
                       <a:prstDash val="solid"/>
                       <a:round/>
@@ -7381,7 +7381,7 @@
                     </a:lnL>
                     <a:lnR w="12700" cap="flat" cmpd="sng" algn="ctr">
                       <a:solidFill>
-                        <a:srgbClr val="D9D5C8"/>
+                        <a:srgbClr val="4A1A5E"/>
                       </a:solidFill>
                       <a:prstDash val="solid"/>
                       <a:round/>
@@ -7390,7 +7390,7 @@
                     </a:lnR>
                     <a:lnT w="12700" cap="flat" cmpd="sng" algn="ctr">
                       <a:solidFill>
-                        <a:srgbClr val="D9D5C8"/>
+                        <a:srgbClr val="4A1A5E"/>
                       </a:solidFill>
                       <a:prstDash val="solid"/>
                       <a:round/>
@@ -7399,7 +7399,7 @@
                     </a:lnT>
                     <a:lnB w="12700" cap="flat" cmpd="sng" algn="ctr">
                       <a:solidFill>
-                        <a:srgbClr val="D9D5C8"/>
+                        <a:srgbClr val="4A1A5E"/>
                       </a:solidFill>
                       <a:prstDash val="solid"/>
                       <a:round/>
@@ -7419,7 +7419,7 @@
                       <a:r>
                         <a:rPr lang="en-US" sz="1800" dirty="0">
                           <a:solidFill>
-                            <a:schemeClr val="accent4"/>
+                            <a:schemeClr val="bg2"/>
                           </a:solidFill>
                         </a:rPr>
                         <a:t>Honoured by the native highlighter</a:t>
@@ -7430,7 +7430,7 @@
                   <a:tcPr marL="91440" marR="91440" marT="45720" marB="45720" anchor="ctr">
                     <a:lnL w="12700" cap="flat" cmpd="sng" algn="ctr">
                       <a:solidFill>
-                        <a:srgbClr val="D9D5C8"/>
+                        <a:srgbClr val="4A1A5E"/>
                       </a:solidFill>
                       <a:prstDash val="solid"/>
                       <a:round/>
@@ -7439,7 +7439,7 @@
                     </a:lnL>
                     <a:lnR w="12700" cap="flat" cmpd="sng" algn="ctr">
                       <a:solidFill>
-                        <a:srgbClr val="D9D5C8"/>
+                        <a:srgbClr val="4A1A5E"/>
                       </a:solidFill>
                       <a:prstDash val="solid"/>
                       <a:round/>
@@ -7448,7 +7448,7 @@
                     </a:lnR>
                     <a:lnT w="12700" cap="flat" cmpd="sng" algn="ctr">
                       <a:solidFill>
-                        <a:srgbClr val="D9D5C8"/>
+                        <a:srgbClr val="4A1A5E"/>
                       </a:solidFill>
                       <a:prstDash val="solid"/>
                       <a:round/>
@@ -7457,7 +7457,7 @@
                     </a:lnT>
                     <a:lnB w="12700" cap="flat" cmpd="sng" algn="ctr">
                       <a:solidFill>
-                        <a:srgbClr val="D9D5C8"/>
+                        <a:srgbClr val="4A1A5E"/>
                       </a:solidFill>
                       <a:prstDash val="solid"/>
                       <a:round/>
@@ -7479,7 +7479,7 @@
                       <a:r>
                         <a:rPr lang="en-US" sz="1800" dirty="0">
                           <a:solidFill>
-                            <a:schemeClr val="accent4"/>
+                            <a:schemeClr val="bg2"/>
                           </a:solidFill>
                         </a:rPr>
                         <a:t>ZSH_AUTOSUGGEST_*</a:t>
@@ -7490,7 +7490,7 @@
                   <a:tcPr marL="91440" marR="91440" marT="45720" marB="45720" anchor="ctr">
                     <a:lnL w="12700" cap="flat" cmpd="sng" algn="ctr">
                       <a:solidFill>
-                        <a:srgbClr val="D9D5C8"/>
+                        <a:srgbClr val="4A1A5E"/>
                       </a:solidFill>
                       <a:prstDash val="solid"/>
                       <a:round/>
@@ -7499,7 +7499,7 @@
                     </a:lnL>
                     <a:lnR w="12700" cap="flat" cmpd="sng" algn="ctr">
                       <a:solidFill>
-                        <a:srgbClr val="D9D5C8"/>
+                        <a:srgbClr val="4A1A5E"/>
                       </a:solidFill>
                       <a:prstDash val="solid"/>
                       <a:round/>
@@ -7508,7 +7508,7 @@
                     </a:lnR>
                     <a:lnT w="12700" cap="flat" cmpd="sng" algn="ctr">
                       <a:solidFill>
-                        <a:srgbClr val="D9D5C8"/>
+                        <a:srgbClr val="4A1A5E"/>
                       </a:solidFill>
                       <a:prstDash val="solid"/>
                       <a:round/>
@@ -7517,7 +7517,7 @@
                     </a:lnT>
                     <a:lnB w="12700" cap="flat" cmpd="sng" algn="ctr">
                       <a:solidFill>
-                        <a:srgbClr val="D9D5C8"/>
+                        <a:srgbClr val="4A1A5E"/>
                       </a:solidFill>
                       <a:prstDash val="solid"/>
                       <a:round/>
@@ -7537,7 +7537,7 @@
                       <a:r>
                         <a:rPr lang="en-US" sz="1800" dirty="0">
                           <a:solidFill>
-                            <a:schemeClr val="accent4"/>
+                            <a:schemeClr val="bg2"/>
                           </a:solidFill>
                         </a:rPr>
                         <a:t>Honoured by autosuggestions</a:t>
@@ -7548,7 +7548,7 @@
                   <a:tcPr marL="91440" marR="91440" marT="45720" marB="45720" anchor="ctr">
                     <a:lnL w="12700" cap="flat" cmpd="sng" algn="ctr">
                       <a:solidFill>
-                        <a:srgbClr val="D9D5C8"/>
+                        <a:srgbClr val="4A1A5E"/>
                       </a:solidFill>
                       <a:prstDash val="solid"/>
                       <a:round/>
@@ -7557,7 +7557,7 @@
                     </a:lnL>
                     <a:lnR w="12700" cap="flat" cmpd="sng" algn="ctr">
                       <a:solidFill>
-                        <a:srgbClr val="D9D5C8"/>
+                        <a:srgbClr val="4A1A5E"/>
                       </a:solidFill>
                       <a:prstDash val="solid"/>
                       <a:round/>
@@ -7566,7 +7566,7 @@
                     </a:lnR>
                     <a:lnT w="12700" cap="flat" cmpd="sng" algn="ctr">
                       <a:solidFill>
-                        <a:srgbClr val="D9D5C8"/>
+                        <a:srgbClr val="4A1A5E"/>
                       </a:solidFill>
                       <a:prstDash val="solid"/>
                       <a:round/>
@@ -7575,7 +7575,7 @@
                     </a:lnT>
                     <a:lnB w="12700" cap="flat" cmpd="sng" algn="ctr">
                       <a:solidFill>
-                        <a:srgbClr val="D9D5C8"/>
+                        <a:srgbClr val="4A1A5E"/>
                       </a:solidFill>
                       <a:prstDash val="solid"/>
                       <a:round/>
@@ -7597,7 +7597,7 @@
                       <a:r>
                         <a:rPr lang="en-US" sz="1800" dirty="0">
                           <a:solidFill>
-                            <a:schemeClr val="accent4"/>
+                            <a:schemeClr val="bg2"/>
                           </a:solidFill>
                         </a:rPr>
                         <a:t>HISTORY_SUBSTRING_SEARCH_*</a:t>
@@ -7608,7 +7608,7 @@
                   <a:tcPr marL="91440" marR="91440" marT="45720" marB="45720" anchor="ctr">
                     <a:lnL w="12700" cap="flat" cmpd="sng" algn="ctr">
                       <a:solidFill>
-                        <a:srgbClr val="D9D5C8"/>
+                        <a:srgbClr val="4A1A5E"/>
                       </a:solidFill>
                       <a:prstDash val="solid"/>
                       <a:round/>
@@ -7617,7 +7617,7 @@
                     </a:lnL>
                     <a:lnR w="12700" cap="flat" cmpd="sng" algn="ctr">
                       <a:solidFill>
-                        <a:srgbClr val="D9D5C8"/>
+                        <a:srgbClr val="4A1A5E"/>
                       </a:solidFill>
                       <a:prstDash val="solid"/>
                       <a:round/>
@@ -7626,7 +7626,7 @@
                     </a:lnR>
                     <a:lnT w="12700" cap="flat" cmpd="sng" algn="ctr">
                       <a:solidFill>
-                        <a:srgbClr val="D9D5C8"/>
+                        <a:srgbClr val="4A1A5E"/>
                       </a:solidFill>
                       <a:prstDash val="solid"/>
                       <a:round/>
@@ -7635,7 +7635,7 @@
                     </a:lnT>
                     <a:lnB w="12700" cap="flat" cmpd="sng" algn="ctr">
                       <a:solidFill>
-                        <a:srgbClr val="D9D5C8"/>
+                        <a:srgbClr val="4A1A5E"/>
                       </a:solidFill>
                       <a:prstDash val="solid"/>
                       <a:round/>
@@ -7655,7 +7655,7 @@
                       <a:r>
                         <a:rPr lang="en-US" sz="1800" dirty="0">
                           <a:solidFill>
-                            <a:schemeClr val="accent4"/>
+                            <a:schemeClr val="bg2"/>
                           </a:solidFill>
                         </a:rPr>
                         <a:t>Honoured by history search</a:t>
@@ -7666,7 +7666,7 @@
                   <a:tcPr marL="91440" marR="91440" marT="45720" marB="45720" anchor="ctr">
                     <a:lnL w="12700" cap="flat" cmpd="sng" algn="ctr">
                       <a:solidFill>
-                        <a:srgbClr val="D9D5C8"/>
+                        <a:srgbClr val="4A1A5E"/>
                       </a:solidFill>
                       <a:prstDash val="solid"/>
                       <a:round/>
@@ -7675,7 +7675,7 @@
                     </a:lnL>
                     <a:lnR w="12700" cap="flat" cmpd="sng" algn="ctr">
                       <a:solidFill>
-                        <a:srgbClr val="D9D5C8"/>
+                        <a:srgbClr val="4A1A5E"/>
                       </a:solidFill>
                       <a:prstDash val="solid"/>
                       <a:round/>
@@ -7684,7 +7684,7 @@
                     </a:lnR>
                     <a:lnT w="12700" cap="flat" cmpd="sng" algn="ctr">
                       <a:solidFill>
-                        <a:srgbClr val="D9D5C8"/>
+                        <a:srgbClr val="4A1A5E"/>
                       </a:solidFill>
                       <a:prstDash val="solid"/>
                       <a:round/>
@@ -7693,7 +7693,7 @@
                     </a:lnT>
                     <a:lnB w="12700" cap="flat" cmpd="sng" algn="ctr">
                       <a:solidFill>
-                        <a:srgbClr val="D9D5C8"/>
+                        <a:srgbClr val="4A1A5E"/>
                       </a:solidFill>
                       <a:prstDash val="solid"/>
                       <a:round/>
@@ -7715,7 +7715,7 @@
                       <a:r>
                         <a:rPr lang="en-US" sz="1800" dirty="0">
                           <a:solidFill>
-                            <a:schemeClr val="accent4"/>
+                            <a:schemeClr val="bg2"/>
                           </a:solidFill>
                         </a:rPr>
                         <a:t>AUTOPAIR_*</a:t>
@@ -7726,7 +7726,7 @@
                   <a:tcPr marL="91440" marR="91440" marT="45720" marB="45720" anchor="ctr">
                     <a:lnL w="12700" cap="flat" cmpd="sng" algn="ctr">
                       <a:solidFill>
-                        <a:srgbClr val="D9D5C8"/>
+                        <a:srgbClr val="4A1A5E"/>
                       </a:solidFill>
                       <a:prstDash val="solid"/>
                       <a:round/>
@@ -7735,7 +7735,7 @@
                     </a:lnL>
                     <a:lnR w="12700" cap="flat" cmpd="sng" algn="ctr">
                       <a:solidFill>
-                        <a:srgbClr val="D9D5C8"/>
+                        <a:srgbClr val="4A1A5E"/>
                       </a:solidFill>
                       <a:prstDash val="solid"/>
                       <a:round/>
@@ -7744,7 +7744,7 @@
                     </a:lnR>
                     <a:lnT w="12700" cap="flat" cmpd="sng" algn="ctr">
                       <a:solidFill>
-                        <a:srgbClr val="D9D5C8"/>
+                        <a:srgbClr val="4A1A5E"/>
                       </a:solidFill>
                       <a:prstDash val="solid"/>
                       <a:round/>
@@ -7753,7 +7753,7 @@
                     </a:lnT>
                     <a:lnB w="12700" cap="flat" cmpd="sng" algn="ctr">
                       <a:solidFill>
-                        <a:srgbClr val="D9D5C8"/>
+                        <a:srgbClr val="4A1A5E"/>
                       </a:solidFill>
                       <a:prstDash val="solid"/>
                       <a:round/>
@@ -7773,7 +7773,7 @@
                       <a:r>
                         <a:rPr lang="en-US" sz="1800" dirty="0">
                           <a:solidFill>
-                            <a:schemeClr val="accent4"/>
+                            <a:schemeClr val="bg2"/>
                           </a:solidFill>
                         </a:rPr>
                         <a:t>Honoured by autopair</a:t>
@@ -7784,7 +7784,7 @@
                   <a:tcPr marL="91440" marR="91440" marT="45720" marB="45720" anchor="ctr">
                     <a:lnL w="12700" cap="flat" cmpd="sng" algn="ctr">
                       <a:solidFill>
-                        <a:srgbClr val="D9D5C8"/>
+                        <a:srgbClr val="4A1A5E"/>
                       </a:solidFill>
                       <a:prstDash val="solid"/>
                       <a:round/>
@@ -7793,7 +7793,7 @@
                     </a:lnL>
                     <a:lnR w="12700" cap="flat" cmpd="sng" algn="ctr">
                       <a:solidFill>
-                        <a:srgbClr val="D9D5C8"/>
+                        <a:srgbClr val="4A1A5E"/>
                       </a:solidFill>
                       <a:prstDash val="solid"/>
                       <a:round/>
@@ -7802,7 +7802,7 @@
                     </a:lnR>
                     <a:lnT w="12700" cap="flat" cmpd="sng" algn="ctr">
                       <a:solidFill>
-                        <a:srgbClr val="D9D5C8"/>
+                        <a:srgbClr val="4A1A5E"/>
                       </a:solidFill>
                       <a:prstDash val="solid"/>
                       <a:round/>
@@ -7811,7 +7811,7 @@
                     </a:lnT>
                     <a:lnB w="12700" cap="flat" cmpd="sng" algn="ctr">
                       <a:solidFill>
-                        <a:srgbClr val="D9D5C8"/>
+                        <a:srgbClr val="4A1A5E"/>
                       </a:solidFill>
                       <a:prstDash val="solid"/>
                       <a:round/>
@@ -7855,7 +7855,7 @@
             <a:lvl1pPr>
               <a:defRPr sz="1200">
                 <a:solidFill>
-                  <a:schemeClr val="accent6"/>
+                  <a:schemeClr val="accent5"/>
                 </a:solidFill>
                 <a:latin typeface="Courier New"/>
                 <a:ea typeface="Courier New"/>
@@ -8032,7 +8032,7 @@
           </a:solidFill>
           <a:ln w="12700">
             <a:solidFill>
-              <a:srgbClr val="2C3844"/>
+              <a:srgbClr val="4A1A5E"/>
             </a:solidFill>
             <a:prstDash val="solid"/>
           </a:ln>
@@ -8280,7 +8280,7 @@
             <a:r>
               <a:rPr lang="en-US" sz="3600" b="1" dirty="0">
                 <a:solidFill>
-                  <a:schemeClr val="accent4"/>
+                  <a:schemeClr val="bg2"/>
                 </a:solidFill>
               </a:rPr>
               <a:t>Native plugins</a:t>
@@ -8316,7 +8316,7 @@
             <a:r>
               <a:rPr lang="en-US" sz="1200" dirty="0">
                 <a:solidFill>
-                  <a:schemeClr val="accent6"/>
+                  <a:schemeClr val="accent5"/>
                 </a:solidFill>
                 <a:latin typeface="Courier New" pitchFamily="34" charset="0"/>
                 <a:ea typeface="Courier New" pitchFamily="34" charset="-122"/>
@@ -8355,7 +8355,7 @@
             <a:r>
               <a:rPr lang="en-US" sz="2300" dirty="0">
                 <a:solidFill>
-                  <a:schemeClr val="accent4"/>
+                  <a:schemeClr val="bg2"/>
                 </a:solidFill>
               </a:rPr>
               <a:t>A native plugin is a cdylib loaded with zmodload -R. Version mismatches are refused rather than crashing. See docs/PLUGINS.md.</a:t>
@@ -8381,11 +8381,11 @@
             </a:avLst>
           </a:prstGeom>
           <a:solidFill>
-            <a:srgbClr val="FFFFFF"/>
+            <a:schemeClr val="tx2"/>
           </a:solidFill>
           <a:ln w="12700">
             <a:solidFill>
-              <a:srgbClr val="D9D5C8"/>
+              <a:srgbClr val="4A1A5E"/>
             </a:solidFill>
             <a:prstDash val="solid"/>
           </a:ln>
@@ -8418,7 +8418,7 @@
             <a:r>
               <a:rPr lang="en-US" sz="2500" b="1" dirty="0">
                 <a:solidFill>
-                  <a:schemeClr val="accent2"/>
+                  <a:schemeClr val="accent1"/>
                 </a:solidFill>
                 <a:latin typeface="Cambria" pitchFamily="34" charset="0"/>
                 <a:ea typeface="Cambria" pitchFamily="34" charset="-122"/>
@@ -8457,7 +8457,7 @@
             <a:r>
               <a:rPr lang="en-US" sz="2800" dirty="0">
                 <a:solidFill>
-                  <a:schemeClr val="accent4"/>
+                  <a:schemeClr val="bg2"/>
                 </a:solidFill>
               </a:rPr>
               <a:t>Rust, through a stable C ABI</a:t>
@@ -8483,11 +8483,11 @@
             </a:avLst>
           </a:prstGeom>
           <a:solidFill>
-            <a:srgbClr val="FFFFFF"/>
+            <a:schemeClr val="tx2"/>
           </a:solidFill>
           <a:ln w="12700">
             <a:solidFill>
-              <a:srgbClr val="D9D5C8"/>
+              <a:srgbClr val="4A1A5E"/>
             </a:solidFill>
             <a:prstDash val="solid"/>
           </a:ln>
@@ -8520,7 +8520,7 @@
             <a:r>
               <a:rPr lang="en-US" sz="2500" b="1" dirty="0">
                 <a:solidFill>
-                  <a:schemeClr val="accent2"/>
+                  <a:schemeClr val="accent1"/>
                 </a:solidFill>
                 <a:latin typeface="Cambria" pitchFamily="34" charset="0"/>
                 <a:ea typeface="Cambria" pitchFamily="34" charset="-122"/>
@@ -8559,7 +8559,7 @@
             <a:r>
               <a:rPr lang="en-US" sz="2800" dirty="0">
                 <a:solidFill>
-                  <a:schemeClr val="accent4"/>
+                  <a:schemeClr val="bg2"/>
                 </a:solidFill>
               </a:rPr>
               <a:t>zmodload -R path/to/lib.dylib</a:t>
@@ -8585,11 +8585,11 @@
             </a:avLst>
           </a:prstGeom>
           <a:solidFill>
-            <a:srgbClr val="FFFFFF"/>
+            <a:schemeClr val="tx2"/>
           </a:solidFill>
           <a:ln w="12700">
             <a:solidFill>
-              <a:srgbClr val="D9D5C8"/>
+              <a:srgbClr val="4A1A5E"/>
             </a:solidFill>
             <a:prstDash val="solid"/>
           </a:ln>
@@ -8622,7 +8622,7 @@
             <a:r>
               <a:rPr lang="en-US" sz="2500" b="1" dirty="0">
                 <a:solidFill>
-                  <a:schemeClr val="accent2"/>
+                  <a:schemeClr val="accent1"/>
                 </a:solidFill>
                 <a:latin typeface="Cambria" pitchFamily="34" charset="0"/>
                 <a:ea typeface="Cambria" pitchFamily="34" charset="-122"/>
@@ -8661,7 +8661,7 @@
             <a:r>
               <a:rPr lang="en-US" sz="2800" dirty="0">
                 <a:solidFill>
-                  <a:schemeClr val="accent4"/>
+                  <a:schemeClr val="bg2"/>
                 </a:solidFill>
               </a:rPr>
               <a:t>ABI version gate; mismatches refused</a:t>
@@ -8687,11 +8687,11 @@
             </a:avLst>
           </a:prstGeom>
           <a:solidFill>
-            <a:srgbClr val="FFFFFF"/>
+            <a:schemeClr val="tx2"/>
           </a:solidFill>
           <a:ln w="12700">
             <a:solidFill>
-              <a:srgbClr val="D9D5C8"/>
+              <a:srgbClr val="4A1A5E"/>
             </a:solidFill>
             <a:prstDash val="solid"/>
           </a:ln>
@@ -8724,7 +8724,7 @@
             <a:r>
               <a:rPr lang="en-US" sz="2500" b="1" dirty="0">
                 <a:solidFill>
-                  <a:schemeClr val="accent2"/>
+                  <a:schemeClr val="accent1"/>
                 </a:solidFill>
                 <a:latin typeface="Cambria" pitchFamily="34" charset="0"/>
                 <a:ea typeface="Cambria" pitchFamily="34" charset="-122"/>
@@ -8763,7 +8763,7 @@
             <a:r>
               <a:rPr lang="en-US" sz="2800" dirty="0">
                 <a:solidFill>
-                  <a:schemeClr val="accent4"/>
+                  <a:schemeClr val="bg2"/>
                 </a:solidFill>
               </a:rPr>
               <a:t>Builtins and native completions</a:t>
@@ -8802,7 +8802,7 @@
             <a:lvl1pPr>
               <a:defRPr sz="1200">
                 <a:solidFill>
-                  <a:schemeClr val="accent6"/>
+                  <a:schemeClr val="accent5"/>
                 </a:solidFill>
                 <a:latin typeface="Courier New"/>
                 <a:ea typeface="Courier New"/>
@@ -8979,7 +8979,7 @@
           </a:solidFill>
           <a:ln w="12700">
             <a:solidFill>
-              <a:srgbClr val="2C3844"/>
+              <a:srgbClr val="4A1A5E"/>
             </a:solidFill>
             <a:prstDash val="solid"/>
           </a:ln>
@@ -9081,7 +9081,7 @@
           </a:solidFill>
           <a:ln w="12700">
             <a:solidFill>
-              <a:srgbClr val="2C3844"/>
+              <a:srgbClr val="4A1A5E"/>
             </a:solidFill>
             <a:prstDash val="solid"/>
           </a:ln>
@@ -9183,7 +9183,7 @@
           </a:solidFill>
           <a:ln w="12700">
             <a:solidFill>
-              <a:srgbClr val="2C3844"/>
+              <a:srgbClr val="4A1A5E"/>
             </a:solidFill>
             <a:prstDash val="solid"/>
           </a:ln>
@@ -9285,7 +9285,7 @@
           </a:solidFill>
           <a:ln w="12700">
             <a:solidFill>
-              <a:srgbClr val="2C3844"/>
+              <a:srgbClr val="4A1A5E"/>
             </a:solidFill>
             <a:prstDash val="solid"/>
           </a:ln>
@@ -9468,7 +9468,7 @@
             <a:r>
               <a:rPr lang="en-US" sz="3600" b="1" dirty="0">
                 <a:solidFill>
-                  <a:schemeClr val="accent4"/>
+                  <a:schemeClr val="bg2"/>
                 </a:solidFill>
               </a:rPr>
               <a:t>Prewarming completions</a:t>
@@ -9504,7 +9504,7 @@
             <a:r>
               <a:rPr lang="en-US" sz="1200" dirty="0">
                 <a:solidFill>
-                  <a:schemeClr val="accent6"/>
+                  <a:schemeClr val="accent5"/>
                 </a:solidFill>
                 <a:latin typeface="Courier New" pitchFamily="34" charset="0"/>
                 <a:ea typeface="Courier New" pitchFamily="34" charset="-122"/>
@@ -9543,7 +9543,7 @@
             <a:r>
               <a:rPr lang="en-US" sz="1700" dirty="0">
                 <a:solidFill>
-                  <a:schemeClr val="accent4"/>
+                  <a:schemeClr val="bg2"/>
                 </a:solidFill>
               </a:rPr>
               <a:t>--prewarm-autoloads compiles every function on $fpath ahead of time, so the first TAB is a cache probe rather than a parse. Each entry is stamped with the definition's SHA-256 and the compiler's identity, so an edited function recompiles.</a:t>
@@ -9569,11 +9569,11 @@
             </a:avLst>
           </a:prstGeom>
           <a:solidFill>
-            <a:schemeClr val="accent4"/>
+            <a:schemeClr val="tx2"/>
           </a:solidFill>
           <a:ln w="12700">
             <a:solidFill>
-              <a:srgbClr val="2C3844"/>
+              <a:srgbClr val="4A1A5E"/>
             </a:solidFill>
             <a:prstDash val="solid"/>
           </a:ln>
@@ -9691,7 +9691,7 @@
             <a:lvl1pPr>
               <a:defRPr sz="1200">
                 <a:solidFill>
-                  <a:schemeClr val="accent6"/>
+                  <a:schemeClr val="accent5"/>
                 </a:solidFill>
                 <a:latin typeface="Courier New"/>
                 <a:ea typeface="Courier New"/>
@@ -9868,7 +9868,7 @@
           </a:solidFill>
           <a:ln w="12700">
             <a:solidFill>
-              <a:srgbClr val="2C3844"/>
+              <a:srgbClr val="4A1A5E"/>
             </a:solidFill>
             <a:prstDash val="solid"/>
           </a:ln>
@@ -9970,7 +9970,7 @@
           </a:solidFill>
           <a:ln w="12700">
             <a:solidFill>
-              <a:srgbClr val="2C3844"/>
+              <a:srgbClr val="4A1A5E"/>
             </a:solidFill>
             <a:prstDash val="solid"/>
           </a:ln>
@@ -10072,7 +10072,7 @@
           </a:solidFill>
           <a:ln w="12700">
             <a:solidFill>
-              <a:srgbClr val="2C3844"/>
+              <a:srgbClr val="4A1A5E"/>
             </a:solidFill>
             <a:prstDash val="solid"/>
           </a:ln>
@@ -10174,7 +10174,7 @@
           </a:solidFill>
           <a:ln w="12700">
             <a:solidFill>
-              <a:srgbClr val="2C3844"/>
+              <a:srgbClr val="4A1A5E"/>
             </a:solidFill>
             <a:prstDash val="solid"/>
           </a:ln>
@@ -10357,7 +10357,7 @@
             <a:r>
               <a:rPr lang="en-US" sz="3600" b="1" dirty="0">
                 <a:solidFill>
-                  <a:schemeClr val="accent4"/>
+                  <a:schemeClr val="bg2"/>
                 </a:solidFill>
               </a:rPr>
               <a:t>Line editor features</a:t>
@@ -10393,7 +10393,7 @@
             <a:r>
               <a:rPr lang="en-US" sz="1200" dirty="0">
                 <a:solidFill>
-                  <a:schemeClr val="accent6"/>
+                  <a:schemeClr val="accent5"/>
                 </a:solidFill>
                 <a:latin typeface="Courier New" pitchFamily="34" charset="0"/>
                 <a:ea typeface="Courier New" pitchFamily="34" charset="-122"/>
@@ -10432,7 +10432,7 @@
             <a:r>
               <a:rPr lang="en-US" sz="2300" dirty="0">
                 <a:solidFill>
-                  <a:schemeClr val="accent4"/>
+                  <a:schemeClr val="bg2"/>
                 </a:solidFill>
               </a:rPr>
               <a:t>Rust ports of the fish engines that the zsh plugins recreate in script. They are refused when RCS is unset, so bare zshrs -f stays byte-identical to zsh -f.</a:t>
@@ -10458,11 +10458,11 @@
             </a:avLst>
           </a:prstGeom>
           <a:solidFill>
-            <a:srgbClr val="FFFFFF"/>
+            <a:schemeClr val="tx2"/>
           </a:solidFill>
           <a:ln w="12700">
             <a:solidFill>
-              <a:srgbClr val="D9D5C8"/>
+              <a:srgbClr val="4A1A5E"/>
             </a:solidFill>
             <a:prstDash val="solid"/>
           </a:ln>
@@ -10495,7 +10495,7 @@
             <a:r>
               <a:rPr lang="en-US" sz="1600" b="1" dirty="0">
                 <a:solidFill>
-                  <a:schemeClr val="accent2"/>
+                  <a:schemeClr val="accent1"/>
                 </a:solidFill>
                 <a:latin typeface="Cambria" pitchFamily="34" charset="0"/>
                 <a:ea typeface="Cambria" pitchFamily="34" charset="-122"/>
@@ -10534,7 +10534,7 @@
             <a:r>
               <a:rPr lang="en-US" sz="2200" dirty="0">
                 <a:solidFill>
-                  <a:schemeClr val="accent4"/>
+                  <a:schemeClr val="bg2"/>
                 </a:solidFill>
               </a:rPr>
               <a:t>Command validity, paths, quotes, brackets by nesting level</a:t>
@@ -10560,11 +10560,11 @@
             </a:avLst>
           </a:prstGeom>
           <a:solidFill>
-            <a:srgbClr val="FFFFFF"/>
+            <a:schemeClr val="tx2"/>
           </a:solidFill>
           <a:ln w="12700">
             <a:solidFill>
-              <a:srgbClr val="D9D5C8"/>
+              <a:srgbClr val="4A1A5E"/>
             </a:solidFill>
             <a:prstDash val="solid"/>
           </a:ln>
@@ -10597,7 +10597,7 @@
             <a:r>
               <a:rPr lang="en-US" sz="1600" b="1" dirty="0">
                 <a:solidFill>
-                  <a:schemeClr val="accent2"/>
+                  <a:schemeClr val="accent1"/>
                 </a:solidFill>
                 <a:latin typeface="Cambria" pitchFamily="34" charset="0"/>
                 <a:ea typeface="Cambria" pitchFamily="34" charset="-122"/>
@@ -10636,7 +10636,7 @@
             <a:r>
               <a:rPr lang="en-US" sz="2200" dirty="0">
                 <a:solidFill>
-                  <a:schemeClr val="accent4"/>
+                  <a:schemeClr val="bg2"/>
                 </a:solidFill>
               </a:rPr>
               <a:t>Ghost text from history</a:t>
@@ -10662,11 +10662,11 @@
             </a:avLst>
           </a:prstGeom>
           <a:solidFill>
-            <a:srgbClr val="FFFFFF"/>
+            <a:schemeClr val="tx2"/>
           </a:solidFill>
           <a:ln w="12700">
             <a:solidFill>
-              <a:srgbClr val="D9D5C8"/>
+              <a:srgbClr val="4A1A5E"/>
             </a:solidFill>
             <a:prstDash val="solid"/>
           </a:ln>
@@ -10699,7 +10699,7 @@
             <a:r>
               <a:rPr lang="en-US" sz="1600" b="1" dirty="0">
                 <a:solidFill>
-                  <a:schemeClr val="accent2"/>
+                  <a:schemeClr val="accent1"/>
                 </a:solidFill>
                 <a:latin typeface="Cambria" pitchFamily="34" charset="0"/>
                 <a:ea typeface="Cambria" pitchFamily="34" charset="-122"/>
@@ -10738,7 +10738,7 @@
             <a:r>
               <a:rPr lang="en-US" sz="2200" dirty="0">
                 <a:solidFill>
-                  <a:schemeClr val="accent4"/>
+                  <a:schemeClr val="bg2"/>
                 </a:solidFill>
               </a:rPr>
               <a:t>Prefix and substring, up arrow</a:t>
@@ -10764,11 +10764,11 @@
             </a:avLst>
           </a:prstGeom>
           <a:solidFill>
-            <a:srgbClr val="FFFFFF"/>
+            <a:schemeClr val="tx2"/>
           </a:solidFill>
           <a:ln w="12700">
             <a:solidFill>
-              <a:srgbClr val="D9D5C8"/>
+              <a:srgbClr val="4A1A5E"/>
             </a:solidFill>
             <a:prstDash val="solid"/>
           </a:ln>
@@ -10801,7 +10801,7 @@
             <a:r>
               <a:rPr lang="en-US" sz="1600" b="1" dirty="0">
                 <a:solidFill>
-                  <a:schemeClr val="accent2"/>
+                  <a:schemeClr val="accent1"/>
                 </a:solidFill>
                 <a:latin typeface="Cambria" pitchFamily="34" charset="0"/>
                 <a:ea typeface="Cambria" pitchFamily="34" charset="-122"/>
@@ -10840,7 +10840,7 @@
             <a:r>
               <a:rPr lang="en-US" sz="2200" dirty="0">
                 <a:solidFill>
-                  <a:schemeClr val="accent4"/>
+                  <a:schemeClr val="bg2"/>
                 </a:solidFill>
               </a:rPr>
               <a:t>Brackets and quotes</a:t>
@@ -10879,7 +10879,7 @@
             <a:lvl1pPr>
               <a:defRPr sz="1200">
                 <a:solidFill>
-                  <a:schemeClr val="accent6"/>
+                  <a:schemeClr val="accent5"/>
                 </a:solidFill>
                 <a:latin typeface="Courier New"/>
                 <a:ea typeface="Courier New"/>
@@ -11056,7 +11056,7 @@
           </a:solidFill>
           <a:ln w="12700">
             <a:solidFill>
-              <a:srgbClr val="2C3844"/>
+              <a:srgbClr val="4A1A5E"/>
             </a:solidFill>
             <a:prstDash val="solid"/>
           </a:ln>
@@ -11198,7 +11198,7 @@
           </a:solidFill>
           <a:ln w="12700">
             <a:solidFill>
-              <a:srgbClr val="2C3844"/>
+              <a:srgbClr val="4A1A5E"/>
             </a:solidFill>
             <a:prstDash val="solid"/>
           </a:ln>
@@ -11340,7 +11340,7 @@
           </a:solidFill>
           <a:ln w="12700">
             <a:solidFill>
-              <a:srgbClr val="2C3844"/>
+              <a:srgbClr val="4A1A5E"/>
             </a:solidFill>
             <a:prstDash val="solid"/>
           </a:ln>
@@ -11563,7 +11563,7 @@
             <a:r>
               <a:rPr lang="en-US" sz="3600" b="1" dirty="0">
                 <a:solidFill>
-                  <a:schemeClr val="accent4"/>
+                  <a:schemeClr val="bg2"/>
                 </a:solidFill>
               </a:rPr>
               <a:t>Autosuggestions</a:t>
@@ -11599,7 +11599,7 @@
             <a:r>
               <a:rPr lang="en-US" sz="1200" dirty="0">
                 <a:solidFill>
-                  <a:schemeClr val="accent6"/>
+                  <a:schemeClr val="accent5"/>
                 </a:solidFill>
                 <a:latin typeface="Courier New" pitchFamily="34" charset="0"/>
                 <a:ea typeface="Courier New" pitchFamily="34" charset="-122"/>
@@ -11638,7 +11638,7 @@
             <a:r>
               <a:rPr lang="en-US" sz="2300" dirty="0">
                 <a:solidFill>
-                  <a:schemeClr val="accent4"/>
+                  <a:schemeClr val="bg2"/>
                 </a:solidFill>
               </a:rPr>
               <a:t>Ghost text from history. Right arrow or End accepts it; forward-word accepts one word. ZSH_AUTOSUGGEST_* variables apply.</a:t>
@@ -11664,11 +11664,11 @@
             </a:avLst>
           </a:prstGeom>
           <a:solidFill>
-            <a:srgbClr val="FFFFFF"/>
+            <a:schemeClr val="tx2"/>
           </a:solidFill>
           <a:ln w="12700">
             <a:solidFill>
-              <a:srgbClr val="D9D5C8"/>
+              <a:srgbClr val="4A1A5E"/>
             </a:solidFill>
             <a:prstDash val="solid"/>
           </a:ln>
@@ -11701,7 +11701,7 @@
             <a:r>
               <a:rPr lang="en-US" sz="1700" b="1" dirty="0">
                 <a:solidFill>
-                  <a:schemeClr val="accent2"/>
+                  <a:schemeClr val="accent1"/>
                 </a:solidFill>
                 <a:latin typeface="Cambria" pitchFamily="34" charset="0"/>
                 <a:ea typeface="Cambria" pitchFamily="34" charset="-122"/>
@@ -11740,7 +11740,7 @@
             <a:r>
               <a:rPr lang="en-US" sz="2800" dirty="0">
                 <a:solidFill>
-                  <a:schemeClr val="accent4"/>
+                  <a:schemeClr val="bg2"/>
                 </a:solidFill>
               </a:rPr>
               <a:t>Right arrow or End</a:t>
@@ -11766,11 +11766,11 @@
             </a:avLst>
           </a:prstGeom>
           <a:solidFill>
-            <a:srgbClr val="FFFFFF"/>
+            <a:schemeClr val="tx2"/>
           </a:solidFill>
           <a:ln w="12700">
             <a:solidFill>
-              <a:srgbClr val="D9D5C8"/>
+              <a:srgbClr val="4A1A5E"/>
             </a:solidFill>
             <a:prstDash val="solid"/>
           </a:ln>
@@ -11803,7 +11803,7 @@
             <a:r>
               <a:rPr lang="en-US" sz="1700" b="1" dirty="0">
                 <a:solidFill>
-                  <a:schemeClr val="accent2"/>
+                  <a:schemeClr val="accent1"/>
                 </a:solidFill>
                 <a:latin typeface="Cambria" pitchFamily="34" charset="0"/>
                 <a:ea typeface="Cambria" pitchFamily="34" charset="-122"/>
@@ -11842,7 +11842,7 @@
             <a:r>
               <a:rPr lang="en-US" sz="2800" dirty="0">
                 <a:solidFill>
-                  <a:schemeClr val="accent4"/>
+                  <a:schemeClr val="bg2"/>
                 </a:solidFill>
               </a:rPr>
               <a:t>forward-word</a:t>
@@ -11868,11 +11868,11 @@
             </a:avLst>
           </a:prstGeom>
           <a:solidFill>
-            <a:srgbClr val="FFFFFF"/>
+            <a:schemeClr val="tx2"/>
           </a:solidFill>
           <a:ln w="12700">
             <a:solidFill>
-              <a:srgbClr val="D9D5C8"/>
+              <a:srgbClr val="4A1A5E"/>
             </a:solidFill>
             <a:prstDash val="solid"/>
           </a:ln>
@@ -11905,7 +11905,7 @@
             <a:r>
               <a:rPr lang="en-US" sz="1700" b="1" dirty="0">
                 <a:solidFill>
-                  <a:schemeClr val="accent2"/>
+                  <a:schemeClr val="accent1"/>
                 </a:solidFill>
                 <a:latin typeface="Cambria" pitchFamily="34" charset="0"/>
                 <a:ea typeface="Cambria" pitchFamily="34" charset="-122"/>
@@ -11944,7 +11944,7 @@
             <a:r>
               <a:rPr lang="en-US" sz="2800" dirty="0">
                 <a:solidFill>
-                  <a:schemeClr val="accent4"/>
+                  <a:schemeClr val="bg2"/>
                 </a:solidFill>
               </a:rPr>
               <a:t>ZSH_AUTOSUGGEST_*</a:t>
@@ -11970,11 +11970,11 @@
             </a:avLst>
           </a:prstGeom>
           <a:solidFill>
-            <a:srgbClr val="FFFFFF"/>
+            <a:schemeClr val="tx2"/>
           </a:solidFill>
           <a:ln w="12700">
             <a:solidFill>
-              <a:srgbClr val="D9D5C8"/>
+              <a:srgbClr val="4A1A5E"/>
             </a:solidFill>
             <a:prstDash val="solid"/>
           </a:ln>
@@ -12007,7 +12007,7 @@
             <a:r>
               <a:rPr lang="en-US" sz="1700" b="1" dirty="0">
                 <a:solidFill>
-                  <a:schemeClr val="accent2"/>
+                  <a:schemeClr val="accent1"/>
                 </a:solidFill>
                 <a:latin typeface="Cambria" pitchFamily="34" charset="0"/>
                 <a:ea typeface="Cambria" pitchFamily="34" charset="-122"/>
@@ -12046,7 +12046,7 @@
             <a:r>
               <a:rPr lang="en-US" sz="2800" dirty="0">
                 <a:solidFill>
-                  <a:schemeClr val="accent4"/>
+                  <a:schemeClr val="bg2"/>
                 </a:solidFill>
               </a:rPr>
               <a:t>autosuggest = false in [zle]</a:t>
@@ -12085,7 +12085,7 @@
             <a:lvl1pPr>
               <a:defRPr sz="1200">
                 <a:solidFill>
-                  <a:schemeClr val="accent6"/>
+                  <a:schemeClr val="accent5"/>
                 </a:solidFill>
                 <a:latin typeface="Courier New"/>
                 <a:ea typeface="Courier New"/>
@@ -12262,7 +12262,7 @@
           </a:solidFill>
           <a:ln w="12700">
             <a:solidFill>
-              <a:srgbClr val="2C3844"/>
+              <a:srgbClr val="4A1A5E"/>
             </a:solidFill>
             <a:prstDash val="solid"/>
           </a:ln>
@@ -12364,7 +12364,7 @@
           </a:solidFill>
           <a:ln w="12700">
             <a:solidFill>
-              <a:srgbClr val="2C3844"/>
+              <a:srgbClr val="4A1A5E"/>
             </a:solidFill>
             <a:prstDash val="solid"/>
           </a:ln>
@@ -12466,7 +12466,7 @@
           </a:solidFill>
           <a:ln w="12700">
             <a:solidFill>
-              <a:srgbClr val="2C3844"/>
+              <a:srgbClr val="4A1A5E"/>
             </a:solidFill>
             <a:prstDash val="solid"/>
           </a:ln>
@@ -12568,7 +12568,7 @@
           </a:solidFill>
           <a:ln w="12700">
             <a:solidFill>
-              <a:srgbClr val="2C3844"/>
+              <a:srgbClr val="4A1A5E"/>
             </a:solidFill>
             <a:prstDash val="solid"/>
           </a:ln>
@@ -12856,7 +12856,7 @@
           </a:solidFill>
           <a:ln w="12700">
             <a:solidFill>
-              <a:srgbClr val="2C3844"/>
+              <a:srgbClr val="4A1A5E"/>
             </a:solidFill>
             <a:prstDash val="solid"/>
           </a:ln>
@@ -12998,7 +12998,7 @@
           </a:solidFill>
           <a:ln w="12700">
             <a:solidFill>
-              <a:srgbClr val="2C3844"/>
+              <a:srgbClr val="4A1A5E"/>
             </a:solidFill>
             <a:prstDash val="solid"/>
           </a:ln>
@@ -13221,7 +13221,7 @@
             <a:r>
               <a:rPr lang="en-US" sz="3600" b="1" dirty="0">
                 <a:solidFill>
-                  <a:schemeClr val="accent4"/>
+                  <a:schemeClr val="bg2"/>
                 </a:solidFill>
               </a:rPr>
               <a:t>The [zle] section</a:t>
@@ -13257,7 +13257,7 @@
             <a:r>
               <a:rPr lang="en-US" sz="1200" dirty="0">
                 <a:solidFill>
-                  <a:schemeClr val="accent6"/>
+                  <a:schemeClr val="accent5"/>
                 </a:solidFill>
                 <a:latin typeface="Courier New" pitchFamily="34" charset="0"/>
                 <a:ea typeface="Courier New" pitchFamily="34" charset="-122"/>
@@ -13296,7 +13296,7 @@
             <a:r>
               <a:rPr lang="en-US" sz="2000" dirty="0">
                 <a:solidFill>
-                  <a:schemeClr val="accent4"/>
+                  <a:schemeClr val="bg2"/>
                 </a:solidFill>
               </a:rPr>
               <a:t>Per-feature false in the [zle] section of ~/.zshrs/zshrs.toml opts out. ZSHRS_NATIVE_ZLE_FX=0 disables all of them. The README is inconsistent about whether the defaults are on or off: confirm on your build.</a:t>
@@ -13322,11 +13322,11 @@
             </a:avLst>
           </a:prstGeom>
           <a:solidFill>
-            <a:schemeClr val="accent4"/>
+            <a:schemeClr val="tx2"/>
           </a:solidFill>
           <a:ln w="12700">
             <a:solidFill>
-              <a:srgbClr val="2C3844"/>
+              <a:srgbClr val="4A1A5E"/>
             </a:solidFill>
             <a:prstDash val="solid"/>
           </a:ln>
@@ -13505,7 +13505,7 @@
             <a:r>
               <a:rPr lang="en-US" sz="2600" dirty="0">
                 <a:solidFill>
-                  <a:schemeClr val="accent4"/>
+                  <a:schemeClr val="bg2"/>
                 </a:solidFill>
               </a:rPr>
               <a:t>ZSHRS_NATIVE_ZLE_FX=0 force-disables all engines</a:t>
@@ -13544,7 +13544,7 @@
             <a:lvl1pPr>
               <a:defRPr sz="1200">
                 <a:solidFill>
-                  <a:schemeClr val="accent6"/>
+                  <a:schemeClr val="accent5"/>
                 </a:solidFill>
                 <a:latin typeface="Courier New"/>
                 <a:ea typeface="Courier New"/>
@@ -13749,7 +13749,7 @@
                   <a:tcPr marL="91440" marR="91440" marT="45720" marB="45720" anchor="ctr">
                     <a:lnL w="12700" cap="flat" cmpd="sng" algn="ctr">
                       <a:solidFill>
-                        <a:srgbClr val="2C3844"/>
+                        <a:srgbClr val="4A1A5E"/>
                       </a:solidFill>
                       <a:prstDash val="solid"/>
                       <a:round/>
@@ -13758,7 +13758,7 @@
                     </a:lnL>
                     <a:lnR w="12700" cap="flat" cmpd="sng" algn="ctr">
                       <a:solidFill>
-                        <a:srgbClr val="2C3844"/>
+                        <a:srgbClr val="4A1A5E"/>
                       </a:solidFill>
                       <a:prstDash val="solid"/>
                       <a:round/>
@@ -13767,7 +13767,7 @@
                     </a:lnR>
                     <a:lnT w="12700" cap="flat" cmpd="sng" algn="ctr">
                       <a:solidFill>
-                        <a:srgbClr val="2C3844"/>
+                        <a:srgbClr val="4A1A5E"/>
                       </a:solidFill>
                       <a:prstDash val="solid"/>
                       <a:round/>
@@ -13776,7 +13776,7 @@
                     </a:lnT>
                     <a:lnB w="12700" cap="flat" cmpd="sng" algn="ctr">
                       <a:solidFill>
-                        <a:srgbClr val="2C3844"/>
+                        <a:srgbClr val="4A1A5E"/>
                       </a:solidFill>
                       <a:prstDash val="solid"/>
                       <a:round/>
@@ -13807,7 +13807,7 @@
                   <a:tcPr marL="91440" marR="91440" marT="45720" marB="45720" anchor="ctr">
                     <a:lnL w="12700" cap="flat" cmpd="sng" algn="ctr">
                       <a:solidFill>
-                        <a:srgbClr val="2C3844"/>
+                        <a:srgbClr val="4A1A5E"/>
                       </a:solidFill>
                       <a:prstDash val="solid"/>
                       <a:round/>
@@ -13816,7 +13816,7 @@
                     </a:lnL>
                     <a:lnR w="12700" cap="flat" cmpd="sng" algn="ctr">
                       <a:solidFill>
-                        <a:srgbClr val="2C3844"/>
+                        <a:srgbClr val="4A1A5E"/>
                       </a:solidFill>
                       <a:prstDash val="solid"/>
                       <a:round/>
@@ -13825,7 +13825,7 @@
                     </a:lnR>
                     <a:lnT w="12700" cap="flat" cmpd="sng" algn="ctr">
                       <a:solidFill>
-                        <a:srgbClr val="2C3844"/>
+                        <a:srgbClr val="4A1A5E"/>
                       </a:solidFill>
                       <a:prstDash val="solid"/>
                       <a:round/>
@@ -13834,7 +13834,7 @@
                     </a:lnT>
                     <a:lnB w="12700" cap="flat" cmpd="sng" algn="ctr">
                       <a:solidFill>
-                        <a:srgbClr val="2C3844"/>
+                        <a:srgbClr val="4A1A5E"/>
                       </a:solidFill>
                       <a:prstDash val="solid"/>
                       <a:round/>
@@ -13867,7 +13867,7 @@
                   <a:tcPr marL="91440" marR="91440" marT="45720" marB="45720" anchor="ctr">
                     <a:lnL w="12700" cap="flat" cmpd="sng" algn="ctr">
                       <a:solidFill>
-                        <a:srgbClr val="2C3844"/>
+                        <a:srgbClr val="4A1A5E"/>
                       </a:solidFill>
                       <a:prstDash val="solid"/>
                       <a:round/>
@@ -13876,7 +13876,7 @@
                     </a:lnL>
                     <a:lnR w="12700" cap="flat" cmpd="sng" algn="ctr">
                       <a:solidFill>
-                        <a:srgbClr val="2C3844"/>
+                        <a:srgbClr val="4A1A5E"/>
                       </a:solidFill>
                       <a:prstDash val="solid"/>
                       <a:round/>
@@ -13885,7 +13885,7 @@
                     </a:lnR>
                     <a:lnT w="12700" cap="flat" cmpd="sng" algn="ctr">
                       <a:solidFill>
-                        <a:srgbClr val="2C3844"/>
+                        <a:srgbClr val="4A1A5E"/>
                       </a:solidFill>
                       <a:prstDash val="solid"/>
                       <a:round/>
@@ -13894,7 +13894,7 @@
                     </a:lnT>
                     <a:lnB w="12700" cap="flat" cmpd="sng" algn="ctr">
                       <a:solidFill>
-                        <a:srgbClr val="2C3844"/>
+                        <a:srgbClr val="4A1A5E"/>
                       </a:solidFill>
                       <a:prstDash val="solid"/>
                       <a:round/>
@@ -13925,7 +13925,7 @@
                   <a:tcPr marL="91440" marR="91440" marT="45720" marB="45720" anchor="ctr">
                     <a:lnL w="12700" cap="flat" cmpd="sng" algn="ctr">
                       <a:solidFill>
-                        <a:srgbClr val="2C3844"/>
+                        <a:srgbClr val="4A1A5E"/>
                       </a:solidFill>
                       <a:prstDash val="solid"/>
                       <a:round/>
@@ -13934,7 +13934,7 @@
                     </a:lnL>
                     <a:lnR w="12700" cap="flat" cmpd="sng" algn="ctr">
                       <a:solidFill>
-                        <a:srgbClr val="2C3844"/>
+                        <a:srgbClr val="4A1A5E"/>
                       </a:solidFill>
                       <a:prstDash val="solid"/>
                       <a:round/>
@@ -13943,7 +13943,7 @@
                     </a:lnR>
                     <a:lnT w="12700" cap="flat" cmpd="sng" algn="ctr">
                       <a:solidFill>
-                        <a:srgbClr val="2C3844"/>
+                        <a:srgbClr val="4A1A5E"/>
                       </a:solidFill>
                       <a:prstDash val="solid"/>
                       <a:round/>
@@ -13952,7 +13952,7 @@
                     </a:lnT>
                     <a:lnB w="12700" cap="flat" cmpd="sng" algn="ctr">
                       <a:solidFill>
-                        <a:srgbClr val="2C3844"/>
+                        <a:srgbClr val="4A1A5E"/>
                       </a:solidFill>
                       <a:prstDash val="solid"/>
                       <a:round/>
@@ -13985,7 +13985,7 @@
                   <a:tcPr marL="91440" marR="91440" marT="45720" marB="45720" anchor="ctr">
                     <a:lnL w="12700" cap="flat" cmpd="sng" algn="ctr">
                       <a:solidFill>
-                        <a:srgbClr val="2C3844"/>
+                        <a:srgbClr val="4A1A5E"/>
                       </a:solidFill>
                       <a:prstDash val="solid"/>
                       <a:round/>
@@ -13994,7 +13994,7 @@
                     </a:lnL>
                     <a:lnR w="12700" cap="flat" cmpd="sng" algn="ctr">
                       <a:solidFill>
-                        <a:srgbClr val="2C3844"/>
+                        <a:srgbClr val="4A1A5E"/>
                       </a:solidFill>
                       <a:prstDash val="solid"/>
                       <a:round/>
@@ -14003,7 +14003,7 @@
                     </a:lnR>
                     <a:lnT w="12700" cap="flat" cmpd="sng" algn="ctr">
                       <a:solidFill>
-                        <a:srgbClr val="2C3844"/>
+                        <a:srgbClr val="4A1A5E"/>
                       </a:solidFill>
                       <a:prstDash val="solid"/>
                       <a:round/>
@@ -14012,7 +14012,7 @@
                     </a:lnT>
                     <a:lnB w="12700" cap="flat" cmpd="sng" algn="ctr">
                       <a:solidFill>
-                        <a:srgbClr val="2C3844"/>
+                        <a:srgbClr val="4A1A5E"/>
                       </a:solidFill>
                       <a:prstDash val="solid"/>
                       <a:round/>
@@ -14043,7 +14043,7 @@
                   <a:tcPr marL="91440" marR="91440" marT="45720" marB="45720" anchor="ctr">
                     <a:lnL w="12700" cap="flat" cmpd="sng" algn="ctr">
                       <a:solidFill>
-                        <a:srgbClr val="2C3844"/>
+                        <a:srgbClr val="4A1A5E"/>
                       </a:solidFill>
                       <a:prstDash val="solid"/>
                       <a:round/>
@@ -14052,7 +14052,7 @@
                     </a:lnL>
                     <a:lnR w="12700" cap="flat" cmpd="sng" algn="ctr">
                       <a:solidFill>
-                        <a:srgbClr val="2C3844"/>
+                        <a:srgbClr val="4A1A5E"/>
                       </a:solidFill>
                       <a:prstDash val="solid"/>
                       <a:round/>
@@ -14061,7 +14061,7 @@
                     </a:lnR>
                     <a:lnT w="12700" cap="flat" cmpd="sng" algn="ctr">
                       <a:solidFill>
-                        <a:srgbClr val="2C3844"/>
+                        <a:srgbClr val="4A1A5E"/>
                       </a:solidFill>
                       <a:prstDash val="solid"/>
                       <a:round/>
@@ -14070,7 +14070,7 @@
                     </a:lnT>
                     <a:lnB w="12700" cap="flat" cmpd="sng" algn="ctr">
                       <a:solidFill>
-                        <a:srgbClr val="2C3844"/>
+                        <a:srgbClr val="4A1A5E"/>
                       </a:solidFill>
                       <a:prstDash val="solid"/>
                       <a:round/>
@@ -14103,7 +14103,7 @@
                   <a:tcPr marL="91440" marR="91440" marT="45720" marB="45720" anchor="ctr">
                     <a:lnL w="12700" cap="flat" cmpd="sng" algn="ctr">
                       <a:solidFill>
-                        <a:srgbClr val="2C3844"/>
+                        <a:srgbClr val="4A1A5E"/>
                       </a:solidFill>
                       <a:prstDash val="solid"/>
                       <a:round/>
@@ -14112,7 +14112,7 @@
                     </a:lnL>
                     <a:lnR w="12700" cap="flat" cmpd="sng" algn="ctr">
                       <a:solidFill>
-                        <a:srgbClr val="2C3844"/>
+                        <a:srgbClr val="4A1A5E"/>
                       </a:solidFill>
                       <a:prstDash val="solid"/>
                       <a:round/>
@@ -14121,7 +14121,7 @@
                     </a:lnR>
                     <a:lnT w="12700" cap="flat" cmpd="sng" algn="ctr">
                       <a:solidFill>
-                        <a:srgbClr val="2C3844"/>
+                        <a:srgbClr val="4A1A5E"/>
                       </a:solidFill>
                       <a:prstDash val="solid"/>
                       <a:round/>
@@ -14130,7 +14130,7 @@
                     </a:lnT>
                     <a:lnB w="12700" cap="flat" cmpd="sng" algn="ctr">
                       <a:solidFill>
-                        <a:srgbClr val="2C3844"/>
+                        <a:srgbClr val="4A1A5E"/>
                       </a:solidFill>
                       <a:prstDash val="solid"/>
                       <a:round/>
@@ -14161,7 +14161,7 @@
                   <a:tcPr marL="91440" marR="91440" marT="45720" marB="45720" anchor="ctr">
                     <a:lnL w="12700" cap="flat" cmpd="sng" algn="ctr">
                       <a:solidFill>
-                        <a:srgbClr val="2C3844"/>
+                        <a:srgbClr val="4A1A5E"/>
                       </a:solidFill>
                       <a:prstDash val="solid"/>
                       <a:round/>
@@ -14170,7 +14170,7 @@
                     </a:lnL>
                     <a:lnR w="12700" cap="flat" cmpd="sng" algn="ctr">
                       <a:solidFill>
-                        <a:srgbClr val="2C3844"/>
+                        <a:srgbClr val="4A1A5E"/>
                       </a:solidFill>
                       <a:prstDash val="solid"/>
                       <a:round/>
@@ -14179,7 +14179,7 @@
                     </a:lnR>
                     <a:lnT w="12700" cap="flat" cmpd="sng" algn="ctr">
                       <a:solidFill>
-                        <a:srgbClr val="2C3844"/>
+                        <a:srgbClr val="4A1A5E"/>
                       </a:solidFill>
                       <a:prstDash val="solid"/>
                       <a:round/>
@@ -14188,7 +14188,7 @@
                     </a:lnT>
                     <a:lnB w="12700" cap="flat" cmpd="sng" algn="ctr">
                       <a:solidFill>
-                        <a:srgbClr val="2C3844"/>
+                        <a:srgbClr val="4A1A5E"/>
                       </a:solidFill>
                       <a:prstDash val="solid"/>
                       <a:round/>
@@ -14304,7 +14304,7 @@
             <a:r>
               <a:rPr lang="en-US" sz="3600" b="1" dirty="0">
                 <a:solidFill>
-                  <a:schemeClr val="accent4"/>
+                  <a:schemeClr val="bg2"/>
                 </a:solidFill>
               </a:rPr>
               <a:t>193 line-editor widgets</a:t>
@@ -14340,7 +14340,7 @@
             <a:r>
               <a:rPr lang="en-US" sz="1200" dirty="0">
                 <a:solidFill>
-                  <a:schemeClr val="accent6"/>
+                  <a:schemeClr val="accent5"/>
                 </a:solidFill>
                 <a:latin typeface="Courier New" pitchFamily="34" charset="0"/>
                 <a:ea typeface="Courier New" pitchFamily="34" charset="-122"/>
@@ -14379,7 +14379,7 @@
             <a:r>
               <a:rPr lang="en-US" sz="2400" dirty="0">
                 <a:solidFill>
-                  <a:schemeClr val="accent4"/>
+                  <a:schemeClr val="bg2"/>
                 </a:solidFill>
               </a:rPr>
               <a:t>The README lists the registered widget families.</a:t>
@@ -14405,11 +14405,11 @@
             </a:avLst>
           </a:prstGeom>
           <a:solidFill>
-            <a:srgbClr val="FFFFFF"/>
+            <a:schemeClr val="tx2"/>
           </a:solidFill>
           <a:ln w="12700">
             <a:solidFill>
-              <a:srgbClr val="D9D5C8"/>
+              <a:srgbClr val="4A1A5E"/>
             </a:solidFill>
             <a:prstDash val="solid"/>
           </a:ln>
@@ -14442,7 +14442,7 @@
             <a:r>
               <a:rPr lang="en-US" sz="2200" b="1" dirty="0">
                 <a:solidFill>
-                  <a:schemeClr val="accent2"/>
+                  <a:schemeClr val="accent1"/>
                 </a:solidFill>
                 <a:latin typeface="Cambria" pitchFamily="34" charset="0"/>
                 <a:ea typeface="Cambria" pitchFamily="34" charset="-122"/>
@@ -14485,7 +14485,7 @@
             <a:r>
               <a:rPr lang="en-US" sz="2300" dirty="0">
                 <a:solidFill>
-                  <a:schemeClr val="accent4"/>
+                  <a:schemeClr val="bg2"/>
                 </a:solidFill>
               </a:rPr>
               <a:t>History navigation</a:t>
@@ -14503,7 +14503,7 @@
             <a:r>
               <a:rPr lang="en-US" sz="2300" dirty="0">
                 <a:solidFill>
-                  <a:schemeClr val="accent4"/>
+                  <a:schemeClr val="bg2"/>
                 </a:solidFill>
               </a:rPr>
               <a:t>Shell-aware word motion</a:t>
@@ -14529,11 +14529,11 @@
             </a:avLst>
           </a:prstGeom>
           <a:solidFill>
-            <a:srgbClr val="FFFFFF"/>
+            <a:schemeClr val="tx2"/>
           </a:solidFill>
           <a:ln w="12700">
             <a:solidFill>
-              <a:srgbClr val="D9D5C8"/>
+              <a:srgbClr val="4A1A5E"/>
             </a:solidFill>
             <a:prstDash val="solid"/>
           </a:ln>
@@ -14566,7 +14566,7 @@
             <a:r>
               <a:rPr lang="en-US" sz="2200" b="1" dirty="0">
                 <a:solidFill>
-                  <a:schemeClr val="accent2"/>
+                  <a:schemeClr val="accent1"/>
                 </a:solidFill>
                 <a:latin typeface="Cambria" pitchFamily="34" charset="0"/>
                 <a:ea typeface="Cambria" pitchFamily="34" charset="-122"/>
@@ -14609,7 +14609,7 @@
             <a:r>
               <a:rPr lang="en-US" sz="2300" dirty="0">
                 <a:solidFill>
-                  <a:schemeClr val="accent4"/>
+                  <a:schemeClr val="bg2"/>
                 </a:solidFill>
               </a:rPr>
               <a:t>vi find, repeat, marks</a:t>
@@ -14627,7 +14627,7 @@
             <a:r>
               <a:rPr lang="en-US" sz="2300" dirty="0">
                 <a:solidFill>
-                  <a:schemeClr val="accent4"/>
+                  <a:schemeClr val="bg2"/>
                 </a:solidFill>
               </a:rPr>
               <a:t>Undo and redo</a:t>
@@ -14645,7 +14645,7 @@
             <a:r>
               <a:rPr lang="en-US" sz="2300" dirty="0">
                 <a:solidFill>
-                  <a:schemeClr val="accent4"/>
+                  <a:schemeClr val="bg2"/>
                 </a:solidFill>
               </a:rPr>
               <a:t>Yank-pop</a:t>
@@ -14671,11 +14671,11 @@
             </a:avLst>
           </a:prstGeom>
           <a:solidFill>
-            <a:srgbClr val="FFFFFF"/>
+            <a:schemeClr val="tx2"/>
           </a:solidFill>
           <a:ln w="12700">
             <a:solidFill>
-              <a:srgbClr val="D9D5C8"/>
+              <a:srgbClr val="4A1A5E"/>
             </a:solidFill>
             <a:prstDash val="solid"/>
           </a:ln>
@@ -14708,7 +14708,7 @@
             <a:r>
               <a:rPr lang="en-US" sz="2200" b="1" dirty="0">
                 <a:solidFill>
-                  <a:schemeClr val="accent2"/>
+                  <a:schemeClr val="accent1"/>
                 </a:solidFill>
                 <a:latin typeface="Cambria" pitchFamily="34" charset="0"/>
                 <a:ea typeface="Cambria" pitchFamily="34" charset="-122"/>
@@ -14751,7 +14751,7 @@
             <a:r>
               <a:rPr lang="en-US" sz="2300" dirty="0">
                 <a:solidFill>
-                  <a:schemeClr val="accent4"/>
+                  <a:schemeClr val="bg2"/>
                 </a:solidFill>
               </a:rPr>
               <a:t>Region and visual mode</a:t>
@@ -14769,7 +14769,7 @@
             <a:r>
               <a:rPr lang="en-US" sz="2300" dirty="0">
                 <a:solidFill>
-                  <a:schemeClr val="accent4"/>
+                  <a:schemeClr val="bg2"/>
                 </a:solidFill>
               </a:rPr>
               <a:t>Text objects</a:t>
@@ -14795,11 +14795,11 @@
             </a:avLst>
           </a:prstGeom>
           <a:solidFill>
-            <a:srgbClr val="FFFFFF"/>
+            <a:schemeClr val="tx2"/>
           </a:solidFill>
           <a:ln w="12700">
             <a:solidFill>
-              <a:srgbClr val="D9D5C8"/>
+              <a:srgbClr val="4A1A5E"/>
             </a:solidFill>
             <a:prstDash val="solid"/>
           </a:ln>
@@ -14832,7 +14832,7 @@
             <a:r>
               <a:rPr lang="en-US" sz="2200" b="1" dirty="0">
                 <a:solidFill>
-                  <a:schemeClr val="accent2"/>
+                  <a:schemeClr val="accent1"/>
                 </a:solidFill>
                 <a:latin typeface="Cambria" pitchFamily="34" charset="0"/>
                 <a:ea typeface="Cambria" pitchFamily="34" charset="-122"/>
@@ -14875,7 +14875,7 @@
             <a:r>
               <a:rPr lang="en-US" sz="2300" dirty="0">
                 <a:solidFill>
-                  <a:schemeClr val="accent4"/>
+                  <a:schemeClr val="bg2"/>
                 </a:solidFill>
               </a:rPr>
               <a:t>isearch</a:t>
@@ -14893,7 +14893,7 @@
             <a:r>
               <a:rPr lang="en-US" sz="2300" dirty="0">
                 <a:solidFill>
-                  <a:schemeClr val="accent4"/>
+                  <a:schemeClr val="bg2"/>
                 </a:solidFill>
               </a:rPr>
               <a:t>Completion menu</a:t>
@@ -14932,7 +14932,7 @@
             <a:lvl1pPr>
               <a:defRPr sz="1200">
                 <a:solidFill>
-                  <a:schemeClr val="accent6"/>
+                  <a:schemeClr val="accent5"/>
                 </a:solidFill>
                 <a:latin typeface="Courier New"/>
                 <a:ea typeface="Courier New"/>
@@ -15109,7 +15109,7 @@
           </a:solidFill>
           <a:ln w="12700">
             <a:solidFill>
-              <a:srgbClr val="2C3844"/>
+              <a:srgbClr val="4A1A5E"/>
             </a:solidFill>
             <a:prstDash val="solid"/>
           </a:ln>
@@ -15251,7 +15251,7 @@
           </a:solidFill>
           <a:ln w="12700">
             <a:solidFill>
-              <a:srgbClr val="2C3844"/>
+              <a:srgbClr val="4A1A5E"/>
             </a:solidFill>
             <a:prstDash val="solid"/>
           </a:ln>
@@ -15474,7 +15474,7 @@
             <a:r>
               <a:rPr lang="en-US" sz="3600" b="1" dirty="0">
                 <a:solidFill>
-                  <a:schemeClr val="accent4"/>
+                  <a:schemeClr val="bg2"/>
                 </a:solidFill>
               </a:rPr>
               <a:t>Work that never forks</a:t>
@@ -15510,7 +15510,7 @@
             <a:r>
               <a:rPr lang="en-US" sz="1200" dirty="0">
                 <a:solidFill>
-                  <a:schemeClr val="accent6"/>
+                  <a:schemeClr val="accent5"/>
                 </a:solidFill>
                 <a:latin typeface="Courier New" pitchFamily="34" charset="0"/>
                 <a:ea typeface="Courier New" pitchFamily="34" charset="-122"/>
@@ -15549,7 +15549,7 @@
             <a:r>
               <a:rPr lang="en-US" sz="2400" dirty="0">
                 <a:solidFill>
-                  <a:schemeClr val="accent4"/>
+                  <a:schemeClr val="bg2"/>
                 </a:solidFill>
               </a:rPr>
               <a:t>From the README no-fork table. In zsh each of these forks or runs single-threaded.</a:t>
@@ -15596,7 +15596,7 @@
                       <a:r>
                         <a:rPr lang="en-US" sz="1800" b="1" dirty="0">
                           <a:solidFill>
-                            <a:schemeClr val="accent2"/>
+                            <a:schemeClr val="accent1"/>
                           </a:solidFill>
                         </a:rPr>
                         <a:t>Operation</a:t>
@@ -15607,7 +15607,7 @@
                   <a:tcPr marL="91440" marR="91440" marT="45720" marB="45720" anchor="ctr">
                     <a:lnL w="12700" cap="flat" cmpd="sng" algn="ctr">
                       <a:solidFill>
-                        <a:srgbClr val="D9D5C8"/>
+                        <a:srgbClr val="4A1A5E"/>
                       </a:solidFill>
                       <a:prstDash val="solid"/>
                       <a:round/>
@@ -15616,7 +15616,7 @@
                     </a:lnL>
                     <a:lnR w="12700" cap="flat" cmpd="sng" algn="ctr">
                       <a:solidFill>
-                        <a:srgbClr val="D9D5C8"/>
+                        <a:srgbClr val="4A1A5E"/>
                       </a:solidFill>
                       <a:prstDash val="solid"/>
                       <a:round/>
@@ -15625,7 +15625,7 @@
                     </a:lnR>
                     <a:lnT w="12700" cap="flat" cmpd="sng" algn="ctr">
                       <a:solidFill>
-                        <a:srgbClr val="D9D5C8"/>
+                        <a:srgbClr val="4A1A5E"/>
                       </a:solidFill>
                       <a:prstDash val="solid"/>
                       <a:round/>
@@ -15634,7 +15634,7 @@
                     </a:lnT>
                     <a:lnB w="12700" cap="flat" cmpd="sng" algn="ctr">
                       <a:solidFill>
-                        <a:srgbClr val="D9D5C8"/>
+                        <a:srgbClr val="4A1A5E"/>
                       </a:solidFill>
                       <a:prstDash val="solid"/>
                       <a:round/>
@@ -15654,7 +15654,7 @@
                       <a:r>
                         <a:rPr lang="en-US" sz="1800" b="1" dirty="0">
                           <a:solidFill>
-                            <a:schemeClr val="accent2"/>
+                            <a:schemeClr val="accent1"/>
                           </a:solidFill>
                         </a:rPr>
                         <a:t>In zshrs</a:t>
@@ -15665,7 +15665,7 @@
                   <a:tcPr marL="91440" marR="91440" marT="45720" marB="45720" anchor="ctr">
                     <a:lnL w="12700" cap="flat" cmpd="sng" algn="ctr">
                       <a:solidFill>
-                        <a:srgbClr val="D9D5C8"/>
+                        <a:srgbClr val="4A1A5E"/>
                       </a:solidFill>
                       <a:prstDash val="solid"/>
                       <a:round/>
@@ -15674,7 +15674,7 @@
                     </a:lnL>
                     <a:lnR w="12700" cap="flat" cmpd="sng" algn="ctr">
                       <a:solidFill>
-                        <a:srgbClr val="D9D5C8"/>
+                        <a:srgbClr val="4A1A5E"/>
                       </a:solidFill>
                       <a:prstDash val="solid"/>
                       <a:round/>
@@ -15683,7 +15683,7 @@
                     </a:lnR>
                     <a:lnT w="12700" cap="flat" cmpd="sng" algn="ctr">
                       <a:solidFill>
-                        <a:srgbClr val="D9D5C8"/>
+                        <a:srgbClr val="4A1A5E"/>
                       </a:solidFill>
                       <a:prstDash val="solid"/>
                       <a:round/>
@@ -15692,7 +15692,7 @@
                     </a:lnT>
                     <a:lnB w="12700" cap="flat" cmpd="sng" algn="ctr">
                       <a:solidFill>
-                        <a:srgbClr val="D9D5C8"/>
+                        <a:srgbClr val="4A1A5E"/>
                       </a:solidFill>
                       <a:prstDash val="solid"/>
                       <a:round/>
@@ -15714,7 +15714,7 @@
                       <a:r>
                         <a:rPr lang="en-US" sz="1800" dirty="0">
                           <a:solidFill>
-                            <a:schemeClr val="accent4"/>
+                            <a:schemeClr val="bg2"/>
                           </a:solidFill>
                         </a:rPr>
                         <a:t>$(cmd)</a:t>
@@ -15725,7 +15725,7 @@
                   <a:tcPr marL="91440" marR="91440" marT="45720" marB="45720" anchor="ctr">
                     <a:lnL w="12700" cap="flat" cmpd="sng" algn="ctr">
                       <a:solidFill>
-                        <a:srgbClr val="D9D5C8"/>
+                        <a:srgbClr val="4A1A5E"/>
                       </a:solidFill>
                       <a:prstDash val="solid"/>
                       <a:round/>
@@ -15734,7 +15734,7 @@
                     </a:lnL>
                     <a:lnR w="12700" cap="flat" cmpd="sng" algn="ctr">
                       <a:solidFill>
-                        <a:srgbClr val="D9D5C8"/>
+                        <a:srgbClr val="4A1A5E"/>
                       </a:solidFill>
                       <a:prstDash val="solid"/>
                       <a:round/>
@@ -15743,7 +15743,7 @@
                     </a:lnR>
                     <a:lnT w="12700" cap="flat" cmpd="sng" algn="ctr">
                       <a:solidFill>
-                        <a:srgbClr val="D9D5C8"/>
+                        <a:srgbClr val="4A1A5E"/>
                       </a:solidFill>
                       <a:prstDash val="solid"/>
                       <a:round/>
@@ -15752,7 +15752,7 @@
                     </a:lnT>
                     <a:lnB w="12700" cap="flat" cmpd="sng" algn="ctr">
                       <a:solidFill>
-                        <a:srgbClr val="D9D5C8"/>
+                        <a:srgbClr val="4A1A5E"/>
                       </a:solidFill>
                       <a:prstDash val="solid"/>
                       <a:round/>
@@ -15772,7 +15772,7 @@
                       <a:r>
                         <a:rPr lang="en-US" sz="1800" dirty="0">
                           <a:solidFill>
-                            <a:schemeClr val="accent4"/>
+                            <a:schemeClr val="bg2"/>
                           </a:solidFill>
                         </a:rPr>
                         <a:t>In-process stdout capture via dup2</a:t>
@@ -15783,7 +15783,7 @@
                   <a:tcPr marL="91440" marR="91440" marT="45720" marB="45720" anchor="ctr">
                     <a:lnL w="12700" cap="flat" cmpd="sng" algn="ctr">
                       <a:solidFill>
-                        <a:srgbClr val="D9D5C8"/>
+                        <a:srgbClr val="4A1A5E"/>
                       </a:solidFill>
                       <a:prstDash val="solid"/>
                       <a:round/>
@@ -15792,7 +15792,7 @@
                     </a:lnL>
                     <a:lnR w="12700" cap="flat" cmpd="sng" algn="ctr">
                       <a:solidFill>
-                        <a:srgbClr val="D9D5C8"/>
+                        <a:srgbClr val="4A1A5E"/>
                       </a:solidFill>
                       <a:prstDash val="solid"/>
                       <a:round/>
@@ -15801,7 +15801,7 @@
                     </a:lnR>
                     <a:lnT w="12700" cap="flat" cmpd="sng" algn="ctr">
                       <a:solidFill>
-                        <a:srgbClr val="D9D5C8"/>
+                        <a:srgbClr val="4A1A5E"/>
                       </a:solidFill>
                       <a:prstDash val="solid"/>
                       <a:round/>
@@ -15810,7 +15810,7 @@
                     </a:lnT>
                     <a:lnB w="12700" cap="flat" cmpd="sng" algn="ctr">
                       <a:solidFill>
-                        <a:srgbClr val="D9D5C8"/>
+                        <a:srgbClr val="4A1A5E"/>
                       </a:solidFill>
                       <a:prstDash val="solid"/>
                       <a:round/>
@@ -15832,7 +15832,7 @@
                       <a:r>
                         <a:rPr lang="en-US" sz="1800" dirty="0">
                           <a:solidFill>
-                            <a:schemeClr val="accent4"/>
+                            <a:schemeClr val="bg2"/>
                           </a:solidFill>
                         </a:rPr>
                         <a:t>&lt;(cmd) and &gt;(cmd)</a:t>
@@ -15843,7 +15843,7 @@
                   <a:tcPr marL="91440" marR="91440" marT="45720" marB="45720" anchor="ctr">
                     <a:lnL w="12700" cap="flat" cmpd="sng" algn="ctr">
                       <a:solidFill>
-                        <a:srgbClr val="D9D5C8"/>
+                        <a:srgbClr val="4A1A5E"/>
                       </a:solidFill>
                       <a:prstDash val="solid"/>
                       <a:round/>
@@ -15852,7 +15852,7 @@
                     </a:lnL>
                     <a:lnR w="12700" cap="flat" cmpd="sng" algn="ctr">
                       <a:solidFill>
-                        <a:srgbClr val="D9D5C8"/>
+                        <a:srgbClr val="4A1A5E"/>
                       </a:solidFill>
                       <a:prstDash val="solid"/>
                       <a:round/>
@@ -15861,7 +15861,7 @@
                     </a:lnR>
                     <a:lnT w="12700" cap="flat" cmpd="sng" algn="ctr">
                       <a:solidFill>
-                        <a:srgbClr val="D9D5C8"/>
+                        <a:srgbClr val="4A1A5E"/>
                       </a:solidFill>
                       <a:prstDash val="solid"/>
                       <a:round/>
@@ -15870,7 +15870,7 @@
                     </a:lnT>
                     <a:lnB w="12700" cap="flat" cmpd="sng" algn="ctr">
                       <a:solidFill>
-                        <a:srgbClr val="D9D5C8"/>
+                        <a:srgbClr val="4A1A5E"/>
                       </a:solidFill>
                       <a:prstDash val="solid"/>
                       <a:round/>
@@ -15890,7 +15890,7 @@
                       <a:r>
                         <a:rPr lang="en-US" sz="1800" dirty="0">
                           <a:solidFill>
-                            <a:schemeClr val="accent4"/>
+                            <a:schemeClr val="bg2"/>
                           </a:solidFill>
                         </a:rPr>
                         <a:t>Worker pool thread plus FIFO</a:t>
@@ -15901,7 +15901,7 @@
                   <a:tcPr marL="91440" marR="91440" marT="45720" marB="45720" anchor="ctr">
                     <a:lnL w="12700" cap="flat" cmpd="sng" algn="ctr">
                       <a:solidFill>
-                        <a:srgbClr val="D9D5C8"/>
+                        <a:srgbClr val="4A1A5E"/>
                       </a:solidFill>
                       <a:prstDash val="solid"/>
                       <a:round/>
@@ -15910,7 +15910,7 @@
                     </a:lnL>
                     <a:lnR w="12700" cap="flat" cmpd="sng" algn="ctr">
                       <a:solidFill>
-                        <a:srgbClr val="D9D5C8"/>
+                        <a:srgbClr val="4A1A5E"/>
                       </a:solidFill>
                       <a:prstDash val="solid"/>
                       <a:round/>
@@ -15919,7 +15919,7 @@
                     </a:lnR>
                     <a:lnT w="12700" cap="flat" cmpd="sng" algn="ctr">
                       <a:solidFill>
-                        <a:srgbClr val="D9D5C8"/>
+                        <a:srgbClr val="4A1A5E"/>
                       </a:solidFill>
                       <a:prstDash val="solid"/>
                       <a:round/>
@@ -15928,7 +15928,7 @@
                     </a:lnT>
                     <a:lnB w="12700" cap="flat" cmpd="sng" algn="ctr">
                       <a:solidFill>
-                        <a:srgbClr val="D9D5C8"/>
+                        <a:srgbClr val="4A1A5E"/>
                       </a:solidFill>
                       <a:prstDash val="solid"/>
                       <a:round/>
@@ -15950,7 +15950,7 @@
                       <a:r>
                         <a:rPr lang="en-US" sz="1800" dirty="0">
                           <a:solidFill>
-                            <a:schemeClr val="accent4"/>
+                            <a:schemeClr val="bg2"/>
                           </a:solidFill>
                         </a:rPr>
                         <a:t>cat, head, tail, wc, sort</a:t>
@@ -15961,7 +15961,7 @@
                   <a:tcPr marL="91440" marR="91440" marT="45720" marB="45720" anchor="ctr">
                     <a:lnL w="12700" cap="flat" cmpd="sng" algn="ctr">
                       <a:solidFill>
-                        <a:srgbClr val="D9D5C8"/>
+                        <a:srgbClr val="4A1A5E"/>
                       </a:solidFill>
                       <a:prstDash val="solid"/>
                       <a:round/>
@@ -15970,7 +15970,7 @@
                     </a:lnL>
                     <a:lnR w="12700" cap="flat" cmpd="sng" algn="ctr">
                       <a:solidFill>
-                        <a:srgbClr val="D9D5C8"/>
+                        <a:srgbClr val="4A1A5E"/>
                       </a:solidFill>
                       <a:prstDash val="solid"/>
                       <a:round/>
@@ -15979,7 +15979,7 @@
                     </a:lnR>
                     <a:lnT w="12700" cap="flat" cmpd="sng" algn="ctr">
                       <a:solidFill>
-                        <a:srgbClr val="D9D5C8"/>
+                        <a:srgbClr val="4A1A5E"/>
                       </a:solidFill>
                       <a:prstDash val="solid"/>
                       <a:round/>
@@ -15988,7 +15988,7 @@
                     </a:lnT>
                     <a:lnB w="12700" cap="flat" cmpd="sng" algn="ctr">
                       <a:solidFill>
-                        <a:srgbClr val="D9D5C8"/>
+                        <a:srgbClr val="4A1A5E"/>
                       </a:solidFill>
                       <a:prstDash val="solid"/>
                       <a:round/>
@@ -16008,7 +16008,7 @@
                       <a:r>
                         <a:rPr lang="en-US" sz="1800" dirty="0">
                           <a:solidFill>
-                            <a:schemeClr val="accent4"/>
+                            <a:schemeClr val="bg2"/>
                           </a:solidFill>
                         </a:rPr>
                         <a:t>Builtins, zero fork</a:t>
@@ -16019,7 +16019,7 @@
                   <a:tcPr marL="91440" marR="91440" marT="45720" marB="45720" anchor="ctr">
                     <a:lnL w="12700" cap="flat" cmpd="sng" algn="ctr">
                       <a:solidFill>
-                        <a:srgbClr val="D9D5C8"/>
+                        <a:srgbClr val="4A1A5E"/>
                       </a:solidFill>
                       <a:prstDash val="solid"/>
                       <a:round/>
@@ -16028,7 +16028,7 @@
                     </a:lnL>
                     <a:lnR w="12700" cap="flat" cmpd="sng" algn="ctr">
                       <a:solidFill>
-                        <a:srgbClr val="D9D5C8"/>
+                        <a:srgbClr val="4A1A5E"/>
                       </a:solidFill>
                       <a:prstDash val="solid"/>
                       <a:round/>
@@ -16037,7 +16037,7 @@
                     </a:lnR>
                     <a:lnT w="12700" cap="flat" cmpd="sng" algn="ctr">
                       <a:solidFill>
-                        <a:srgbClr val="D9D5C8"/>
+                        <a:srgbClr val="4A1A5E"/>
                       </a:solidFill>
                       <a:prstDash val="solid"/>
                       <a:round/>
@@ -16046,7 +16046,7 @@
                     </a:lnT>
                     <a:lnB w="12700" cap="flat" cmpd="sng" algn="ctr">
                       <a:solidFill>
-                        <a:srgbClr val="D9D5C8"/>
+                        <a:srgbClr val="4A1A5E"/>
                       </a:solidFill>
                       <a:prstDash val="solid"/>
                       <a:round/>
@@ -16068,7 +16068,7 @@
                       <a:r>
                         <a:rPr lang="en-US" sz="1800" dirty="0">
                           <a:solidFill>
-                            <a:schemeClr val="accent4"/>
+                            <a:schemeClr val="bg2"/>
                           </a:solidFill>
                         </a:rPr>
                         <a:t>date, hostname, uname</a:t>
@@ -16079,7 +16079,7 @@
                   <a:tcPr marL="91440" marR="91440" marT="45720" marB="45720" anchor="ctr">
                     <a:lnL w="12700" cap="flat" cmpd="sng" algn="ctr">
                       <a:solidFill>
-                        <a:srgbClr val="D9D5C8"/>
+                        <a:srgbClr val="4A1A5E"/>
                       </a:solidFill>
                       <a:prstDash val="solid"/>
                       <a:round/>
@@ -16088,7 +16088,7 @@
                     </a:lnL>
                     <a:lnR w="12700" cap="flat" cmpd="sng" algn="ctr">
                       <a:solidFill>
-                        <a:srgbClr val="D9D5C8"/>
+                        <a:srgbClr val="4A1A5E"/>
                       </a:solidFill>
                       <a:prstDash val="solid"/>
                       <a:round/>
@@ -16097,7 +16097,7 @@
                     </a:lnR>
                     <a:lnT w="12700" cap="flat" cmpd="sng" algn="ctr">
                       <a:solidFill>
-                        <a:srgbClr val="D9D5C8"/>
+                        <a:srgbClr val="4A1A5E"/>
                       </a:solidFill>
                       <a:prstDash val="solid"/>
                       <a:round/>
@@ -16106,7 +16106,7 @@
                     </a:lnT>
                     <a:lnB w="12700" cap="flat" cmpd="sng" algn="ctr">
                       <a:solidFill>
-                        <a:srgbClr val="D9D5C8"/>
+                        <a:srgbClr val="4A1A5E"/>
                       </a:solidFill>
                       <a:prstDash val="solid"/>
                       <a:round/>
@@ -16126,7 +16126,7 @@
                       <a:r>
                         <a:rPr lang="en-US" sz="1800" dirty="0">
                           <a:solidFill>
-                            <a:schemeClr val="accent4"/>
+                            <a:schemeClr val="bg2"/>
                           </a:solidFill>
                         </a:rPr>
                         <a:t>Builtins, direct syscall</a:t>
@@ -16137,7 +16137,7 @@
                   <a:tcPr marL="91440" marR="91440" marT="45720" marB="45720" anchor="ctr">
                     <a:lnL w="12700" cap="flat" cmpd="sng" algn="ctr">
                       <a:solidFill>
-                        <a:srgbClr val="D9D5C8"/>
+                        <a:srgbClr val="4A1A5E"/>
                       </a:solidFill>
                       <a:prstDash val="solid"/>
                       <a:round/>
@@ -16146,7 +16146,7 @@
                     </a:lnL>
                     <a:lnR w="12700" cap="flat" cmpd="sng" algn="ctr">
                       <a:solidFill>
-                        <a:srgbClr val="D9D5C8"/>
+                        <a:srgbClr val="4A1A5E"/>
                       </a:solidFill>
                       <a:prstDash val="solid"/>
                       <a:round/>
@@ -16155,7 +16155,7 @@
                     </a:lnR>
                     <a:lnT w="12700" cap="flat" cmpd="sng" algn="ctr">
                       <a:solidFill>
-                        <a:srgbClr val="D9D5C8"/>
+                        <a:srgbClr val="4A1A5E"/>
                       </a:solidFill>
                       <a:prstDash val="solid"/>
                       <a:round/>
@@ -16164,7 +16164,7 @@
                     </a:lnT>
                     <a:lnB w="12700" cap="flat" cmpd="sng" algn="ctr">
                       <a:solidFill>
-                        <a:srgbClr val="D9D5C8"/>
+                        <a:srgbClr val="4A1A5E"/>
                       </a:solidFill>
                       <a:prstDash val="solid"/>
                       <a:round/>
@@ -16186,7 +16186,7 @@
                       <a:r>
                         <a:rPr lang="en-US" sz="1800" dirty="0">
                           <a:solidFill>
-                            <a:schemeClr val="accent4"/>
+                            <a:schemeClr val="bg2"/>
                           </a:solidFill>
                         </a:rPr>
                         <a:t>pmap, pgrep, peach</a:t>
@@ -16197,7 +16197,7 @@
                   <a:tcPr marL="91440" marR="91440" marT="45720" marB="45720" anchor="ctr">
                     <a:lnL w="12700" cap="flat" cmpd="sng" algn="ctr">
                       <a:solidFill>
-                        <a:srgbClr val="D9D5C8"/>
+                        <a:srgbClr val="4A1A5E"/>
                       </a:solidFill>
                       <a:prstDash val="solid"/>
                       <a:round/>
@@ -16206,7 +16206,7 @@
                     </a:lnL>
                     <a:lnR w="12700" cap="flat" cmpd="sng" algn="ctr">
                       <a:solidFill>
-                        <a:srgbClr val="D9D5C8"/>
+                        <a:srgbClr val="4A1A5E"/>
                       </a:solidFill>
                       <a:prstDash val="solid"/>
                       <a:round/>
@@ -16215,7 +16215,7 @@
                     </a:lnR>
                     <a:lnT w="12700" cap="flat" cmpd="sng" algn="ctr">
                       <a:solidFill>
-                        <a:srgbClr val="D9D5C8"/>
+                        <a:srgbClr val="4A1A5E"/>
                       </a:solidFill>
                       <a:prstDash val="solid"/>
                       <a:round/>
@@ -16224,7 +16224,7 @@
                     </a:lnT>
                     <a:lnB w="12700" cap="flat" cmpd="sng" algn="ctr">
                       <a:solidFill>
-                        <a:srgbClr val="D9D5C8"/>
+                        <a:srgbClr val="4A1A5E"/>
                       </a:solidFill>
                       <a:prstDash val="solid"/>
                       <a:round/>
@@ -16244,7 +16244,7 @@
                       <a:r>
                         <a:rPr lang="en-US" sz="1800" dirty="0">
                           <a:solidFill>
-                            <a:schemeClr val="accent4"/>
+                            <a:schemeClr val="bg2"/>
                           </a:solidFill>
                         </a:rPr>
                         <a:t>Run on the VM, zero fork</a:t>
@@ -16255,7 +16255,7 @@
                   <a:tcPr marL="91440" marR="91440" marT="45720" marB="45720" anchor="ctr">
                     <a:lnL w="12700" cap="flat" cmpd="sng" algn="ctr">
                       <a:solidFill>
-                        <a:srgbClr val="D9D5C8"/>
+                        <a:srgbClr val="4A1A5E"/>
                       </a:solidFill>
                       <a:prstDash val="solid"/>
                       <a:round/>
@@ -16264,7 +16264,7 @@
                     </a:lnL>
                     <a:lnR w="12700" cap="flat" cmpd="sng" algn="ctr">
                       <a:solidFill>
-                        <a:srgbClr val="D9D5C8"/>
+                        <a:srgbClr val="4A1A5E"/>
                       </a:solidFill>
                       <a:prstDash val="solid"/>
                       <a:round/>
@@ -16273,7 +16273,7 @@
                     </a:lnR>
                     <a:lnT w="12700" cap="flat" cmpd="sng" algn="ctr">
                       <a:solidFill>
-                        <a:srgbClr val="D9D5C8"/>
+                        <a:srgbClr val="4A1A5E"/>
                       </a:solidFill>
                       <a:prstDash val="solid"/>
                       <a:round/>
@@ -16282,7 +16282,7 @@
                     </a:lnT>
                     <a:lnB w="12700" cap="flat" cmpd="sng" algn="ctr">
                       <a:solidFill>
-                        <a:srgbClr val="D9D5C8"/>
+                        <a:srgbClr val="4A1A5E"/>
                       </a:solidFill>
                       <a:prstDash val="solid"/>
                       <a:round/>
@@ -16304,7 +16304,7 @@
                       <a:r>
                         <a:rPr lang="en-US" sz="1800" dirty="0">
                           <a:solidFill>
-                            <a:schemeClr val="accent4"/>
+                            <a:schemeClr val="bg2"/>
                           </a:solidFill>
                         </a:rPr>
                         <a:t>**/*.rs</a:t>
@@ -16315,7 +16315,7 @@
                   <a:tcPr marL="91440" marR="91440" marT="45720" marB="45720" anchor="ctr">
                     <a:lnL w="12700" cap="flat" cmpd="sng" algn="ctr">
                       <a:solidFill>
-                        <a:srgbClr val="D9D5C8"/>
+                        <a:srgbClr val="4A1A5E"/>
                       </a:solidFill>
                       <a:prstDash val="solid"/>
                       <a:round/>
@@ -16324,7 +16324,7 @@
                     </a:lnL>
                     <a:lnR w="12700" cap="flat" cmpd="sng" algn="ctr">
                       <a:solidFill>
-                        <a:srgbClr val="D9D5C8"/>
+                        <a:srgbClr val="4A1A5E"/>
                       </a:solidFill>
                       <a:prstDash val="solid"/>
                       <a:round/>
@@ -16333,7 +16333,7 @@
                     </a:lnR>
                     <a:lnT w="12700" cap="flat" cmpd="sng" algn="ctr">
                       <a:solidFill>
-                        <a:srgbClr val="D9D5C8"/>
+                        <a:srgbClr val="4A1A5E"/>
                       </a:solidFill>
                       <a:prstDash val="solid"/>
                       <a:round/>
@@ -16342,7 +16342,7 @@
                     </a:lnT>
                     <a:lnB w="12700" cap="flat" cmpd="sng" algn="ctr">
                       <a:solidFill>
-                        <a:srgbClr val="D9D5C8"/>
+                        <a:srgbClr val="4A1A5E"/>
                       </a:solidFill>
                       <a:prstDash val="solid"/>
                       <a:round/>
@@ -16362,7 +16362,7 @@
                       <a:r>
                         <a:rPr lang="en-US" sz="1800" dirty="0">
                           <a:solidFill>
-                            <a:schemeClr val="accent4"/>
+                            <a:schemeClr val="bg2"/>
                           </a:solidFill>
                         </a:rPr>
                         <a:t>Parallel per-subdir descent</a:t>
@@ -16373,7 +16373,7 @@
                   <a:tcPr marL="91440" marR="91440" marT="45720" marB="45720" anchor="ctr">
                     <a:lnL w="12700" cap="flat" cmpd="sng" algn="ctr">
                       <a:solidFill>
-                        <a:srgbClr val="D9D5C8"/>
+                        <a:srgbClr val="4A1A5E"/>
                       </a:solidFill>
                       <a:prstDash val="solid"/>
                       <a:round/>
@@ -16382,7 +16382,7 @@
                     </a:lnL>
                     <a:lnR w="12700" cap="flat" cmpd="sng" algn="ctr">
                       <a:solidFill>
-                        <a:srgbClr val="D9D5C8"/>
+                        <a:srgbClr val="4A1A5E"/>
                       </a:solidFill>
                       <a:prstDash val="solid"/>
                       <a:round/>
@@ -16391,7 +16391,7 @@
                     </a:lnR>
                     <a:lnT w="12700" cap="flat" cmpd="sng" algn="ctr">
                       <a:solidFill>
-                        <a:srgbClr val="D9D5C8"/>
+                        <a:srgbClr val="4A1A5E"/>
                       </a:solidFill>
                       <a:prstDash val="solid"/>
                       <a:round/>
@@ -16400,7 +16400,7 @@
                     </a:lnT>
                     <a:lnB w="12700" cap="flat" cmpd="sng" algn="ctr">
                       <a:solidFill>
-                        <a:srgbClr val="D9D5C8"/>
+                        <a:srgbClr val="4A1A5E"/>
                       </a:solidFill>
                       <a:prstDash val="solid"/>
                       <a:round/>
@@ -16422,7 +16422,7 @@
                       <a:r>
                         <a:rPr lang="en-US" sz="1800" dirty="0">
                           <a:solidFill>
-                            <a:schemeClr val="accent4"/>
+                            <a:schemeClr val="bg2"/>
                           </a:solidFill>
                         </a:rPr>
                         <a:t>compinit</a:t>
@@ -16433,7 +16433,7 @@
                   <a:tcPr marL="91440" marR="91440" marT="45720" marB="45720" anchor="ctr">
                     <a:lnL w="12700" cap="flat" cmpd="sng" algn="ctr">
                       <a:solidFill>
-                        <a:srgbClr val="D9D5C8"/>
+                        <a:srgbClr val="4A1A5E"/>
                       </a:solidFill>
                       <a:prstDash val="solid"/>
                       <a:round/>
@@ -16442,7 +16442,7 @@
                     </a:lnL>
                     <a:lnR w="12700" cap="flat" cmpd="sng" algn="ctr">
                       <a:solidFill>
-                        <a:srgbClr val="D9D5C8"/>
+                        <a:srgbClr val="4A1A5E"/>
                       </a:solidFill>
                       <a:prstDash val="solid"/>
                       <a:round/>
@@ -16451,7 +16451,7 @@
                     </a:lnR>
                     <a:lnT w="12700" cap="flat" cmpd="sng" algn="ctr">
                       <a:solidFill>
-                        <a:srgbClr val="D9D5C8"/>
+                        <a:srgbClr val="4A1A5E"/>
                       </a:solidFill>
                       <a:prstDash val="solid"/>
                       <a:round/>
@@ -16460,7 +16460,7 @@
                     </a:lnT>
                     <a:lnB w="12700" cap="flat" cmpd="sng" algn="ctr">
                       <a:solidFill>
-                        <a:srgbClr val="D9D5C8"/>
+                        <a:srgbClr val="4A1A5E"/>
                       </a:solidFill>
                       <a:prstDash val="solid"/>
                       <a:round/>
@@ -16480,7 +16480,7 @@
                       <a:r>
                         <a:rPr lang="en-US" sz="1800" dirty="0">
                           <a:solidFill>
-                            <a:schemeClr val="accent4"/>
+                            <a:schemeClr val="bg2"/>
                           </a:solidFill>
                         </a:rPr>
                         <a:t>Background fpath scan</a:t>
@@ -16491,7 +16491,7 @@
                   <a:tcPr marL="91440" marR="91440" marT="45720" marB="45720" anchor="ctr">
                     <a:lnL w="12700" cap="flat" cmpd="sng" algn="ctr">
                       <a:solidFill>
-                        <a:srgbClr val="D9D5C8"/>
+                        <a:srgbClr val="4A1A5E"/>
                       </a:solidFill>
                       <a:prstDash val="solid"/>
                       <a:round/>
@@ -16500,7 +16500,7 @@
                     </a:lnL>
                     <a:lnR w="12700" cap="flat" cmpd="sng" algn="ctr">
                       <a:solidFill>
-                        <a:srgbClr val="D9D5C8"/>
+                        <a:srgbClr val="4A1A5E"/>
                       </a:solidFill>
                       <a:prstDash val="solid"/>
                       <a:round/>
@@ -16509,7 +16509,7 @@
                     </a:lnR>
                     <a:lnT w="12700" cap="flat" cmpd="sng" algn="ctr">
                       <a:solidFill>
-                        <a:srgbClr val="D9D5C8"/>
+                        <a:srgbClr val="4A1A5E"/>
                       </a:solidFill>
                       <a:prstDash val="solid"/>
                       <a:round/>
@@ -16518,7 +16518,7 @@
                     </a:lnT>
                     <a:lnB w="12700" cap="flat" cmpd="sng" algn="ctr">
                       <a:solidFill>
-                        <a:srgbClr val="D9D5C8"/>
+                        <a:srgbClr val="4A1A5E"/>
                       </a:solidFill>
                       <a:prstDash val="solid"/>
                       <a:round/>
@@ -16562,7 +16562,7 @@
             <a:lvl1pPr>
               <a:defRPr sz="1200">
                 <a:solidFill>
-                  <a:schemeClr val="accent6"/>
+                  <a:schemeClr val="accent5"/>
                 </a:solidFill>
                 <a:latin typeface="Courier New"/>
                 <a:ea typeface="Courier New"/>
@@ -16739,7 +16739,7 @@
           </a:solidFill>
           <a:ln w="12700">
             <a:solidFill>
-              <a:srgbClr val="2C3844"/>
+              <a:srgbClr val="4A1A5E"/>
             </a:solidFill>
             <a:prstDash val="solid"/>
           </a:ln>
@@ -16969,7 +16969,7 @@
             <a:r>
               <a:rPr lang="en-US" sz="3600" b="1" dirty="0">
                 <a:solidFill>
-                  <a:schemeClr val="accent4"/>
+                  <a:schemeClr val="bg2"/>
                 </a:solidFill>
               </a:rPr>
               <a:t>git and fzf in process</a:t>
@@ -17005,7 +17005,7 @@
             <a:r>
               <a:rPr lang="en-US" sz="1200" dirty="0">
                 <a:solidFill>
-                  <a:schemeClr val="accent6"/>
+                  <a:schemeClr val="accent5"/>
                 </a:solidFill>
                 <a:latin typeface="Courier New" pitchFamily="34" charset="0"/>
                 <a:ea typeface="Courier New" pitchFamily="34" charset="-122"/>
@@ -17044,7 +17044,7 @@
             <a:r>
               <a:rPr lang="en-US" sz="2300" dirty="0">
                 <a:solidFill>
-                  <a:schemeClr val="accent4"/>
+                  <a:schemeClr val="bg2"/>
                 </a:solidFill>
               </a:rPr>
               <a:t>Through the zshrs-native build, git is a builtin and arb --fzf is an fzf-compatible finder, both in the shell's own process with no fork, no exec and no PATH lookup.</a:t>
@@ -17070,11 +17070,11 @@
             </a:avLst>
           </a:prstGeom>
           <a:solidFill>
-            <a:srgbClr val="FFFFFF"/>
+            <a:schemeClr val="tx2"/>
           </a:solidFill>
           <a:ln w="12700">
             <a:solidFill>
-              <a:srgbClr val="D9D5C8"/>
+              <a:srgbClr val="4A1A5E"/>
             </a:solidFill>
             <a:prstDash val="solid"/>
           </a:ln>
@@ -17107,7 +17107,7 @@
             <a:r>
               <a:rPr lang="en-US" sz="2600" b="1" dirty="0">
                 <a:solidFill>
-                  <a:schemeClr val="accent2"/>
+                  <a:schemeClr val="accent1"/>
                 </a:solidFill>
                 <a:latin typeface="Cambria" pitchFamily="34" charset="0"/>
                 <a:ea typeface="Cambria" pitchFamily="34" charset="-122"/>
@@ -17150,7 +17150,7 @@
             <a:r>
               <a:rPr lang="en-US" sz="2400" dirty="0">
                 <a:solidFill>
-                  <a:schemeClr val="accent4"/>
+                  <a:schemeClr val="bg2"/>
                 </a:solidFill>
               </a:rPr>
               <a:t>Builtin, in process</a:t>
@@ -17168,7 +17168,7 @@
             <a:r>
               <a:rPr lang="en-US" sz="2400" dirty="0">
                 <a:solidFill>
-                  <a:schemeClr val="accent4"/>
+                  <a:schemeClr val="bg2"/>
                 </a:solidFill>
               </a:rPr>
               <a:t>No fork, no exec</a:t>
@@ -17186,7 +17186,7 @@
             <a:r>
               <a:rPr lang="en-US" sz="2400" dirty="0">
                 <a:solidFill>
-                  <a:schemeClr val="accent4"/>
+                  <a:schemeClr val="bg2"/>
                 </a:solidFill>
               </a:rPr>
               <a:t>No PATH lookup</a:t>
@@ -17212,11 +17212,11 @@
             </a:avLst>
           </a:prstGeom>
           <a:solidFill>
-            <a:srgbClr val="FFFFFF"/>
+            <a:schemeClr val="tx2"/>
           </a:solidFill>
           <a:ln w="12700">
             <a:solidFill>
-              <a:srgbClr val="D9D5C8"/>
+              <a:srgbClr val="4A1A5E"/>
             </a:solidFill>
             <a:prstDash val="solid"/>
           </a:ln>
@@ -17249,7 +17249,7 @@
             <a:r>
               <a:rPr lang="en-US" sz="2600" b="1" dirty="0">
                 <a:solidFill>
-                  <a:schemeClr val="accent2"/>
+                  <a:schemeClr val="accent1"/>
                 </a:solidFill>
                 <a:latin typeface="Cambria" pitchFamily="34" charset="0"/>
                 <a:ea typeface="Cambria" pitchFamily="34" charset="-122"/>
@@ -17292,7 +17292,7 @@
             <a:r>
               <a:rPr lang="en-US" sz="2400" dirty="0">
                 <a:solidFill>
-                  <a:schemeClr val="accent4"/>
+                  <a:schemeClr val="bg2"/>
                 </a:solidFill>
               </a:rPr>
               <a:t>arb --fzf, in process</a:t>
@@ -17310,7 +17310,7 @@
             <a:r>
               <a:rPr lang="en-US" sz="2400" dirty="0">
                 <a:solidFill>
-                  <a:schemeClr val="accent4"/>
+                  <a:schemeClr val="bg2"/>
                 </a:solidFill>
               </a:rPr>
               <a:t>FZF_DEFAULT_OPTS</a:t>
@@ -17328,7 +17328,7 @@
             <a:r>
               <a:rPr lang="en-US" sz="2400" dirty="0">
                 <a:solidFill>
-                  <a:schemeClr val="accent4"/>
+                  <a:schemeClr val="bg2"/>
                 </a:solidFill>
               </a:rPr>
               <a:t>FZF_DEFAULT_OPTS_FILE</a:t>
@@ -17367,7 +17367,7 @@
             <a:lvl1pPr>
               <a:defRPr sz="1200">
                 <a:solidFill>
-                  <a:schemeClr val="accent6"/>
+                  <a:schemeClr val="accent5"/>
                 </a:solidFill>
                 <a:latin typeface="Courier New"/>
                 <a:ea typeface="Courier New"/>
@@ -17544,7 +17544,7 @@
           </a:solidFill>
           <a:ln w="12700">
             <a:solidFill>
-              <a:srgbClr val="2C3844"/>
+              <a:srgbClr val="4A1A5E"/>
             </a:solidFill>
             <a:prstDash val="solid"/>
           </a:ln>
@@ -17754,7 +17754,7 @@
             <a:r>
               <a:rPr lang="en-US" sz="3600" b="1" dirty="0">
                 <a:solidFill>
-                  <a:schemeClr val="accent4"/>
+                  <a:schemeClr val="bg2"/>
                 </a:solidFill>
               </a:rPr>
               <a:t>async, await, background</a:t>
@@ -17790,7 +17790,7 @@
             <a:r>
               <a:rPr lang="en-US" sz="1200" dirty="0">
                 <a:solidFill>
-                  <a:schemeClr val="accent6"/>
+                  <a:schemeClr val="accent5"/>
                 </a:solidFill>
                 <a:latin typeface="Courier New" pitchFamily="34" charset="0"/>
                 <a:ea typeface="Courier New" pitchFamily="34" charset="-122"/>
@@ -17829,7 +17829,7 @@
             <a:r>
               <a:rPr lang="en-US" sz="2300" dirty="0">
                 <a:solidFill>
-                  <a:schemeClr val="accent4"/>
+                  <a:schemeClr val="bg2"/>
                 </a:solidFill>
               </a:rPr>
               <a:t>async ships work to the pool and returns an id; await collects the result. Coprocesses and ordinary background jobs work as in zsh.</a:t>
@@ -17855,11 +17855,11 @@
             </a:avLst>
           </a:prstGeom>
           <a:solidFill>
-            <a:schemeClr val="accent4"/>
+            <a:schemeClr val="tx2"/>
           </a:solidFill>
           <a:ln w="12700">
             <a:solidFill>
-              <a:srgbClr val="2C3844"/>
+              <a:srgbClr val="4A1A5E"/>
             </a:solidFill>
             <a:prstDash val="solid"/>
           </a:ln>
@@ -17997,7 +17997,7 @@
             <a:lvl1pPr>
               <a:defRPr sz="1200">
                 <a:solidFill>
-                  <a:schemeClr val="accent6"/>
+                  <a:schemeClr val="accent5"/>
                 </a:solidFill>
                 <a:latin typeface="Courier New"/>
                 <a:ea typeface="Courier New"/>
@@ -18069,7 +18069,7 @@
             <a:r>
               <a:rPr lang="en-US" sz="3600" b="1" dirty="0">
                 <a:solidFill>
-                  <a:schemeClr val="accent4"/>
+                  <a:schemeClr val="bg2"/>
                 </a:solidFill>
               </a:rPr>
               <a:t>What this deck covers</a:t>
@@ -18105,7 +18105,7 @@
             <a:r>
               <a:rPr lang="en-US" sz="1200" dirty="0">
                 <a:solidFill>
-                  <a:schemeClr val="accent6"/>
+                  <a:schemeClr val="accent5"/>
                 </a:solidFill>
                 <a:latin typeface="Courier New" pitchFamily="34" charset="0"/>
                 <a:ea typeface="Courier New" pitchFamily="34" charset="-122"/>
@@ -18144,7 +18144,7 @@
             <a:r>
               <a:rPr lang="en-US" sz="2400" dirty="0">
                 <a:solidFill>
-                  <a:schemeClr val="accent4"/>
+                  <a:schemeClr val="bg2"/>
                 </a:solidFill>
               </a:rPr>
               <a:t>Seven parts, in the order you would meet them.</a:t>
@@ -18191,7 +18191,7 @@
                       <a:r>
                         <a:rPr lang="en-US" sz="2000" b="1" dirty="0">
                           <a:solidFill>
-                            <a:schemeClr val="accent2"/>
+                            <a:schemeClr val="accent1"/>
                           </a:solidFill>
                         </a:rPr>
                         <a:t>Part</a:t>
@@ -18202,7 +18202,7 @@
                   <a:tcPr marL="91440" marR="91440" marT="45720" marB="45720" anchor="ctr">
                     <a:lnL w="12700" cap="flat" cmpd="sng" algn="ctr">
                       <a:solidFill>
-                        <a:srgbClr val="D9D5C8"/>
+                        <a:srgbClr val="4A1A5E"/>
                       </a:solidFill>
                       <a:prstDash val="solid"/>
                       <a:round/>
@@ -18211,7 +18211,7 @@
                     </a:lnL>
                     <a:lnR w="12700" cap="flat" cmpd="sng" algn="ctr">
                       <a:solidFill>
-                        <a:srgbClr val="D9D5C8"/>
+                        <a:srgbClr val="4A1A5E"/>
                       </a:solidFill>
                       <a:prstDash val="solid"/>
                       <a:round/>
@@ -18220,7 +18220,7 @@
                     </a:lnR>
                     <a:lnT w="12700" cap="flat" cmpd="sng" algn="ctr">
                       <a:solidFill>
-                        <a:srgbClr val="D9D5C8"/>
+                        <a:srgbClr val="4A1A5E"/>
                       </a:solidFill>
                       <a:prstDash val="solid"/>
                       <a:round/>
@@ -18229,7 +18229,7 @@
                     </a:lnT>
                     <a:lnB w="12700" cap="flat" cmpd="sng" algn="ctr">
                       <a:solidFill>
-                        <a:srgbClr val="D9D5C8"/>
+                        <a:srgbClr val="4A1A5E"/>
                       </a:solidFill>
                       <a:prstDash val="solid"/>
                       <a:round/>
@@ -18249,7 +18249,7 @@
                       <a:r>
                         <a:rPr lang="en-US" sz="2000" b="1" dirty="0">
                           <a:solidFill>
-                            <a:schemeClr val="accent2"/>
+                            <a:schemeClr val="accent1"/>
                           </a:solidFill>
                         </a:rPr>
                         <a:t>Contents</a:t>
@@ -18260,7 +18260,7 @@
                   <a:tcPr marL="91440" marR="91440" marT="45720" marB="45720" anchor="ctr">
                     <a:lnL w="12700" cap="flat" cmpd="sng" algn="ctr">
                       <a:solidFill>
-                        <a:srgbClr val="D9D5C8"/>
+                        <a:srgbClr val="4A1A5E"/>
                       </a:solidFill>
                       <a:prstDash val="solid"/>
                       <a:round/>
@@ -18269,7 +18269,7 @@
                     </a:lnL>
                     <a:lnR w="12700" cap="flat" cmpd="sng" algn="ctr">
                       <a:solidFill>
-                        <a:srgbClr val="D9D5C8"/>
+                        <a:srgbClr val="4A1A5E"/>
                       </a:solidFill>
                       <a:prstDash val="solid"/>
                       <a:round/>
@@ -18278,7 +18278,7 @@
                     </a:lnR>
                     <a:lnT w="12700" cap="flat" cmpd="sng" algn="ctr">
                       <a:solidFill>
-                        <a:srgbClr val="D9D5C8"/>
+                        <a:srgbClr val="4A1A5E"/>
                       </a:solidFill>
                       <a:prstDash val="solid"/>
                       <a:round/>
@@ -18287,7 +18287,7 @@
                     </a:lnT>
                     <a:lnB w="12700" cap="flat" cmpd="sng" algn="ctr">
                       <a:solidFill>
-                        <a:srgbClr val="D9D5C8"/>
+                        <a:srgbClr val="4A1A5E"/>
                       </a:solidFill>
                       <a:prstDash val="solid"/>
                       <a:round/>
@@ -18309,7 +18309,7 @@
                       <a:r>
                         <a:rPr lang="en-US" sz="2000" dirty="0">
                           <a:solidFill>
-                            <a:schemeClr val="accent4"/>
+                            <a:schemeClr val="bg2"/>
                           </a:solidFill>
                         </a:rPr>
                         <a:t>Start</a:t>
@@ -18320,7 +18320,7 @@
                   <a:tcPr marL="91440" marR="91440" marT="45720" marB="45720" anchor="ctr">
                     <a:lnL w="12700" cap="flat" cmpd="sng" algn="ctr">
                       <a:solidFill>
-                        <a:srgbClr val="D9D5C8"/>
+                        <a:srgbClr val="4A1A5E"/>
                       </a:solidFill>
                       <a:prstDash val="solid"/>
                       <a:round/>
@@ -18329,7 +18329,7 @@
                     </a:lnL>
                     <a:lnR w="12700" cap="flat" cmpd="sng" algn="ctr">
                       <a:solidFill>
-                        <a:srgbClr val="D9D5C8"/>
+                        <a:srgbClr val="4A1A5E"/>
                       </a:solidFill>
                       <a:prstDash val="solid"/>
                       <a:round/>
@@ -18338,7 +18338,7 @@
                     </a:lnR>
                     <a:lnT w="12700" cap="flat" cmpd="sng" algn="ctr">
                       <a:solidFill>
-                        <a:srgbClr val="D9D5C8"/>
+                        <a:srgbClr val="4A1A5E"/>
                       </a:solidFill>
                       <a:prstDash val="solid"/>
                       <a:round/>
@@ -18347,7 +18347,7 @@
                     </a:lnT>
                     <a:lnB w="12700" cap="flat" cmpd="sng" algn="ctr">
                       <a:solidFill>
-                        <a:srgbClr val="D9D5C8"/>
+                        <a:srgbClr val="4A1A5E"/>
                       </a:solidFill>
                       <a:prstDash val="solid"/>
                       <a:round/>
@@ -18367,7 +18367,7 @@
                       <a:r>
                         <a:rPr lang="en-US" sz="2000" dirty="0">
                           <a:solidFill>
-                            <a:schemeClr val="accent4"/>
+                            <a:schemeClr val="bg2"/>
                           </a:solidFill>
                         </a:rPr>
                         <a:t>Install, try, login shell</a:t>
@@ -18378,7 +18378,7 @@
                   <a:tcPr marL="91440" marR="91440" marT="45720" marB="45720" anchor="ctr">
                     <a:lnL w="12700" cap="flat" cmpd="sng" algn="ctr">
                       <a:solidFill>
-                        <a:srgbClr val="D9D5C8"/>
+                        <a:srgbClr val="4A1A5E"/>
                       </a:solidFill>
                       <a:prstDash val="solid"/>
                       <a:round/>
@@ -18387,7 +18387,7 @@
                     </a:lnL>
                     <a:lnR w="12700" cap="flat" cmpd="sng" algn="ctr">
                       <a:solidFill>
-                        <a:srgbClr val="D9D5C8"/>
+                        <a:srgbClr val="4A1A5E"/>
                       </a:solidFill>
                       <a:prstDash val="solid"/>
                       <a:round/>
@@ -18396,7 +18396,7 @@
                     </a:lnR>
                     <a:lnT w="12700" cap="flat" cmpd="sng" algn="ctr">
                       <a:solidFill>
-                        <a:srgbClr val="D9D5C8"/>
+                        <a:srgbClr val="4A1A5E"/>
                       </a:solidFill>
                       <a:prstDash val="solid"/>
                       <a:round/>
@@ -18405,7 +18405,7 @@
                     </a:lnT>
                     <a:lnB w="12700" cap="flat" cmpd="sng" algn="ctr">
                       <a:solidFill>
-                        <a:srgbClr val="D9D5C8"/>
+                        <a:srgbClr val="4A1A5E"/>
                       </a:solidFill>
                       <a:prstDash val="solid"/>
                       <a:round/>
@@ -18427,7 +18427,7 @@
                       <a:r>
                         <a:rPr lang="en-US" sz="2000" dirty="0">
                           <a:solidFill>
-                            <a:schemeClr val="accent4"/>
+                            <a:schemeClr val="bg2"/>
                           </a:solidFill>
                         </a:rPr>
                         <a:t>Fit</a:t>
@@ -18438,7 +18438,7 @@
                   <a:tcPr marL="91440" marR="91440" marT="45720" marB="45720" anchor="ctr">
                     <a:lnL w="12700" cap="flat" cmpd="sng" algn="ctr">
                       <a:solidFill>
-                        <a:srgbClr val="D9D5C8"/>
+                        <a:srgbClr val="4A1A5E"/>
                       </a:solidFill>
                       <a:prstDash val="solid"/>
                       <a:round/>
@@ -18447,7 +18447,7 @@
                     </a:lnL>
                     <a:lnR w="12700" cap="flat" cmpd="sng" algn="ctr">
                       <a:solidFill>
-                        <a:srgbClr val="D9D5C8"/>
+                        <a:srgbClr val="4A1A5E"/>
                       </a:solidFill>
                       <a:prstDash val="solid"/>
                       <a:round/>
@@ -18456,7 +18456,7 @@
                     </a:lnR>
                     <a:lnT w="12700" cap="flat" cmpd="sng" algn="ctr">
                       <a:solidFill>
-                        <a:srgbClr val="D9D5C8"/>
+                        <a:srgbClr val="4A1A5E"/>
                       </a:solidFill>
                       <a:prstDash val="solid"/>
                       <a:round/>
@@ -18465,7 +18465,7 @@
                     </a:lnT>
                     <a:lnB w="12700" cap="flat" cmpd="sng" algn="ctr">
                       <a:solidFill>
-                        <a:srgbClr val="D9D5C8"/>
+                        <a:srgbClr val="4A1A5E"/>
                       </a:solidFill>
                       <a:prstDash val="solid"/>
                       <a:round/>
@@ -18485,7 +18485,7 @@
                       <a:r>
                         <a:rPr lang="en-US" sz="2000" dirty="0">
                           <a:solidFill>
-                            <a:schemeClr val="accent4"/>
+                            <a:schemeClr val="bg2"/>
                           </a:solidFill>
                         </a:rPr>
                         <a:t>Your config, plugins, completions, manuals</a:t>
@@ -18496,7 +18496,7 @@
                   <a:tcPr marL="91440" marR="91440" marT="45720" marB="45720" anchor="ctr">
                     <a:lnL w="12700" cap="flat" cmpd="sng" algn="ctr">
                       <a:solidFill>
-                        <a:srgbClr val="D9D5C8"/>
+                        <a:srgbClr val="4A1A5E"/>
                       </a:solidFill>
                       <a:prstDash val="solid"/>
                       <a:round/>
@@ -18505,7 +18505,7 @@
                     </a:lnL>
                     <a:lnR w="12700" cap="flat" cmpd="sng" algn="ctr">
                       <a:solidFill>
-                        <a:srgbClr val="D9D5C8"/>
+                        <a:srgbClr val="4A1A5E"/>
                       </a:solidFill>
                       <a:prstDash val="solid"/>
                       <a:round/>
@@ -18514,7 +18514,7 @@
                     </a:lnR>
                     <a:lnT w="12700" cap="flat" cmpd="sng" algn="ctr">
                       <a:solidFill>
-                        <a:srgbClr val="D9D5C8"/>
+                        <a:srgbClr val="4A1A5E"/>
                       </a:solidFill>
                       <a:prstDash val="solid"/>
                       <a:round/>
@@ -18523,7 +18523,7 @@
                     </a:lnT>
                     <a:lnB w="12700" cap="flat" cmpd="sng" algn="ctr">
                       <a:solidFill>
-                        <a:srgbClr val="D9D5C8"/>
+                        <a:srgbClr val="4A1A5E"/>
                       </a:solidFill>
                       <a:prstDash val="solid"/>
                       <a:round/>
@@ -18545,7 +18545,7 @@
                       <a:r>
                         <a:rPr lang="en-US" sz="2000" dirty="0">
                           <a:solidFill>
-                            <a:schemeClr val="accent4"/>
+                            <a:schemeClr val="bg2"/>
                           </a:solidFill>
                         </a:rPr>
                         <a:t>Editor</a:t>
@@ -18556,7 +18556,7 @@
                   <a:tcPr marL="91440" marR="91440" marT="45720" marB="45720" anchor="ctr">
                     <a:lnL w="12700" cap="flat" cmpd="sng" algn="ctr">
                       <a:solidFill>
-                        <a:srgbClr val="D9D5C8"/>
+                        <a:srgbClr val="4A1A5E"/>
                       </a:solidFill>
                       <a:prstDash val="solid"/>
                       <a:round/>
@@ -18565,7 +18565,7 @@
                     </a:lnL>
                     <a:lnR w="12700" cap="flat" cmpd="sng" algn="ctr">
                       <a:solidFill>
-                        <a:srgbClr val="D9D5C8"/>
+                        <a:srgbClr val="4A1A5E"/>
                       </a:solidFill>
                       <a:prstDash val="solid"/>
                       <a:round/>
@@ -18574,7 +18574,7 @@
                     </a:lnR>
                     <a:lnT w="12700" cap="flat" cmpd="sng" algn="ctr">
                       <a:solidFill>
-                        <a:srgbClr val="D9D5C8"/>
+                        <a:srgbClr val="4A1A5E"/>
                       </a:solidFill>
                       <a:prstDash val="solid"/>
                       <a:round/>
@@ -18583,7 +18583,7 @@
                     </a:lnT>
                     <a:lnB w="12700" cap="flat" cmpd="sng" algn="ctr">
                       <a:solidFill>
-                        <a:srgbClr val="D9D5C8"/>
+                        <a:srgbClr val="4A1A5E"/>
                       </a:solidFill>
                       <a:prstDash val="solid"/>
                       <a:round/>
@@ -18603,7 +18603,7 @@
                       <a:r>
                         <a:rPr lang="en-US" sz="2000" dirty="0">
                           <a:solidFill>
-                            <a:schemeClr val="accent4"/>
+                            <a:schemeClr val="bg2"/>
                           </a:solidFill>
                         </a:rPr>
                         <a:t>Highlighting, suggestions, history search, prompt</a:t>
@@ -18614,7 +18614,7 @@
                   <a:tcPr marL="91440" marR="91440" marT="45720" marB="45720" anchor="ctr">
                     <a:lnL w="12700" cap="flat" cmpd="sng" algn="ctr">
                       <a:solidFill>
-                        <a:srgbClr val="D9D5C8"/>
+                        <a:srgbClr val="4A1A5E"/>
                       </a:solidFill>
                       <a:prstDash val="solid"/>
                       <a:round/>
@@ -18623,7 +18623,7 @@
                     </a:lnL>
                     <a:lnR w="12700" cap="flat" cmpd="sng" algn="ctr">
                       <a:solidFill>
-                        <a:srgbClr val="D9D5C8"/>
+                        <a:srgbClr val="4A1A5E"/>
                       </a:solidFill>
                       <a:prstDash val="solid"/>
                       <a:round/>
@@ -18632,7 +18632,7 @@
                     </a:lnR>
                     <a:lnT w="12700" cap="flat" cmpd="sng" algn="ctr">
                       <a:solidFill>
-                        <a:srgbClr val="D9D5C8"/>
+                        <a:srgbClr val="4A1A5E"/>
                       </a:solidFill>
                       <a:prstDash val="solid"/>
                       <a:round/>
@@ -18641,7 +18641,7 @@
                     </a:lnT>
                     <a:lnB w="12700" cap="flat" cmpd="sng" algn="ctr">
                       <a:solidFill>
-                        <a:srgbClr val="D9D5C8"/>
+                        <a:srgbClr val="4A1A5E"/>
                       </a:solidFill>
                       <a:prstDash val="solid"/>
                       <a:round/>
@@ -18663,7 +18663,7 @@
                       <a:r>
                         <a:rPr lang="en-US" sz="2000" dirty="0">
                           <a:solidFill>
-                            <a:schemeClr val="accent4"/>
+                            <a:schemeClr val="bg2"/>
                           </a:solidFill>
                         </a:rPr>
                         <a:t>Speed</a:t>
@@ -18674,7 +18674,7 @@
                   <a:tcPr marL="91440" marR="91440" marT="45720" marB="45720" anchor="ctr">
                     <a:lnL w="12700" cap="flat" cmpd="sng" algn="ctr">
                       <a:solidFill>
-                        <a:srgbClr val="D9D5C8"/>
+                        <a:srgbClr val="4A1A5E"/>
                       </a:solidFill>
                       <a:prstDash val="solid"/>
                       <a:round/>
@@ -18683,7 +18683,7 @@
                     </a:lnL>
                     <a:lnR w="12700" cap="flat" cmpd="sng" algn="ctr">
                       <a:solidFill>
-                        <a:srgbClr val="D9D5C8"/>
+                        <a:srgbClr val="4A1A5E"/>
                       </a:solidFill>
                       <a:prstDash val="solid"/>
                       <a:round/>
@@ -18692,7 +18692,7 @@
                     </a:lnR>
                     <a:lnT w="12700" cap="flat" cmpd="sng" algn="ctr">
                       <a:solidFill>
-                        <a:srgbClr val="D9D5C8"/>
+                        <a:srgbClr val="4A1A5E"/>
                       </a:solidFill>
                       <a:prstDash val="solid"/>
                       <a:round/>
@@ -18701,7 +18701,7 @@
                     </a:lnT>
                     <a:lnB w="12700" cap="flat" cmpd="sng" algn="ctr">
                       <a:solidFill>
-                        <a:srgbClr val="D9D5C8"/>
+                        <a:srgbClr val="4A1A5E"/>
                       </a:solidFill>
                       <a:prstDash val="solid"/>
                       <a:round/>
@@ -18721,7 +18721,7 @@
                       <a:r>
                         <a:rPr lang="en-US" sz="2000" dirty="0">
                           <a:solidFill>
-                            <a:schemeClr val="accent4"/>
+                            <a:schemeClr val="bg2"/>
                           </a:solidFill>
                         </a:rPr>
                         <a:t>No-fork commands, parallel builtins, caches</a:t>
@@ -18732,7 +18732,7 @@
                   <a:tcPr marL="91440" marR="91440" marT="45720" marB="45720" anchor="ctr">
                     <a:lnL w="12700" cap="flat" cmpd="sng" algn="ctr">
                       <a:solidFill>
-                        <a:srgbClr val="D9D5C8"/>
+                        <a:srgbClr val="4A1A5E"/>
                       </a:solidFill>
                       <a:prstDash val="solid"/>
                       <a:round/>
@@ -18741,7 +18741,7 @@
                     </a:lnL>
                     <a:lnR w="12700" cap="flat" cmpd="sng" algn="ctr">
                       <a:solidFill>
-                        <a:srgbClr val="D9D5C8"/>
+                        <a:srgbClr val="4A1A5E"/>
                       </a:solidFill>
                       <a:prstDash val="solid"/>
                       <a:round/>
@@ -18750,7 +18750,7 @@
                     </a:lnR>
                     <a:lnT w="12700" cap="flat" cmpd="sng" algn="ctr">
                       <a:solidFill>
-                        <a:srgbClr val="D9D5C8"/>
+                        <a:srgbClr val="4A1A5E"/>
                       </a:solidFill>
                       <a:prstDash val="solid"/>
                       <a:round/>
@@ -18759,7 +18759,7 @@
                     </a:lnT>
                     <a:lnB w="12700" cap="flat" cmpd="sng" algn="ctr">
                       <a:solidFill>
-                        <a:srgbClr val="D9D5C8"/>
+                        <a:srgbClr val="4A1A5E"/>
                       </a:solidFill>
                       <a:prstDash val="solid"/>
                       <a:round/>
@@ -18781,7 +18781,7 @@
                       <a:r>
                         <a:rPr lang="en-US" sz="2000" dirty="0">
                           <a:solidFill>
-                            <a:schemeClr val="accent4"/>
+                            <a:schemeClr val="bg2"/>
                           </a:solidFill>
                         </a:rPr>
                         <a:t>Operate</a:t>
@@ -18792,7 +18792,7 @@
                   <a:tcPr marL="91440" marR="91440" marT="45720" marB="45720" anchor="ctr">
                     <a:lnL w="12700" cap="flat" cmpd="sng" algn="ctr">
                       <a:solidFill>
-                        <a:srgbClr val="D9D5C8"/>
+                        <a:srgbClr val="4A1A5E"/>
                       </a:solidFill>
                       <a:prstDash val="solid"/>
                       <a:round/>
@@ -18801,7 +18801,7 @@
                     </a:lnL>
                     <a:lnR w="12700" cap="flat" cmpd="sng" algn="ctr">
                       <a:solidFill>
-                        <a:srgbClr val="D9D5C8"/>
+                        <a:srgbClr val="4A1A5E"/>
                       </a:solidFill>
                       <a:prstDash val="solid"/>
                       <a:round/>
@@ -18810,7 +18810,7 @@
                     </a:lnR>
                     <a:lnT w="12700" cap="flat" cmpd="sng" algn="ctr">
                       <a:solidFill>
-                        <a:srgbClr val="D9D5C8"/>
+                        <a:srgbClr val="4A1A5E"/>
                       </a:solidFill>
                       <a:prstDash val="solid"/>
                       <a:round/>
@@ -18819,7 +18819,7 @@
                     </a:lnT>
                     <a:lnB w="12700" cap="flat" cmpd="sng" algn="ctr">
                       <a:solidFill>
-                        <a:srgbClr val="D9D5C8"/>
+                        <a:srgbClr val="4A1A5E"/>
                       </a:solidFill>
                       <a:prstDash val="solid"/>
                       <a:round/>
@@ -18839,7 +18839,7 @@
                       <a:r>
                         <a:rPr lang="en-US" sz="2000" dirty="0">
                           <a:solidFill>
-                            <a:schemeClr val="accent4"/>
+                            <a:schemeClr val="bg2"/>
                           </a:solidFill>
                         </a:rPr>
                         <a:t>Daemon, jobs, config file, history</a:t>
@@ -18850,7 +18850,7 @@
                   <a:tcPr marL="91440" marR="91440" marT="45720" marB="45720" anchor="ctr">
                     <a:lnL w="12700" cap="flat" cmpd="sng" algn="ctr">
                       <a:solidFill>
-                        <a:srgbClr val="D9D5C8"/>
+                        <a:srgbClr val="4A1A5E"/>
                       </a:solidFill>
                       <a:prstDash val="solid"/>
                       <a:round/>
@@ -18859,7 +18859,7 @@
                     </a:lnL>
                     <a:lnR w="12700" cap="flat" cmpd="sng" algn="ctr">
                       <a:solidFill>
-                        <a:srgbClr val="D9D5C8"/>
+                        <a:srgbClr val="4A1A5E"/>
                       </a:solidFill>
                       <a:prstDash val="solid"/>
                       <a:round/>
@@ -18868,7 +18868,7 @@
                     </a:lnR>
                     <a:lnT w="12700" cap="flat" cmpd="sng" algn="ctr">
                       <a:solidFill>
-                        <a:srgbClr val="D9D5C8"/>
+                        <a:srgbClr val="4A1A5E"/>
                       </a:solidFill>
                       <a:prstDash val="solid"/>
                       <a:round/>
@@ -18877,7 +18877,7 @@
                     </a:lnT>
                     <a:lnB w="12700" cap="flat" cmpd="sng" algn="ctr">
                       <a:solidFill>
-                        <a:srgbClr val="D9D5C8"/>
+                        <a:srgbClr val="4A1A5E"/>
                       </a:solidFill>
                       <a:prstDash val="solid"/>
                       <a:round/>
@@ -18899,7 +18899,7 @@
                       <a:r>
                         <a:rPr lang="en-US" sz="2000" dirty="0">
                           <a:solidFill>
-                            <a:schemeClr val="accent4"/>
+                            <a:schemeClr val="bg2"/>
                           </a:solidFill>
                         </a:rPr>
                         <a:t>Inspect</a:t>
@@ -18910,7 +18910,7 @@
                   <a:tcPr marL="91440" marR="91440" marT="45720" marB="45720" anchor="ctr">
                     <a:lnL w="12700" cap="flat" cmpd="sng" algn="ctr">
                       <a:solidFill>
-                        <a:srgbClr val="D9D5C8"/>
+                        <a:srgbClr val="4A1A5E"/>
                       </a:solidFill>
                       <a:prstDash val="solid"/>
                       <a:round/>
@@ -18919,7 +18919,7 @@
                     </a:lnL>
                     <a:lnR w="12700" cap="flat" cmpd="sng" algn="ctr">
                       <a:solidFill>
-                        <a:srgbClr val="D9D5C8"/>
+                        <a:srgbClr val="4A1A5E"/>
                       </a:solidFill>
                       <a:prstDash val="solid"/>
                       <a:round/>
@@ -18928,7 +18928,7 @@
                     </a:lnR>
                     <a:lnT w="12700" cap="flat" cmpd="sng" algn="ctr">
                       <a:solidFill>
-                        <a:srgbClr val="D9D5C8"/>
+                        <a:srgbClr val="4A1A5E"/>
                       </a:solidFill>
                       <a:prstDash val="solid"/>
                       <a:round/>
@@ -18937,7 +18937,7 @@
                     </a:lnT>
                     <a:lnB w="12700" cap="flat" cmpd="sng" algn="ctr">
                       <a:solidFill>
-                        <a:srgbClr val="D9D5C8"/>
+                        <a:srgbClr val="4A1A5E"/>
                       </a:solidFill>
                       <a:prstDash val="solid"/>
                       <a:round/>
@@ -18957,7 +18957,7 @@
                       <a:r>
                         <a:rPr lang="en-US" sz="2000" dirty="0">
                           <a:solidFill>
-                            <a:schemeClr val="accent4"/>
+                            <a:schemeClr val="bg2"/>
                           </a:solidFill>
                         </a:rPr>
                         <a:t>intercept, provenance, dumps, profile, doctor</a:t>
@@ -18968,7 +18968,7 @@
                   <a:tcPr marL="91440" marR="91440" marT="45720" marB="45720" anchor="ctr">
                     <a:lnL w="12700" cap="flat" cmpd="sng" algn="ctr">
                       <a:solidFill>
-                        <a:srgbClr val="D9D5C8"/>
+                        <a:srgbClr val="4A1A5E"/>
                       </a:solidFill>
                       <a:prstDash val="solid"/>
                       <a:round/>
@@ -18977,7 +18977,7 @@
                     </a:lnL>
                     <a:lnR w="12700" cap="flat" cmpd="sng" algn="ctr">
                       <a:solidFill>
-                        <a:srgbClr val="D9D5C8"/>
+                        <a:srgbClr val="4A1A5E"/>
                       </a:solidFill>
                       <a:prstDash val="solid"/>
                       <a:round/>
@@ -18986,7 +18986,7 @@
                     </a:lnR>
                     <a:lnT w="12700" cap="flat" cmpd="sng" algn="ctr">
                       <a:solidFill>
-                        <a:srgbClr val="D9D5C8"/>
+                        <a:srgbClr val="4A1A5E"/>
                       </a:solidFill>
                       <a:prstDash val="solid"/>
                       <a:round/>
@@ -18995,7 +18995,7 @@
                     </a:lnT>
                     <a:lnB w="12700" cap="flat" cmpd="sng" algn="ctr">
                       <a:solidFill>
-                        <a:srgbClr val="D9D5C8"/>
+                        <a:srgbClr val="4A1A5E"/>
                       </a:solidFill>
                       <a:prstDash val="solid"/>
                       <a:round/>
@@ -19017,7 +19017,7 @@
                       <a:r>
                         <a:rPr lang="en-US" sz="2000" dirty="0">
                           <a:solidFill>
-                            <a:schemeClr val="accent4"/>
+                            <a:schemeClr val="bg2"/>
                           </a:solidFill>
                         </a:rPr>
                         <a:t>Reference</a:t>
@@ -19028,7 +19028,7 @@
                   <a:tcPr marL="91440" marR="91440" marT="45720" marB="45720" anchor="ctr">
                     <a:lnL w="12700" cap="flat" cmpd="sng" algn="ctr">
                       <a:solidFill>
-                        <a:srgbClr val="D9D5C8"/>
+                        <a:srgbClr val="4A1A5E"/>
                       </a:solidFill>
                       <a:prstDash val="solid"/>
                       <a:round/>
@@ -19037,7 +19037,7 @@
                     </a:lnL>
                     <a:lnR w="12700" cap="flat" cmpd="sng" algn="ctr">
                       <a:solidFill>
-                        <a:srgbClr val="D9D5C8"/>
+                        <a:srgbClr val="4A1A5E"/>
                       </a:solidFill>
                       <a:prstDash val="solid"/>
                       <a:round/>
@@ -19046,7 +19046,7 @@
                     </a:lnR>
                     <a:lnT w="12700" cap="flat" cmpd="sng" algn="ctr">
                       <a:solidFill>
-                        <a:srgbClr val="D9D5C8"/>
+                        <a:srgbClr val="4A1A5E"/>
                       </a:solidFill>
                       <a:prstDash val="solid"/>
                       <a:round/>
@@ -19055,7 +19055,7 @@
                     </a:lnT>
                     <a:lnB w="12700" cap="flat" cmpd="sng" algn="ctr">
                       <a:solidFill>
-                        <a:srgbClr val="D9D5C8"/>
+                        <a:srgbClr val="4A1A5E"/>
                       </a:solidFill>
                       <a:prstDash val="solid"/>
                       <a:round/>
@@ -19075,7 +19075,7 @@
                       <a:r>
                         <a:rPr lang="en-US" sz="2000" dirty="0">
                           <a:solidFill>
-                            <a:schemeClr val="accent4"/>
+                            <a:schemeClr val="bg2"/>
                           </a:solidFill>
                         </a:rPr>
                         <a:t>Emulation, files, cheat sheets, issues</a:t>
@@ -19086,7 +19086,7 @@
                   <a:tcPr marL="91440" marR="91440" marT="45720" marB="45720" anchor="ctr">
                     <a:lnL w="12700" cap="flat" cmpd="sng" algn="ctr">
                       <a:solidFill>
-                        <a:srgbClr val="D9D5C8"/>
+                        <a:srgbClr val="4A1A5E"/>
                       </a:solidFill>
                       <a:prstDash val="solid"/>
                       <a:round/>
@@ -19095,7 +19095,7 @@
                     </a:lnL>
                     <a:lnR w="12700" cap="flat" cmpd="sng" algn="ctr">
                       <a:solidFill>
-                        <a:srgbClr val="D9D5C8"/>
+                        <a:srgbClr val="4A1A5E"/>
                       </a:solidFill>
                       <a:prstDash val="solid"/>
                       <a:round/>
@@ -19104,7 +19104,7 @@
                     </a:lnR>
                     <a:lnT w="12700" cap="flat" cmpd="sng" algn="ctr">
                       <a:solidFill>
-                        <a:srgbClr val="D9D5C8"/>
+                        <a:srgbClr val="4A1A5E"/>
                       </a:solidFill>
                       <a:prstDash val="solid"/>
                       <a:round/>
@@ -19113,7 +19113,7 @@
                     </a:lnT>
                     <a:lnB w="12700" cap="flat" cmpd="sng" algn="ctr">
                       <a:solidFill>
-                        <a:srgbClr val="D9D5C8"/>
+                        <a:srgbClr val="4A1A5E"/>
                       </a:solidFill>
                       <a:prstDash val="solid"/>
                       <a:round/>
@@ -19157,7 +19157,7 @@
             <a:lvl1pPr>
               <a:defRPr sz="1200">
                 <a:solidFill>
-                  <a:schemeClr val="accent6"/>
+                  <a:schemeClr val="accent5"/>
                 </a:solidFill>
                 <a:latin typeface="Courier New"/>
                 <a:ea typeface="Courier New"/>
@@ -19334,7 +19334,7 @@
           </a:solidFill>
           <a:ln w="12700">
             <a:solidFill>
-              <a:srgbClr val="2C3844"/>
+              <a:srgbClr val="4A1A5E"/>
             </a:solidFill>
             <a:prstDash val="solid"/>
           </a:ln>
@@ -19582,7 +19582,7 @@
             <a:r>
               <a:rPr lang="en-US" sz="3600" b="1" dirty="0">
                 <a:solidFill>
-                  <a:schemeClr val="accent4"/>
+                  <a:schemeClr val="bg2"/>
                 </a:solidFill>
               </a:rPr>
               <a:t>Caches</a:t>
@@ -19618,7 +19618,7 @@
             <a:r>
               <a:rPr lang="en-US" sz="1200" dirty="0">
                 <a:solidFill>
-                  <a:schemeClr val="accent6"/>
+                  <a:schemeClr val="accent5"/>
                 </a:solidFill>
                 <a:latin typeface="Courier New" pitchFamily="34" charset="0"/>
                 <a:ea typeface="Courier New" pitchFamily="34" charset="-122"/>
@@ -19657,7 +19657,7 @@
             <a:r>
               <a:rPr lang="en-US" sz="2100" dirty="0">
                 <a:solidFill>
-                  <a:schemeClr val="accent4"/>
+                  <a:schemeClr val="bg2"/>
                 </a:solidFill>
               </a:rPr>
               <a:t>Compiled bytecode and plugin payloads live in rkyv images under ~/.zshrs/images and are read by mmap. SQLite files beside them are read-only mirrors for browsing, never consulted for cache hits.</a:t>
@@ -19683,11 +19683,11 @@
             </a:avLst>
           </a:prstGeom>
           <a:solidFill>
-            <a:srgbClr val="FFFFFF"/>
+            <a:schemeClr val="tx2"/>
           </a:solidFill>
           <a:ln w="12700">
             <a:solidFill>
-              <a:srgbClr val="D9D5C8"/>
+              <a:srgbClr val="4A1A5E"/>
             </a:solidFill>
             <a:prstDash val="solid"/>
           </a:ln>
@@ -19720,7 +19720,7 @@
             <a:r>
               <a:rPr lang="en-US" sz="1600" b="1" dirty="0">
                 <a:solidFill>
-                  <a:schemeClr val="accent2"/>
+                  <a:schemeClr val="accent1"/>
                 </a:solidFill>
                 <a:latin typeface="Cambria" pitchFamily="34" charset="0"/>
                 <a:ea typeface="Cambria" pitchFamily="34" charset="-122"/>
@@ -19759,7 +19759,7 @@
             <a:r>
               <a:rPr lang="en-US" sz="2300" dirty="0">
                 <a:solidFill>
-                  <a:schemeClr val="accent4"/>
+                  <a:schemeClr val="bg2"/>
                 </a:solidFill>
               </a:rPr>
               <a:t>Top-level index: name to shard, generation, offset</a:t>
@@ -19785,11 +19785,11 @@
             </a:avLst>
           </a:prstGeom>
           <a:solidFill>
-            <a:srgbClr val="FFFFFF"/>
+            <a:schemeClr val="tx2"/>
           </a:solidFill>
           <a:ln w="12700">
             <a:solidFill>
-              <a:srgbClr val="D9D5C8"/>
+              <a:srgbClr val="4A1A5E"/>
             </a:solidFill>
             <a:prstDash val="solid"/>
           </a:ln>
@@ -19822,7 +19822,7 @@
             <a:r>
               <a:rPr lang="en-US" sz="1600" b="1" dirty="0">
                 <a:solidFill>
-                  <a:schemeClr val="accent2"/>
+                  <a:schemeClr val="accent1"/>
                 </a:solidFill>
                 <a:latin typeface="Cambria" pitchFamily="34" charset="0"/>
                 <a:ea typeface="Cambria" pitchFamily="34" charset="-122"/>
@@ -19861,7 +19861,7 @@
             <a:r>
               <a:rPr lang="en-US" sz="2300" dirty="0">
                 <a:solidFill>
-                  <a:schemeClr val="accent4"/>
+                  <a:schemeClr val="bg2"/>
                 </a:solidFill>
               </a:rPr>
               <a:t>One compiled program per autoloaded function</a:t>
@@ -19887,11 +19887,11 @@
             </a:avLst>
           </a:prstGeom>
           <a:solidFill>
-            <a:srgbClr val="FFFFFF"/>
+            <a:schemeClr val="tx2"/>
           </a:solidFill>
           <a:ln w="12700">
             <a:solidFill>
-              <a:srgbClr val="D9D5C8"/>
+              <a:srgbClr val="4A1A5E"/>
             </a:solidFill>
             <a:prstDash val="solid"/>
           </a:ln>
@@ -19924,7 +19924,7 @@
             <a:r>
               <a:rPr lang="en-US" sz="1600" b="1" dirty="0">
                 <a:solidFill>
-                  <a:schemeClr val="accent2"/>
+                  <a:schemeClr val="accent1"/>
                 </a:solidFill>
                 <a:latin typeface="Cambria" pitchFamily="34" charset="0"/>
                 <a:ea typeface="Cambria" pitchFamily="34" charset="-122"/>
@@ -19963,7 +19963,7 @@
             <a:r>
               <a:rPr lang="en-US" sz="2300" dirty="0">
                 <a:solidFill>
-                  <a:schemeClr val="accent4"/>
+                  <a:schemeClr val="bg2"/>
                 </a:solidFill>
               </a:rPr>
               <a:t>One compiled chunk per script, keyed by path and mtime</a:t>
@@ -19989,11 +19989,11 @@
             </a:avLst>
           </a:prstGeom>
           <a:solidFill>
-            <a:srgbClr val="FFFFFF"/>
+            <a:schemeClr val="tx2"/>
           </a:solidFill>
           <a:ln w="12700">
             <a:solidFill>
-              <a:srgbClr val="D9D5C8"/>
+              <a:srgbClr val="4A1A5E"/>
             </a:solidFill>
             <a:prstDash val="solid"/>
           </a:ln>
@@ -20026,7 +20026,7 @@
             <a:r>
               <a:rPr lang="en-US" sz="1600" b="1" dirty="0">
                 <a:solidFill>
-                  <a:schemeClr val="accent2"/>
+                  <a:schemeClr val="accent1"/>
                 </a:solidFill>
                 <a:latin typeface="Cambria" pitchFamily="34" charset="0"/>
                 <a:ea typeface="Cambria" pitchFamily="34" charset="-122"/>
@@ -20065,7 +20065,7 @@
             <a:r>
               <a:rPr lang="en-US" sz="2300" dirty="0">
                 <a:solidFill>
-                  <a:schemeClr val="accent4"/>
+                  <a:schemeClr val="bg2"/>
                 </a:solidFill>
               </a:rPr>
               <a:t>catalog.db and history.db, read-only</a:t>
@@ -20104,7 +20104,7 @@
             <a:lvl1pPr>
               <a:defRPr sz="1200">
                 <a:solidFill>
-                  <a:schemeClr val="accent6"/>
+                  <a:schemeClr val="accent5"/>
                 </a:solidFill>
                 <a:latin typeface="Courier New"/>
                 <a:ea typeface="Courier New"/>
@@ -20281,7 +20281,7 @@
           </a:solidFill>
           <a:ln w="12700">
             <a:solidFill>
-              <a:srgbClr val="2C3844"/>
+              <a:srgbClr val="4A1A5E"/>
             </a:solidFill>
             <a:prstDash val="solid"/>
           </a:ln>
@@ -20491,7 +20491,7 @@
             <a:r>
               <a:rPr lang="en-US" sz="3600" b="1" dirty="0">
                 <a:solidFill>
-                  <a:schemeClr val="accent4"/>
+                  <a:schemeClr val="bg2"/>
                 </a:solidFill>
               </a:rPr>
               <a:t>The config file</a:t>
@@ -20527,7 +20527,7 @@
             <a:r>
               <a:rPr lang="en-US" sz="1200" dirty="0">
                 <a:solidFill>
-                  <a:schemeClr val="accent6"/>
+                  <a:schemeClr val="accent5"/>
                 </a:solidFill>
                 <a:latin typeface="Courier New" pitchFamily="34" charset="0"/>
                 <a:ea typeface="Courier New" pitchFamily="34" charset="-122"/>
@@ -20566,7 +20566,7 @@
             <a:r>
               <a:rPr lang="en-US" sz="2300" dirty="0">
                 <a:solidFill>
-                  <a:schemeClr val="accent4"/>
+                  <a:schemeClr val="bg2"/>
                 </a:solidFill>
               </a:rPr>
               <a:t>One directory holds everything: ~/.zshrs, relocatable with ZSHRS_HOME. These are the sections the README documents.</a:t>
@@ -20592,11 +20592,11 @@
             </a:avLst>
           </a:prstGeom>
           <a:solidFill>
-            <a:schemeClr val="accent4"/>
+            <a:schemeClr val="tx2"/>
           </a:solidFill>
           <a:ln w="12700">
             <a:solidFill>
-              <a:srgbClr val="2C3844"/>
+              <a:srgbClr val="4A1A5E"/>
             </a:solidFill>
             <a:prstDash val="solid"/>
           </a:ln>
@@ -20814,7 +20814,7 @@
             <a:lvl1pPr>
               <a:defRPr sz="1200">
                 <a:solidFill>
-                  <a:schemeClr val="accent6"/>
+                  <a:schemeClr val="accent5"/>
                 </a:solidFill>
                 <a:latin typeface="Courier New"/>
                 <a:ea typeface="Courier New"/>
@@ -20991,7 +20991,7 @@
           </a:solidFill>
           <a:ln w="12700">
             <a:solidFill>
-              <a:srgbClr val="2C3844"/>
+              <a:srgbClr val="4A1A5E"/>
             </a:solidFill>
             <a:prstDash val="solid"/>
           </a:ln>
@@ -21093,7 +21093,7 @@
           </a:solidFill>
           <a:ln w="12700">
             <a:solidFill>
-              <a:srgbClr val="2C3844"/>
+              <a:srgbClr val="4A1A5E"/>
             </a:solidFill>
             <a:prstDash val="solid"/>
           </a:ln>
@@ -21195,7 +21195,7 @@
           </a:solidFill>
           <a:ln w="12700">
             <a:solidFill>
-              <a:srgbClr val="2C3844"/>
+              <a:srgbClr val="4A1A5E"/>
             </a:solidFill>
             <a:prstDash val="solid"/>
           </a:ln>
@@ -21297,7 +21297,7 @@
           </a:solidFill>
           <a:ln w="12700">
             <a:solidFill>
-              <a:srgbClr val="2C3844"/>
+              <a:srgbClr val="4A1A5E"/>
             </a:solidFill>
             <a:prstDash val="solid"/>
           </a:ln>
@@ -21480,7 +21480,7 @@
             <a:r>
               <a:rPr lang="en-US" sz="3600" b="1" dirty="0">
                 <a:solidFill>
-                  <a:schemeClr val="accent4"/>
+                  <a:schemeClr val="bg2"/>
                 </a:solidFill>
               </a:rPr>
               <a:t>Daemon (optional)</a:t>
@@ -21516,7 +21516,7 @@
             <a:r>
               <a:rPr lang="en-US" sz="1200" dirty="0">
                 <a:solidFill>
-                  <a:schemeClr val="accent6"/>
+                  <a:schemeClr val="accent5"/>
                 </a:solidFill>
                 <a:latin typeface="Courier New" pitchFamily="34" charset="0"/>
                 <a:ea typeface="Courier New" pitchFamily="34" charset="-122"/>
@@ -21555,7 +21555,7 @@
             <a:r>
               <a:rPr lang="en-US" sz="2100" dirty="0">
                 <a:solidFill>
-                  <a:schemeClr val="accent4"/>
+                  <a:schemeClr val="bg2"/>
                 </a:solidFill>
               </a:rPr>
               <a:t>The daemon owns shared caches and history so many shells can read them by mmap. You start it yourself; nothing auto-spawns it. The design notes require shells to keep working when it is down.</a:t>
@@ -21581,11 +21581,11 @@
             </a:avLst>
           </a:prstGeom>
           <a:solidFill>
-            <a:srgbClr val="FFFFFF"/>
+            <a:schemeClr val="tx2"/>
           </a:solidFill>
           <a:ln w="12700">
             <a:solidFill>
-              <a:srgbClr val="D9D5C8"/>
+              <a:srgbClr val="4A1A5E"/>
             </a:solidFill>
             <a:prstDash val="solid"/>
           </a:ln>
@@ -21618,7 +21618,7 @@
             <a:r>
               <a:rPr lang="en-US" sz="2600" b="1" dirty="0">
                 <a:solidFill>
-                  <a:schemeClr val="accent2"/>
+                  <a:schemeClr val="accent1"/>
                 </a:solidFill>
                 <a:latin typeface="Cambria" pitchFamily="34" charset="0"/>
                 <a:ea typeface="Cambria" pitchFamily="34" charset="-122"/>
@@ -21661,7 +21661,7 @@
             <a:r>
               <a:rPr lang="en-US" sz="2600" dirty="0">
                 <a:solidFill>
-                  <a:schemeClr val="accent4"/>
+                  <a:schemeClr val="bg2"/>
                 </a:solidFill>
               </a:rPr>
               <a:t>Shared caches</a:t>
@@ -21679,7 +21679,7 @@
             <a:r>
               <a:rPr lang="en-US" sz="2600" dirty="0">
                 <a:solidFill>
-                  <a:schemeClr val="accent4"/>
+                  <a:schemeClr val="bg2"/>
                 </a:solidFill>
               </a:rPr>
               <a:t>History</a:t>
@@ -21697,7 +21697,7 @@
             <a:r>
               <a:rPr lang="en-US" sz="2600" dirty="0">
                 <a:solidFill>
-                  <a:schemeClr val="accent4"/>
+                  <a:schemeClr val="bg2"/>
                 </a:solidFill>
               </a:rPr>
               <a:t>fsnotify, scheduling</a:t>
@@ -21723,11 +21723,11 @@
             </a:avLst>
           </a:prstGeom>
           <a:solidFill>
-            <a:srgbClr val="FFFFFF"/>
+            <a:schemeClr val="tx2"/>
           </a:solidFill>
           <a:ln w="12700">
             <a:solidFill>
-              <a:srgbClr val="D9D5C8"/>
+              <a:srgbClr val="4A1A5E"/>
             </a:solidFill>
             <a:prstDash val="solid"/>
           </a:ln>
@@ -21760,7 +21760,7 @@
             <a:r>
               <a:rPr lang="en-US" sz="2600" b="1" dirty="0">
                 <a:solidFill>
-                  <a:schemeClr val="accent2"/>
+                  <a:schemeClr val="accent1"/>
                 </a:solidFill>
                 <a:latin typeface="Cambria" pitchFamily="34" charset="0"/>
                 <a:ea typeface="Cambria" pitchFamily="34" charset="-122"/>
@@ -21803,7 +21803,7 @@
             <a:r>
               <a:rPr lang="en-US" sz="2600" dirty="0">
                 <a:solidFill>
-                  <a:schemeClr val="accent4"/>
+                  <a:schemeClr val="bg2"/>
                 </a:solidFill>
               </a:rPr>
               <a:t>Stateless clients</a:t>
@@ -21821,7 +21821,7 @@
             <a:r>
               <a:rPr lang="en-US" sz="2600" dirty="0">
                 <a:solidFill>
-                  <a:schemeClr val="accent4"/>
+                  <a:schemeClr val="bg2"/>
                 </a:solidFill>
               </a:rPr>
               <a:t>Read caches by mmap</a:t>
@@ -21839,7 +21839,7 @@
             <a:r>
               <a:rPr lang="en-US" sz="2600" dirty="0">
                 <a:solidFill>
-                  <a:schemeClr val="accent4"/>
+                  <a:schemeClr val="bg2"/>
                 </a:solidFill>
               </a:rPr>
               <a:t>Fall through to source if it is down</a:t>
@@ -21878,7 +21878,7 @@
             <a:lvl1pPr>
               <a:defRPr sz="1200">
                 <a:solidFill>
-                  <a:schemeClr val="accent6"/>
+                  <a:schemeClr val="accent5"/>
                 </a:solidFill>
                 <a:latin typeface="Courier New"/>
                 <a:ea typeface="Courier New"/>
@@ -22055,7 +22055,7 @@
           </a:solidFill>
           <a:ln w="12700">
             <a:solidFill>
-              <a:srgbClr val="2C3844"/>
+              <a:srgbClr val="4A1A5E"/>
             </a:solidFill>
             <a:prstDash val="solid"/>
           </a:ln>
@@ -22265,7 +22265,7 @@
             <a:r>
               <a:rPr lang="en-US" sz="3600" b="1" dirty="0">
                 <a:solidFill>
-                  <a:schemeClr val="accent4"/>
+                  <a:schemeClr val="bg2"/>
                 </a:solidFill>
               </a:rPr>
               <a:t>Jobs and messaging</a:t>
@@ -22301,7 +22301,7 @@
             <a:r>
               <a:rPr lang="en-US" sz="1200" dirty="0">
                 <a:solidFill>
-                  <a:schemeClr val="accent6"/>
+                  <a:schemeClr val="accent5"/>
                 </a:solidFill>
                 <a:latin typeface="Courier New" pitchFamily="34" charset="0"/>
                 <a:ea typeface="Courier New" pitchFamily="34" charset="-122"/>
@@ -22340,7 +22340,7 @@
             <a:r>
               <a:rPr lang="en-US" sz="2300" dirty="0">
                 <a:solidFill>
-                  <a:schemeClr val="accent4"/>
+                  <a:schemeClr val="bg2"/>
                 </a:solidFill>
               </a:rPr>
               <a:t>Built on the daemon. zjob runs a child under the daemon on a pseudo-terminal so it survives your shell and can be attached later. zsubscribe, zpublish and zlock coordinate shells.</a:t>
@@ -22366,11 +22366,11 @@
             </a:avLst>
           </a:prstGeom>
           <a:solidFill>
-            <a:srgbClr val="FFFFFF"/>
+            <a:schemeClr val="tx2"/>
           </a:solidFill>
           <a:ln w="12700">
             <a:solidFill>
-              <a:srgbClr val="D9D5C8"/>
+              <a:srgbClr val="4A1A5E"/>
             </a:solidFill>
             <a:prstDash val="solid"/>
           </a:ln>
@@ -22403,7 +22403,7 @@
             <a:r>
               <a:rPr lang="en-US" sz="1600" b="1" dirty="0">
                 <a:solidFill>
-                  <a:schemeClr val="accent2"/>
+                  <a:schemeClr val="accent1"/>
                 </a:solidFill>
                 <a:latin typeface="Cambria" pitchFamily="34" charset="0"/>
                 <a:ea typeface="Cambria" pitchFamily="34" charset="-122"/>
@@ -22442,7 +22442,7 @@
             <a:r>
               <a:rPr lang="en-US" sz="2800" dirty="0">
                 <a:solidFill>
-                  <a:schemeClr val="accent4"/>
+                  <a:schemeClr val="bg2"/>
                 </a:solidFill>
               </a:rPr>
               <a:t>Supervised job; attach later; detach with Ctrl-]</a:t>
@@ -22468,11 +22468,11 @@
             </a:avLst>
           </a:prstGeom>
           <a:solidFill>
-            <a:srgbClr val="FFFFFF"/>
+            <a:schemeClr val="tx2"/>
           </a:solidFill>
           <a:ln w="12700">
             <a:solidFill>
-              <a:srgbClr val="D9D5C8"/>
+              <a:srgbClr val="4A1A5E"/>
             </a:solidFill>
             <a:prstDash val="solid"/>
           </a:ln>
@@ -22505,7 +22505,7 @@
             <a:r>
               <a:rPr lang="en-US" sz="1600" b="1" dirty="0">
                 <a:solidFill>
-                  <a:schemeClr val="accent2"/>
+                  <a:schemeClr val="accent1"/>
                 </a:solidFill>
                 <a:latin typeface="Cambria" pitchFamily="34" charset="0"/>
                 <a:ea typeface="Cambria" pitchFamily="34" charset="-122"/>
@@ -22544,7 +22544,7 @@
             <a:r>
               <a:rPr lang="en-US" sz="2800" dirty="0">
                 <a:solidFill>
-                  <a:schemeClr val="accent4"/>
+                  <a:schemeClr val="bg2"/>
                 </a:solidFill>
               </a:rPr>
               <a:t>Cross-shell pub/sub</a:t>
@@ -22570,11 +22570,11 @@
             </a:avLst>
           </a:prstGeom>
           <a:solidFill>
-            <a:srgbClr val="FFFFFF"/>
+            <a:schemeClr val="tx2"/>
           </a:solidFill>
           <a:ln w="12700">
             <a:solidFill>
-              <a:srgbClr val="D9D5C8"/>
+              <a:srgbClr val="4A1A5E"/>
             </a:solidFill>
             <a:prstDash val="solid"/>
           </a:ln>
@@ -22607,7 +22607,7 @@
             <a:r>
               <a:rPr lang="en-US" sz="1600" b="1" dirty="0">
                 <a:solidFill>
-                  <a:schemeClr val="accent2"/>
+                  <a:schemeClr val="accent1"/>
                 </a:solidFill>
                 <a:latin typeface="Cambria" pitchFamily="34" charset="0"/>
                 <a:ea typeface="Cambria" pitchFamily="34" charset="-122"/>
@@ -22646,7 +22646,7 @@
             <a:r>
               <a:rPr lang="en-US" sz="2800" dirty="0">
                 <a:solidFill>
-                  <a:schemeClr val="accent4"/>
+                  <a:schemeClr val="bg2"/>
                 </a:solidFill>
               </a:rPr>
               <a:t>Named locks; release needs the original token</a:t>
@@ -22685,7 +22685,7 @@
             <a:lvl1pPr>
               <a:defRPr sz="1200">
                 <a:solidFill>
-                  <a:schemeClr val="accent6"/>
+                  <a:schemeClr val="accent5"/>
                 </a:solidFill>
                 <a:latin typeface="Courier New"/>
                 <a:ea typeface="Courier New"/>
@@ -22862,7 +22862,7 @@
           </a:solidFill>
           <a:ln w="12700">
             <a:solidFill>
-              <a:srgbClr val="2C3844"/>
+              <a:srgbClr val="4A1A5E"/>
             </a:solidFill>
             <a:prstDash val="solid"/>
           </a:ln>
@@ -23072,7 +23072,7 @@
             <a:r>
               <a:rPr lang="en-US" sz="3600" b="1" dirty="0">
                 <a:solidFill>
-                  <a:schemeClr val="accent4"/>
+                  <a:schemeClr val="bg2"/>
                 </a:solidFill>
               </a:rPr>
               <a:t>ai flags</a:t>
@@ -23108,7 +23108,7 @@
             <a:r>
               <a:rPr lang="en-US" sz="1200" dirty="0">
                 <a:solidFill>
-                  <a:schemeClr val="accent6"/>
+                  <a:schemeClr val="accent5"/>
                 </a:solidFill>
                 <a:latin typeface="Courier New" pitchFamily="34" charset="0"/>
                 <a:ea typeface="Courier New" pitchFamily="34" charset="-122"/>
@@ -23147,7 +23147,7 @@
             <a:r>
               <a:rPr lang="en-US" sz="2400" dirty="0">
                 <a:solidFill>
-                  <a:schemeClr val="accent4"/>
+                  <a:schemeClr val="bg2"/>
                 </a:solidFill>
               </a:rPr>
               <a:t>Flags from the README table.</a:t>
@@ -23194,7 +23194,7 @@
                       <a:r>
                         <a:rPr lang="en-US" sz="2000" b="1" dirty="0">
                           <a:solidFill>
-                            <a:schemeClr val="accent2"/>
+                            <a:schemeClr val="accent1"/>
                           </a:solidFill>
                         </a:rPr>
                         <a:t>Flag</a:t>
@@ -23205,7 +23205,7 @@
                   <a:tcPr marL="91440" marR="91440" marT="45720" marB="45720" anchor="ctr">
                     <a:lnL w="12700" cap="flat" cmpd="sng" algn="ctr">
                       <a:solidFill>
-                        <a:srgbClr val="D9D5C8"/>
+                        <a:srgbClr val="4A1A5E"/>
                       </a:solidFill>
                       <a:prstDash val="solid"/>
                       <a:round/>
@@ -23214,7 +23214,7 @@
                     </a:lnL>
                     <a:lnR w="12700" cap="flat" cmpd="sng" algn="ctr">
                       <a:solidFill>
-                        <a:srgbClr val="D9D5C8"/>
+                        <a:srgbClr val="4A1A5E"/>
                       </a:solidFill>
                       <a:prstDash val="solid"/>
                       <a:round/>
@@ -23223,7 +23223,7 @@
                     </a:lnR>
                     <a:lnT w="12700" cap="flat" cmpd="sng" algn="ctr">
                       <a:solidFill>
-                        <a:srgbClr val="D9D5C8"/>
+                        <a:srgbClr val="4A1A5E"/>
                       </a:solidFill>
                       <a:prstDash val="solid"/>
                       <a:round/>
@@ -23232,7 +23232,7 @@
                     </a:lnT>
                     <a:lnB w="12700" cap="flat" cmpd="sng" algn="ctr">
                       <a:solidFill>
-                        <a:srgbClr val="D9D5C8"/>
+                        <a:srgbClr val="4A1A5E"/>
                       </a:solidFill>
                       <a:prstDash val="solid"/>
                       <a:round/>
@@ -23252,7 +23252,7 @@
                       <a:r>
                         <a:rPr lang="en-US" sz="2000" b="1" dirty="0">
                           <a:solidFill>
-                            <a:schemeClr val="accent2"/>
+                            <a:schemeClr val="accent1"/>
                           </a:solidFill>
                         </a:rPr>
                         <a:t>Meaning</a:t>
@@ -23263,7 +23263,7 @@
                   <a:tcPr marL="91440" marR="91440" marT="45720" marB="45720" anchor="ctr">
                     <a:lnL w="12700" cap="flat" cmpd="sng" algn="ctr">
                       <a:solidFill>
-                        <a:srgbClr val="D9D5C8"/>
+                        <a:srgbClr val="4A1A5E"/>
                       </a:solidFill>
                       <a:prstDash val="solid"/>
                       <a:round/>
@@ -23272,7 +23272,7 @@
                     </a:lnL>
                     <a:lnR w="12700" cap="flat" cmpd="sng" algn="ctr">
                       <a:solidFill>
-                        <a:srgbClr val="D9D5C8"/>
+                        <a:srgbClr val="4A1A5E"/>
                       </a:solidFill>
                       <a:prstDash val="solid"/>
                       <a:round/>
@@ -23281,7 +23281,7 @@
                     </a:lnR>
                     <a:lnT w="12700" cap="flat" cmpd="sng" algn="ctr">
                       <a:solidFill>
-                        <a:srgbClr val="D9D5C8"/>
+                        <a:srgbClr val="4A1A5E"/>
                       </a:solidFill>
                       <a:prstDash val="solid"/>
                       <a:round/>
@@ -23290,7 +23290,7 @@
                     </a:lnT>
                     <a:lnB w="12700" cap="flat" cmpd="sng" algn="ctr">
                       <a:solidFill>
-                        <a:srgbClr val="D9D5C8"/>
+                        <a:srgbClr val="4A1A5E"/>
                       </a:solidFill>
                       <a:prstDash val="solid"/>
                       <a:round/>
@@ -23312,7 +23312,7 @@
                       <a:r>
                         <a:rPr lang="en-US" sz="2000" dirty="0">
                           <a:solidFill>
-                            <a:schemeClr val="accent4"/>
+                            <a:schemeClr val="bg2"/>
                           </a:solidFill>
                         </a:rPr>
                         <a:t>-m MODEL, -P PROVIDER, -s SYSTEM</a:t>
@@ -23323,7 +23323,7 @@
                   <a:tcPr marL="91440" marR="91440" marT="45720" marB="45720" anchor="ctr">
                     <a:lnL w="12700" cap="flat" cmpd="sng" algn="ctr">
                       <a:solidFill>
-                        <a:srgbClr val="D9D5C8"/>
+                        <a:srgbClr val="4A1A5E"/>
                       </a:solidFill>
                       <a:prstDash val="solid"/>
                       <a:round/>
@@ -23332,7 +23332,7 @@
                     </a:lnL>
                     <a:lnR w="12700" cap="flat" cmpd="sng" algn="ctr">
                       <a:solidFill>
-                        <a:srgbClr val="D9D5C8"/>
+                        <a:srgbClr val="4A1A5E"/>
                       </a:solidFill>
                       <a:prstDash val="solid"/>
                       <a:round/>
@@ -23341,7 +23341,7 @@
                     </a:lnR>
                     <a:lnT w="12700" cap="flat" cmpd="sng" algn="ctr">
                       <a:solidFill>
-                        <a:srgbClr val="D9D5C8"/>
+                        <a:srgbClr val="4A1A5E"/>
                       </a:solidFill>
                       <a:prstDash val="solid"/>
                       <a:round/>
@@ -23350,7 +23350,7 @@
                     </a:lnT>
                     <a:lnB w="12700" cap="flat" cmpd="sng" algn="ctr">
                       <a:solidFill>
-                        <a:srgbClr val="D9D5C8"/>
+                        <a:srgbClr val="4A1A5E"/>
                       </a:solidFill>
                       <a:prstDash val="solid"/>
                       <a:round/>
@@ -23370,7 +23370,7 @@
                       <a:r>
                         <a:rPr lang="en-US" sz="2000" dirty="0">
                           <a:solidFill>
-                            <a:schemeClr val="accent4"/>
+                            <a:schemeClr val="bg2"/>
                           </a:solidFill>
                         </a:rPr>
                         <a:t>model, provider, system prompt</a:t>
@@ -23381,7 +23381,7 @@
                   <a:tcPr marL="91440" marR="91440" marT="45720" marB="45720" anchor="ctr">
                     <a:lnL w="12700" cap="flat" cmpd="sng" algn="ctr">
                       <a:solidFill>
-                        <a:srgbClr val="D9D5C8"/>
+                        <a:srgbClr val="4A1A5E"/>
                       </a:solidFill>
                       <a:prstDash val="solid"/>
                       <a:round/>
@@ -23390,7 +23390,7 @@
                     </a:lnL>
                     <a:lnR w="12700" cap="flat" cmpd="sng" algn="ctr">
                       <a:solidFill>
-                        <a:srgbClr val="D9D5C8"/>
+                        <a:srgbClr val="4A1A5E"/>
                       </a:solidFill>
                       <a:prstDash val="solid"/>
                       <a:round/>
@@ -23399,7 +23399,7 @@
                     </a:lnR>
                     <a:lnT w="12700" cap="flat" cmpd="sng" algn="ctr">
                       <a:solidFill>
-                        <a:srgbClr val="D9D5C8"/>
+                        <a:srgbClr val="4A1A5E"/>
                       </a:solidFill>
                       <a:prstDash val="solid"/>
                       <a:round/>
@@ -23408,7 +23408,7 @@
                     </a:lnT>
                     <a:lnB w="12700" cap="flat" cmpd="sng" algn="ctr">
                       <a:solidFill>
-                        <a:srgbClr val="D9D5C8"/>
+                        <a:srgbClr val="4A1A5E"/>
                       </a:solidFill>
                       <a:prstDash val="solid"/>
                       <a:round/>
@@ -23430,7 +23430,7 @@
                       <a:r>
                         <a:rPr lang="en-US" sz="2000" dirty="0">
                           <a:solidFill>
-                            <a:schemeClr val="accent4"/>
+                            <a:schemeClr val="bg2"/>
                           </a:solidFill>
                         </a:rPr>
                         <a:t>-v VAR, -a ARRAY</a:t>
@@ -23441,7 +23441,7 @@
                   <a:tcPr marL="91440" marR="91440" marT="45720" marB="45720" anchor="ctr">
                     <a:lnL w="12700" cap="flat" cmpd="sng" algn="ctr">
                       <a:solidFill>
-                        <a:srgbClr val="D9D5C8"/>
+                        <a:srgbClr val="4A1A5E"/>
                       </a:solidFill>
                       <a:prstDash val="solid"/>
                       <a:round/>
@@ -23450,7 +23450,7 @@
                     </a:lnL>
                     <a:lnR w="12700" cap="flat" cmpd="sng" algn="ctr">
                       <a:solidFill>
-                        <a:srgbClr val="D9D5C8"/>
+                        <a:srgbClr val="4A1A5E"/>
                       </a:solidFill>
                       <a:prstDash val="solid"/>
                       <a:round/>
@@ -23459,7 +23459,7 @@
                     </a:lnR>
                     <a:lnT w="12700" cap="flat" cmpd="sng" algn="ctr">
                       <a:solidFill>
-                        <a:srgbClr val="D9D5C8"/>
+                        <a:srgbClr val="4A1A5E"/>
                       </a:solidFill>
                       <a:prstDash val="solid"/>
                       <a:round/>
@@ -23468,7 +23468,7 @@
                     </a:lnT>
                     <a:lnB w="12700" cap="flat" cmpd="sng" algn="ctr">
                       <a:solidFill>
-                        <a:srgbClr val="D9D5C8"/>
+                        <a:srgbClr val="4A1A5E"/>
                       </a:solidFill>
                       <a:prstDash val="solid"/>
                       <a:round/>
@@ -23488,7 +23488,7 @@
                       <a:r>
                         <a:rPr lang="en-US" sz="2000" dirty="0">
                           <a:solidFill>
-                            <a:schemeClr val="accent4"/>
+                            <a:schemeClr val="bg2"/>
                           </a:solidFill>
                         </a:rPr>
                         <a:t>assign to a scalar or an array</a:t>
@@ -23499,7 +23499,7 @@
                   <a:tcPr marL="91440" marR="91440" marT="45720" marB="45720" anchor="ctr">
                     <a:lnL w="12700" cap="flat" cmpd="sng" algn="ctr">
                       <a:solidFill>
-                        <a:srgbClr val="D9D5C8"/>
+                        <a:srgbClr val="4A1A5E"/>
                       </a:solidFill>
                       <a:prstDash val="solid"/>
                       <a:round/>
@@ -23508,7 +23508,7 @@
                     </a:lnL>
                     <a:lnR w="12700" cap="flat" cmpd="sng" algn="ctr">
                       <a:solidFill>
-                        <a:srgbClr val="D9D5C8"/>
+                        <a:srgbClr val="4A1A5E"/>
                       </a:solidFill>
                       <a:prstDash val="solid"/>
                       <a:round/>
@@ -23517,7 +23517,7 @@
                     </a:lnR>
                     <a:lnT w="12700" cap="flat" cmpd="sng" algn="ctr">
                       <a:solidFill>
-                        <a:srgbClr val="D9D5C8"/>
+                        <a:srgbClr val="4A1A5E"/>
                       </a:solidFill>
                       <a:prstDash val="solid"/>
                       <a:round/>
@@ -23526,7 +23526,7 @@
                     </a:lnT>
                     <a:lnB w="12700" cap="flat" cmpd="sng" algn="ctr">
                       <a:solidFill>
-                        <a:srgbClr val="D9D5C8"/>
+                        <a:srgbClr val="4A1A5E"/>
                       </a:solidFill>
                       <a:prstDash val="solid"/>
                       <a:round/>
@@ -23548,7 +23548,7 @@
                       <a:r>
                         <a:rPr lang="en-US" sz="2000" dirty="0">
                           <a:solidFill>
-                            <a:schemeClr val="accent4"/>
+                            <a:schemeClr val="bg2"/>
                           </a:solidFill>
                         </a:rPr>
                         <a:t>-b</a:t>
@@ -23559,7 +23559,7 @@
                   <a:tcPr marL="91440" marR="91440" marT="45720" marB="45720" anchor="ctr">
                     <a:lnL w="12700" cap="flat" cmpd="sng" algn="ctr">
                       <a:solidFill>
-                        <a:srgbClr val="D9D5C8"/>
+                        <a:srgbClr val="4A1A5E"/>
                       </a:solidFill>
                       <a:prstDash val="solid"/>
                       <a:round/>
@@ -23568,7 +23568,7 @@
                     </a:lnL>
                     <a:lnR w="12700" cap="flat" cmpd="sng" algn="ctr">
                       <a:solidFill>
-                        <a:srgbClr val="D9D5C8"/>
+                        <a:srgbClr val="4A1A5E"/>
                       </a:solidFill>
                       <a:prstDash val="solid"/>
                       <a:round/>
@@ -23577,7 +23577,7 @@
                     </a:lnR>
                     <a:lnT w="12700" cap="flat" cmpd="sng" algn="ctr">
                       <a:solidFill>
-                        <a:srgbClr val="D9D5C8"/>
+                        <a:srgbClr val="4A1A5E"/>
                       </a:solidFill>
                       <a:prstDash val="solid"/>
                       <a:round/>
@@ -23586,7 +23586,7 @@
                     </a:lnT>
                     <a:lnB w="12700" cap="flat" cmpd="sng" algn="ctr">
                       <a:solidFill>
-                        <a:srgbClr val="D9D5C8"/>
+                        <a:srgbClr val="4A1A5E"/>
                       </a:solidFill>
                       <a:prstDash val="solid"/>
                       <a:round/>
@@ -23606,7 +23606,7 @@
                       <a:r>
                         <a:rPr lang="en-US" sz="2000" dirty="0">
                           <a:solidFill>
-                            <a:schemeClr val="accent4"/>
+                            <a:schemeClr val="bg2"/>
                           </a:solidFill>
                         </a:rPr>
                         <a:t>buffer instead of streaming</a:t>
@@ -23617,7 +23617,7 @@
                   <a:tcPr marL="91440" marR="91440" marT="45720" marB="45720" anchor="ctr">
                     <a:lnL w="12700" cap="flat" cmpd="sng" algn="ctr">
                       <a:solidFill>
-                        <a:srgbClr val="D9D5C8"/>
+                        <a:srgbClr val="4A1A5E"/>
                       </a:solidFill>
                       <a:prstDash val="solid"/>
                       <a:round/>
@@ -23626,7 +23626,7 @@
                     </a:lnL>
                     <a:lnR w="12700" cap="flat" cmpd="sng" algn="ctr">
                       <a:solidFill>
-                        <a:srgbClr val="D9D5C8"/>
+                        <a:srgbClr val="4A1A5E"/>
                       </a:solidFill>
                       <a:prstDash val="solid"/>
                       <a:round/>
@@ -23635,7 +23635,7 @@
                     </a:lnR>
                     <a:lnT w="12700" cap="flat" cmpd="sng" algn="ctr">
                       <a:solidFill>
-                        <a:srgbClr val="D9D5C8"/>
+                        <a:srgbClr val="4A1A5E"/>
                       </a:solidFill>
                       <a:prstDash val="solid"/>
                       <a:round/>
@@ -23644,7 +23644,7 @@
                     </a:lnT>
                     <a:lnB w="12700" cap="flat" cmpd="sng" algn="ctr">
                       <a:solidFill>
-                        <a:srgbClr val="D9D5C8"/>
+                        <a:srgbClr val="4A1A5E"/>
                       </a:solidFill>
                       <a:prstDash val="solid"/>
                       <a:round/>
@@ -23666,7 +23666,7 @@
                       <a:r>
                         <a:rPr lang="en-US" sz="2000" dirty="0">
                           <a:solidFill>
-                            <a:schemeClr val="accent4"/>
+                            <a:schemeClr val="bg2"/>
                           </a:solidFill>
                         </a:rPr>
                         <a:t>-n</a:t>
@@ -23677,7 +23677,7 @@
                   <a:tcPr marL="91440" marR="91440" marT="45720" marB="45720" anchor="ctr">
                     <a:lnL w="12700" cap="flat" cmpd="sng" algn="ctr">
                       <a:solidFill>
-                        <a:srgbClr val="D9D5C8"/>
+                        <a:srgbClr val="4A1A5E"/>
                       </a:solidFill>
                       <a:prstDash val="solid"/>
                       <a:round/>
@@ -23686,7 +23686,7 @@
                     </a:lnL>
                     <a:lnR w="12700" cap="flat" cmpd="sng" algn="ctr">
                       <a:solidFill>
-                        <a:srgbClr val="D9D5C8"/>
+                        <a:srgbClr val="4A1A5E"/>
                       </a:solidFill>
                       <a:prstDash val="solid"/>
                       <a:round/>
@@ -23695,7 +23695,7 @@
                     </a:lnR>
                     <a:lnT w="12700" cap="flat" cmpd="sng" algn="ctr">
                       <a:solidFill>
-                        <a:srgbClr val="D9D5C8"/>
+                        <a:srgbClr val="4A1A5E"/>
                       </a:solidFill>
                       <a:prstDash val="solid"/>
                       <a:round/>
@@ -23704,7 +23704,7 @@
                     </a:lnT>
                     <a:lnB w="12700" cap="flat" cmpd="sng" algn="ctr">
                       <a:solidFill>
-                        <a:srgbClr val="D9D5C8"/>
+                        <a:srgbClr val="4A1A5E"/>
                       </a:solidFill>
                       <a:prstDash val="solid"/>
                       <a:round/>
@@ -23724,7 +23724,7 @@
                       <a:r>
                         <a:rPr lang="en-US" sz="2000" dirty="0">
                           <a:solidFill>
-                            <a:schemeClr val="accent4"/>
+                            <a:schemeClr val="bg2"/>
                           </a:solidFill>
                         </a:rPr>
                         <a:t>bypass the response cache</a:t>
@@ -23735,7 +23735,7 @@
                   <a:tcPr marL="91440" marR="91440" marT="45720" marB="45720" anchor="ctr">
                     <a:lnL w="12700" cap="flat" cmpd="sng" algn="ctr">
                       <a:solidFill>
-                        <a:srgbClr val="D9D5C8"/>
+                        <a:srgbClr val="4A1A5E"/>
                       </a:solidFill>
                       <a:prstDash val="solid"/>
                       <a:round/>
@@ -23744,7 +23744,7 @@
                     </a:lnL>
                     <a:lnR w="12700" cap="flat" cmpd="sng" algn="ctr">
                       <a:solidFill>
-                        <a:srgbClr val="D9D5C8"/>
+                        <a:srgbClr val="4A1A5E"/>
                       </a:solidFill>
                       <a:prstDash val="solid"/>
                       <a:round/>
@@ -23753,7 +23753,7 @@
                     </a:lnR>
                     <a:lnT w="12700" cap="flat" cmpd="sng" algn="ctr">
                       <a:solidFill>
-                        <a:srgbClr val="D9D5C8"/>
+                        <a:srgbClr val="4A1A5E"/>
                       </a:solidFill>
                       <a:prstDash val="solid"/>
                       <a:round/>
@@ -23762,7 +23762,7 @@
                     </a:lnT>
                     <a:lnB w="12700" cap="flat" cmpd="sng" algn="ctr">
                       <a:solidFill>
-                        <a:srgbClr val="D9D5C8"/>
+                        <a:srgbClr val="4A1A5E"/>
                       </a:solidFill>
                       <a:prstDash val="solid"/>
                       <a:round/>
@@ -23784,7 +23784,7 @@
                       <a:r>
                         <a:rPr lang="en-US" sz="2000" dirty="0">
                           <a:solidFill>
-                            <a:schemeClr val="accent4"/>
+                            <a:schemeClr val="bg2"/>
                           </a:solidFill>
                         </a:rPr>
                         <a:t>-c, -H, -G, -K</a:t>
@@ -23795,7 +23795,7 @@
                   <a:tcPr marL="91440" marR="91440" marT="45720" marB="45720" anchor="ctr">
                     <a:lnL w="12700" cap="flat" cmpd="sng" algn="ctr">
                       <a:solidFill>
-                        <a:srgbClr val="D9D5C8"/>
+                        <a:srgbClr val="4A1A5E"/>
                       </a:solidFill>
                       <a:prstDash val="solid"/>
                       <a:round/>
@@ -23804,7 +23804,7 @@
                     </a:lnL>
                     <a:lnR w="12700" cap="flat" cmpd="sng" algn="ctr">
                       <a:solidFill>
-                        <a:srgbClr val="D9D5C8"/>
+                        <a:srgbClr val="4A1A5E"/>
                       </a:solidFill>
                       <a:prstDash val="solid"/>
                       <a:round/>
@@ -23813,7 +23813,7 @@
                     </a:lnR>
                     <a:lnT w="12700" cap="flat" cmpd="sng" algn="ctr">
                       <a:solidFill>
-                        <a:srgbClr val="D9D5C8"/>
+                        <a:srgbClr val="4A1A5E"/>
                       </a:solidFill>
                       <a:prstDash val="solid"/>
                       <a:round/>
@@ -23822,7 +23822,7 @@
                     </a:lnT>
                     <a:lnB w="12700" cap="flat" cmpd="sng" algn="ctr">
                       <a:solidFill>
-                        <a:srgbClr val="D9D5C8"/>
+                        <a:srgbClr val="4A1A5E"/>
                       </a:solidFill>
                       <a:prstDash val="solid"/>
                       <a:round/>
@@ -23842,7 +23842,7 @@
                       <a:r>
                         <a:rPr lang="en-US" sz="2000" dirty="0">
                           <a:solidFill>
-                            <a:schemeClr val="accent4"/>
+                            <a:schemeClr val="bg2"/>
                           </a:solidFill>
                         </a:rPr>
                         <a:t>cost report, history, config, clear cache</a:t>
@@ -23853,7 +23853,7 @@
                   <a:tcPr marL="91440" marR="91440" marT="45720" marB="45720" anchor="ctr">
                     <a:lnL w="12700" cap="flat" cmpd="sng" algn="ctr">
                       <a:solidFill>
-                        <a:srgbClr val="D9D5C8"/>
+                        <a:srgbClr val="4A1A5E"/>
                       </a:solidFill>
                       <a:prstDash val="solid"/>
                       <a:round/>
@@ -23862,7 +23862,7 @@
                     </a:lnL>
                     <a:lnR w="12700" cap="flat" cmpd="sng" algn="ctr">
                       <a:solidFill>
-                        <a:srgbClr val="D9D5C8"/>
+                        <a:srgbClr val="4A1A5E"/>
                       </a:solidFill>
                       <a:prstDash val="solid"/>
                       <a:round/>
@@ -23871,7 +23871,7 @@
                     </a:lnR>
                     <a:lnT w="12700" cap="flat" cmpd="sng" algn="ctr">
                       <a:solidFill>
-                        <a:srgbClr val="D9D5C8"/>
+                        <a:srgbClr val="4A1A5E"/>
                       </a:solidFill>
                       <a:prstDash val="solid"/>
                       <a:round/>
@@ -23880,7 +23880,7 @@
                     </a:lnT>
                     <a:lnB w="12700" cap="flat" cmpd="sng" algn="ctr">
                       <a:solidFill>
-                        <a:srgbClr val="D9D5C8"/>
+                        <a:srgbClr val="4A1A5E"/>
                       </a:solidFill>
                       <a:prstDash val="solid"/>
                       <a:round/>
@@ -23902,7 +23902,7 @@
                       <a:r>
                         <a:rPr lang="en-US" sz="2000" dirty="0">
                           <a:solidFill>
-                            <a:schemeClr val="accent4"/>
+                            <a:schemeClr val="bg2"/>
                           </a:solidFill>
                         </a:rPr>
                         <a:t>-M pattern=response</a:t>
@@ -23913,7 +23913,7 @@
                   <a:tcPr marL="91440" marR="91440" marT="45720" marB="45720" anchor="ctr">
                     <a:lnL w="12700" cap="flat" cmpd="sng" algn="ctr">
                       <a:solidFill>
-                        <a:srgbClr val="D9D5C8"/>
+                        <a:srgbClr val="4A1A5E"/>
                       </a:solidFill>
                       <a:prstDash val="solid"/>
                       <a:round/>
@@ -23922,7 +23922,7 @@
                     </a:lnL>
                     <a:lnR w="12700" cap="flat" cmpd="sng" algn="ctr">
                       <a:solidFill>
-                        <a:srgbClr val="D9D5C8"/>
+                        <a:srgbClr val="4A1A5E"/>
                       </a:solidFill>
                       <a:prstDash val="solid"/>
                       <a:round/>
@@ -23931,7 +23931,7 @@
                     </a:lnR>
                     <a:lnT w="12700" cap="flat" cmpd="sng" algn="ctr">
                       <a:solidFill>
-                        <a:srgbClr val="D9D5C8"/>
+                        <a:srgbClr val="4A1A5E"/>
                       </a:solidFill>
                       <a:prstDash val="solid"/>
                       <a:round/>
@@ -23940,7 +23940,7 @@
                     </a:lnT>
                     <a:lnB w="12700" cap="flat" cmpd="sng" algn="ctr">
                       <a:solidFill>
-                        <a:srgbClr val="D9D5C8"/>
+                        <a:srgbClr val="4A1A5E"/>
                       </a:solidFill>
                       <a:prstDash val="solid"/>
                       <a:round/>
@@ -23960,7 +23960,7 @@
                       <a:r>
                         <a:rPr lang="en-US" sz="2000" dirty="0">
                           <a:solidFill>
-                            <a:schemeClr val="accent4"/>
+                            <a:schemeClr val="bg2"/>
                           </a:solidFill>
                         </a:rPr>
                         <a:t>install a mock</a:t>
@@ -23971,7 +23971,7 @@
                   <a:tcPr marL="91440" marR="91440" marT="45720" marB="45720" anchor="ctr">
                     <a:lnL w="12700" cap="flat" cmpd="sng" algn="ctr">
                       <a:solidFill>
-                        <a:srgbClr val="D9D5C8"/>
+                        <a:srgbClr val="4A1A5E"/>
                       </a:solidFill>
                       <a:prstDash val="solid"/>
                       <a:round/>
@@ -23980,7 +23980,7 @@
                     </a:lnL>
                     <a:lnR w="12700" cap="flat" cmpd="sng" algn="ctr">
                       <a:solidFill>
-                        <a:srgbClr val="D9D5C8"/>
+                        <a:srgbClr val="4A1A5E"/>
                       </a:solidFill>
                       <a:prstDash val="solid"/>
                       <a:round/>
@@ -23989,7 +23989,7 @@
                     </a:lnR>
                     <a:lnT w="12700" cap="flat" cmpd="sng" algn="ctr">
                       <a:solidFill>
-                        <a:srgbClr val="D9D5C8"/>
+                        <a:srgbClr val="4A1A5E"/>
                       </a:solidFill>
                       <a:prstDash val="solid"/>
                       <a:round/>
@@ -23998,7 +23998,7 @@
                     </a:lnT>
                     <a:lnB w="12700" cap="flat" cmpd="sng" algn="ctr">
                       <a:solidFill>
-                        <a:srgbClr val="D9D5C8"/>
+                        <a:srgbClr val="4A1A5E"/>
                       </a:solidFill>
                       <a:prstDash val="solid"/>
                       <a:round/>
@@ -24042,7 +24042,7 @@
             <a:lvl1pPr>
               <a:defRPr sz="1200">
                 <a:solidFill>
-                  <a:schemeClr val="accent6"/>
+                  <a:schemeClr val="accent5"/>
                 </a:solidFill>
                 <a:latin typeface="Courier New"/>
                 <a:ea typeface="Courier New"/>
@@ -24219,7 +24219,7 @@
           </a:solidFill>
           <a:ln w="12700">
             <a:solidFill>
-              <a:srgbClr val="2C3844"/>
+              <a:srgbClr val="4A1A5E"/>
             </a:solidFill>
             <a:prstDash val="solid"/>
           </a:ln>
@@ -24592,7 +24592,7 @@
           </a:solidFill>
           <a:ln w="12700">
             <a:solidFill>
-              <a:srgbClr val="2C3844"/>
+              <a:srgbClr val="4A1A5E"/>
             </a:solidFill>
             <a:prstDash val="solid"/>
           </a:ln>
@@ -24822,7 +24822,7 @@
             <a:r>
               <a:rPr lang="en-US" sz="3600" b="1" dirty="0">
                 <a:solidFill>
-                  <a:schemeClr val="accent4"/>
+                  <a:schemeClr val="bg2"/>
                 </a:solidFill>
               </a:rPr>
               <a:t>Variables bound in advice</a:t>
@@ -24858,7 +24858,7 @@
             <a:r>
               <a:rPr lang="en-US" sz="1200" dirty="0">
                 <a:solidFill>
-                  <a:schemeClr val="accent6"/>
+                  <a:schemeClr val="accent5"/>
                 </a:solidFill>
                 <a:latin typeface="Courier New" pitchFamily="34" charset="0"/>
                 <a:ea typeface="Courier New" pitchFamily="34" charset="-122"/>
@@ -24897,7 +24897,7 @@
             <a:r>
               <a:rPr lang="en-US" sz="2400" dirty="0">
                 <a:solidFill>
-                  <a:schemeClr val="accent4"/>
+                  <a:schemeClr val="bg2"/>
                 </a:solidFill>
               </a:rPr>
               <a:t>These are bound while advice runs. $INTERCEPT_MS, $INTERCEPT_US and $INTERCEPT_STATUS exist only for after advice.</a:t>
@@ -24923,11 +24923,11 @@
             </a:avLst>
           </a:prstGeom>
           <a:solidFill>
-            <a:srgbClr val="FFFFFF"/>
+            <a:schemeClr val="tx2"/>
           </a:solidFill>
           <a:ln w="12700">
             <a:solidFill>
-              <a:srgbClr val="D9D5C8"/>
+              <a:srgbClr val="4A1A5E"/>
             </a:solidFill>
             <a:prstDash val="solid"/>
           </a:ln>
@@ -24960,7 +24960,7 @@
             <a:r>
               <a:rPr lang="en-US" sz="2600" b="1" dirty="0">
                 <a:solidFill>
-                  <a:schemeClr val="accent2"/>
+                  <a:schemeClr val="accent1"/>
                 </a:solidFill>
                 <a:latin typeface="Cambria" pitchFamily="34" charset="0"/>
                 <a:ea typeface="Cambria" pitchFamily="34" charset="-122"/>
@@ -25003,7 +25003,7 @@
             <a:r>
               <a:rPr lang="en-US" sz="2800" dirty="0">
                 <a:solidFill>
-                  <a:schemeClr val="accent4"/>
+                  <a:schemeClr val="bg2"/>
                 </a:solidFill>
               </a:rPr>
               <a:t>$INTERCEPT_NAME</a:t>
@@ -25021,7 +25021,7 @@
             <a:r>
               <a:rPr lang="en-US" sz="2800" dirty="0">
                 <a:solidFill>
-                  <a:schemeClr val="accent4"/>
+                  <a:schemeClr val="bg2"/>
                 </a:solidFill>
               </a:rPr>
               <a:t>$INTERCEPT_ARGS</a:t>
@@ -25039,7 +25039,7 @@
             <a:r>
               <a:rPr lang="en-US" sz="2800" dirty="0">
                 <a:solidFill>
-                  <a:schemeClr val="accent4"/>
+                  <a:schemeClr val="bg2"/>
                 </a:solidFill>
               </a:rPr>
               <a:t>$INTERCEPT_CMD</a:t>
@@ -25065,11 +25065,11 @@
             </a:avLst>
           </a:prstGeom>
           <a:solidFill>
-            <a:srgbClr val="FFFFFF"/>
+            <a:schemeClr val="tx2"/>
           </a:solidFill>
           <a:ln w="12700">
             <a:solidFill>
-              <a:srgbClr val="D9D5C8"/>
+              <a:srgbClr val="4A1A5E"/>
             </a:solidFill>
             <a:prstDash val="solid"/>
           </a:ln>
@@ -25102,7 +25102,7 @@
             <a:r>
               <a:rPr lang="en-US" sz="2600" b="1" dirty="0">
                 <a:solidFill>
-                  <a:schemeClr val="accent2"/>
+                  <a:schemeClr val="accent1"/>
                 </a:solidFill>
                 <a:latin typeface="Cambria" pitchFamily="34" charset="0"/>
                 <a:ea typeface="Cambria" pitchFamily="34" charset="-122"/>
@@ -25145,7 +25145,7 @@
             <a:r>
               <a:rPr lang="en-US" sz="2800" dirty="0">
                 <a:solidFill>
-                  <a:schemeClr val="accent4"/>
+                  <a:schemeClr val="bg2"/>
                 </a:solidFill>
               </a:rPr>
               <a:t>$INTERCEPT_MS</a:t>
@@ -25163,7 +25163,7 @@
             <a:r>
               <a:rPr lang="en-US" sz="2800" dirty="0">
                 <a:solidFill>
-                  <a:schemeClr val="accent4"/>
+                  <a:schemeClr val="bg2"/>
                 </a:solidFill>
               </a:rPr>
               <a:t>$INTERCEPT_US</a:t>
@@ -25181,7 +25181,7 @@
             <a:r>
               <a:rPr lang="en-US" sz="2800" dirty="0">
                 <a:solidFill>
-                  <a:schemeClr val="accent4"/>
+                  <a:schemeClr val="bg2"/>
                 </a:solidFill>
               </a:rPr>
               <a:t>$INTERCEPT_STATUS</a:t>
@@ -25220,7 +25220,7 @@
             <a:lvl1pPr>
               <a:defRPr sz="1200">
                 <a:solidFill>
-                  <a:schemeClr val="accent6"/>
+                  <a:schemeClr val="accent5"/>
                 </a:solidFill>
                 <a:latin typeface="Courier New"/>
                 <a:ea typeface="Courier New"/>
@@ -25397,7 +25397,7 @@
           </a:solidFill>
           <a:ln w="12700">
             <a:solidFill>
-              <a:srgbClr val="2C3844"/>
+              <a:srgbClr val="4A1A5E"/>
             </a:solidFill>
             <a:prstDash val="solid"/>
           </a:ln>
@@ -25667,7 +25667,7 @@
             <a:r>
               <a:rPr lang="en-US" sz="3600" b="1" dirty="0">
                 <a:solidFill>
-                  <a:schemeClr val="accent4"/>
+                  <a:schemeClr val="bg2"/>
                 </a:solidFill>
               </a:rPr>
               <a:t>doctor, profile, dbview</a:t>
@@ -25703,7 +25703,7 @@
             <a:r>
               <a:rPr lang="en-US" sz="1200" dirty="0">
                 <a:solidFill>
-                  <a:schemeClr val="accent6"/>
+                  <a:schemeClr val="accent5"/>
                 </a:solidFill>
                 <a:latin typeface="Courier New" pitchFamily="34" charset="0"/>
                 <a:ea typeface="Courier New" pitchFamily="34" charset="-122"/>
@@ -25742,7 +25742,7 @@
             <a:r>
               <a:rPr lang="en-US" sz="2400" dirty="0">
                 <a:solidFill>
-                  <a:schemeClr val="accent4"/>
+                  <a:schemeClr val="bg2"/>
                 </a:solidFill>
               </a:rPr>
               <a:t>Three diagnostics shipped as builtins.</a:t>
@@ -25768,11 +25768,11 @@
             </a:avLst>
           </a:prstGeom>
           <a:solidFill>
-            <a:srgbClr val="FFFFFF"/>
+            <a:schemeClr val="tx2"/>
           </a:solidFill>
           <a:ln w="12700">
             <a:solidFill>
-              <a:srgbClr val="D9D5C8"/>
+              <a:srgbClr val="4A1A5E"/>
             </a:solidFill>
             <a:prstDash val="solid"/>
           </a:ln>
@@ -25805,7 +25805,7 @@
             <a:r>
               <a:rPr lang="en-US" sz="2600" b="1" dirty="0">
                 <a:solidFill>
-                  <a:schemeClr val="accent2"/>
+                  <a:schemeClr val="accent1"/>
                 </a:solidFill>
                 <a:latin typeface="Cambria" pitchFamily="34" charset="0"/>
                 <a:ea typeface="Cambria" pitchFamily="34" charset="-122"/>
@@ -25844,7 +25844,7 @@
             <a:r>
               <a:rPr lang="en-US" sz="2800" dirty="0">
                 <a:solidFill>
-                  <a:schemeClr val="accent4"/>
+                  <a:schemeClr val="bg2"/>
                 </a:solidFill>
               </a:rPr>
               <a:t>Pool metrics, cache stats, bytecode coverage</a:t>
@@ -25870,11 +25870,11 @@
             </a:avLst>
           </a:prstGeom>
           <a:solidFill>
-            <a:srgbClr val="FFFFFF"/>
+            <a:schemeClr val="tx2"/>
           </a:solidFill>
           <a:ln w="12700">
             <a:solidFill>
-              <a:srgbClr val="D9D5C8"/>
+              <a:srgbClr val="4A1A5E"/>
             </a:solidFill>
             <a:prstDash val="solid"/>
           </a:ln>
@@ -25907,7 +25907,7 @@
             <a:r>
               <a:rPr lang="en-US" sz="2600" b="1" dirty="0">
                 <a:solidFill>
-                  <a:schemeClr val="accent2"/>
+                  <a:schemeClr val="accent1"/>
                 </a:solidFill>
                 <a:latin typeface="Cambria" pitchFamily="34" charset="0"/>
                 <a:ea typeface="Cambria" pitchFamily="34" charset="-122"/>
@@ -25946,7 +25946,7 @@
             <a:r>
               <a:rPr lang="en-US" sz="2800" dirty="0">
                 <a:solidFill>
-                  <a:schemeClr val="accent4"/>
+                  <a:schemeClr val="bg2"/>
                 </a:solidFill>
               </a:rPr>
               <a:t>In-process command profiling, nanosecond accuracy</a:t>
@@ -25972,11 +25972,11 @@
             </a:avLst>
           </a:prstGeom>
           <a:solidFill>
-            <a:srgbClr val="FFFFFF"/>
+            <a:schemeClr val="tx2"/>
           </a:solidFill>
           <a:ln w="12700">
             <a:solidFill>
-              <a:srgbClr val="D9D5C8"/>
+              <a:srgbClr val="4A1A5E"/>
             </a:solidFill>
             <a:prstDash val="solid"/>
           </a:ln>
@@ -26009,7 +26009,7 @@
             <a:r>
               <a:rPr lang="en-US" sz="2600" b="1" dirty="0">
                 <a:solidFill>
-                  <a:schemeClr val="accent2"/>
+                  <a:schemeClr val="accent1"/>
                 </a:solidFill>
                 <a:latin typeface="Cambria" pitchFamily="34" charset="0"/>
                 <a:ea typeface="Cambria" pitchFamily="34" charset="-122"/>
@@ -26048,7 +26048,7 @@
             <a:r>
               <a:rPr lang="en-US" sz="2800" dirty="0">
                 <a:solidFill>
-                  <a:schemeClr val="accent4"/>
+                  <a:schemeClr val="bg2"/>
                 </a:solidFill>
               </a:rPr>
               <a:t>Read-only browse of the SQLite mirrors</a:t>
@@ -26087,7 +26087,7 @@
             <a:lvl1pPr>
               <a:defRPr sz="1200">
                 <a:solidFill>
-                  <a:schemeClr val="accent6"/>
+                  <a:schemeClr val="accent5"/>
                 </a:solidFill>
                 <a:latin typeface="Courier New"/>
                 <a:ea typeface="Courier New"/>
@@ -26264,7 +26264,7 @@
           </a:solidFill>
           <a:ln w="12700">
             <a:solidFill>
-              <a:srgbClr val="2C3844"/>
+              <a:srgbClr val="4A1A5E"/>
             </a:solidFill>
             <a:prstDash val="solid"/>
           </a:ln>
@@ -26514,7 +26514,7 @@
             <a:r>
               <a:rPr lang="en-US" sz="3600" b="1" dirty="0">
                 <a:solidFill>
-                  <a:schemeClr val="accent4"/>
+                  <a:schemeClr val="bg2"/>
                 </a:solidFill>
               </a:rPr>
               <a:t>Formatter</a:t>
@@ -26550,7 +26550,7 @@
             <a:r>
               <a:rPr lang="en-US" sz="1200" dirty="0">
                 <a:solidFill>
-                  <a:schemeClr val="accent6"/>
+                  <a:schemeClr val="accent5"/>
                 </a:solidFill>
                 <a:latin typeface="Courier New" pitchFamily="34" charset="0"/>
                 <a:ea typeface="Courier New" pitchFamily="34" charset="-122"/>
@@ -26589,7 +26589,7 @@
             <a:r>
               <a:rPr lang="en-US" sz="2300" dirty="0">
                 <a:solidFill>
-                  <a:schemeClr val="accent4"/>
+                  <a:schemeClr val="bg2"/>
                 </a:solidFill>
               </a:rPr>
               <a:t>--fmt reindents blocks, applies idiomatic spacing, is heredoc-safe and idempotent. The same engine backs LSP formatting.</a:t>
@@ -26615,11 +26615,11 @@
             </a:avLst>
           </a:prstGeom>
           <a:solidFill>
-            <a:schemeClr val="accent4"/>
+            <a:schemeClr val="tx2"/>
           </a:solidFill>
           <a:ln w="12700">
             <a:solidFill>
-              <a:srgbClr val="2C3844"/>
+              <a:srgbClr val="4A1A5E"/>
             </a:solidFill>
             <a:prstDash val="solid"/>
           </a:ln>
@@ -26698,7 +26698,7 @@
             <a:r>
               <a:rPr lang="en-US" sz="3000" dirty="0">
                 <a:solidFill>
-                  <a:schemeClr val="accent4"/>
+                  <a:schemeClr val="bg2"/>
                 </a:solidFill>
               </a:rPr>
               <a:t>-w writes in place</a:t>
@@ -26716,7 +26716,7 @@
             <a:r>
               <a:rPr lang="en-US" sz="3000" dirty="0">
                 <a:solidFill>
-                  <a:schemeClr val="accent4"/>
+                  <a:schemeClr val="bg2"/>
                 </a:solidFill>
               </a:rPr>
               <a:t>stdin to stdout otherwise</a:t>
@@ -26755,7 +26755,7 @@
             <a:lvl1pPr>
               <a:defRPr sz="1200">
                 <a:solidFill>
-                  <a:schemeClr val="accent6"/>
+                  <a:schemeClr val="accent5"/>
                 </a:solidFill>
                 <a:latin typeface="Courier New"/>
                 <a:ea typeface="Courier New"/>
@@ -26932,7 +26932,7 @@
           </a:solidFill>
           <a:ln w="12700">
             <a:solidFill>
-              <a:srgbClr val="2C3844"/>
+              <a:srgbClr val="4A1A5E"/>
             </a:solidFill>
             <a:prstDash val="solid"/>
           </a:ln>
@@ -27198,7 +27198,7 @@
             <a:r>
               <a:rPr lang="en-US" sz="3600" b="1" dirty="0">
                 <a:solidFill>
-                  <a:schemeClr val="accent4"/>
+                  <a:schemeClr val="bg2"/>
                 </a:solidFill>
               </a:rPr>
               <a:t>Emulation modes</a:t>
@@ -27234,7 +27234,7 @@
             <a:r>
               <a:rPr lang="en-US" sz="1200" dirty="0">
                 <a:solidFill>
-                  <a:schemeClr val="accent6"/>
+                  <a:schemeClr val="accent5"/>
                 </a:solidFill>
                 <a:latin typeface="Courier New" pitchFamily="34" charset="0"/>
                 <a:ea typeface="Courier New" pitchFamily="34" charset="-122"/>
@@ -27273,7 +27273,7 @@
             <a:r>
               <a:rPr lang="en-US" sz="2300" dirty="0">
                 <a:solidFill>
-                  <a:schemeClr val="accent4"/>
+                  <a:schemeClr val="bg2"/>
                 </a:solidFill>
               </a:rPr>
               <a:t>Eight Bourne-family dialects run through one bytecode core, each verified against its real reference shell. --csh is separate.</a:t>
@@ -27321,7 +27321,7 @@
                       <a:r>
                         <a:rPr lang="en-US" sz="2500" b="1" dirty="0">
                           <a:solidFill>
-                            <a:schemeClr val="accent2"/>
+                            <a:schemeClr val="accent1"/>
                           </a:solidFill>
                         </a:rPr>
                         <a:t>Flag</a:t>
@@ -27332,7 +27332,7 @@
                   <a:tcPr marL="91440" marR="91440" marT="45720" marB="45720" anchor="ctr">
                     <a:lnL w="12700" cap="flat" cmpd="sng" algn="ctr">
                       <a:solidFill>
-                        <a:srgbClr val="D9D5C8"/>
+                        <a:srgbClr val="4A1A5E"/>
                       </a:solidFill>
                       <a:prstDash val="solid"/>
                       <a:round/>
@@ -27341,7 +27341,7 @@
                     </a:lnL>
                     <a:lnR w="12700" cap="flat" cmpd="sng" algn="ctr">
                       <a:solidFill>
-                        <a:srgbClr val="D9D5C8"/>
+                        <a:srgbClr val="4A1A5E"/>
                       </a:solidFill>
                       <a:prstDash val="solid"/>
                       <a:round/>
@@ -27350,7 +27350,7 @@
                     </a:lnR>
                     <a:lnT w="12700" cap="flat" cmpd="sng" algn="ctr">
                       <a:solidFill>
-                        <a:srgbClr val="D9D5C8"/>
+                        <a:srgbClr val="4A1A5E"/>
                       </a:solidFill>
                       <a:prstDash val="solid"/>
                       <a:round/>
@@ -27359,7 +27359,7 @@
                     </a:lnT>
                     <a:lnB w="12700" cap="flat" cmpd="sng" algn="ctr">
                       <a:solidFill>
-                        <a:srgbClr val="D9D5C8"/>
+                        <a:srgbClr val="4A1A5E"/>
                       </a:solidFill>
                       <a:prstDash val="solid"/>
                       <a:round/>
@@ -27379,7 +27379,7 @@
                       <a:r>
                         <a:rPr lang="en-US" sz="2500" b="1" dirty="0">
                           <a:solidFill>
-                            <a:schemeClr val="accent2"/>
+                            <a:schemeClr val="accent1"/>
                           </a:solidFill>
                         </a:rPr>
                         <a:t>Behaves as</a:t>
@@ -27390,7 +27390,7 @@
                   <a:tcPr marL="91440" marR="91440" marT="45720" marB="45720" anchor="ctr">
                     <a:lnL w="12700" cap="flat" cmpd="sng" algn="ctr">
                       <a:solidFill>
-                        <a:srgbClr val="D9D5C8"/>
+                        <a:srgbClr val="4A1A5E"/>
                       </a:solidFill>
                       <a:prstDash val="solid"/>
                       <a:round/>
@@ -27399,7 +27399,7 @@
                     </a:lnL>
                     <a:lnR w="12700" cap="flat" cmpd="sng" algn="ctr">
                       <a:solidFill>
-                        <a:srgbClr val="D9D5C8"/>
+                        <a:srgbClr val="4A1A5E"/>
                       </a:solidFill>
                       <a:prstDash val="solid"/>
                       <a:round/>
@@ -27408,7 +27408,7 @@
                     </a:lnR>
                     <a:lnT w="12700" cap="flat" cmpd="sng" algn="ctr">
                       <a:solidFill>
-                        <a:srgbClr val="D9D5C8"/>
+                        <a:srgbClr val="4A1A5E"/>
                       </a:solidFill>
                       <a:prstDash val="solid"/>
                       <a:round/>
@@ -27417,7 +27417,7 @@
                     </a:lnT>
                     <a:lnB w="12700" cap="flat" cmpd="sng" algn="ctr">
                       <a:solidFill>
-                        <a:srgbClr val="D9D5C8"/>
+                        <a:srgbClr val="4A1A5E"/>
                       </a:solidFill>
                       <a:prstDash val="solid"/>
                       <a:round/>
@@ -27437,7 +27437,7 @@
                       <a:r>
                         <a:rPr lang="en-US" sz="2500" b="1" dirty="0">
                           <a:solidFill>
-                            <a:schemeClr val="accent2"/>
+                            <a:schemeClr val="accent1"/>
                           </a:solidFill>
                         </a:rPr>
                         <a:t>Verified against</a:t>
@@ -27448,7 +27448,7 @@
                   <a:tcPr marL="91440" marR="91440" marT="45720" marB="45720" anchor="ctr">
                     <a:lnL w="12700" cap="flat" cmpd="sng" algn="ctr">
                       <a:solidFill>
-                        <a:srgbClr val="D9D5C8"/>
+                        <a:srgbClr val="4A1A5E"/>
                       </a:solidFill>
                       <a:prstDash val="solid"/>
                       <a:round/>
@@ -27457,7 +27457,7 @@
                     </a:lnL>
                     <a:lnR w="12700" cap="flat" cmpd="sng" algn="ctr">
                       <a:solidFill>
-                        <a:srgbClr val="D9D5C8"/>
+                        <a:srgbClr val="4A1A5E"/>
                       </a:solidFill>
                       <a:prstDash val="solid"/>
                       <a:round/>
@@ -27466,7 +27466,7 @@
                     </a:lnR>
                     <a:lnT w="12700" cap="flat" cmpd="sng" algn="ctr">
                       <a:solidFill>
-                        <a:srgbClr val="D9D5C8"/>
+                        <a:srgbClr val="4A1A5E"/>
                       </a:solidFill>
                       <a:prstDash val="solid"/>
                       <a:round/>
@@ -27475,7 +27475,7 @@
                     </a:lnT>
                     <a:lnB w="12700" cap="flat" cmpd="sng" algn="ctr">
                       <a:solidFill>
-                        <a:srgbClr val="D9D5C8"/>
+                        <a:srgbClr val="4A1A5E"/>
                       </a:solidFill>
                       <a:prstDash val="solid"/>
                       <a:round/>
@@ -27497,7 +27497,7 @@
                       <a:r>
                         <a:rPr lang="en-US" sz="2500" dirty="0">
                           <a:solidFill>
-                            <a:schemeClr val="accent4"/>
+                            <a:schemeClr val="bg2"/>
                           </a:solidFill>
                         </a:rPr>
                         <a:t>--zsh</a:t>
@@ -27508,7 +27508,7 @@
                   <a:tcPr marL="91440" marR="91440" marT="45720" marB="45720" anchor="ctr">
                     <a:lnL w="12700" cap="flat" cmpd="sng" algn="ctr">
                       <a:solidFill>
-                        <a:srgbClr val="D9D5C8"/>
+                        <a:srgbClr val="4A1A5E"/>
                       </a:solidFill>
                       <a:prstDash val="solid"/>
                       <a:round/>
@@ -27517,7 +27517,7 @@
                     </a:lnL>
                     <a:lnR w="12700" cap="flat" cmpd="sng" algn="ctr">
                       <a:solidFill>
-                        <a:srgbClr val="D9D5C8"/>
+                        <a:srgbClr val="4A1A5E"/>
                       </a:solidFill>
                       <a:prstDash val="solid"/>
                       <a:round/>
@@ -27526,7 +27526,7 @@
                     </a:lnR>
                     <a:lnT w="12700" cap="flat" cmpd="sng" algn="ctr">
                       <a:solidFill>
-                        <a:srgbClr val="D9D5C8"/>
+                        <a:srgbClr val="4A1A5E"/>
                       </a:solidFill>
                       <a:prstDash val="solid"/>
                       <a:round/>
@@ -27535,7 +27535,7 @@
                     </a:lnT>
                     <a:lnB w="12700" cap="flat" cmpd="sng" algn="ctr">
                       <a:solidFill>
-                        <a:srgbClr val="D9D5C8"/>
+                        <a:srgbClr val="4A1A5E"/>
                       </a:solidFill>
                       <a:prstDash val="solid"/>
                       <a:round/>
@@ -27555,7 +27555,7 @@
                       <a:r>
                         <a:rPr lang="en-US" sz="2500" dirty="0">
                           <a:solidFill>
-                            <a:schemeClr val="accent4"/>
+                            <a:schemeClr val="bg2"/>
                           </a:solidFill>
                         </a:rPr>
                         <a:t>zsh</a:t>
@@ -27566,7 +27566,7 @@
                   <a:tcPr marL="91440" marR="91440" marT="45720" marB="45720" anchor="ctr">
                     <a:lnL w="12700" cap="flat" cmpd="sng" algn="ctr">
                       <a:solidFill>
-                        <a:srgbClr val="D9D5C8"/>
+                        <a:srgbClr val="4A1A5E"/>
                       </a:solidFill>
                       <a:prstDash val="solid"/>
                       <a:round/>
@@ -27575,7 +27575,7 @@
                     </a:lnL>
                     <a:lnR w="12700" cap="flat" cmpd="sng" algn="ctr">
                       <a:solidFill>
-                        <a:srgbClr val="D9D5C8"/>
+                        <a:srgbClr val="4A1A5E"/>
                       </a:solidFill>
                       <a:prstDash val="solid"/>
                       <a:round/>
@@ -27584,7 +27584,7 @@
                     </a:lnR>
                     <a:lnT w="12700" cap="flat" cmpd="sng" algn="ctr">
                       <a:solidFill>
-                        <a:srgbClr val="D9D5C8"/>
+                        <a:srgbClr val="4A1A5E"/>
                       </a:solidFill>
                       <a:prstDash val="solid"/>
                       <a:round/>
@@ -27593,7 +27593,7 @@
                     </a:lnT>
                     <a:lnB w="12700" cap="flat" cmpd="sng" algn="ctr">
                       <a:solidFill>
-                        <a:srgbClr val="D9D5C8"/>
+                        <a:srgbClr val="4A1A5E"/>
                       </a:solidFill>
                       <a:prstDash val="solid"/>
                       <a:round/>
@@ -27613,7 +27613,7 @@
                       <a:r>
                         <a:rPr lang="en-US" sz="2500" dirty="0">
                           <a:solidFill>
-                            <a:schemeClr val="accent4"/>
+                            <a:schemeClr val="bg2"/>
                           </a:solidFill>
                         </a:rPr>
                         <a:t>zsh 5.9</a:t>
@@ -27624,7 +27624,7 @@
                   <a:tcPr marL="91440" marR="91440" marT="45720" marB="45720" anchor="ctr">
                     <a:lnL w="12700" cap="flat" cmpd="sng" algn="ctr">
                       <a:solidFill>
-                        <a:srgbClr val="D9D5C8"/>
+                        <a:srgbClr val="4A1A5E"/>
                       </a:solidFill>
                       <a:prstDash val="solid"/>
                       <a:round/>
@@ -27633,7 +27633,7 @@
                     </a:lnL>
                     <a:lnR w="12700" cap="flat" cmpd="sng" algn="ctr">
                       <a:solidFill>
-                        <a:srgbClr val="D9D5C8"/>
+                        <a:srgbClr val="4A1A5E"/>
                       </a:solidFill>
                       <a:prstDash val="solid"/>
                       <a:round/>
@@ -27642,7 +27642,7 @@
                     </a:lnR>
                     <a:lnT w="12700" cap="flat" cmpd="sng" algn="ctr">
                       <a:solidFill>
-                        <a:srgbClr val="D9D5C8"/>
+                        <a:srgbClr val="4A1A5E"/>
                       </a:solidFill>
                       <a:prstDash val="solid"/>
                       <a:round/>
@@ -27651,7 +27651,7 @@
                     </a:lnT>
                     <a:lnB w="12700" cap="flat" cmpd="sng" algn="ctr">
                       <a:solidFill>
-                        <a:srgbClr val="D9D5C8"/>
+                        <a:srgbClr val="4A1A5E"/>
                       </a:solidFill>
                       <a:prstDash val="solid"/>
                       <a:round/>
@@ -27673,7 +27673,7 @@
                       <a:r>
                         <a:rPr lang="en-US" sz="2500" dirty="0">
                           <a:solidFill>
-                            <a:schemeClr val="accent4"/>
+                            <a:schemeClr val="bg2"/>
                           </a:solidFill>
                         </a:rPr>
                         <a:t>--bash</a:t>
@@ -27684,7 +27684,7 @@
                   <a:tcPr marL="91440" marR="91440" marT="45720" marB="45720" anchor="ctr">
                     <a:lnL w="12700" cap="flat" cmpd="sng" algn="ctr">
                       <a:solidFill>
-                        <a:srgbClr val="D9D5C8"/>
+                        <a:srgbClr val="4A1A5E"/>
                       </a:solidFill>
                       <a:prstDash val="solid"/>
                       <a:round/>
@@ -27693,7 +27693,7 @@
                     </a:lnL>
                     <a:lnR w="12700" cap="flat" cmpd="sng" algn="ctr">
                       <a:solidFill>
-                        <a:srgbClr val="D9D5C8"/>
+                        <a:srgbClr val="4A1A5E"/>
                       </a:solidFill>
                       <a:prstDash val="solid"/>
                       <a:round/>
@@ -27702,7 +27702,7 @@
                     </a:lnR>
                     <a:lnT w="12700" cap="flat" cmpd="sng" algn="ctr">
                       <a:solidFill>
-                        <a:srgbClr val="D9D5C8"/>
+                        <a:srgbClr val="4A1A5E"/>
                       </a:solidFill>
                       <a:prstDash val="solid"/>
                       <a:round/>
@@ -27711,7 +27711,7 @@
                     </a:lnT>
                     <a:lnB w="12700" cap="flat" cmpd="sng" algn="ctr">
                       <a:solidFill>
-                        <a:srgbClr val="D9D5C8"/>
+                        <a:srgbClr val="4A1A5E"/>
                       </a:solidFill>
                       <a:prstDash val="solid"/>
                       <a:round/>
@@ -27731,7 +27731,7 @@
                       <a:r>
                         <a:rPr lang="en-US" sz="2500" dirty="0">
                           <a:solidFill>
-                            <a:schemeClr val="accent4"/>
+                            <a:schemeClr val="bg2"/>
                           </a:solidFill>
                         </a:rPr>
                         <a:t>bash</a:t>
@@ -27742,7 +27742,7 @@
                   <a:tcPr marL="91440" marR="91440" marT="45720" marB="45720" anchor="ctr">
                     <a:lnL w="12700" cap="flat" cmpd="sng" algn="ctr">
                       <a:solidFill>
-                        <a:srgbClr val="D9D5C8"/>
+                        <a:srgbClr val="4A1A5E"/>
                       </a:solidFill>
                       <a:prstDash val="solid"/>
                       <a:round/>
@@ -27751,7 +27751,7 @@
                     </a:lnL>
                     <a:lnR w="12700" cap="flat" cmpd="sng" algn="ctr">
                       <a:solidFill>
-                        <a:srgbClr val="D9D5C8"/>
+                        <a:srgbClr val="4A1A5E"/>
                       </a:solidFill>
                       <a:prstDash val="solid"/>
                       <a:round/>
@@ -27760,7 +27760,7 @@
                     </a:lnR>
                     <a:lnT w="12700" cap="flat" cmpd="sng" algn="ctr">
                       <a:solidFill>
-                        <a:srgbClr val="D9D5C8"/>
+                        <a:srgbClr val="4A1A5E"/>
                       </a:solidFill>
                       <a:prstDash val="solid"/>
                       <a:round/>
@@ -27769,7 +27769,7 @@
                     </a:lnT>
                     <a:lnB w="12700" cap="flat" cmpd="sng" algn="ctr">
                       <a:solidFill>
-                        <a:srgbClr val="D9D5C8"/>
+                        <a:srgbClr val="4A1A5E"/>
                       </a:solidFill>
                       <a:prstDash val="solid"/>
                       <a:round/>
@@ -27789,7 +27789,7 @@
                       <a:r>
                         <a:rPr lang="en-US" sz="2500" dirty="0">
                           <a:solidFill>
-                            <a:schemeClr val="accent4"/>
+                            <a:schemeClr val="bg2"/>
                           </a:solidFill>
                         </a:rPr>
                         <a:t>GNU bash 5.3.15</a:t>
@@ -27800,7 +27800,7 @@
                   <a:tcPr marL="91440" marR="91440" marT="45720" marB="45720" anchor="ctr">
                     <a:lnL w="12700" cap="flat" cmpd="sng" algn="ctr">
                       <a:solidFill>
-                        <a:srgbClr val="D9D5C8"/>
+                        <a:srgbClr val="4A1A5E"/>
                       </a:solidFill>
                       <a:prstDash val="solid"/>
                       <a:round/>
@@ -27809,7 +27809,7 @@
                     </a:lnL>
                     <a:lnR w="12700" cap="flat" cmpd="sng" algn="ctr">
                       <a:solidFill>
-                        <a:srgbClr val="D9D5C8"/>
+                        <a:srgbClr val="4A1A5E"/>
                       </a:solidFill>
                       <a:prstDash val="solid"/>
                       <a:round/>
@@ -27818,7 +27818,7 @@
                     </a:lnR>
                     <a:lnT w="12700" cap="flat" cmpd="sng" algn="ctr">
                       <a:solidFill>
-                        <a:srgbClr val="D9D5C8"/>
+                        <a:srgbClr val="4A1A5E"/>
                       </a:solidFill>
                       <a:prstDash val="solid"/>
                       <a:round/>
@@ -27827,7 +27827,7 @@
                     </a:lnT>
                     <a:lnB w="12700" cap="flat" cmpd="sng" algn="ctr">
                       <a:solidFill>
-                        <a:srgbClr val="D9D5C8"/>
+                        <a:srgbClr val="4A1A5E"/>
                       </a:solidFill>
                       <a:prstDash val="solid"/>
                       <a:round/>
@@ -27849,7 +27849,7 @@
                       <a:r>
                         <a:rPr lang="en-US" sz="2500" dirty="0">
                           <a:solidFill>
-                            <a:schemeClr val="accent4"/>
+                            <a:schemeClr val="bg2"/>
                           </a:solidFill>
                         </a:rPr>
                         <a:t>--ksh, --mksh</a:t>
@@ -27860,7 +27860,7 @@
                   <a:tcPr marL="91440" marR="91440" marT="45720" marB="45720" anchor="ctr">
                     <a:lnL w="12700" cap="flat" cmpd="sng" algn="ctr">
                       <a:solidFill>
-                        <a:srgbClr val="D9D5C8"/>
+                        <a:srgbClr val="4A1A5E"/>
                       </a:solidFill>
                       <a:prstDash val="solid"/>
                       <a:round/>
@@ -27869,7 +27869,7 @@
                     </a:lnL>
                     <a:lnR w="12700" cap="flat" cmpd="sng" algn="ctr">
                       <a:solidFill>
-                        <a:srgbClr val="D9D5C8"/>
+                        <a:srgbClr val="4A1A5E"/>
                       </a:solidFill>
                       <a:prstDash val="solid"/>
                       <a:round/>
@@ -27878,7 +27878,7 @@
                     </a:lnR>
                     <a:lnT w="12700" cap="flat" cmpd="sng" algn="ctr">
                       <a:solidFill>
-                        <a:srgbClr val="D9D5C8"/>
+                        <a:srgbClr val="4A1A5E"/>
                       </a:solidFill>
                       <a:prstDash val="solid"/>
                       <a:round/>
@@ -27887,7 +27887,7 @@
                     </a:lnT>
                     <a:lnB w="12700" cap="flat" cmpd="sng" algn="ctr">
                       <a:solidFill>
-                        <a:srgbClr val="D9D5C8"/>
+                        <a:srgbClr val="4A1A5E"/>
                       </a:solidFill>
                       <a:prstDash val="solid"/>
                       <a:round/>
@@ -27907,7 +27907,7 @@
                       <a:r>
                         <a:rPr lang="en-US" sz="2500" dirty="0">
                           <a:solidFill>
-                            <a:schemeClr val="accent4"/>
+                            <a:schemeClr val="bg2"/>
                           </a:solidFill>
                         </a:rPr>
                         <a:t>ksh family</a:t>
@@ -27918,7 +27918,7 @@
                   <a:tcPr marL="91440" marR="91440" marT="45720" marB="45720" anchor="ctr">
                     <a:lnL w="12700" cap="flat" cmpd="sng" algn="ctr">
                       <a:solidFill>
-                        <a:srgbClr val="D9D5C8"/>
+                        <a:srgbClr val="4A1A5E"/>
                       </a:solidFill>
                       <a:prstDash val="solid"/>
                       <a:round/>
@@ -27927,7 +27927,7 @@
                     </a:lnL>
                     <a:lnR w="12700" cap="flat" cmpd="sng" algn="ctr">
                       <a:solidFill>
-                        <a:srgbClr val="D9D5C8"/>
+                        <a:srgbClr val="4A1A5E"/>
                       </a:solidFill>
                       <a:prstDash val="solid"/>
                       <a:round/>
@@ -27936,7 +27936,7 @@
                     </a:lnR>
                     <a:lnT w="12700" cap="flat" cmpd="sng" algn="ctr">
                       <a:solidFill>
-                        <a:srgbClr val="D9D5C8"/>
+                        <a:srgbClr val="4A1A5E"/>
                       </a:solidFill>
                       <a:prstDash val="solid"/>
                       <a:round/>
@@ -27945,7 +27945,7 @@
                     </a:lnT>
                     <a:lnB w="12700" cap="flat" cmpd="sng" algn="ctr">
                       <a:solidFill>
-                        <a:srgbClr val="D9D5C8"/>
+                        <a:srgbClr val="4A1A5E"/>
                       </a:solidFill>
                       <a:prstDash val="solid"/>
                       <a:round/>
@@ -27965,7 +27965,7 @@
                       <a:r>
                         <a:rPr lang="en-US" sz="2500" dirty="0">
                           <a:solidFill>
-                            <a:schemeClr val="accent4"/>
+                            <a:schemeClr val="bg2"/>
                           </a:solidFill>
                         </a:rPr>
                         <a:t>ksh93, mksh</a:t>
@@ -27976,7 +27976,7 @@
                   <a:tcPr marL="91440" marR="91440" marT="45720" marB="45720" anchor="ctr">
                     <a:lnL w="12700" cap="flat" cmpd="sng" algn="ctr">
                       <a:solidFill>
-                        <a:srgbClr val="D9D5C8"/>
+                        <a:srgbClr val="4A1A5E"/>
                       </a:solidFill>
                       <a:prstDash val="solid"/>
                       <a:round/>
@@ -27985,7 +27985,7 @@
                     </a:lnL>
                     <a:lnR w="12700" cap="flat" cmpd="sng" algn="ctr">
                       <a:solidFill>
-                        <a:srgbClr val="D9D5C8"/>
+                        <a:srgbClr val="4A1A5E"/>
                       </a:solidFill>
                       <a:prstDash val="solid"/>
                       <a:round/>
@@ -27994,7 +27994,7 @@
                     </a:lnR>
                     <a:lnT w="12700" cap="flat" cmpd="sng" algn="ctr">
                       <a:solidFill>
-                        <a:srgbClr val="D9D5C8"/>
+                        <a:srgbClr val="4A1A5E"/>
                       </a:solidFill>
                       <a:prstDash val="solid"/>
                       <a:round/>
@@ -28003,7 +28003,7 @@
                     </a:lnT>
                     <a:lnB w="12700" cap="flat" cmpd="sng" algn="ctr">
                       <a:solidFill>
-                        <a:srgbClr val="D9D5C8"/>
+                        <a:srgbClr val="4A1A5E"/>
                       </a:solidFill>
                       <a:prstDash val="solid"/>
                       <a:round/>
@@ -28025,7 +28025,7 @@
                       <a:r>
                         <a:rPr lang="en-US" sz="2500" dirty="0">
                           <a:solidFill>
-                            <a:schemeClr val="accent4"/>
+                            <a:schemeClr val="bg2"/>
                           </a:solidFill>
                         </a:rPr>
                         <a:t>--sh, --posix</a:t>
@@ -28036,7 +28036,7 @@
                   <a:tcPr marL="91440" marR="91440" marT="45720" marB="45720" anchor="ctr">
                     <a:lnL w="12700" cap="flat" cmpd="sng" algn="ctr">
                       <a:solidFill>
-                        <a:srgbClr val="D9D5C8"/>
+                        <a:srgbClr val="4A1A5E"/>
                       </a:solidFill>
                       <a:prstDash val="solid"/>
                       <a:round/>
@@ -28045,7 +28045,7 @@
                     </a:lnL>
                     <a:lnR w="12700" cap="flat" cmpd="sng" algn="ctr">
                       <a:solidFill>
-                        <a:srgbClr val="D9D5C8"/>
+                        <a:srgbClr val="4A1A5E"/>
                       </a:solidFill>
                       <a:prstDash val="solid"/>
                       <a:round/>
@@ -28054,7 +28054,7 @@
                     </a:lnR>
                     <a:lnT w="12700" cap="flat" cmpd="sng" algn="ctr">
                       <a:solidFill>
-                        <a:srgbClr val="D9D5C8"/>
+                        <a:srgbClr val="4A1A5E"/>
                       </a:solidFill>
                       <a:prstDash val="solid"/>
                       <a:round/>
@@ -28063,7 +28063,7 @@
                     </a:lnT>
                     <a:lnB w="12700" cap="flat" cmpd="sng" algn="ctr">
                       <a:solidFill>
-                        <a:srgbClr val="D9D5C8"/>
+                        <a:srgbClr val="4A1A5E"/>
                       </a:solidFill>
                       <a:prstDash val="solid"/>
                       <a:round/>
@@ -28083,7 +28083,7 @@
                       <a:r>
                         <a:rPr lang="en-US" sz="2500" dirty="0">
                           <a:solidFill>
-                            <a:schemeClr val="accent4"/>
+                            <a:schemeClr val="bg2"/>
                           </a:solidFill>
                         </a:rPr>
                         <a:t>/bin/sh</a:t>
@@ -28094,7 +28094,7 @@
                   <a:tcPr marL="91440" marR="91440" marT="45720" marB="45720" anchor="ctr">
                     <a:lnL w="12700" cap="flat" cmpd="sng" algn="ctr">
                       <a:solidFill>
-                        <a:srgbClr val="D9D5C8"/>
+                        <a:srgbClr val="4A1A5E"/>
                       </a:solidFill>
                       <a:prstDash val="solid"/>
                       <a:round/>
@@ -28103,7 +28103,7 @@
                     </a:lnL>
                     <a:lnR w="12700" cap="flat" cmpd="sng" algn="ctr">
                       <a:solidFill>
-                        <a:srgbClr val="D9D5C8"/>
+                        <a:srgbClr val="4A1A5E"/>
                       </a:solidFill>
                       <a:prstDash val="solid"/>
                       <a:round/>
@@ -28112,7 +28112,7 @@
                     </a:lnR>
                     <a:lnT w="12700" cap="flat" cmpd="sng" algn="ctr">
                       <a:solidFill>
-                        <a:srgbClr val="D9D5C8"/>
+                        <a:srgbClr val="4A1A5E"/>
                       </a:solidFill>
                       <a:prstDash val="solid"/>
                       <a:round/>
@@ -28121,7 +28121,7 @@
                     </a:lnT>
                     <a:lnB w="12700" cap="flat" cmpd="sng" algn="ctr">
                       <a:solidFill>
-                        <a:srgbClr val="D9D5C8"/>
+                        <a:srgbClr val="4A1A5E"/>
                       </a:solidFill>
                       <a:prstDash val="solid"/>
                       <a:round/>
@@ -28141,7 +28141,7 @@
                       <a:r>
                         <a:rPr lang="en-US" sz="2500" dirty="0">
                           <a:solidFill>
-                            <a:schemeClr val="accent4"/>
+                            <a:schemeClr val="bg2"/>
                           </a:solidFill>
                         </a:rPr>
                         <a:t>/bin/sh</a:t>
@@ -28152,7 +28152,7 @@
                   <a:tcPr marL="91440" marR="91440" marT="45720" marB="45720" anchor="ctr">
                     <a:lnL w="12700" cap="flat" cmpd="sng" algn="ctr">
                       <a:solidFill>
-                        <a:srgbClr val="D9D5C8"/>
+                        <a:srgbClr val="4A1A5E"/>
                       </a:solidFill>
                       <a:prstDash val="solid"/>
                       <a:round/>
@@ -28161,7 +28161,7 @@
                     </a:lnL>
                     <a:lnR w="12700" cap="flat" cmpd="sng" algn="ctr">
                       <a:solidFill>
-                        <a:srgbClr val="D9D5C8"/>
+                        <a:srgbClr val="4A1A5E"/>
                       </a:solidFill>
                       <a:prstDash val="solid"/>
                       <a:round/>
@@ -28170,7 +28170,7 @@
                     </a:lnR>
                     <a:lnT w="12700" cap="flat" cmpd="sng" algn="ctr">
                       <a:solidFill>
-                        <a:srgbClr val="D9D5C8"/>
+                        <a:srgbClr val="4A1A5E"/>
                       </a:solidFill>
                       <a:prstDash val="solid"/>
                       <a:round/>
@@ -28179,7 +28179,7 @@
                     </a:lnT>
                     <a:lnB w="12700" cap="flat" cmpd="sng" algn="ctr">
                       <a:solidFill>
-                        <a:srgbClr val="D9D5C8"/>
+                        <a:srgbClr val="4A1A5E"/>
                       </a:solidFill>
                       <a:prstDash val="solid"/>
                       <a:round/>
@@ -28201,7 +28201,7 @@
                       <a:r>
                         <a:rPr lang="en-US" sz="2500" dirty="0">
                           <a:solidFill>
-                            <a:schemeClr val="accent4"/>
+                            <a:schemeClr val="bg2"/>
                           </a:solidFill>
                         </a:rPr>
                         <a:t>--dash, --ash</a:t>
@@ -28212,7 +28212,7 @@
                   <a:tcPr marL="91440" marR="91440" marT="45720" marB="45720" anchor="ctr">
                     <a:lnL w="12700" cap="flat" cmpd="sng" algn="ctr">
                       <a:solidFill>
-                        <a:srgbClr val="D9D5C8"/>
+                        <a:srgbClr val="4A1A5E"/>
                       </a:solidFill>
                       <a:prstDash val="solid"/>
                       <a:round/>
@@ -28221,7 +28221,7 @@
                     </a:lnL>
                     <a:lnR w="12700" cap="flat" cmpd="sng" algn="ctr">
                       <a:solidFill>
-                        <a:srgbClr val="D9D5C8"/>
+                        <a:srgbClr val="4A1A5E"/>
                       </a:solidFill>
                       <a:prstDash val="solid"/>
                       <a:round/>
@@ -28230,7 +28230,7 @@
                     </a:lnR>
                     <a:lnT w="12700" cap="flat" cmpd="sng" algn="ctr">
                       <a:solidFill>
-                        <a:srgbClr val="D9D5C8"/>
+                        <a:srgbClr val="4A1A5E"/>
                       </a:solidFill>
                       <a:prstDash val="solid"/>
                       <a:round/>
@@ -28239,7 +28239,7 @@
                     </a:lnT>
                     <a:lnB w="12700" cap="flat" cmpd="sng" algn="ctr">
                       <a:solidFill>
-                        <a:srgbClr val="D9D5C8"/>
+                        <a:srgbClr val="4A1A5E"/>
                       </a:solidFill>
                       <a:prstDash val="solid"/>
                       <a:round/>
@@ -28259,7 +28259,7 @@
                       <a:r>
                         <a:rPr lang="en-US" sz="2500" dirty="0">
                           <a:solidFill>
-                            <a:schemeClr val="accent4"/>
+                            <a:schemeClr val="bg2"/>
                           </a:solidFill>
                         </a:rPr>
                         <a:t>dash</a:t>
@@ -28270,7 +28270,7 @@
                   <a:tcPr marL="91440" marR="91440" marT="45720" marB="45720" anchor="ctr">
                     <a:lnL w="12700" cap="flat" cmpd="sng" algn="ctr">
                       <a:solidFill>
-                        <a:srgbClr val="D9D5C8"/>
+                        <a:srgbClr val="4A1A5E"/>
                       </a:solidFill>
                       <a:prstDash val="solid"/>
                       <a:round/>
@@ -28279,7 +28279,7 @@
                     </a:lnL>
                     <a:lnR w="12700" cap="flat" cmpd="sng" algn="ctr">
                       <a:solidFill>
-                        <a:srgbClr val="D9D5C8"/>
+                        <a:srgbClr val="4A1A5E"/>
                       </a:solidFill>
                       <a:prstDash val="solid"/>
                       <a:round/>
@@ -28288,7 +28288,7 @@
                     </a:lnR>
                     <a:lnT w="12700" cap="flat" cmpd="sng" algn="ctr">
                       <a:solidFill>
-                        <a:srgbClr val="D9D5C8"/>
+                        <a:srgbClr val="4A1A5E"/>
                       </a:solidFill>
                       <a:prstDash val="solid"/>
                       <a:round/>
@@ -28297,7 +28297,7 @@
                     </a:lnT>
                     <a:lnB w="12700" cap="flat" cmpd="sng" algn="ctr">
                       <a:solidFill>
-                        <a:srgbClr val="D9D5C8"/>
+                        <a:srgbClr val="4A1A5E"/>
                       </a:solidFill>
                       <a:prstDash val="solid"/>
                       <a:round/>
@@ -28317,7 +28317,7 @@
                       <a:r>
                         <a:rPr lang="en-US" sz="2500" dirty="0">
                           <a:solidFill>
-                            <a:schemeClr val="accent4"/>
+                            <a:schemeClr val="bg2"/>
                           </a:solidFill>
                         </a:rPr>
                         <a:t>dash</a:t>
@@ -28328,7 +28328,7 @@
                   <a:tcPr marL="91440" marR="91440" marT="45720" marB="45720" anchor="ctr">
                     <a:lnL w="12700" cap="flat" cmpd="sng" algn="ctr">
                       <a:solidFill>
-                        <a:srgbClr val="D9D5C8"/>
+                        <a:srgbClr val="4A1A5E"/>
                       </a:solidFill>
                       <a:prstDash val="solid"/>
                       <a:round/>
@@ -28337,7 +28337,7 @@
                     </a:lnL>
                     <a:lnR w="12700" cap="flat" cmpd="sng" algn="ctr">
                       <a:solidFill>
-                        <a:srgbClr val="D9D5C8"/>
+                        <a:srgbClr val="4A1A5E"/>
                       </a:solidFill>
                       <a:prstDash val="solid"/>
                       <a:round/>
@@ -28346,7 +28346,7 @@
                     </a:lnR>
                     <a:lnT w="12700" cap="flat" cmpd="sng" algn="ctr">
                       <a:solidFill>
-                        <a:srgbClr val="D9D5C8"/>
+                        <a:srgbClr val="4A1A5E"/>
                       </a:solidFill>
                       <a:prstDash val="solid"/>
                       <a:round/>
@@ -28355,7 +28355,7 @@
                     </a:lnT>
                     <a:lnB w="12700" cap="flat" cmpd="sng" algn="ctr">
                       <a:solidFill>
-                        <a:srgbClr val="D9D5C8"/>
+                        <a:srgbClr val="4A1A5E"/>
                       </a:solidFill>
                       <a:prstDash val="solid"/>
                       <a:round/>
@@ -28399,7 +28399,7 @@
             <a:lvl1pPr>
               <a:defRPr sz="1200">
                 <a:solidFill>
-                  <a:schemeClr val="accent6"/>
+                  <a:schemeClr val="accent5"/>
                 </a:solidFill>
                 <a:latin typeface="Courier New"/>
                 <a:ea typeface="Courier New"/>
@@ -28576,7 +28576,7 @@
           </a:solidFill>
           <a:ln w="12700">
             <a:solidFill>
-              <a:srgbClr val="2C3844"/>
+              <a:srgbClr val="4A1A5E"/>
             </a:solidFill>
             <a:prstDash val="solid"/>
           </a:ln>
@@ -28804,7 +28804,7 @@
             <a:r>
               <a:rPr lang="en-US" sz="3600" b="1" dirty="0">
                 <a:solidFill>
-                  <a:schemeClr val="accent4"/>
+                  <a:schemeClr val="bg2"/>
                 </a:solidFill>
               </a:rPr>
               <a:t>Login-shell symlinks</a:t>
@@ -28840,7 +28840,7 @@
             <a:r>
               <a:rPr lang="en-US" sz="1200" dirty="0">
                 <a:solidFill>
-                  <a:schemeClr val="accent6"/>
+                  <a:schemeClr val="accent5"/>
                 </a:solidFill>
                 <a:latin typeface="Courier New" pitchFamily="34" charset="0"/>
                 <a:ea typeface="Courier New" pitchFamily="34" charset="-122"/>
@@ -28879,7 +28879,7 @@
             <a:r>
               <a:rPr lang="en-US" sz="2300" dirty="0">
                 <a:solidFill>
-                  <a:schemeClr val="accent4"/>
+                  <a:schemeClr val="bg2"/>
                 </a:solidFill>
               </a:rPr>
               <a:t>The symlink name selects the personality, the way argv[0] inference works in zsh. Add the path to /etc/shells and chsh.</a:t>
@@ -28927,7 +28927,7 @@
                       <a:r>
                         <a:rPr lang="en-US" sz="2500" b="1" dirty="0">
                           <a:solidFill>
-                            <a:schemeClr val="accent2"/>
+                            <a:schemeClr val="accent1"/>
                           </a:solidFill>
                         </a:rPr>
                         <a:t>Symlink</a:t>
@@ -28938,7 +28938,7 @@
                   <a:tcPr marL="91440" marR="91440" marT="45720" marB="45720" anchor="ctr">
                     <a:lnL w="12700" cap="flat" cmpd="sng" algn="ctr">
                       <a:solidFill>
-                        <a:srgbClr val="D9D5C8"/>
+                        <a:srgbClr val="4A1A5E"/>
                       </a:solidFill>
                       <a:prstDash val="solid"/>
                       <a:round/>
@@ -28947,7 +28947,7 @@
                     </a:lnL>
                     <a:lnR w="12700" cap="flat" cmpd="sng" algn="ctr">
                       <a:solidFill>
-                        <a:srgbClr val="D9D5C8"/>
+                        <a:srgbClr val="4A1A5E"/>
                       </a:solidFill>
                       <a:prstDash val="solid"/>
                       <a:round/>
@@ -28956,7 +28956,7 @@
                     </a:lnR>
                     <a:lnT w="12700" cap="flat" cmpd="sng" algn="ctr">
                       <a:solidFill>
-                        <a:srgbClr val="D9D5C8"/>
+                        <a:srgbClr val="4A1A5E"/>
                       </a:solidFill>
                       <a:prstDash val="solid"/>
                       <a:round/>
@@ -28965,7 +28965,7 @@
                     </a:lnT>
                     <a:lnB w="12700" cap="flat" cmpd="sng" algn="ctr">
                       <a:solidFill>
-                        <a:srgbClr val="D9D5C8"/>
+                        <a:srgbClr val="4A1A5E"/>
                       </a:solidFill>
                       <a:prstDash val="solid"/>
                       <a:round/>
@@ -28985,7 +28985,7 @@
                       <a:r>
                         <a:rPr lang="en-US" sz="2500" b="1" dirty="0">
                           <a:solidFill>
-                            <a:schemeClr val="accent2"/>
+                            <a:schemeClr val="accent1"/>
                           </a:solidFill>
                         </a:rPr>
                         <a:t>Starts as</a:t>
@@ -28996,7 +28996,7 @@
                   <a:tcPr marL="91440" marR="91440" marT="45720" marB="45720" anchor="ctr">
                     <a:lnL w="12700" cap="flat" cmpd="sng" algn="ctr">
                       <a:solidFill>
-                        <a:srgbClr val="D9D5C8"/>
+                        <a:srgbClr val="4A1A5E"/>
                       </a:solidFill>
                       <a:prstDash val="solid"/>
                       <a:round/>
@@ -29005,7 +29005,7 @@
                     </a:lnL>
                     <a:lnR w="12700" cap="flat" cmpd="sng" algn="ctr">
                       <a:solidFill>
-                        <a:srgbClr val="D9D5C8"/>
+                        <a:srgbClr val="4A1A5E"/>
                       </a:solidFill>
                       <a:prstDash val="solid"/>
                       <a:round/>
@@ -29014,7 +29014,7 @@
                     </a:lnR>
                     <a:lnT w="12700" cap="flat" cmpd="sng" algn="ctr">
                       <a:solidFill>
-                        <a:srgbClr val="D9D5C8"/>
+                        <a:srgbClr val="4A1A5E"/>
                       </a:solidFill>
                       <a:prstDash val="solid"/>
                       <a:round/>
@@ -29023,7 +29023,7 @@
                     </a:lnT>
                     <a:lnB w="12700" cap="flat" cmpd="sng" algn="ctr">
                       <a:solidFill>
-                        <a:srgbClr val="D9D5C8"/>
+                        <a:srgbClr val="4A1A5E"/>
                       </a:solidFill>
                       <a:prstDash val="solid"/>
                       <a:round/>
@@ -29043,7 +29043,7 @@
                       <a:r>
                         <a:rPr lang="en-US" sz="2500" b="1" dirty="0">
                           <a:solidFill>
-                            <a:schemeClr val="accent2"/>
+                            <a:schemeClr val="accent1"/>
                           </a:solidFill>
                         </a:rPr>
                         <a:t>Mode</a:t>
@@ -29054,7 +29054,7 @@
                   <a:tcPr marL="91440" marR="91440" marT="45720" marB="45720" anchor="ctr">
                     <a:lnL w="12700" cap="flat" cmpd="sng" algn="ctr">
                       <a:solidFill>
-                        <a:srgbClr val="D9D5C8"/>
+                        <a:srgbClr val="4A1A5E"/>
                       </a:solidFill>
                       <a:prstDash val="solid"/>
                       <a:round/>
@@ -29063,7 +29063,7 @@
                     </a:lnL>
                     <a:lnR w="12700" cap="flat" cmpd="sng" algn="ctr">
                       <a:solidFill>
-                        <a:srgbClr val="D9D5C8"/>
+                        <a:srgbClr val="4A1A5E"/>
                       </a:solidFill>
                       <a:prstDash val="solid"/>
                       <a:round/>
@@ -29072,7 +29072,7 @@
                     </a:lnR>
                     <a:lnT w="12700" cap="flat" cmpd="sng" algn="ctr">
                       <a:solidFill>
-                        <a:srgbClr val="D9D5C8"/>
+                        <a:srgbClr val="4A1A5E"/>
                       </a:solidFill>
                       <a:prstDash val="solid"/>
                       <a:round/>
@@ -29081,7 +29081,7 @@
                     </a:lnT>
                     <a:lnB w="12700" cap="flat" cmpd="sng" algn="ctr">
                       <a:solidFill>
-                        <a:srgbClr val="D9D5C8"/>
+                        <a:srgbClr val="4A1A5E"/>
                       </a:solidFill>
                       <a:prstDash val="solid"/>
                       <a:round/>
@@ -29103,7 +29103,7 @@
                       <a:r>
                         <a:rPr lang="en-US" sz="2500" dirty="0">
                           <a:solidFill>
-                            <a:schemeClr val="accent4"/>
+                            <a:schemeClr val="bg2"/>
                           </a:solidFill>
                         </a:rPr>
                         <a:t>bash</a:t>
@@ -29114,7 +29114,7 @@
                   <a:tcPr marL="91440" marR="91440" marT="45720" marB="45720" anchor="ctr">
                     <a:lnL w="12700" cap="flat" cmpd="sng" algn="ctr">
                       <a:solidFill>
-                        <a:srgbClr val="D9D5C8"/>
+                        <a:srgbClr val="4A1A5E"/>
                       </a:solidFill>
                       <a:prstDash val="solid"/>
                       <a:round/>
@@ -29123,7 +29123,7 @@
                     </a:lnL>
                     <a:lnR w="12700" cap="flat" cmpd="sng" algn="ctr">
                       <a:solidFill>
-                        <a:srgbClr val="D9D5C8"/>
+                        <a:srgbClr val="4A1A5E"/>
                       </a:solidFill>
                       <a:prstDash val="solid"/>
                       <a:round/>
@@ -29132,7 +29132,7 @@
                     </a:lnR>
                     <a:lnT w="12700" cap="flat" cmpd="sng" algn="ctr">
                       <a:solidFill>
-                        <a:srgbClr val="D9D5C8"/>
+                        <a:srgbClr val="4A1A5E"/>
                       </a:solidFill>
                       <a:prstDash val="solid"/>
                       <a:round/>
@@ -29141,7 +29141,7 @@
                     </a:lnT>
                     <a:lnB w="12700" cap="flat" cmpd="sng" algn="ctr">
                       <a:solidFill>
-                        <a:srgbClr val="D9D5C8"/>
+                        <a:srgbClr val="4A1A5E"/>
                       </a:solidFill>
                       <a:prstDash val="solid"/>
                       <a:round/>
@@ -29161,7 +29161,7 @@
                       <a:r>
                         <a:rPr lang="en-US" sz="2500" dirty="0">
                           <a:solidFill>
-                            <a:schemeClr val="accent4"/>
+                            <a:schemeClr val="bg2"/>
                           </a:solidFill>
                         </a:rPr>
                         <a:t>-bash</a:t>
@@ -29172,7 +29172,7 @@
                   <a:tcPr marL="91440" marR="91440" marT="45720" marB="45720" anchor="ctr">
                     <a:lnL w="12700" cap="flat" cmpd="sng" algn="ctr">
                       <a:solidFill>
-                        <a:srgbClr val="D9D5C8"/>
+                        <a:srgbClr val="4A1A5E"/>
                       </a:solidFill>
                       <a:prstDash val="solid"/>
                       <a:round/>
@@ -29181,7 +29181,7 @@
                     </a:lnL>
                     <a:lnR w="12700" cap="flat" cmpd="sng" algn="ctr">
                       <a:solidFill>
-                        <a:srgbClr val="D9D5C8"/>
+                        <a:srgbClr val="4A1A5E"/>
                       </a:solidFill>
                       <a:prstDash val="solid"/>
                       <a:round/>
@@ -29190,7 +29190,7 @@
                     </a:lnR>
                     <a:lnT w="12700" cap="flat" cmpd="sng" algn="ctr">
                       <a:solidFill>
-                        <a:srgbClr val="D9D5C8"/>
+                        <a:srgbClr val="4A1A5E"/>
                       </a:solidFill>
                       <a:prstDash val="solid"/>
                       <a:round/>
@@ -29199,7 +29199,7 @@
                     </a:lnT>
                     <a:lnB w="12700" cap="flat" cmpd="sng" algn="ctr">
                       <a:solidFill>
-                        <a:srgbClr val="D9D5C8"/>
+                        <a:srgbClr val="4A1A5E"/>
                       </a:solidFill>
                       <a:prstDash val="solid"/>
                       <a:round/>
@@ -29219,7 +29219,7 @@
                       <a:r>
                         <a:rPr lang="en-US" sz="2500" dirty="0">
                           <a:solidFill>
-                            <a:schemeClr val="accent4"/>
+                            <a:schemeClr val="bg2"/>
                           </a:solidFill>
                         </a:rPr>
                         <a:t>--bash</a:t>
@@ -29230,7 +29230,7 @@
                   <a:tcPr marL="91440" marR="91440" marT="45720" marB="45720" anchor="ctr">
                     <a:lnL w="12700" cap="flat" cmpd="sng" algn="ctr">
                       <a:solidFill>
-                        <a:srgbClr val="D9D5C8"/>
+                        <a:srgbClr val="4A1A5E"/>
                       </a:solidFill>
                       <a:prstDash val="solid"/>
                       <a:round/>
@@ -29239,7 +29239,7 @@
                     </a:lnL>
                     <a:lnR w="12700" cap="flat" cmpd="sng" algn="ctr">
                       <a:solidFill>
-                        <a:srgbClr val="D9D5C8"/>
+                        <a:srgbClr val="4A1A5E"/>
                       </a:solidFill>
                       <a:prstDash val="solid"/>
                       <a:round/>
@@ -29248,7 +29248,7 @@
                     </a:lnR>
                     <a:lnT w="12700" cap="flat" cmpd="sng" algn="ctr">
                       <a:solidFill>
-                        <a:srgbClr val="D9D5C8"/>
+                        <a:srgbClr val="4A1A5E"/>
                       </a:solidFill>
                       <a:prstDash val="solid"/>
                       <a:round/>
@@ -29257,7 +29257,7 @@
                     </a:lnT>
                     <a:lnB w="12700" cap="flat" cmpd="sng" algn="ctr">
                       <a:solidFill>
-                        <a:srgbClr val="D9D5C8"/>
+                        <a:srgbClr val="4A1A5E"/>
                       </a:solidFill>
                       <a:prstDash val="solid"/>
                       <a:round/>
@@ -29279,7 +29279,7 @@
                       <a:r>
                         <a:rPr lang="en-US" sz="2500" dirty="0">
                           <a:solidFill>
-                            <a:schemeClr val="accent4"/>
+                            <a:schemeClr val="bg2"/>
                           </a:solidFill>
                         </a:rPr>
                         <a:t>ksh</a:t>
@@ -29290,7 +29290,7 @@
                   <a:tcPr marL="91440" marR="91440" marT="45720" marB="45720" anchor="ctr">
                     <a:lnL w="12700" cap="flat" cmpd="sng" algn="ctr">
                       <a:solidFill>
-                        <a:srgbClr val="D9D5C8"/>
+                        <a:srgbClr val="4A1A5E"/>
                       </a:solidFill>
                       <a:prstDash val="solid"/>
                       <a:round/>
@@ -29299,7 +29299,7 @@
                     </a:lnL>
                     <a:lnR w="12700" cap="flat" cmpd="sng" algn="ctr">
                       <a:solidFill>
-                        <a:srgbClr val="D9D5C8"/>
+                        <a:srgbClr val="4A1A5E"/>
                       </a:solidFill>
                       <a:prstDash val="solid"/>
                       <a:round/>
@@ -29308,7 +29308,7 @@
                     </a:lnR>
                     <a:lnT w="12700" cap="flat" cmpd="sng" algn="ctr">
                       <a:solidFill>
-                        <a:srgbClr val="D9D5C8"/>
+                        <a:srgbClr val="4A1A5E"/>
                       </a:solidFill>
                       <a:prstDash val="solid"/>
                       <a:round/>
@@ -29317,7 +29317,7 @@
                     </a:lnT>
                     <a:lnB w="12700" cap="flat" cmpd="sng" algn="ctr">
                       <a:solidFill>
-                        <a:srgbClr val="D9D5C8"/>
+                        <a:srgbClr val="4A1A5E"/>
                       </a:solidFill>
                       <a:prstDash val="solid"/>
                       <a:round/>
@@ -29337,7 +29337,7 @@
                       <a:r>
                         <a:rPr lang="en-US" sz="2500" dirty="0">
                           <a:solidFill>
-                            <a:schemeClr val="accent4"/>
+                            <a:schemeClr val="bg2"/>
                           </a:solidFill>
                         </a:rPr>
                         <a:t>-ksh</a:t>
@@ -29348,7 +29348,7 @@
                   <a:tcPr marL="91440" marR="91440" marT="45720" marB="45720" anchor="ctr">
                     <a:lnL w="12700" cap="flat" cmpd="sng" algn="ctr">
                       <a:solidFill>
-                        <a:srgbClr val="D9D5C8"/>
+                        <a:srgbClr val="4A1A5E"/>
                       </a:solidFill>
                       <a:prstDash val="solid"/>
                       <a:round/>
@@ -29357,7 +29357,7 @@
                     </a:lnL>
                     <a:lnR w="12700" cap="flat" cmpd="sng" algn="ctr">
                       <a:solidFill>
-                        <a:srgbClr val="D9D5C8"/>
+                        <a:srgbClr val="4A1A5E"/>
                       </a:solidFill>
                       <a:prstDash val="solid"/>
                       <a:round/>
@@ -29366,7 +29366,7 @@
                     </a:lnR>
                     <a:lnT w="12700" cap="flat" cmpd="sng" algn="ctr">
                       <a:solidFill>
-                        <a:srgbClr val="D9D5C8"/>
+                        <a:srgbClr val="4A1A5E"/>
                       </a:solidFill>
                       <a:prstDash val="solid"/>
                       <a:round/>
@@ -29375,7 +29375,7 @@
                     </a:lnT>
                     <a:lnB w="12700" cap="flat" cmpd="sng" algn="ctr">
                       <a:solidFill>
-                        <a:srgbClr val="D9D5C8"/>
+                        <a:srgbClr val="4A1A5E"/>
                       </a:solidFill>
                       <a:prstDash val="solid"/>
                       <a:round/>
@@ -29395,7 +29395,7 @@
                       <a:r>
                         <a:rPr lang="en-US" sz="2500" dirty="0">
                           <a:solidFill>
-                            <a:schemeClr val="accent4"/>
+                            <a:schemeClr val="bg2"/>
                           </a:solidFill>
                         </a:rPr>
                         <a:t>--ksh</a:t>
@@ -29406,7 +29406,7 @@
                   <a:tcPr marL="91440" marR="91440" marT="45720" marB="45720" anchor="ctr">
                     <a:lnL w="12700" cap="flat" cmpd="sng" algn="ctr">
                       <a:solidFill>
-                        <a:srgbClr val="D9D5C8"/>
+                        <a:srgbClr val="4A1A5E"/>
                       </a:solidFill>
                       <a:prstDash val="solid"/>
                       <a:round/>
@@ -29415,7 +29415,7 @@
                     </a:lnL>
                     <a:lnR w="12700" cap="flat" cmpd="sng" algn="ctr">
                       <a:solidFill>
-                        <a:srgbClr val="D9D5C8"/>
+                        <a:srgbClr val="4A1A5E"/>
                       </a:solidFill>
                       <a:prstDash val="solid"/>
                       <a:round/>
@@ -29424,7 +29424,7 @@
                     </a:lnR>
                     <a:lnT w="12700" cap="flat" cmpd="sng" algn="ctr">
                       <a:solidFill>
-                        <a:srgbClr val="D9D5C8"/>
+                        <a:srgbClr val="4A1A5E"/>
                       </a:solidFill>
                       <a:prstDash val="solid"/>
                       <a:round/>
@@ -29433,7 +29433,7 @@
                     </a:lnT>
                     <a:lnB w="12700" cap="flat" cmpd="sng" algn="ctr">
                       <a:solidFill>
-                        <a:srgbClr val="D9D5C8"/>
+                        <a:srgbClr val="4A1A5E"/>
                       </a:solidFill>
                       <a:prstDash val="solid"/>
                       <a:round/>
@@ -29455,7 +29455,7 @@
                       <a:r>
                         <a:rPr lang="en-US" sz="2500" dirty="0">
                           <a:solidFill>
-                            <a:schemeClr val="accent4"/>
+                            <a:schemeClr val="bg2"/>
                           </a:solidFill>
                         </a:rPr>
                         <a:t>sh</a:t>
@@ -29466,7 +29466,7 @@
                   <a:tcPr marL="91440" marR="91440" marT="45720" marB="45720" anchor="ctr">
                     <a:lnL w="12700" cap="flat" cmpd="sng" algn="ctr">
                       <a:solidFill>
-                        <a:srgbClr val="D9D5C8"/>
+                        <a:srgbClr val="4A1A5E"/>
                       </a:solidFill>
                       <a:prstDash val="solid"/>
                       <a:round/>
@@ -29475,7 +29475,7 @@
                     </a:lnL>
                     <a:lnR w="12700" cap="flat" cmpd="sng" algn="ctr">
                       <a:solidFill>
-                        <a:srgbClr val="D9D5C8"/>
+                        <a:srgbClr val="4A1A5E"/>
                       </a:solidFill>
                       <a:prstDash val="solid"/>
                       <a:round/>
@@ -29484,7 +29484,7 @@
                     </a:lnR>
                     <a:lnT w="12700" cap="flat" cmpd="sng" algn="ctr">
                       <a:solidFill>
-                        <a:srgbClr val="D9D5C8"/>
+                        <a:srgbClr val="4A1A5E"/>
                       </a:solidFill>
                       <a:prstDash val="solid"/>
                       <a:round/>
@@ -29493,7 +29493,7 @@
                     </a:lnT>
                     <a:lnB w="12700" cap="flat" cmpd="sng" algn="ctr">
                       <a:solidFill>
-                        <a:srgbClr val="D9D5C8"/>
+                        <a:srgbClr val="4A1A5E"/>
                       </a:solidFill>
                       <a:prstDash val="solid"/>
                       <a:round/>
@@ -29513,7 +29513,7 @@
                       <a:r>
                         <a:rPr lang="en-US" sz="2500" dirty="0">
                           <a:solidFill>
-                            <a:schemeClr val="accent4"/>
+                            <a:schemeClr val="bg2"/>
                           </a:solidFill>
                         </a:rPr>
                         <a:t>-sh</a:t>
@@ -29524,7 +29524,7 @@
                   <a:tcPr marL="91440" marR="91440" marT="45720" marB="45720" anchor="ctr">
                     <a:lnL w="12700" cap="flat" cmpd="sng" algn="ctr">
                       <a:solidFill>
-                        <a:srgbClr val="D9D5C8"/>
+                        <a:srgbClr val="4A1A5E"/>
                       </a:solidFill>
                       <a:prstDash val="solid"/>
                       <a:round/>
@@ -29533,7 +29533,7 @@
                     </a:lnL>
                     <a:lnR w="12700" cap="flat" cmpd="sng" algn="ctr">
                       <a:solidFill>
-                        <a:srgbClr val="D9D5C8"/>
+                        <a:srgbClr val="4A1A5E"/>
                       </a:solidFill>
                       <a:prstDash val="solid"/>
                       <a:round/>
@@ -29542,7 +29542,7 @@
                     </a:lnR>
                     <a:lnT w="12700" cap="flat" cmpd="sng" algn="ctr">
                       <a:solidFill>
-                        <a:srgbClr val="D9D5C8"/>
+                        <a:srgbClr val="4A1A5E"/>
                       </a:solidFill>
                       <a:prstDash val="solid"/>
                       <a:round/>
@@ -29551,7 +29551,7 @@
                     </a:lnT>
                     <a:lnB w="12700" cap="flat" cmpd="sng" algn="ctr">
                       <a:solidFill>
-                        <a:srgbClr val="D9D5C8"/>
+                        <a:srgbClr val="4A1A5E"/>
                       </a:solidFill>
                       <a:prstDash val="solid"/>
                       <a:round/>
@@ -29571,7 +29571,7 @@
                       <a:r>
                         <a:rPr lang="en-US" sz="2500" dirty="0">
                           <a:solidFill>
-                            <a:schemeClr val="accent4"/>
+                            <a:schemeClr val="bg2"/>
                           </a:solidFill>
                         </a:rPr>
                         <a:t>--sh</a:t>
@@ -29582,7 +29582,7 @@
                   <a:tcPr marL="91440" marR="91440" marT="45720" marB="45720" anchor="ctr">
                     <a:lnL w="12700" cap="flat" cmpd="sng" algn="ctr">
                       <a:solidFill>
-                        <a:srgbClr val="D9D5C8"/>
+                        <a:srgbClr val="4A1A5E"/>
                       </a:solidFill>
                       <a:prstDash val="solid"/>
                       <a:round/>
@@ -29591,7 +29591,7 @@
                     </a:lnL>
                     <a:lnR w="12700" cap="flat" cmpd="sng" algn="ctr">
                       <a:solidFill>
-                        <a:srgbClr val="D9D5C8"/>
+                        <a:srgbClr val="4A1A5E"/>
                       </a:solidFill>
                       <a:prstDash val="solid"/>
                       <a:round/>
@@ -29600,7 +29600,7 @@
                     </a:lnR>
                     <a:lnT w="12700" cap="flat" cmpd="sng" algn="ctr">
                       <a:solidFill>
-                        <a:srgbClr val="D9D5C8"/>
+                        <a:srgbClr val="4A1A5E"/>
                       </a:solidFill>
                       <a:prstDash val="solid"/>
                       <a:round/>
@@ -29609,7 +29609,7 @@
                     </a:lnT>
                     <a:lnB w="12700" cap="flat" cmpd="sng" algn="ctr">
                       <a:solidFill>
-                        <a:srgbClr val="D9D5C8"/>
+                        <a:srgbClr val="4A1A5E"/>
                       </a:solidFill>
                       <a:prstDash val="solid"/>
                       <a:round/>
@@ -29631,7 +29631,7 @@
                       <a:r>
                         <a:rPr lang="en-US" sz="2500" dirty="0">
                           <a:solidFill>
-                            <a:schemeClr val="accent4"/>
+                            <a:schemeClr val="bg2"/>
                           </a:solidFill>
                         </a:rPr>
                         <a:t>dash</a:t>
@@ -29642,7 +29642,7 @@
                   <a:tcPr marL="91440" marR="91440" marT="45720" marB="45720" anchor="ctr">
                     <a:lnL w="12700" cap="flat" cmpd="sng" algn="ctr">
                       <a:solidFill>
-                        <a:srgbClr val="D9D5C8"/>
+                        <a:srgbClr val="4A1A5E"/>
                       </a:solidFill>
                       <a:prstDash val="solid"/>
                       <a:round/>
@@ -29651,7 +29651,7 @@
                     </a:lnL>
                     <a:lnR w="12700" cap="flat" cmpd="sng" algn="ctr">
                       <a:solidFill>
-                        <a:srgbClr val="D9D5C8"/>
+                        <a:srgbClr val="4A1A5E"/>
                       </a:solidFill>
                       <a:prstDash val="solid"/>
                       <a:round/>
@@ -29660,7 +29660,7 @@
                     </a:lnR>
                     <a:lnT w="12700" cap="flat" cmpd="sng" algn="ctr">
                       <a:solidFill>
-                        <a:srgbClr val="D9D5C8"/>
+                        <a:srgbClr val="4A1A5E"/>
                       </a:solidFill>
                       <a:prstDash val="solid"/>
                       <a:round/>
@@ -29669,7 +29669,7 @@
                     </a:lnT>
                     <a:lnB w="12700" cap="flat" cmpd="sng" algn="ctr">
                       <a:solidFill>
-                        <a:srgbClr val="D9D5C8"/>
+                        <a:srgbClr val="4A1A5E"/>
                       </a:solidFill>
                       <a:prstDash val="solid"/>
                       <a:round/>
@@ -29689,7 +29689,7 @@
                       <a:r>
                         <a:rPr lang="en-US" sz="2500" dirty="0">
                           <a:solidFill>
-                            <a:schemeClr val="accent4"/>
+                            <a:schemeClr val="bg2"/>
                           </a:solidFill>
                         </a:rPr>
                         <a:t>-dash</a:t>
@@ -29700,7 +29700,7 @@
                   <a:tcPr marL="91440" marR="91440" marT="45720" marB="45720" anchor="ctr">
                     <a:lnL w="12700" cap="flat" cmpd="sng" algn="ctr">
                       <a:solidFill>
-                        <a:srgbClr val="D9D5C8"/>
+                        <a:srgbClr val="4A1A5E"/>
                       </a:solidFill>
                       <a:prstDash val="solid"/>
                       <a:round/>
@@ -29709,7 +29709,7 @@
                     </a:lnL>
                     <a:lnR w="12700" cap="flat" cmpd="sng" algn="ctr">
                       <a:solidFill>
-                        <a:srgbClr val="D9D5C8"/>
+                        <a:srgbClr val="4A1A5E"/>
                       </a:solidFill>
                       <a:prstDash val="solid"/>
                       <a:round/>
@@ -29718,7 +29718,7 @@
                     </a:lnR>
                     <a:lnT w="12700" cap="flat" cmpd="sng" algn="ctr">
                       <a:solidFill>
-                        <a:srgbClr val="D9D5C8"/>
+                        <a:srgbClr val="4A1A5E"/>
                       </a:solidFill>
                       <a:prstDash val="solid"/>
                       <a:round/>
@@ -29727,7 +29727,7 @@
                     </a:lnT>
                     <a:lnB w="12700" cap="flat" cmpd="sng" algn="ctr">
                       <a:solidFill>
-                        <a:srgbClr val="D9D5C8"/>
+                        <a:srgbClr val="4A1A5E"/>
                       </a:solidFill>
                       <a:prstDash val="solid"/>
                       <a:round/>
@@ -29747,7 +29747,7 @@
                       <a:r>
                         <a:rPr lang="en-US" sz="2500" dirty="0">
                           <a:solidFill>
-                            <a:schemeClr val="accent4"/>
+                            <a:schemeClr val="bg2"/>
                           </a:solidFill>
                         </a:rPr>
                         <a:t>--dash</a:t>
@@ -29758,7 +29758,7 @@
                   <a:tcPr marL="91440" marR="91440" marT="45720" marB="45720" anchor="ctr">
                     <a:lnL w="12700" cap="flat" cmpd="sng" algn="ctr">
                       <a:solidFill>
-                        <a:srgbClr val="D9D5C8"/>
+                        <a:srgbClr val="4A1A5E"/>
                       </a:solidFill>
                       <a:prstDash val="solid"/>
                       <a:round/>
@@ -29767,7 +29767,7 @@
                     </a:lnL>
                     <a:lnR w="12700" cap="flat" cmpd="sng" algn="ctr">
                       <a:solidFill>
-                        <a:srgbClr val="D9D5C8"/>
+                        <a:srgbClr val="4A1A5E"/>
                       </a:solidFill>
                       <a:prstDash val="solid"/>
                       <a:round/>
@@ -29776,7 +29776,7 @@
                     </a:lnR>
                     <a:lnT w="12700" cap="flat" cmpd="sng" algn="ctr">
                       <a:solidFill>
-                        <a:srgbClr val="D9D5C8"/>
+                        <a:srgbClr val="4A1A5E"/>
                       </a:solidFill>
                       <a:prstDash val="solid"/>
                       <a:round/>
@@ -29785,7 +29785,7 @@
                     </a:lnT>
                     <a:lnB w="12700" cap="flat" cmpd="sng" algn="ctr">
                       <a:solidFill>
-                        <a:srgbClr val="D9D5C8"/>
+                        <a:srgbClr val="4A1A5E"/>
                       </a:solidFill>
                       <a:prstDash val="solid"/>
                       <a:round/>
@@ -29807,7 +29807,7 @@
                       <a:r>
                         <a:rPr lang="en-US" sz="2500" dirty="0">
                           <a:solidFill>
-                            <a:schemeClr val="accent4"/>
+                            <a:schemeClr val="bg2"/>
                           </a:solidFill>
                         </a:rPr>
                         <a:t>zsh</a:t>
@@ -29818,7 +29818,7 @@
                   <a:tcPr marL="91440" marR="91440" marT="45720" marB="45720" anchor="ctr">
                     <a:lnL w="12700" cap="flat" cmpd="sng" algn="ctr">
                       <a:solidFill>
-                        <a:srgbClr val="D9D5C8"/>
+                        <a:srgbClr val="4A1A5E"/>
                       </a:solidFill>
                       <a:prstDash val="solid"/>
                       <a:round/>
@@ -29827,7 +29827,7 @@
                     </a:lnL>
                     <a:lnR w="12700" cap="flat" cmpd="sng" algn="ctr">
                       <a:solidFill>
-                        <a:srgbClr val="D9D5C8"/>
+                        <a:srgbClr val="4A1A5E"/>
                       </a:solidFill>
                       <a:prstDash val="solid"/>
                       <a:round/>
@@ -29836,7 +29836,7 @@
                     </a:lnR>
                     <a:lnT w="12700" cap="flat" cmpd="sng" algn="ctr">
                       <a:solidFill>
-                        <a:srgbClr val="D9D5C8"/>
+                        <a:srgbClr val="4A1A5E"/>
                       </a:solidFill>
                       <a:prstDash val="solid"/>
                       <a:round/>
@@ -29845,7 +29845,7 @@
                     </a:lnT>
                     <a:lnB w="12700" cap="flat" cmpd="sng" algn="ctr">
                       <a:solidFill>
-                        <a:srgbClr val="D9D5C8"/>
+                        <a:srgbClr val="4A1A5E"/>
                       </a:solidFill>
                       <a:prstDash val="solid"/>
                       <a:round/>
@@ -29865,7 +29865,7 @@
                       <a:r>
                         <a:rPr lang="en-US" sz="2500" dirty="0">
                           <a:solidFill>
-                            <a:schemeClr val="accent4"/>
+                            <a:schemeClr val="bg2"/>
                           </a:solidFill>
                         </a:rPr>
                         <a:t>-zsh</a:t>
@@ -29876,7 +29876,7 @@
                   <a:tcPr marL="91440" marR="91440" marT="45720" marB="45720" anchor="ctr">
                     <a:lnL w="12700" cap="flat" cmpd="sng" algn="ctr">
                       <a:solidFill>
-                        <a:srgbClr val="D9D5C8"/>
+                        <a:srgbClr val="4A1A5E"/>
                       </a:solidFill>
                       <a:prstDash val="solid"/>
                       <a:round/>
@@ -29885,7 +29885,7 @@
                     </a:lnL>
                     <a:lnR w="12700" cap="flat" cmpd="sng" algn="ctr">
                       <a:solidFill>
-                        <a:srgbClr val="D9D5C8"/>
+                        <a:srgbClr val="4A1A5E"/>
                       </a:solidFill>
                       <a:prstDash val="solid"/>
                       <a:round/>
@@ -29894,7 +29894,7 @@
                     </a:lnR>
                     <a:lnT w="12700" cap="flat" cmpd="sng" algn="ctr">
                       <a:solidFill>
-                        <a:srgbClr val="D9D5C8"/>
+                        <a:srgbClr val="4A1A5E"/>
                       </a:solidFill>
                       <a:prstDash val="solid"/>
                       <a:round/>
@@ -29903,7 +29903,7 @@
                     </a:lnT>
                     <a:lnB w="12700" cap="flat" cmpd="sng" algn="ctr">
                       <a:solidFill>
-                        <a:srgbClr val="D9D5C8"/>
+                        <a:srgbClr val="4A1A5E"/>
                       </a:solidFill>
                       <a:prstDash val="solid"/>
                       <a:round/>
@@ -29923,7 +29923,7 @@
                       <a:r>
                         <a:rPr lang="en-US" sz="2500" dirty="0">
                           <a:solidFill>
-                            <a:schemeClr val="accent4"/>
+                            <a:schemeClr val="bg2"/>
                           </a:solidFill>
                         </a:rPr>
                         <a:t>--zsh</a:t>
@@ -29934,7 +29934,7 @@
                   <a:tcPr marL="91440" marR="91440" marT="45720" marB="45720" anchor="ctr">
                     <a:lnL w="12700" cap="flat" cmpd="sng" algn="ctr">
                       <a:solidFill>
-                        <a:srgbClr val="D9D5C8"/>
+                        <a:srgbClr val="4A1A5E"/>
                       </a:solidFill>
                       <a:prstDash val="solid"/>
                       <a:round/>
@@ -29943,7 +29943,7 @@
                     </a:lnL>
                     <a:lnR w="12700" cap="flat" cmpd="sng" algn="ctr">
                       <a:solidFill>
-                        <a:srgbClr val="D9D5C8"/>
+                        <a:srgbClr val="4A1A5E"/>
                       </a:solidFill>
                       <a:prstDash val="solid"/>
                       <a:round/>
@@ -29952,7 +29952,7 @@
                     </a:lnR>
                     <a:lnT w="12700" cap="flat" cmpd="sng" algn="ctr">
                       <a:solidFill>
-                        <a:srgbClr val="D9D5C8"/>
+                        <a:srgbClr val="4A1A5E"/>
                       </a:solidFill>
                       <a:prstDash val="solid"/>
                       <a:round/>
@@ -29961,7 +29961,7 @@
                     </a:lnT>
                     <a:lnB w="12700" cap="flat" cmpd="sng" algn="ctr">
                       <a:solidFill>
-                        <a:srgbClr val="D9D5C8"/>
+                        <a:srgbClr val="4A1A5E"/>
                       </a:solidFill>
                       <a:prstDash val="solid"/>
                       <a:round/>
@@ -30005,7 +30005,7 @@
             <a:lvl1pPr>
               <a:defRPr sz="1200">
                 <a:solidFill>
-                  <a:schemeClr val="accent6"/>
+                  <a:schemeClr val="accent5"/>
                 </a:solidFill>
                 <a:latin typeface="Courier New"/>
                 <a:ea typeface="Courier New"/>
@@ -30077,7 +30077,7 @@
             <a:r>
               <a:rPr lang="en-US" sz="3600" b="1" dirty="0">
                 <a:solidFill>
-                  <a:schemeClr val="accent4"/>
+                  <a:schemeClr val="bg2"/>
                 </a:solidFill>
               </a:rPr>
               <a:t>Try it without switching</a:t>
@@ -30113,7 +30113,7 @@
             <a:r>
               <a:rPr lang="en-US" sz="1200" dirty="0">
                 <a:solidFill>
-                  <a:schemeClr val="accent6"/>
+                  <a:schemeClr val="accent5"/>
                 </a:solidFill>
                 <a:latin typeface="Courier New" pitchFamily="34" charset="0"/>
                 <a:ea typeface="Courier New" pitchFamily="34" charset="-122"/>
@@ -30152,7 +30152,7 @@
             <a:r>
               <a:rPr lang="en-US" sz="2400" dirty="0">
                 <a:solidFill>
-                  <a:schemeClr val="accent4"/>
+                  <a:schemeClr val="bg2"/>
                 </a:solidFill>
               </a:rPr>
               <a:t>Start it from your current shell. Nothing about your login shell changes.</a:t>
@@ -30178,11 +30178,11 @@
             </a:avLst>
           </a:prstGeom>
           <a:solidFill>
-            <a:schemeClr val="accent4"/>
+            <a:schemeClr val="tx2"/>
           </a:solidFill>
           <a:ln w="12700">
             <a:solidFill>
-              <a:srgbClr val="2C3844"/>
+              <a:srgbClr val="4A1A5E"/>
             </a:solidFill>
             <a:prstDash val="solid"/>
           </a:ln>
@@ -30281,7 +30281,7 @@
             <a:r>
               <a:rPr lang="en-US" sz="3000" dirty="0">
                 <a:solidFill>
-                  <a:schemeClr val="accent4"/>
+                  <a:schemeClr val="bg2"/>
                 </a:solidFill>
               </a:rPr>
               <a:t>It reads your usual startup files</a:t>
@@ -30299,7 +30299,7 @@
             <a:r>
               <a:rPr lang="en-US" sz="3000" dirty="0">
                 <a:solidFill>
-                  <a:schemeClr val="accent4"/>
+                  <a:schemeClr val="bg2"/>
                 </a:solidFill>
               </a:rPr>
               <a:t>Bare zshrs -f skips rc files and stays byte-identical to zsh -f</a:t>
@@ -30338,7 +30338,7 @@
             <a:lvl1pPr>
               <a:defRPr sz="1200">
                 <a:solidFill>
-                  <a:schemeClr val="accent6"/>
+                  <a:schemeClr val="accent5"/>
                 </a:solidFill>
                 <a:latin typeface="Courier New"/>
                 <a:ea typeface="Courier New"/>
@@ -30543,7 +30543,7 @@
                   <a:tcPr marL="91440" marR="91440" marT="45720" marB="45720" anchor="ctr">
                     <a:lnL w="12700" cap="flat" cmpd="sng" algn="ctr">
                       <a:solidFill>
-                        <a:srgbClr val="2C3844"/>
+                        <a:srgbClr val="4A1A5E"/>
                       </a:solidFill>
                       <a:prstDash val="solid"/>
                       <a:round/>
@@ -30552,7 +30552,7 @@
                     </a:lnL>
                     <a:lnR w="12700" cap="flat" cmpd="sng" algn="ctr">
                       <a:solidFill>
-                        <a:srgbClr val="2C3844"/>
+                        <a:srgbClr val="4A1A5E"/>
                       </a:solidFill>
                       <a:prstDash val="solid"/>
                       <a:round/>
@@ -30561,7 +30561,7 @@
                     </a:lnR>
                     <a:lnT w="12700" cap="flat" cmpd="sng" algn="ctr">
                       <a:solidFill>
-                        <a:srgbClr val="2C3844"/>
+                        <a:srgbClr val="4A1A5E"/>
                       </a:solidFill>
                       <a:prstDash val="solid"/>
                       <a:round/>
@@ -30570,7 +30570,7 @@
                     </a:lnT>
                     <a:lnB w="12700" cap="flat" cmpd="sng" algn="ctr">
                       <a:solidFill>
-                        <a:srgbClr val="2C3844"/>
+                        <a:srgbClr val="4A1A5E"/>
                       </a:solidFill>
                       <a:prstDash val="solid"/>
                       <a:round/>
@@ -30601,7 +30601,7 @@
                   <a:tcPr marL="91440" marR="91440" marT="45720" marB="45720" anchor="ctr">
                     <a:lnL w="12700" cap="flat" cmpd="sng" algn="ctr">
                       <a:solidFill>
-                        <a:srgbClr val="2C3844"/>
+                        <a:srgbClr val="4A1A5E"/>
                       </a:solidFill>
                       <a:prstDash val="solid"/>
                       <a:round/>
@@ -30610,7 +30610,7 @@
                     </a:lnL>
                     <a:lnR w="12700" cap="flat" cmpd="sng" algn="ctr">
                       <a:solidFill>
-                        <a:srgbClr val="2C3844"/>
+                        <a:srgbClr val="4A1A5E"/>
                       </a:solidFill>
                       <a:prstDash val="solid"/>
                       <a:round/>
@@ -30619,7 +30619,7 @@
                     </a:lnR>
                     <a:lnT w="12700" cap="flat" cmpd="sng" algn="ctr">
                       <a:solidFill>
-                        <a:srgbClr val="2C3844"/>
+                        <a:srgbClr val="4A1A5E"/>
                       </a:solidFill>
                       <a:prstDash val="solid"/>
                       <a:round/>
@@ -30628,7 +30628,7 @@
                     </a:lnT>
                     <a:lnB w="12700" cap="flat" cmpd="sng" algn="ctr">
                       <a:solidFill>
-                        <a:srgbClr val="2C3844"/>
+                        <a:srgbClr val="4A1A5E"/>
                       </a:solidFill>
                       <a:prstDash val="solid"/>
                       <a:round/>
@@ -30661,7 +30661,7 @@
                   <a:tcPr marL="91440" marR="91440" marT="45720" marB="45720" anchor="ctr">
                     <a:lnL w="12700" cap="flat" cmpd="sng" algn="ctr">
                       <a:solidFill>
-                        <a:srgbClr val="2C3844"/>
+                        <a:srgbClr val="4A1A5E"/>
                       </a:solidFill>
                       <a:prstDash val="solid"/>
                       <a:round/>
@@ -30670,7 +30670,7 @@
                     </a:lnL>
                     <a:lnR w="12700" cap="flat" cmpd="sng" algn="ctr">
                       <a:solidFill>
-                        <a:srgbClr val="2C3844"/>
+                        <a:srgbClr val="4A1A5E"/>
                       </a:solidFill>
                       <a:prstDash val="solid"/>
                       <a:round/>
@@ -30679,7 +30679,7 @@
                     </a:lnR>
                     <a:lnT w="12700" cap="flat" cmpd="sng" algn="ctr">
                       <a:solidFill>
-                        <a:srgbClr val="2C3844"/>
+                        <a:srgbClr val="4A1A5E"/>
                       </a:solidFill>
                       <a:prstDash val="solid"/>
                       <a:round/>
@@ -30688,7 +30688,7 @@
                     </a:lnT>
                     <a:lnB w="12700" cap="flat" cmpd="sng" algn="ctr">
                       <a:solidFill>
-                        <a:srgbClr val="2C3844"/>
+                        <a:srgbClr val="4A1A5E"/>
                       </a:solidFill>
                       <a:prstDash val="solid"/>
                       <a:round/>
@@ -30719,7 +30719,7 @@
                   <a:tcPr marL="91440" marR="91440" marT="45720" marB="45720" anchor="ctr">
                     <a:lnL w="12700" cap="flat" cmpd="sng" algn="ctr">
                       <a:solidFill>
-                        <a:srgbClr val="2C3844"/>
+                        <a:srgbClr val="4A1A5E"/>
                       </a:solidFill>
                       <a:prstDash val="solid"/>
                       <a:round/>
@@ -30728,7 +30728,7 @@
                     </a:lnL>
                     <a:lnR w="12700" cap="flat" cmpd="sng" algn="ctr">
                       <a:solidFill>
-                        <a:srgbClr val="2C3844"/>
+                        <a:srgbClr val="4A1A5E"/>
                       </a:solidFill>
                       <a:prstDash val="solid"/>
                       <a:round/>
@@ -30737,7 +30737,7 @@
                     </a:lnR>
                     <a:lnT w="12700" cap="flat" cmpd="sng" algn="ctr">
                       <a:solidFill>
-                        <a:srgbClr val="2C3844"/>
+                        <a:srgbClr val="4A1A5E"/>
                       </a:solidFill>
                       <a:prstDash val="solid"/>
                       <a:round/>
@@ -30746,7 +30746,7 @@
                     </a:lnT>
                     <a:lnB w="12700" cap="flat" cmpd="sng" algn="ctr">
                       <a:solidFill>
-                        <a:srgbClr val="2C3844"/>
+                        <a:srgbClr val="4A1A5E"/>
                       </a:solidFill>
                       <a:prstDash val="solid"/>
                       <a:round/>
@@ -30779,7 +30779,7 @@
                   <a:tcPr marL="91440" marR="91440" marT="45720" marB="45720" anchor="ctr">
                     <a:lnL w="12700" cap="flat" cmpd="sng" algn="ctr">
                       <a:solidFill>
-                        <a:srgbClr val="2C3844"/>
+                        <a:srgbClr val="4A1A5E"/>
                       </a:solidFill>
                       <a:prstDash val="solid"/>
                       <a:round/>
@@ -30788,7 +30788,7 @@
                     </a:lnL>
                     <a:lnR w="12700" cap="flat" cmpd="sng" algn="ctr">
                       <a:solidFill>
-                        <a:srgbClr val="2C3844"/>
+                        <a:srgbClr val="4A1A5E"/>
                       </a:solidFill>
                       <a:prstDash val="solid"/>
                       <a:round/>
@@ -30797,7 +30797,7 @@
                     </a:lnR>
                     <a:lnT w="12700" cap="flat" cmpd="sng" algn="ctr">
                       <a:solidFill>
-                        <a:srgbClr val="2C3844"/>
+                        <a:srgbClr val="4A1A5E"/>
                       </a:solidFill>
                       <a:prstDash val="solid"/>
                       <a:round/>
@@ -30806,7 +30806,7 @@
                     </a:lnT>
                     <a:lnB w="12700" cap="flat" cmpd="sng" algn="ctr">
                       <a:solidFill>
-                        <a:srgbClr val="2C3844"/>
+                        <a:srgbClr val="4A1A5E"/>
                       </a:solidFill>
                       <a:prstDash val="solid"/>
                       <a:round/>
@@ -30837,7 +30837,7 @@
                   <a:tcPr marL="91440" marR="91440" marT="45720" marB="45720" anchor="ctr">
                     <a:lnL w="12700" cap="flat" cmpd="sng" algn="ctr">
                       <a:solidFill>
-                        <a:srgbClr val="2C3844"/>
+                        <a:srgbClr val="4A1A5E"/>
                       </a:solidFill>
                       <a:prstDash val="solid"/>
                       <a:round/>
@@ -30846,7 +30846,7 @@
                     </a:lnL>
                     <a:lnR w="12700" cap="flat" cmpd="sng" algn="ctr">
                       <a:solidFill>
-                        <a:srgbClr val="2C3844"/>
+                        <a:srgbClr val="4A1A5E"/>
                       </a:solidFill>
                       <a:prstDash val="solid"/>
                       <a:round/>
@@ -30855,7 +30855,7 @@
                     </a:lnR>
                     <a:lnT w="12700" cap="flat" cmpd="sng" algn="ctr">
                       <a:solidFill>
-                        <a:srgbClr val="2C3844"/>
+                        <a:srgbClr val="4A1A5E"/>
                       </a:solidFill>
                       <a:prstDash val="solid"/>
                       <a:round/>
@@ -30864,7 +30864,7 @@
                     </a:lnT>
                     <a:lnB w="12700" cap="flat" cmpd="sng" algn="ctr">
                       <a:solidFill>
-                        <a:srgbClr val="2C3844"/>
+                        <a:srgbClr val="4A1A5E"/>
                       </a:solidFill>
                       <a:prstDash val="solid"/>
                       <a:round/>
@@ -30897,7 +30897,7 @@
                   <a:tcPr marL="91440" marR="91440" marT="45720" marB="45720" anchor="ctr">
                     <a:lnL w="12700" cap="flat" cmpd="sng" algn="ctr">
                       <a:solidFill>
-                        <a:srgbClr val="2C3844"/>
+                        <a:srgbClr val="4A1A5E"/>
                       </a:solidFill>
                       <a:prstDash val="solid"/>
                       <a:round/>
@@ -30906,7 +30906,7 @@
                     </a:lnL>
                     <a:lnR w="12700" cap="flat" cmpd="sng" algn="ctr">
                       <a:solidFill>
-                        <a:srgbClr val="2C3844"/>
+                        <a:srgbClr val="4A1A5E"/>
                       </a:solidFill>
                       <a:prstDash val="solid"/>
                       <a:round/>
@@ -30915,7 +30915,7 @@
                     </a:lnR>
                     <a:lnT w="12700" cap="flat" cmpd="sng" algn="ctr">
                       <a:solidFill>
-                        <a:srgbClr val="2C3844"/>
+                        <a:srgbClr val="4A1A5E"/>
                       </a:solidFill>
                       <a:prstDash val="solid"/>
                       <a:round/>
@@ -30924,7 +30924,7 @@
                     </a:lnT>
                     <a:lnB w="12700" cap="flat" cmpd="sng" algn="ctr">
                       <a:solidFill>
-                        <a:srgbClr val="2C3844"/>
+                        <a:srgbClr val="4A1A5E"/>
                       </a:solidFill>
                       <a:prstDash val="solid"/>
                       <a:round/>
@@ -30955,7 +30955,7 @@
                   <a:tcPr marL="91440" marR="91440" marT="45720" marB="45720" anchor="ctr">
                     <a:lnL w="12700" cap="flat" cmpd="sng" algn="ctr">
                       <a:solidFill>
-                        <a:srgbClr val="2C3844"/>
+                        <a:srgbClr val="4A1A5E"/>
                       </a:solidFill>
                       <a:prstDash val="solid"/>
                       <a:round/>
@@ -30964,7 +30964,7 @@
                     </a:lnL>
                     <a:lnR w="12700" cap="flat" cmpd="sng" algn="ctr">
                       <a:solidFill>
-                        <a:srgbClr val="2C3844"/>
+                        <a:srgbClr val="4A1A5E"/>
                       </a:solidFill>
                       <a:prstDash val="solid"/>
                       <a:round/>
@@ -30973,7 +30973,7 @@
                     </a:lnR>
                     <a:lnT w="12700" cap="flat" cmpd="sng" algn="ctr">
                       <a:solidFill>
-                        <a:srgbClr val="2C3844"/>
+                        <a:srgbClr val="4A1A5E"/>
                       </a:solidFill>
                       <a:prstDash val="solid"/>
                       <a:round/>
@@ -30982,7 +30982,7 @@
                     </a:lnT>
                     <a:lnB w="12700" cap="flat" cmpd="sng" algn="ctr">
                       <a:solidFill>
-                        <a:srgbClr val="2C3844"/>
+                        <a:srgbClr val="4A1A5E"/>
                       </a:solidFill>
                       <a:prstDash val="solid"/>
                       <a:round/>
@@ -31015,7 +31015,7 @@
                   <a:tcPr marL="91440" marR="91440" marT="45720" marB="45720" anchor="ctr">
                     <a:lnL w="12700" cap="flat" cmpd="sng" algn="ctr">
                       <a:solidFill>
-                        <a:srgbClr val="2C3844"/>
+                        <a:srgbClr val="4A1A5E"/>
                       </a:solidFill>
                       <a:prstDash val="solid"/>
                       <a:round/>
@@ -31024,7 +31024,7 @@
                     </a:lnL>
                     <a:lnR w="12700" cap="flat" cmpd="sng" algn="ctr">
                       <a:solidFill>
-                        <a:srgbClr val="2C3844"/>
+                        <a:srgbClr val="4A1A5E"/>
                       </a:solidFill>
                       <a:prstDash val="solid"/>
                       <a:round/>
@@ -31033,7 +31033,7 @@
                     </a:lnR>
                     <a:lnT w="12700" cap="flat" cmpd="sng" algn="ctr">
                       <a:solidFill>
-                        <a:srgbClr val="2C3844"/>
+                        <a:srgbClr val="4A1A5E"/>
                       </a:solidFill>
                       <a:prstDash val="solid"/>
                       <a:round/>
@@ -31042,7 +31042,7 @@
                     </a:lnT>
                     <a:lnB w="12700" cap="flat" cmpd="sng" algn="ctr">
                       <a:solidFill>
-                        <a:srgbClr val="2C3844"/>
+                        <a:srgbClr val="4A1A5E"/>
                       </a:solidFill>
                       <a:prstDash val="solid"/>
                       <a:round/>
@@ -31073,7 +31073,7 @@
                   <a:tcPr marL="91440" marR="91440" marT="45720" marB="45720" anchor="ctr">
                     <a:lnL w="12700" cap="flat" cmpd="sng" algn="ctr">
                       <a:solidFill>
-                        <a:srgbClr val="2C3844"/>
+                        <a:srgbClr val="4A1A5E"/>
                       </a:solidFill>
                       <a:prstDash val="solid"/>
                       <a:round/>
@@ -31082,7 +31082,7 @@
                     </a:lnL>
                     <a:lnR w="12700" cap="flat" cmpd="sng" algn="ctr">
                       <a:solidFill>
-                        <a:srgbClr val="2C3844"/>
+                        <a:srgbClr val="4A1A5E"/>
                       </a:solidFill>
                       <a:prstDash val="solid"/>
                       <a:round/>
@@ -31091,7 +31091,7 @@
                     </a:lnR>
                     <a:lnT w="12700" cap="flat" cmpd="sng" algn="ctr">
                       <a:solidFill>
-                        <a:srgbClr val="2C3844"/>
+                        <a:srgbClr val="4A1A5E"/>
                       </a:solidFill>
                       <a:prstDash val="solid"/>
                       <a:round/>
@@ -31100,7 +31100,7 @@
                     </a:lnT>
                     <a:lnB w="12700" cap="flat" cmpd="sng" algn="ctr">
                       <a:solidFill>
-                        <a:srgbClr val="2C3844"/>
+                        <a:srgbClr val="4A1A5E"/>
                       </a:solidFill>
                       <a:prstDash val="solid"/>
                       <a:round/>
@@ -31133,7 +31133,7 @@
                   <a:tcPr marL="91440" marR="91440" marT="45720" marB="45720" anchor="ctr">
                     <a:lnL w="12700" cap="flat" cmpd="sng" algn="ctr">
                       <a:solidFill>
-                        <a:srgbClr val="2C3844"/>
+                        <a:srgbClr val="4A1A5E"/>
                       </a:solidFill>
                       <a:prstDash val="solid"/>
                       <a:round/>
@@ -31142,7 +31142,7 @@
                     </a:lnL>
                     <a:lnR w="12700" cap="flat" cmpd="sng" algn="ctr">
                       <a:solidFill>
-                        <a:srgbClr val="2C3844"/>
+                        <a:srgbClr val="4A1A5E"/>
                       </a:solidFill>
                       <a:prstDash val="solid"/>
                       <a:round/>
@@ -31151,7 +31151,7 @@
                     </a:lnR>
                     <a:lnT w="12700" cap="flat" cmpd="sng" algn="ctr">
                       <a:solidFill>
-                        <a:srgbClr val="2C3844"/>
+                        <a:srgbClr val="4A1A5E"/>
                       </a:solidFill>
                       <a:prstDash val="solid"/>
                       <a:round/>
@@ -31160,7 +31160,7 @@
                     </a:lnT>
                     <a:lnB w="12700" cap="flat" cmpd="sng" algn="ctr">
                       <a:solidFill>
-                        <a:srgbClr val="2C3844"/>
+                        <a:srgbClr val="4A1A5E"/>
                       </a:solidFill>
                       <a:prstDash val="solid"/>
                       <a:round/>
@@ -31191,7 +31191,7 @@
                   <a:tcPr marL="91440" marR="91440" marT="45720" marB="45720" anchor="ctr">
                     <a:lnL w="12700" cap="flat" cmpd="sng" algn="ctr">
                       <a:solidFill>
-                        <a:srgbClr val="2C3844"/>
+                        <a:srgbClr val="4A1A5E"/>
                       </a:solidFill>
                       <a:prstDash val="solid"/>
                       <a:round/>
@@ -31200,7 +31200,7 @@
                     </a:lnL>
                     <a:lnR w="12700" cap="flat" cmpd="sng" algn="ctr">
                       <a:solidFill>
-                        <a:srgbClr val="2C3844"/>
+                        <a:srgbClr val="4A1A5E"/>
                       </a:solidFill>
                       <a:prstDash val="solid"/>
                       <a:round/>
@@ -31209,7 +31209,7 @@
                     </a:lnR>
                     <a:lnT w="12700" cap="flat" cmpd="sng" algn="ctr">
                       <a:solidFill>
-                        <a:srgbClr val="2C3844"/>
+                        <a:srgbClr val="4A1A5E"/>
                       </a:solidFill>
                       <a:prstDash val="solid"/>
                       <a:round/>
@@ -31218,7 +31218,7 @@
                     </a:lnT>
                     <a:lnB w="12700" cap="flat" cmpd="sng" algn="ctr">
                       <a:solidFill>
-                        <a:srgbClr val="2C3844"/>
+                        <a:srgbClr val="4A1A5E"/>
                       </a:solidFill>
                       <a:prstDash val="solid"/>
                       <a:round/>
@@ -31334,7 +31334,7 @@
             <a:r>
               <a:rPr lang="en-US" sz="3600" b="1" dirty="0">
                 <a:solidFill>
-                  <a:schemeClr val="accent4"/>
+                  <a:schemeClr val="bg2"/>
                 </a:solidFill>
               </a:rPr>
               <a:t>Resetting</a:t>
@@ -31370,7 +31370,7 @@
             <a:r>
               <a:rPr lang="en-US" sz="1200" dirty="0">
                 <a:solidFill>
-                  <a:schemeClr val="accent6"/>
+                  <a:schemeClr val="accent5"/>
                 </a:solidFill>
                 <a:latin typeface="Courier New" pitchFamily="34" charset="0"/>
                 <a:ea typeface="Courier New" pitchFamily="34" charset="-122"/>
@@ -31409,7 +31409,7 @@
             <a:r>
               <a:rPr lang="en-US" sz="2400" dirty="0">
                 <a:solidFill>
-                  <a:schemeClr val="accent4"/>
+                  <a:schemeClr val="bg2"/>
                 </a:solidFill>
               </a:rPr>
               <a:t>Source files are the source of truth and the caches are accelerators, so removing cache files is safe.</a:t>
@@ -31435,11 +31435,11 @@
             </a:avLst>
           </a:prstGeom>
           <a:solidFill>
-            <a:srgbClr val="FFFFFF"/>
+            <a:schemeClr val="tx2"/>
           </a:solidFill>
           <a:ln w="12700">
             <a:solidFill>
-              <a:srgbClr val="D9D5C8"/>
+              <a:srgbClr val="4A1A5E"/>
             </a:solidFill>
             <a:prstDash val="solid"/>
           </a:ln>
@@ -31472,7 +31472,7 @@
             <a:r>
               <a:rPr lang="en-US" sz="2600" b="1" dirty="0">
                 <a:solidFill>
-                  <a:schemeClr val="accent2"/>
+                  <a:schemeClr val="accent1"/>
                 </a:solidFill>
                 <a:latin typeface="Cambria" pitchFamily="34" charset="0"/>
                 <a:ea typeface="Cambria" pitchFamily="34" charset="-122"/>
@@ -31511,7 +31511,7 @@
             <a:r>
               <a:rPr lang="en-US" sz="2800" dirty="0">
                 <a:solidFill>
-                  <a:schemeClr val="accent4"/>
+                  <a:schemeClr val="bg2"/>
                 </a:solidFill>
               </a:rPr>
               <a:t>rm -rf ~/.zshrs removes everything it created</a:t>
@@ -31537,11 +31537,11 @@
             </a:avLst>
           </a:prstGeom>
           <a:solidFill>
-            <a:srgbClr val="FFFFFF"/>
+            <a:schemeClr val="tx2"/>
           </a:solidFill>
           <a:ln w="12700">
             <a:solidFill>
-              <a:srgbClr val="D9D5C8"/>
+              <a:srgbClr val="4A1A5E"/>
             </a:solidFill>
             <a:prstDash val="solid"/>
           </a:ln>
@@ -31574,7 +31574,7 @@
             <a:r>
               <a:rPr lang="en-US" sz="2600" b="1" dirty="0">
                 <a:solidFill>
-                  <a:schemeClr val="accent2"/>
+                  <a:schemeClr val="accent1"/>
                 </a:solidFill>
                 <a:latin typeface="Cambria" pitchFamily="34" charset="0"/>
                 <a:ea typeface="Cambria" pitchFamily="34" charset="-122"/>
@@ -31613,7 +31613,7 @@
             <a:r>
               <a:rPr lang="en-US" sz="2800" dirty="0">
                 <a:solidFill>
-                  <a:schemeClr val="accent4"/>
+                  <a:schemeClr val="bg2"/>
                 </a:solidFill>
               </a:rPr>
               <a:t>Remove files under ~/.zshrs/images</a:t>
@@ -31639,11 +31639,11 @@
             </a:avLst>
           </a:prstGeom>
           <a:solidFill>
-            <a:srgbClr val="FFFFFF"/>
+            <a:schemeClr val="tx2"/>
           </a:solidFill>
           <a:ln w="12700">
             <a:solidFill>
-              <a:srgbClr val="D9D5C8"/>
+              <a:srgbClr val="4A1A5E"/>
             </a:solidFill>
             <a:prstDash val="solid"/>
           </a:ln>
@@ -31676,7 +31676,7 @@
             <a:r>
               <a:rPr lang="en-US" sz="2600" b="1" dirty="0">
                 <a:solidFill>
-                  <a:schemeClr val="accent2"/>
+                  <a:schemeClr val="accent1"/>
                 </a:solidFill>
                 <a:latin typeface="Cambria" pitchFamily="34" charset="0"/>
                 <a:ea typeface="Cambria" pitchFamily="34" charset="-122"/>
@@ -31715,7 +31715,7 @@
             <a:r>
               <a:rPr lang="en-US" sz="2800" dirty="0">
                 <a:solidFill>
-                  <a:schemeClr val="accent4"/>
+                  <a:schemeClr val="bg2"/>
                 </a:solidFill>
               </a:rPr>
               <a:t>Bare zshrs -f skips rc files and engines</a:t>
@@ -31754,7 +31754,7 @@
             <a:lvl1pPr>
               <a:defRPr sz="1200">
                 <a:solidFill>
-                  <a:schemeClr val="accent6"/>
+                  <a:schemeClr val="accent5"/>
                 </a:solidFill>
                 <a:latin typeface="Courier New"/>
                 <a:ea typeface="Courier New"/>
@@ -31959,7 +31959,7 @@
                   <a:tcPr marL="91440" marR="91440" marT="45720" marB="45720" anchor="ctr">
                     <a:lnL w="12700" cap="flat" cmpd="sng" algn="ctr">
                       <a:solidFill>
-                        <a:srgbClr val="2C3844"/>
+                        <a:srgbClr val="4A1A5E"/>
                       </a:solidFill>
                       <a:prstDash val="solid"/>
                       <a:round/>
@@ -31968,7 +31968,7 @@
                     </a:lnL>
                     <a:lnR w="12700" cap="flat" cmpd="sng" algn="ctr">
                       <a:solidFill>
-                        <a:srgbClr val="2C3844"/>
+                        <a:srgbClr val="4A1A5E"/>
                       </a:solidFill>
                       <a:prstDash val="solid"/>
                       <a:round/>
@@ -31977,7 +31977,7 @@
                     </a:lnR>
                     <a:lnT w="12700" cap="flat" cmpd="sng" algn="ctr">
                       <a:solidFill>
-                        <a:srgbClr val="2C3844"/>
+                        <a:srgbClr val="4A1A5E"/>
                       </a:solidFill>
                       <a:prstDash val="solid"/>
                       <a:round/>
@@ -31986,7 +31986,7 @@
                     </a:lnT>
                     <a:lnB w="12700" cap="flat" cmpd="sng" algn="ctr">
                       <a:solidFill>
-                        <a:srgbClr val="2C3844"/>
+                        <a:srgbClr val="4A1A5E"/>
                       </a:solidFill>
                       <a:prstDash val="solid"/>
                       <a:round/>
@@ -32017,7 +32017,7 @@
                   <a:tcPr marL="91440" marR="91440" marT="45720" marB="45720" anchor="ctr">
                     <a:lnL w="12700" cap="flat" cmpd="sng" algn="ctr">
                       <a:solidFill>
-                        <a:srgbClr val="2C3844"/>
+                        <a:srgbClr val="4A1A5E"/>
                       </a:solidFill>
                       <a:prstDash val="solid"/>
                       <a:round/>
@@ -32026,7 +32026,7 @@
                     </a:lnL>
                     <a:lnR w="12700" cap="flat" cmpd="sng" algn="ctr">
                       <a:solidFill>
-                        <a:srgbClr val="2C3844"/>
+                        <a:srgbClr val="4A1A5E"/>
                       </a:solidFill>
                       <a:prstDash val="solid"/>
                       <a:round/>
@@ -32035,7 +32035,7 @@
                     </a:lnR>
                     <a:lnT w="12700" cap="flat" cmpd="sng" algn="ctr">
                       <a:solidFill>
-                        <a:srgbClr val="2C3844"/>
+                        <a:srgbClr val="4A1A5E"/>
                       </a:solidFill>
                       <a:prstDash val="solid"/>
                       <a:round/>
@@ -32044,7 +32044,7 @@
                     </a:lnT>
                     <a:lnB w="12700" cap="flat" cmpd="sng" algn="ctr">
                       <a:solidFill>
-                        <a:srgbClr val="2C3844"/>
+                        <a:srgbClr val="4A1A5E"/>
                       </a:solidFill>
                       <a:prstDash val="solid"/>
                       <a:round/>
@@ -32077,7 +32077,7 @@
                   <a:tcPr marL="91440" marR="91440" marT="45720" marB="45720" anchor="ctr">
                     <a:lnL w="12700" cap="flat" cmpd="sng" algn="ctr">
                       <a:solidFill>
-                        <a:srgbClr val="2C3844"/>
+                        <a:srgbClr val="4A1A5E"/>
                       </a:solidFill>
                       <a:prstDash val="solid"/>
                       <a:round/>
@@ -32086,7 +32086,7 @@
                     </a:lnL>
                     <a:lnR w="12700" cap="flat" cmpd="sng" algn="ctr">
                       <a:solidFill>
-                        <a:srgbClr val="2C3844"/>
+                        <a:srgbClr val="4A1A5E"/>
                       </a:solidFill>
                       <a:prstDash val="solid"/>
                       <a:round/>
@@ -32095,7 +32095,7 @@
                     </a:lnR>
                     <a:lnT w="12700" cap="flat" cmpd="sng" algn="ctr">
                       <a:solidFill>
-                        <a:srgbClr val="2C3844"/>
+                        <a:srgbClr val="4A1A5E"/>
                       </a:solidFill>
                       <a:prstDash val="solid"/>
                       <a:round/>
@@ -32104,7 +32104,7 @@
                     </a:lnT>
                     <a:lnB w="12700" cap="flat" cmpd="sng" algn="ctr">
                       <a:solidFill>
-                        <a:srgbClr val="2C3844"/>
+                        <a:srgbClr val="4A1A5E"/>
                       </a:solidFill>
                       <a:prstDash val="solid"/>
                       <a:round/>
@@ -32135,7 +32135,7 @@
                   <a:tcPr marL="91440" marR="91440" marT="45720" marB="45720" anchor="ctr">
                     <a:lnL w="12700" cap="flat" cmpd="sng" algn="ctr">
                       <a:solidFill>
-                        <a:srgbClr val="2C3844"/>
+                        <a:srgbClr val="4A1A5E"/>
                       </a:solidFill>
                       <a:prstDash val="solid"/>
                       <a:round/>
@@ -32144,7 +32144,7 @@
                     </a:lnL>
                     <a:lnR w="12700" cap="flat" cmpd="sng" algn="ctr">
                       <a:solidFill>
-                        <a:srgbClr val="2C3844"/>
+                        <a:srgbClr val="4A1A5E"/>
                       </a:solidFill>
                       <a:prstDash val="solid"/>
                       <a:round/>
@@ -32153,7 +32153,7 @@
                     </a:lnR>
                     <a:lnT w="12700" cap="flat" cmpd="sng" algn="ctr">
                       <a:solidFill>
-                        <a:srgbClr val="2C3844"/>
+                        <a:srgbClr val="4A1A5E"/>
                       </a:solidFill>
                       <a:prstDash val="solid"/>
                       <a:round/>
@@ -32162,7 +32162,7 @@
                     </a:lnT>
                     <a:lnB w="12700" cap="flat" cmpd="sng" algn="ctr">
                       <a:solidFill>
-                        <a:srgbClr val="2C3844"/>
+                        <a:srgbClr val="4A1A5E"/>
                       </a:solidFill>
                       <a:prstDash val="solid"/>
                       <a:round/>
@@ -32195,7 +32195,7 @@
                   <a:tcPr marL="91440" marR="91440" marT="45720" marB="45720" anchor="ctr">
                     <a:lnL w="12700" cap="flat" cmpd="sng" algn="ctr">
                       <a:solidFill>
-                        <a:srgbClr val="2C3844"/>
+                        <a:srgbClr val="4A1A5E"/>
                       </a:solidFill>
                       <a:prstDash val="solid"/>
                       <a:round/>
@@ -32204,7 +32204,7 @@
                     </a:lnL>
                     <a:lnR w="12700" cap="flat" cmpd="sng" algn="ctr">
                       <a:solidFill>
-                        <a:srgbClr val="2C3844"/>
+                        <a:srgbClr val="4A1A5E"/>
                       </a:solidFill>
                       <a:prstDash val="solid"/>
                       <a:round/>
@@ -32213,7 +32213,7 @@
                     </a:lnR>
                     <a:lnT w="12700" cap="flat" cmpd="sng" algn="ctr">
                       <a:solidFill>
-                        <a:srgbClr val="2C3844"/>
+                        <a:srgbClr val="4A1A5E"/>
                       </a:solidFill>
                       <a:prstDash val="solid"/>
                       <a:round/>
@@ -32222,7 +32222,7 @@
                     </a:lnT>
                     <a:lnB w="12700" cap="flat" cmpd="sng" algn="ctr">
                       <a:solidFill>
-                        <a:srgbClr val="2C3844"/>
+                        <a:srgbClr val="4A1A5E"/>
                       </a:solidFill>
                       <a:prstDash val="solid"/>
                       <a:round/>
@@ -32253,7 +32253,7 @@
                   <a:tcPr marL="91440" marR="91440" marT="45720" marB="45720" anchor="ctr">
                     <a:lnL w="12700" cap="flat" cmpd="sng" algn="ctr">
                       <a:solidFill>
-                        <a:srgbClr val="2C3844"/>
+                        <a:srgbClr val="4A1A5E"/>
                       </a:solidFill>
                       <a:prstDash val="solid"/>
                       <a:round/>
@@ -32262,7 +32262,7 @@
                     </a:lnL>
                     <a:lnR w="12700" cap="flat" cmpd="sng" algn="ctr">
                       <a:solidFill>
-                        <a:srgbClr val="2C3844"/>
+                        <a:srgbClr val="4A1A5E"/>
                       </a:solidFill>
                       <a:prstDash val="solid"/>
                       <a:round/>
@@ -32271,7 +32271,7 @@
                     </a:lnR>
                     <a:lnT w="12700" cap="flat" cmpd="sng" algn="ctr">
                       <a:solidFill>
-                        <a:srgbClr val="2C3844"/>
+                        <a:srgbClr val="4A1A5E"/>
                       </a:solidFill>
                       <a:prstDash val="solid"/>
                       <a:round/>
@@ -32280,7 +32280,7 @@
                     </a:lnT>
                     <a:lnB w="12700" cap="flat" cmpd="sng" algn="ctr">
                       <a:solidFill>
-                        <a:srgbClr val="2C3844"/>
+                        <a:srgbClr val="4A1A5E"/>
                       </a:solidFill>
                       <a:prstDash val="solid"/>
                       <a:round/>
@@ -32313,7 +32313,7 @@
                   <a:tcPr marL="91440" marR="91440" marT="45720" marB="45720" anchor="ctr">
                     <a:lnL w="12700" cap="flat" cmpd="sng" algn="ctr">
                       <a:solidFill>
-                        <a:srgbClr val="2C3844"/>
+                        <a:srgbClr val="4A1A5E"/>
                       </a:solidFill>
                       <a:prstDash val="solid"/>
                       <a:round/>
@@ -32322,7 +32322,7 @@
                     </a:lnL>
                     <a:lnR w="12700" cap="flat" cmpd="sng" algn="ctr">
                       <a:solidFill>
-                        <a:srgbClr val="2C3844"/>
+                        <a:srgbClr val="4A1A5E"/>
                       </a:solidFill>
                       <a:prstDash val="solid"/>
                       <a:round/>
@@ -32331,7 +32331,7 @@
                     </a:lnR>
                     <a:lnT w="12700" cap="flat" cmpd="sng" algn="ctr">
                       <a:solidFill>
-                        <a:srgbClr val="2C3844"/>
+                        <a:srgbClr val="4A1A5E"/>
                       </a:solidFill>
                       <a:prstDash val="solid"/>
                       <a:round/>
@@ -32340,7 +32340,7 @@
                     </a:lnT>
                     <a:lnB w="12700" cap="flat" cmpd="sng" algn="ctr">
                       <a:solidFill>
-                        <a:srgbClr val="2C3844"/>
+                        <a:srgbClr val="4A1A5E"/>
                       </a:solidFill>
                       <a:prstDash val="solid"/>
                       <a:round/>
@@ -32371,7 +32371,7 @@
                   <a:tcPr marL="91440" marR="91440" marT="45720" marB="45720" anchor="ctr">
                     <a:lnL w="12700" cap="flat" cmpd="sng" algn="ctr">
                       <a:solidFill>
-                        <a:srgbClr val="2C3844"/>
+                        <a:srgbClr val="4A1A5E"/>
                       </a:solidFill>
                       <a:prstDash val="solid"/>
                       <a:round/>
@@ -32380,7 +32380,7 @@
                     </a:lnL>
                     <a:lnR w="12700" cap="flat" cmpd="sng" algn="ctr">
                       <a:solidFill>
-                        <a:srgbClr val="2C3844"/>
+                        <a:srgbClr val="4A1A5E"/>
                       </a:solidFill>
                       <a:prstDash val="solid"/>
                       <a:round/>
@@ -32389,7 +32389,7 @@
                     </a:lnR>
                     <a:lnT w="12700" cap="flat" cmpd="sng" algn="ctr">
                       <a:solidFill>
-                        <a:srgbClr val="2C3844"/>
+                        <a:srgbClr val="4A1A5E"/>
                       </a:solidFill>
                       <a:prstDash val="solid"/>
                       <a:round/>
@@ -32398,7 +32398,7 @@
                     </a:lnT>
                     <a:lnB w="12700" cap="flat" cmpd="sng" algn="ctr">
                       <a:solidFill>
-                        <a:srgbClr val="2C3844"/>
+                        <a:srgbClr val="4A1A5E"/>
                       </a:solidFill>
                       <a:prstDash val="solid"/>
                       <a:round/>
@@ -32431,7 +32431,7 @@
                   <a:tcPr marL="91440" marR="91440" marT="45720" marB="45720" anchor="ctr">
                     <a:lnL w="12700" cap="flat" cmpd="sng" algn="ctr">
                       <a:solidFill>
-                        <a:srgbClr val="2C3844"/>
+                        <a:srgbClr val="4A1A5E"/>
                       </a:solidFill>
                       <a:prstDash val="solid"/>
                       <a:round/>
@@ -32440,7 +32440,7 @@
                     </a:lnL>
                     <a:lnR w="12700" cap="flat" cmpd="sng" algn="ctr">
                       <a:solidFill>
-                        <a:srgbClr val="2C3844"/>
+                        <a:srgbClr val="4A1A5E"/>
                       </a:solidFill>
                       <a:prstDash val="solid"/>
                       <a:round/>
@@ -32449,7 +32449,7 @@
                     </a:lnR>
                     <a:lnT w="12700" cap="flat" cmpd="sng" algn="ctr">
                       <a:solidFill>
-                        <a:srgbClr val="2C3844"/>
+                        <a:srgbClr val="4A1A5E"/>
                       </a:solidFill>
                       <a:prstDash val="solid"/>
                       <a:round/>
@@ -32458,7 +32458,7 @@
                     </a:lnT>
                     <a:lnB w="12700" cap="flat" cmpd="sng" algn="ctr">
                       <a:solidFill>
-                        <a:srgbClr val="2C3844"/>
+                        <a:srgbClr val="4A1A5E"/>
                       </a:solidFill>
                       <a:prstDash val="solid"/>
                       <a:round/>
@@ -32489,7 +32489,7 @@
                   <a:tcPr marL="91440" marR="91440" marT="45720" marB="45720" anchor="ctr">
                     <a:lnL w="12700" cap="flat" cmpd="sng" algn="ctr">
                       <a:solidFill>
-                        <a:srgbClr val="2C3844"/>
+                        <a:srgbClr val="4A1A5E"/>
                       </a:solidFill>
                       <a:prstDash val="solid"/>
                       <a:round/>
@@ -32498,7 +32498,7 @@
                     </a:lnL>
                     <a:lnR w="12700" cap="flat" cmpd="sng" algn="ctr">
                       <a:solidFill>
-                        <a:srgbClr val="2C3844"/>
+                        <a:srgbClr val="4A1A5E"/>
                       </a:solidFill>
                       <a:prstDash val="solid"/>
                       <a:round/>
@@ -32507,7 +32507,7 @@
                     </a:lnR>
                     <a:lnT w="12700" cap="flat" cmpd="sng" algn="ctr">
                       <a:solidFill>
-                        <a:srgbClr val="2C3844"/>
+                        <a:srgbClr val="4A1A5E"/>
                       </a:solidFill>
                       <a:prstDash val="solid"/>
                       <a:round/>
@@ -32516,7 +32516,7 @@
                     </a:lnT>
                     <a:lnB w="12700" cap="flat" cmpd="sng" algn="ctr">
                       <a:solidFill>
-                        <a:srgbClr val="2C3844"/>
+                        <a:srgbClr val="4A1A5E"/>
                       </a:solidFill>
                       <a:prstDash val="solid"/>
                       <a:round/>
@@ -32549,7 +32549,7 @@
                   <a:tcPr marL="91440" marR="91440" marT="45720" marB="45720" anchor="ctr">
                     <a:lnL w="12700" cap="flat" cmpd="sng" algn="ctr">
                       <a:solidFill>
-                        <a:srgbClr val="2C3844"/>
+                        <a:srgbClr val="4A1A5E"/>
                       </a:solidFill>
                       <a:prstDash val="solid"/>
                       <a:round/>
@@ -32558,7 +32558,7 @@
                     </a:lnL>
                     <a:lnR w="12700" cap="flat" cmpd="sng" algn="ctr">
                       <a:solidFill>
-                        <a:srgbClr val="2C3844"/>
+                        <a:srgbClr val="4A1A5E"/>
                       </a:solidFill>
                       <a:prstDash val="solid"/>
                       <a:round/>
@@ -32567,7 +32567,7 @@
                     </a:lnR>
                     <a:lnT w="12700" cap="flat" cmpd="sng" algn="ctr">
                       <a:solidFill>
-                        <a:srgbClr val="2C3844"/>
+                        <a:srgbClr val="4A1A5E"/>
                       </a:solidFill>
                       <a:prstDash val="solid"/>
                       <a:round/>
@@ -32576,7 +32576,7 @@
                     </a:lnT>
                     <a:lnB w="12700" cap="flat" cmpd="sng" algn="ctr">
                       <a:solidFill>
-                        <a:srgbClr val="2C3844"/>
+                        <a:srgbClr val="4A1A5E"/>
                       </a:solidFill>
                       <a:prstDash val="solid"/>
                       <a:round/>
@@ -32607,7 +32607,7 @@
                   <a:tcPr marL="91440" marR="91440" marT="45720" marB="45720" anchor="ctr">
                     <a:lnL w="12700" cap="flat" cmpd="sng" algn="ctr">
                       <a:solidFill>
-                        <a:srgbClr val="2C3844"/>
+                        <a:srgbClr val="4A1A5E"/>
                       </a:solidFill>
                       <a:prstDash val="solid"/>
                       <a:round/>
@@ -32616,7 +32616,7 @@
                     </a:lnL>
                     <a:lnR w="12700" cap="flat" cmpd="sng" algn="ctr">
                       <a:solidFill>
-                        <a:srgbClr val="2C3844"/>
+                        <a:srgbClr val="4A1A5E"/>
                       </a:solidFill>
                       <a:prstDash val="solid"/>
                       <a:round/>
@@ -32625,7 +32625,7 @@
                     </a:lnR>
                     <a:lnT w="12700" cap="flat" cmpd="sng" algn="ctr">
                       <a:solidFill>
-                        <a:srgbClr val="2C3844"/>
+                        <a:srgbClr val="4A1A5E"/>
                       </a:solidFill>
                       <a:prstDash val="solid"/>
                       <a:round/>
@@ -32634,7 +32634,7 @@
                     </a:lnT>
                     <a:lnB w="12700" cap="flat" cmpd="sng" algn="ctr">
                       <a:solidFill>
-                        <a:srgbClr val="2C3844"/>
+                        <a:srgbClr val="4A1A5E"/>
                       </a:solidFill>
                       <a:prstDash val="solid"/>
                       <a:round/>
@@ -32750,7 +32750,7 @@
             <a:r>
               <a:rPr lang="en-US" sz="3600" b="1" dirty="0">
                 <a:solidFill>
-                  <a:schemeClr val="accent4"/>
+                  <a:schemeClr val="bg2"/>
                 </a:solidFill>
               </a:rPr>
               <a:t>Reporting a problem</a:t>
@@ -32786,7 +32786,7 @@
             <a:r>
               <a:rPr lang="en-US" sz="1200" dirty="0">
                 <a:solidFill>
-                  <a:schemeClr val="accent6"/>
+                  <a:schemeClr val="accent5"/>
                 </a:solidFill>
                 <a:latin typeface="Courier New" pitchFamily="34" charset="0"/>
                 <a:ea typeface="Courier New" pitchFamily="34" charset="-122"/>
@@ -32825,7 +32825,7 @@
             <a:r>
               <a:rPr lang="en-US" sz="2300" dirty="0">
                 <a:solidFill>
-                  <a:schemeClr val="accent4"/>
+                  <a:schemeClr val="bg2"/>
                 </a:solidFill>
               </a:rPr>
               <a:t>Parity bugs are easiest to fix with a one-line repro that runs in both shells. Use -f on both sides so no rc file differs.</a:t>
@@ -32851,11 +32851,11 @@
             </a:avLst>
           </a:prstGeom>
           <a:solidFill>
-            <a:schemeClr val="accent4"/>
+            <a:schemeClr val="tx2"/>
           </a:solidFill>
           <a:ln w="12700">
             <a:solidFill>
-              <a:srgbClr val="2C3844"/>
+              <a:srgbClr val="4A1A5E"/>
             </a:solidFill>
             <a:prstDash val="solid"/>
           </a:ln>
@@ -32954,7 +32954,7 @@
             <a:r>
               <a:rPr lang="en-US" sz="3000" dirty="0">
                 <a:solidFill>
-                  <a:schemeClr val="accent4"/>
+                  <a:schemeClr val="bg2"/>
                 </a:solidFill>
               </a:rPr>
               <a:t>Open an issue with both outputs</a:t>
@@ -32972,7 +32972,7 @@
             <a:r>
               <a:rPr lang="en-US" sz="3000" dirty="0">
                 <a:solidFill>
-                  <a:schemeClr val="accent4"/>
+                  <a:schemeClr val="bg2"/>
                 </a:solidFill>
               </a:rPr>
               <a:t>Include the version: zshrs --version</a:t>
@@ -32990,7 +32990,7 @@
             <a:r>
               <a:rPr lang="en-US" sz="3000" dirty="0">
                 <a:solidFill>
-                  <a:schemeClr val="accent4"/>
+                  <a:schemeClr val="bg2"/>
                 </a:solidFill>
               </a:rPr>
               <a:t>Include zshrs.log if it crashed</a:t>
@@ -33029,7 +33029,7 @@
             <a:lvl1pPr>
               <a:defRPr sz="1200">
                 <a:solidFill>
-                  <a:schemeClr val="accent6"/>
+                  <a:schemeClr val="accent5"/>
                 </a:solidFill>
                 <a:latin typeface="Courier New"/>
                 <a:ea typeface="Courier New"/>
@@ -33206,7 +33206,7 @@
           </a:solidFill>
           <a:ln w="12700">
             <a:solidFill>
-              <a:srgbClr val="2C3844"/>
+              <a:srgbClr val="4A1A5E"/>
             </a:solidFill>
             <a:prstDash val="solid"/>
           </a:ln>
@@ -33536,7 +33536,7 @@
             <a:r>
               <a:rPr lang="en-US" sz="3600" b="1" dirty="0">
                 <a:solidFill>
-                  <a:schemeClr val="accent4"/>
+                  <a:schemeClr val="bg2"/>
                 </a:solidFill>
               </a:rPr>
               <a:t>Cheat sheet: knobs</a:t>
@@ -33572,7 +33572,7 @@
             <a:r>
               <a:rPr lang="en-US" sz="1200" dirty="0">
                 <a:solidFill>
-                  <a:schemeClr val="accent6"/>
+                  <a:schemeClr val="accent5"/>
                 </a:solidFill>
                 <a:latin typeface="Courier New" pitchFamily="34" charset="0"/>
                 <a:ea typeface="Courier New" pitchFamily="34" charset="-122"/>
@@ -33611,7 +33611,7 @@
             <a:r>
               <a:rPr lang="en-US" sz="2400" dirty="0">
                 <a:solidFill>
-                  <a:schemeClr val="accent4"/>
+                  <a:schemeClr val="bg2"/>
                 </a:solidFill>
               </a:rPr>
               <a:t>Config keys and environment variables from the README.</a:t>
@@ -33658,7 +33658,7 @@
                       <a:r>
                         <a:rPr lang="en-US" sz="1600" b="1" dirty="0">
                           <a:solidFill>
-                            <a:schemeClr val="accent2"/>
+                            <a:schemeClr val="accent1"/>
                           </a:solidFill>
                         </a:rPr>
                         <a:t>Name</a:t>
@@ -33669,7 +33669,7 @@
                   <a:tcPr marL="91440" marR="91440" marT="45720" marB="45720" anchor="ctr">
                     <a:lnL w="12700" cap="flat" cmpd="sng" algn="ctr">
                       <a:solidFill>
-                        <a:srgbClr val="D9D5C8"/>
+                        <a:srgbClr val="4A1A5E"/>
                       </a:solidFill>
                       <a:prstDash val="solid"/>
                       <a:round/>
@@ -33678,7 +33678,7 @@
                     </a:lnL>
                     <a:lnR w="12700" cap="flat" cmpd="sng" algn="ctr">
                       <a:solidFill>
-                        <a:srgbClr val="D9D5C8"/>
+                        <a:srgbClr val="4A1A5E"/>
                       </a:solidFill>
                       <a:prstDash val="solid"/>
                       <a:round/>
@@ -33687,7 +33687,7 @@
                     </a:lnR>
                     <a:lnT w="12700" cap="flat" cmpd="sng" algn="ctr">
                       <a:solidFill>
-                        <a:srgbClr val="D9D5C8"/>
+                        <a:srgbClr val="4A1A5E"/>
                       </a:solidFill>
                       <a:prstDash val="solid"/>
                       <a:round/>
@@ -33696,7 +33696,7 @@
                     </a:lnT>
                     <a:lnB w="12700" cap="flat" cmpd="sng" algn="ctr">
                       <a:solidFill>
-                        <a:srgbClr val="D9D5C8"/>
+                        <a:srgbClr val="4A1A5E"/>
                       </a:solidFill>
                       <a:prstDash val="solid"/>
                       <a:round/>
@@ -33716,7 +33716,7 @@
                       <a:r>
                         <a:rPr lang="en-US" sz="1600" b="1" dirty="0">
                           <a:solidFill>
-                            <a:schemeClr val="accent2"/>
+                            <a:schemeClr val="accent1"/>
                           </a:solidFill>
                         </a:rPr>
                         <a:t>What</a:t>
@@ -33727,7 +33727,7 @@
                   <a:tcPr marL="91440" marR="91440" marT="45720" marB="45720" anchor="ctr">
                     <a:lnL w="12700" cap="flat" cmpd="sng" algn="ctr">
                       <a:solidFill>
-                        <a:srgbClr val="D9D5C8"/>
+                        <a:srgbClr val="4A1A5E"/>
                       </a:solidFill>
                       <a:prstDash val="solid"/>
                       <a:round/>
@@ -33736,7 +33736,7 @@
                     </a:lnL>
                     <a:lnR w="12700" cap="flat" cmpd="sng" algn="ctr">
                       <a:solidFill>
-                        <a:srgbClr val="D9D5C8"/>
+                        <a:srgbClr val="4A1A5E"/>
                       </a:solidFill>
                       <a:prstDash val="solid"/>
                       <a:round/>
@@ -33745,7 +33745,7 @@
                     </a:lnR>
                     <a:lnT w="12700" cap="flat" cmpd="sng" algn="ctr">
                       <a:solidFill>
-                        <a:srgbClr val="D9D5C8"/>
+                        <a:srgbClr val="4A1A5E"/>
                       </a:solidFill>
                       <a:prstDash val="solid"/>
                       <a:round/>
@@ -33754,7 +33754,7 @@
                     </a:lnT>
                     <a:lnB w="12700" cap="flat" cmpd="sng" algn="ctr">
                       <a:solidFill>
-                        <a:srgbClr val="D9D5C8"/>
+                        <a:srgbClr val="4A1A5E"/>
                       </a:solidFill>
                       <a:prstDash val="solid"/>
                       <a:round/>
@@ -33776,7 +33776,7 @@
                       <a:r>
                         <a:rPr lang="en-US" sz="1600" dirty="0">
                           <a:solidFill>
-                            <a:schemeClr val="accent4"/>
+                            <a:schemeClr val="bg2"/>
                           </a:solidFill>
                         </a:rPr>
                         <a:t>[zle] autosuggest, syntax_highlight, history_search, autopair</a:t>
@@ -33787,7 +33787,7 @@
                   <a:tcPr marL="91440" marR="91440" marT="45720" marB="45720" anchor="ctr">
                     <a:lnL w="12700" cap="flat" cmpd="sng" algn="ctr">
                       <a:solidFill>
-                        <a:srgbClr val="D9D5C8"/>
+                        <a:srgbClr val="4A1A5E"/>
                       </a:solidFill>
                       <a:prstDash val="solid"/>
                       <a:round/>
@@ -33796,7 +33796,7 @@
                     </a:lnL>
                     <a:lnR w="12700" cap="flat" cmpd="sng" algn="ctr">
                       <a:solidFill>
-                        <a:srgbClr val="D9D5C8"/>
+                        <a:srgbClr val="4A1A5E"/>
                       </a:solidFill>
                       <a:prstDash val="solid"/>
                       <a:round/>
@@ -33805,7 +33805,7 @@
                     </a:lnR>
                     <a:lnT w="12700" cap="flat" cmpd="sng" algn="ctr">
                       <a:solidFill>
-                        <a:srgbClr val="D9D5C8"/>
+                        <a:srgbClr val="4A1A5E"/>
                       </a:solidFill>
                       <a:prstDash val="solid"/>
                       <a:round/>
@@ -33814,7 +33814,7 @@
                     </a:lnT>
                     <a:lnB w="12700" cap="flat" cmpd="sng" algn="ctr">
                       <a:solidFill>
-                        <a:srgbClr val="D9D5C8"/>
+                        <a:srgbClr val="4A1A5E"/>
                       </a:solidFill>
                       <a:prstDash val="solid"/>
                       <a:round/>
@@ -33834,7 +33834,7 @@
                       <a:r>
                         <a:rPr lang="en-US" sz="1600" dirty="0">
                           <a:solidFill>
-                            <a:schemeClr val="accent4"/>
+                            <a:schemeClr val="bg2"/>
                           </a:solidFill>
                         </a:rPr>
                         <a:t>Engines on or off</a:t>
@@ -33845,7 +33845,7 @@
                   <a:tcPr marL="91440" marR="91440" marT="45720" marB="45720" anchor="ctr">
                     <a:lnL w="12700" cap="flat" cmpd="sng" algn="ctr">
                       <a:solidFill>
-                        <a:srgbClr val="D9D5C8"/>
+                        <a:srgbClr val="4A1A5E"/>
                       </a:solidFill>
                       <a:prstDash val="solid"/>
                       <a:round/>
@@ -33854,7 +33854,7 @@
                     </a:lnL>
                     <a:lnR w="12700" cap="flat" cmpd="sng" algn="ctr">
                       <a:solidFill>
-                        <a:srgbClr val="D9D5C8"/>
+                        <a:srgbClr val="4A1A5E"/>
                       </a:solidFill>
                       <a:prstDash val="solid"/>
                       <a:round/>
@@ -33863,7 +33863,7 @@
                     </a:lnR>
                     <a:lnT w="12700" cap="flat" cmpd="sng" algn="ctr">
                       <a:solidFill>
-                        <a:srgbClr val="D9D5C8"/>
+                        <a:srgbClr val="4A1A5E"/>
                       </a:solidFill>
                       <a:prstDash val="solid"/>
                       <a:round/>
@@ -33872,7 +33872,7 @@
                     </a:lnT>
                     <a:lnB w="12700" cap="flat" cmpd="sng" algn="ctr">
                       <a:solidFill>
-                        <a:srgbClr val="D9D5C8"/>
+                        <a:srgbClr val="4A1A5E"/>
                       </a:solidFill>
                       <a:prstDash val="solid"/>
                       <a:round/>
@@ -33894,7 +33894,7 @@
                       <a:r>
                         <a:rPr lang="en-US" sz="1600" dirty="0">
                           <a:solidFill>
-                            <a:schemeClr val="accent4"/>
+                            <a:schemeClr val="bg2"/>
                           </a:solidFill>
                         </a:rPr>
                         <a:t>ZSHRS_NATIVE_ZLE_FX=0</a:t>
@@ -33905,7 +33905,7 @@
                   <a:tcPr marL="91440" marR="91440" marT="45720" marB="45720" anchor="ctr">
                     <a:lnL w="12700" cap="flat" cmpd="sng" algn="ctr">
                       <a:solidFill>
-                        <a:srgbClr val="D9D5C8"/>
+                        <a:srgbClr val="4A1A5E"/>
                       </a:solidFill>
                       <a:prstDash val="solid"/>
                       <a:round/>
@@ -33914,7 +33914,7 @@
                     </a:lnL>
                     <a:lnR w="12700" cap="flat" cmpd="sng" algn="ctr">
                       <a:solidFill>
-                        <a:srgbClr val="D9D5C8"/>
+                        <a:srgbClr val="4A1A5E"/>
                       </a:solidFill>
                       <a:prstDash val="solid"/>
                       <a:round/>
@@ -33923,7 +33923,7 @@
                     </a:lnR>
                     <a:lnT w="12700" cap="flat" cmpd="sng" algn="ctr">
                       <a:solidFill>
-                        <a:srgbClr val="D9D5C8"/>
+                        <a:srgbClr val="4A1A5E"/>
                       </a:solidFill>
                       <a:prstDash val="solid"/>
                       <a:round/>
@@ -33932,7 +33932,7 @@
                     </a:lnT>
                     <a:lnB w="12700" cap="flat" cmpd="sng" algn="ctr">
                       <a:solidFill>
-                        <a:srgbClr val="D9D5C8"/>
+                        <a:srgbClr val="4A1A5E"/>
                       </a:solidFill>
                       <a:prstDash val="solid"/>
                       <a:round/>
@@ -33952,7 +33952,7 @@
                       <a:r>
                         <a:rPr lang="en-US" sz="1600" dirty="0">
                           <a:solidFill>
-                            <a:schemeClr val="accent4"/>
+                            <a:schemeClr val="bg2"/>
                           </a:solidFill>
                         </a:rPr>
                         <a:t>Disable all engines</a:t>
@@ -33963,7 +33963,7 @@
                   <a:tcPr marL="91440" marR="91440" marT="45720" marB="45720" anchor="ctr">
                     <a:lnL w="12700" cap="flat" cmpd="sng" algn="ctr">
                       <a:solidFill>
-                        <a:srgbClr val="D9D5C8"/>
+                        <a:srgbClr val="4A1A5E"/>
                       </a:solidFill>
                       <a:prstDash val="solid"/>
                       <a:round/>
@@ -33972,7 +33972,7 @@
                     </a:lnL>
                     <a:lnR w="12700" cap="flat" cmpd="sng" algn="ctr">
                       <a:solidFill>
-                        <a:srgbClr val="D9D5C8"/>
+                        <a:srgbClr val="4A1A5E"/>
                       </a:solidFill>
                       <a:prstDash val="solid"/>
                       <a:round/>
@@ -33981,7 +33981,7 @@
                     </a:lnR>
                     <a:lnT w="12700" cap="flat" cmpd="sng" algn="ctr">
                       <a:solidFill>
-                        <a:srgbClr val="D9D5C8"/>
+                        <a:srgbClr val="4A1A5E"/>
                       </a:solidFill>
                       <a:prstDash val="solid"/>
                       <a:round/>
@@ -33990,7 +33990,7 @@
                     </a:lnT>
                     <a:lnB w="12700" cap="flat" cmpd="sng" algn="ctr">
                       <a:solidFill>
-                        <a:srgbClr val="D9D5C8"/>
+                        <a:srgbClr val="4A1A5E"/>
                       </a:solidFill>
                       <a:prstDash val="solid"/>
                       <a:round/>
@@ -34012,7 +34012,7 @@
                       <a:r>
                         <a:rPr lang="en-US" sz="1600" dirty="0">
                           <a:solidFill>
-                            <a:schemeClr val="accent4"/>
+                            <a:schemeClr val="bg2"/>
                           </a:solidFill>
                         </a:rPr>
                         <a:t>ZSHRS_ZLE_*_BUDGET_MS</a:t>
@@ -34023,7 +34023,7 @@
                   <a:tcPr marL="91440" marR="91440" marT="45720" marB="45720" anchor="ctr">
                     <a:lnL w="12700" cap="flat" cmpd="sng" algn="ctr">
                       <a:solidFill>
-                        <a:srgbClr val="D9D5C8"/>
+                        <a:srgbClr val="4A1A5E"/>
                       </a:solidFill>
                       <a:prstDash val="solid"/>
                       <a:round/>
@@ -34032,7 +34032,7 @@
                     </a:lnL>
                     <a:lnR w="12700" cap="flat" cmpd="sng" algn="ctr">
                       <a:solidFill>
-                        <a:srgbClr val="D9D5C8"/>
+                        <a:srgbClr val="4A1A5E"/>
                       </a:solidFill>
                       <a:prstDash val="solid"/>
                       <a:round/>
@@ -34041,7 +34041,7 @@
                     </a:lnR>
                     <a:lnT w="12700" cap="flat" cmpd="sng" algn="ctr">
                       <a:solidFill>
-                        <a:srgbClr val="D9D5C8"/>
+                        <a:srgbClr val="4A1A5E"/>
                       </a:solidFill>
                       <a:prstDash val="solid"/>
                       <a:round/>
@@ -34050,7 +34050,7 @@
                     </a:lnT>
                     <a:lnB w="12700" cap="flat" cmpd="sng" algn="ctr">
                       <a:solidFill>
-                        <a:srgbClr val="D9D5C8"/>
+                        <a:srgbClr val="4A1A5E"/>
                       </a:solidFill>
                       <a:prstDash val="solid"/>
                       <a:round/>
@@ -34070,7 +34070,7 @@
                       <a:r>
                         <a:rPr lang="en-US" sz="1600" dirty="0">
                           <a:solidFill>
-                            <a:schemeClr val="accent4"/>
+                            <a:schemeClr val="bg2"/>
                           </a:solidFill>
                         </a:rPr>
                         <a:t>Per-keystroke budget</a:t>
@@ -34081,7 +34081,7 @@
                   <a:tcPr marL="91440" marR="91440" marT="45720" marB="45720" anchor="ctr">
                     <a:lnL w="12700" cap="flat" cmpd="sng" algn="ctr">
                       <a:solidFill>
-                        <a:srgbClr val="D9D5C8"/>
+                        <a:srgbClr val="4A1A5E"/>
                       </a:solidFill>
                       <a:prstDash val="solid"/>
                       <a:round/>
@@ -34090,7 +34090,7 @@
                     </a:lnL>
                     <a:lnR w="12700" cap="flat" cmpd="sng" algn="ctr">
                       <a:solidFill>
-                        <a:srgbClr val="D9D5C8"/>
+                        <a:srgbClr val="4A1A5E"/>
                       </a:solidFill>
                       <a:prstDash val="solid"/>
                       <a:round/>
@@ -34099,7 +34099,7 @@
                     </a:lnR>
                     <a:lnT w="12700" cap="flat" cmpd="sng" algn="ctr">
                       <a:solidFill>
-                        <a:srgbClr val="D9D5C8"/>
+                        <a:srgbClr val="4A1A5E"/>
                       </a:solidFill>
                       <a:prstDash val="solid"/>
                       <a:round/>
@@ -34108,7 +34108,7 @@
                     </a:lnT>
                     <a:lnB w="12700" cap="flat" cmpd="sng" algn="ctr">
                       <a:solidFill>
-                        <a:srgbClr val="D9D5C8"/>
+                        <a:srgbClr val="4A1A5E"/>
                       </a:solidFill>
                       <a:prstDash val="solid"/>
                       <a:round/>
@@ -34130,7 +34130,7 @@
                       <a:r>
                         <a:rPr lang="en-US" sz="1600" dirty="0">
                           <a:solidFill>
-                            <a:schemeClr val="accent4"/>
+                            <a:schemeClr val="bg2"/>
                           </a:solidFill>
                         </a:rPr>
                         <a:t>ZSHRS_HOME</a:t>
@@ -34141,7 +34141,7 @@
                   <a:tcPr marL="91440" marR="91440" marT="45720" marB="45720" anchor="ctr">
                     <a:lnL w="12700" cap="flat" cmpd="sng" algn="ctr">
                       <a:solidFill>
-                        <a:srgbClr val="D9D5C8"/>
+                        <a:srgbClr val="4A1A5E"/>
                       </a:solidFill>
                       <a:prstDash val="solid"/>
                       <a:round/>
@@ -34150,7 +34150,7 @@
                     </a:lnL>
                     <a:lnR w="12700" cap="flat" cmpd="sng" algn="ctr">
                       <a:solidFill>
-                        <a:srgbClr val="D9D5C8"/>
+                        <a:srgbClr val="4A1A5E"/>
                       </a:solidFill>
                       <a:prstDash val="solid"/>
                       <a:round/>
@@ -34159,7 +34159,7 @@
                     </a:lnR>
                     <a:lnT w="12700" cap="flat" cmpd="sng" algn="ctr">
                       <a:solidFill>
-                        <a:srgbClr val="D9D5C8"/>
+                        <a:srgbClr val="4A1A5E"/>
                       </a:solidFill>
                       <a:prstDash val="solid"/>
                       <a:round/>
@@ -34168,7 +34168,7 @@
                     </a:lnT>
                     <a:lnB w="12700" cap="flat" cmpd="sng" algn="ctr">
                       <a:solidFill>
-                        <a:srgbClr val="D9D5C8"/>
+                        <a:srgbClr val="4A1A5E"/>
                       </a:solidFill>
                       <a:prstDash val="solid"/>
                       <a:round/>
@@ -34188,7 +34188,7 @@
                       <a:r>
                         <a:rPr lang="en-US" sz="1600" dirty="0">
                           <a:solidFill>
-                            <a:schemeClr val="accent4"/>
+                            <a:schemeClr val="bg2"/>
                           </a:solidFill>
                         </a:rPr>
                         <a:t>Config and cache directory</a:t>
@@ -34199,7 +34199,7 @@
                   <a:tcPr marL="91440" marR="91440" marT="45720" marB="45720" anchor="ctr">
                     <a:lnL w="12700" cap="flat" cmpd="sng" algn="ctr">
                       <a:solidFill>
-                        <a:srgbClr val="D9D5C8"/>
+                        <a:srgbClr val="4A1A5E"/>
                       </a:solidFill>
                       <a:prstDash val="solid"/>
                       <a:round/>
@@ -34208,7 +34208,7 @@
                     </a:lnL>
                     <a:lnR w="12700" cap="flat" cmpd="sng" algn="ctr">
                       <a:solidFill>
-                        <a:srgbClr val="D9D5C8"/>
+                        <a:srgbClr val="4A1A5E"/>
                       </a:solidFill>
                       <a:prstDash val="solid"/>
                       <a:round/>
@@ -34217,7 +34217,7 @@
                     </a:lnR>
                     <a:lnT w="12700" cap="flat" cmpd="sng" algn="ctr">
                       <a:solidFill>
-                        <a:srgbClr val="D9D5C8"/>
+                        <a:srgbClr val="4A1A5E"/>
                       </a:solidFill>
                       <a:prstDash val="solid"/>
                       <a:round/>
@@ -34226,7 +34226,7 @@
                     </a:lnT>
                     <a:lnB w="12700" cap="flat" cmpd="sng" algn="ctr">
                       <a:solidFill>
-                        <a:srgbClr val="D9D5C8"/>
+                        <a:srgbClr val="4A1A5E"/>
                       </a:solidFill>
                       <a:prstDash val="solid"/>
                       <a:round/>
@@ -34248,7 +34248,7 @@
                       <a:r>
                         <a:rPr lang="en-US" sz="1600" dirty="0">
                           <a:solidFill>
-                            <a:schemeClr val="accent4"/>
+                            <a:schemeClr val="bg2"/>
                           </a:solidFill>
                         </a:rPr>
                         <a:t>ZSHRS_STARTUP_TRACE=1</a:t>
@@ -34259,7 +34259,7 @@
                   <a:tcPr marL="91440" marR="91440" marT="45720" marB="45720" anchor="ctr">
                     <a:lnL w="12700" cap="flat" cmpd="sng" algn="ctr">
                       <a:solidFill>
-                        <a:srgbClr val="D9D5C8"/>
+                        <a:srgbClr val="4A1A5E"/>
                       </a:solidFill>
                       <a:prstDash val="solid"/>
                       <a:round/>
@@ -34268,7 +34268,7 @@
                     </a:lnL>
                     <a:lnR w="12700" cap="flat" cmpd="sng" algn="ctr">
                       <a:solidFill>
-                        <a:srgbClr val="D9D5C8"/>
+                        <a:srgbClr val="4A1A5E"/>
                       </a:solidFill>
                       <a:prstDash val="solid"/>
                       <a:round/>
@@ -34277,7 +34277,7 @@
                     </a:lnR>
                     <a:lnT w="12700" cap="flat" cmpd="sng" algn="ctr">
                       <a:solidFill>
-                        <a:srgbClr val="D9D5C8"/>
+                        <a:srgbClr val="4A1A5E"/>
                       </a:solidFill>
                       <a:prstDash val="solid"/>
                       <a:round/>
@@ -34286,7 +34286,7 @@
                     </a:lnT>
                     <a:lnB w="12700" cap="flat" cmpd="sng" algn="ctr">
                       <a:solidFill>
-                        <a:srgbClr val="D9D5C8"/>
+                        <a:srgbClr val="4A1A5E"/>
                       </a:solidFill>
                       <a:prstDash val="solid"/>
                       <a:round/>
@@ -34306,7 +34306,7 @@
                       <a:r>
                         <a:rPr lang="en-US" sz="1600" dirty="0">
                           <a:solidFill>
-                            <a:schemeClr val="accent4"/>
+                            <a:schemeClr val="bg2"/>
                           </a:solidFill>
                         </a:rPr>
                         <a:t>Startup phase timing</a:t>
@@ -34317,7 +34317,7 @@
                   <a:tcPr marL="91440" marR="91440" marT="45720" marB="45720" anchor="ctr">
                     <a:lnL w="12700" cap="flat" cmpd="sng" algn="ctr">
                       <a:solidFill>
-                        <a:srgbClr val="D9D5C8"/>
+                        <a:srgbClr val="4A1A5E"/>
                       </a:solidFill>
                       <a:prstDash val="solid"/>
                       <a:round/>
@@ -34326,7 +34326,7 @@
                     </a:lnL>
                     <a:lnR w="12700" cap="flat" cmpd="sng" algn="ctr">
                       <a:solidFill>
-                        <a:srgbClr val="D9D5C8"/>
+                        <a:srgbClr val="4A1A5E"/>
                       </a:solidFill>
                       <a:prstDash val="solid"/>
                       <a:round/>
@@ -34335,7 +34335,7 @@
                     </a:lnR>
                     <a:lnT w="12700" cap="flat" cmpd="sng" algn="ctr">
                       <a:solidFill>
-                        <a:srgbClr val="D9D5C8"/>
+                        <a:srgbClr val="4A1A5E"/>
                       </a:solidFill>
                       <a:prstDash val="solid"/>
                       <a:round/>
@@ -34344,7 +34344,7 @@
                     </a:lnT>
                     <a:lnB w="12700" cap="flat" cmpd="sng" algn="ctr">
                       <a:solidFill>
-                        <a:srgbClr val="D9D5C8"/>
+                        <a:srgbClr val="4A1A5E"/>
                       </a:solidFill>
                       <a:prstDash val="solid"/>
                       <a:round/>
@@ -34388,7 +34388,7 @@
             <a:lvl1pPr>
               <a:defRPr sz="1200">
                 <a:solidFill>
-                  <a:schemeClr val="accent6"/>
+                  <a:schemeClr val="accent5"/>
                 </a:solidFill>
                 <a:latin typeface="Courier New"/>
                 <a:ea typeface="Courier New"/>
@@ -34529,7 +34529,7 @@
           </a:solidFill>
           <a:ln w="12700">
             <a:solidFill>
-              <a:srgbClr val="2C3844"/>
+              <a:srgbClr val="4A1A5E"/>
             </a:solidFill>
             <a:prstDash val="solid"/>
           </a:ln>
@@ -35029,7 +35029,7 @@
           </a:solidFill>
           <a:ln w="12700">
             <a:solidFill>
-              <a:srgbClr val="2C3844"/>
+              <a:srgbClr val="4A1A5E"/>
             </a:solidFill>
             <a:prstDash val="solid"/>
           </a:ln>
@@ -35257,7 +35257,7 @@
             <a:r>
               <a:rPr lang="en-US" sz="3600" b="1" dirty="0">
                 <a:solidFill>
-                  <a:schemeClr val="accent4"/>
+                  <a:schemeClr val="bg2"/>
                 </a:solidFill>
               </a:rPr>
               <a:t>First run</a:t>
@@ -35293,7 +35293,7 @@
             <a:r>
               <a:rPr lang="en-US" sz="1200" dirty="0">
                 <a:solidFill>
-                  <a:schemeClr val="accent6"/>
+                  <a:schemeClr val="accent5"/>
                 </a:solidFill>
                 <a:latin typeface="Courier New" pitchFamily="34" charset="0"/>
                 <a:ea typeface="Courier New" pitchFamily="34" charset="-122"/>
@@ -35332,7 +35332,7 @@
             <a:r>
               <a:rPr lang="en-US" sz="2300" dirty="0">
                 <a:solidFill>
-                  <a:schemeClr val="accent4"/>
+                  <a:schemeClr val="bg2"/>
                 </a:solidFill>
               </a:rPr>
               <a:t>On first run zshrs writes its bundled completion functions and manuals under ~/.zshrs. Nothing is printed to the terminal; informational output goes to the log.</a:t>
@@ -35358,11 +35358,11 @@
             </a:avLst>
           </a:prstGeom>
           <a:solidFill>
-            <a:srgbClr val="FFFFFF"/>
+            <a:schemeClr val="tx2"/>
           </a:solidFill>
           <a:ln w="12700">
             <a:solidFill>
-              <a:srgbClr val="D9D5C8"/>
+              <a:srgbClr val="4A1A5E"/>
             </a:solidFill>
             <a:prstDash val="solid"/>
           </a:ln>
@@ -35395,7 +35395,7 @@
             <a:r>
               <a:rPr lang="en-US" sz="2600" b="1" dirty="0">
                 <a:solidFill>
-                  <a:schemeClr val="accent2"/>
+                  <a:schemeClr val="accent1"/>
                 </a:solidFill>
                 <a:latin typeface="Cambria" pitchFamily="34" charset="0"/>
                 <a:ea typeface="Cambria" pitchFamily="34" charset="-122"/>
@@ -35438,7 +35438,7 @@
             <a:r>
               <a:rPr lang="en-US" sz="2000" dirty="0">
                 <a:solidFill>
-                  <a:schemeClr val="accent4"/>
+                  <a:schemeClr val="bg2"/>
                 </a:solidFill>
               </a:rPr>
               <a:t>~/.zshrs/functions</a:t>
@@ -35456,7 +35456,7 @@
             <a:r>
               <a:rPr lang="en-US" sz="2000" dirty="0">
                 <a:solidFill>
-                  <a:schemeClr val="accent4"/>
+                  <a:schemeClr val="bg2"/>
                 </a:solidFill>
               </a:rPr>
               <a:t>~/.zshrs/man and ~/.zshrs/info</a:t>
@@ -35474,7 +35474,7 @@
             <a:r>
               <a:rPr lang="en-US" sz="2000" dirty="0">
                 <a:solidFill>
-                  <a:schemeClr val="accent4"/>
+                  <a:schemeClr val="bg2"/>
                 </a:solidFill>
               </a:rPr>
               <a:t>~/.zshrs/images (caches)</a:t>
@@ -35500,11 +35500,11 @@
             </a:avLst>
           </a:prstGeom>
           <a:solidFill>
-            <a:srgbClr val="FFFFFF"/>
+            <a:schemeClr val="tx2"/>
           </a:solidFill>
           <a:ln w="12700">
             <a:solidFill>
-              <a:srgbClr val="D9D5C8"/>
+              <a:srgbClr val="4A1A5E"/>
             </a:solidFill>
             <a:prstDash val="solid"/>
           </a:ln>
@@ -35537,7 +35537,7 @@
             <a:r>
               <a:rPr lang="en-US" sz="2600" b="1" dirty="0">
                 <a:solidFill>
-                  <a:schemeClr val="accent2"/>
+                  <a:schemeClr val="accent1"/>
                 </a:solidFill>
                 <a:latin typeface="Cambria" pitchFamily="34" charset="0"/>
                 <a:ea typeface="Cambria" pitchFamily="34" charset="-122"/>
@@ -35580,7 +35580,7 @@
             <a:r>
               <a:rPr lang="en-US" sz="2000" dirty="0">
                 <a:solidFill>
-                  <a:schemeClr val="accent4"/>
+                  <a:schemeClr val="bg2"/>
                 </a:solidFill>
               </a:rPr>
               <a:t>No banner</a:t>
@@ -35598,7 +35598,7 @@
             <a:r>
               <a:rPr lang="en-US" sz="2000" dirty="0">
                 <a:solidFill>
-                  <a:schemeClr val="accent4"/>
+                  <a:schemeClr val="bg2"/>
                 </a:solidFill>
               </a:rPr>
               <a:t>No progress output</a:t>
@@ -35616,7 +35616,7 @@
             <a:r>
               <a:rPr lang="en-US" sz="2000" dirty="0">
                 <a:solidFill>
-                  <a:schemeClr val="accent4"/>
+                  <a:schemeClr val="bg2"/>
                 </a:solidFill>
               </a:rPr>
               <a:t>Informational output goes to zshrs.log</a:t>
@@ -35642,11 +35642,11 @@
             </a:avLst>
           </a:prstGeom>
           <a:solidFill>
-            <a:srgbClr val="FFFFFF"/>
+            <a:schemeClr val="tx2"/>
           </a:solidFill>
           <a:ln w="12700">
             <a:solidFill>
-              <a:srgbClr val="D9D5C8"/>
+              <a:srgbClr val="4A1A5E"/>
             </a:solidFill>
             <a:prstDash val="solid"/>
           </a:ln>
@@ -35679,7 +35679,7 @@
             <a:r>
               <a:rPr lang="en-US" sz="2600" b="1" dirty="0">
                 <a:solidFill>
-                  <a:schemeClr val="accent2"/>
+                  <a:schemeClr val="accent1"/>
                 </a:solidFill>
                 <a:latin typeface="Cambria" pitchFamily="34" charset="0"/>
                 <a:ea typeface="Cambria" pitchFamily="34" charset="-122"/>
@@ -35722,7 +35722,7 @@
             <a:r>
               <a:rPr lang="en-US" sz="2000" dirty="0">
                 <a:solidFill>
-                  <a:schemeClr val="accent4"/>
+                  <a:schemeClr val="bg2"/>
                 </a:solidFill>
               </a:rPr>
               <a:t>~/.zshrs/zshrs.toml</a:t>
@@ -35740,7 +35740,7 @@
             <a:r>
               <a:rPr lang="en-US" sz="2000" dirty="0">
                 <a:solidFill>
-                  <a:schemeClr val="accent4"/>
+                  <a:schemeClr val="bg2"/>
                 </a:solidFill>
               </a:rPr>
               <a:t>Override the directory with ZSHRS_HOME</a:t>
@@ -35779,7 +35779,7 @@
             <a:lvl1pPr>
               <a:defRPr sz="1200">
                 <a:solidFill>
-                  <a:schemeClr val="accent6"/>
+                  <a:schemeClr val="accent5"/>
                 </a:solidFill>
                 <a:latin typeface="Courier New"/>
                 <a:ea typeface="Courier New"/>
@@ -35985,7 +35985,7 @@
                   <a:tcPr marL="91440" marR="91440" marT="45720" marB="45720" anchor="ctr">
                     <a:lnL w="12700" cap="flat" cmpd="sng" algn="ctr">
                       <a:solidFill>
-                        <a:srgbClr val="2C3844"/>
+                        <a:srgbClr val="4A1A5E"/>
                       </a:solidFill>
                       <a:prstDash val="solid"/>
                       <a:round/>
@@ -35994,7 +35994,7 @@
                     </a:lnL>
                     <a:lnR w="12700" cap="flat" cmpd="sng" algn="ctr">
                       <a:solidFill>
-                        <a:srgbClr val="2C3844"/>
+                        <a:srgbClr val="4A1A5E"/>
                       </a:solidFill>
                       <a:prstDash val="solid"/>
                       <a:round/>
@@ -36003,7 +36003,7 @@
                     </a:lnR>
                     <a:lnT w="12700" cap="flat" cmpd="sng" algn="ctr">
                       <a:solidFill>
-                        <a:srgbClr val="2C3844"/>
+                        <a:srgbClr val="4A1A5E"/>
                       </a:solidFill>
                       <a:prstDash val="solid"/>
                       <a:round/>
@@ -36012,7 +36012,7 @@
                     </a:lnT>
                     <a:lnB w="12700" cap="flat" cmpd="sng" algn="ctr">
                       <a:solidFill>
-                        <a:srgbClr val="2C3844"/>
+                        <a:srgbClr val="4A1A5E"/>
                       </a:solidFill>
                       <a:prstDash val="solid"/>
                       <a:round/>
@@ -36043,7 +36043,7 @@
                   <a:tcPr marL="91440" marR="91440" marT="45720" marB="45720" anchor="ctr">
                     <a:lnL w="12700" cap="flat" cmpd="sng" algn="ctr">
                       <a:solidFill>
-                        <a:srgbClr val="2C3844"/>
+                        <a:srgbClr val="4A1A5E"/>
                       </a:solidFill>
                       <a:prstDash val="solid"/>
                       <a:round/>
@@ -36052,7 +36052,7 @@
                     </a:lnL>
                     <a:lnR w="12700" cap="flat" cmpd="sng" algn="ctr">
                       <a:solidFill>
-                        <a:srgbClr val="2C3844"/>
+                        <a:srgbClr val="4A1A5E"/>
                       </a:solidFill>
                       <a:prstDash val="solid"/>
                       <a:round/>
@@ -36061,7 +36061,7 @@
                     </a:lnR>
                     <a:lnT w="12700" cap="flat" cmpd="sng" algn="ctr">
                       <a:solidFill>
-                        <a:srgbClr val="2C3844"/>
+                        <a:srgbClr val="4A1A5E"/>
                       </a:solidFill>
                       <a:prstDash val="solid"/>
                       <a:round/>
@@ -36070,7 +36070,7 @@
                     </a:lnT>
                     <a:lnB w="12700" cap="flat" cmpd="sng" algn="ctr">
                       <a:solidFill>
-                        <a:srgbClr val="2C3844"/>
+                        <a:srgbClr val="4A1A5E"/>
                       </a:solidFill>
                       <a:prstDash val="solid"/>
                       <a:round/>
@@ -36101,7 +36101,7 @@
                   <a:tcPr marL="91440" marR="91440" marT="45720" marB="45720" anchor="ctr">
                     <a:lnL w="12700" cap="flat" cmpd="sng" algn="ctr">
                       <a:solidFill>
-                        <a:srgbClr val="2C3844"/>
+                        <a:srgbClr val="4A1A5E"/>
                       </a:solidFill>
                       <a:prstDash val="solid"/>
                       <a:round/>
@@ -36110,7 +36110,7 @@
                     </a:lnL>
                     <a:lnR w="12700" cap="flat" cmpd="sng" algn="ctr">
                       <a:solidFill>
-                        <a:srgbClr val="2C3844"/>
+                        <a:srgbClr val="4A1A5E"/>
                       </a:solidFill>
                       <a:prstDash val="solid"/>
                       <a:round/>
@@ -36119,7 +36119,7 @@
                     </a:lnR>
                     <a:lnT w="12700" cap="flat" cmpd="sng" algn="ctr">
                       <a:solidFill>
-                        <a:srgbClr val="2C3844"/>
+                        <a:srgbClr val="4A1A5E"/>
                       </a:solidFill>
                       <a:prstDash val="solid"/>
                       <a:round/>
@@ -36128,7 +36128,7 @@
                     </a:lnT>
                     <a:lnB w="12700" cap="flat" cmpd="sng" algn="ctr">
                       <a:solidFill>
-                        <a:srgbClr val="2C3844"/>
+                        <a:srgbClr val="4A1A5E"/>
                       </a:solidFill>
                       <a:prstDash val="solid"/>
                       <a:round/>
@@ -36161,7 +36161,7 @@
                   <a:tcPr marL="91440" marR="91440" marT="45720" marB="45720" anchor="ctr">
                     <a:lnL w="12700" cap="flat" cmpd="sng" algn="ctr">
                       <a:solidFill>
-                        <a:srgbClr val="2C3844"/>
+                        <a:srgbClr val="4A1A5E"/>
                       </a:solidFill>
                       <a:prstDash val="solid"/>
                       <a:round/>
@@ -36170,7 +36170,7 @@
                     </a:lnL>
                     <a:lnR w="12700" cap="flat" cmpd="sng" algn="ctr">
                       <a:solidFill>
-                        <a:srgbClr val="2C3844"/>
+                        <a:srgbClr val="4A1A5E"/>
                       </a:solidFill>
                       <a:prstDash val="solid"/>
                       <a:round/>
@@ -36179,7 +36179,7 @@
                     </a:lnR>
                     <a:lnT w="12700" cap="flat" cmpd="sng" algn="ctr">
                       <a:solidFill>
-                        <a:srgbClr val="2C3844"/>
+                        <a:srgbClr val="4A1A5E"/>
                       </a:solidFill>
                       <a:prstDash val="solid"/>
                       <a:round/>
@@ -36188,7 +36188,7 @@
                     </a:lnT>
                     <a:lnB w="12700" cap="flat" cmpd="sng" algn="ctr">
                       <a:solidFill>
-                        <a:srgbClr val="2C3844"/>
+                        <a:srgbClr val="4A1A5E"/>
                       </a:solidFill>
                       <a:prstDash val="solid"/>
                       <a:round/>
@@ -36219,7 +36219,7 @@
                   <a:tcPr marL="91440" marR="91440" marT="45720" marB="45720" anchor="ctr">
                     <a:lnL w="12700" cap="flat" cmpd="sng" algn="ctr">
                       <a:solidFill>
-                        <a:srgbClr val="2C3844"/>
+                        <a:srgbClr val="4A1A5E"/>
                       </a:solidFill>
                       <a:prstDash val="solid"/>
                       <a:round/>
@@ -36228,7 +36228,7 @@
                     </a:lnL>
                     <a:lnR w="12700" cap="flat" cmpd="sng" algn="ctr">
                       <a:solidFill>
-                        <a:srgbClr val="2C3844"/>
+                        <a:srgbClr val="4A1A5E"/>
                       </a:solidFill>
                       <a:prstDash val="solid"/>
                       <a:round/>
@@ -36237,7 +36237,7 @@
                     </a:lnR>
                     <a:lnT w="12700" cap="flat" cmpd="sng" algn="ctr">
                       <a:solidFill>
-                        <a:srgbClr val="2C3844"/>
+                        <a:srgbClr val="4A1A5E"/>
                       </a:solidFill>
                       <a:prstDash val="solid"/>
                       <a:round/>
@@ -36246,7 +36246,7 @@
                     </a:lnT>
                     <a:lnB w="12700" cap="flat" cmpd="sng" algn="ctr">
                       <a:solidFill>
-                        <a:srgbClr val="2C3844"/>
+                        <a:srgbClr val="4A1A5E"/>
                       </a:solidFill>
                       <a:prstDash val="solid"/>
                       <a:round/>
@@ -36277,7 +36277,7 @@
                   <a:tcPr marL="91440" marR="91440" marT="45720" marB="45720" anchor="ctr">
                     <a:lnL w="12700" cap="flat" cmpd="sng" algn="ctr">
                       <a:solidFill>
-                        <a:srgbClr val="2C3844"/>
+                        <a:srgbClr val="4A1A5E"/>
                       </a:solidFill>
                       <a:prstDash val="solid"/>
                       <a:round/>
@@ -36286,7 +36286,7 @@
                     </a:lnL>
                     <a:lnR w="12700" cap="flat" cmpd="sng" algn="ctr">
                       <a:solidFill>
-                        <a:srgbClr val="2C3844"/>
+                        <a:srgbClr val="4A1A5E"/>
                       </a:solidFill>
                       <a:prstDash val="solid"/>
                       <a:round/>
@@ -36295,7 +36295,7 @@
                     </a:lnR>
                     <a:lnT w="12700" cap="flat" cmpd="sng" algn="ctr">
                       <a:solidFill>
-                        <a:srgbClr val="2C3844"/>
+                        <a:srgbClr val="4A1A5E"/>
                       </a:solidFill>
                       <a:prstDash val="solid"/>
                       <a:round/>
@@ -36304,7 +36304,7 @@
                     </a:lnT>
                     <a:lnB w="12700" cap="flat" cmpd="sng" algn="ctr">
                       <a:solidFill>
-                        <a:srgbClr val="2C3844"/>
+                        <a:srgbClr val="4A1A5E"/>
                       </a:solidFill>
                       <a:prstDash val="solid"/>
                       <a:round/>
@@ -36337,7 +36337,7 @@
                   <a:tcPr marL="91440" marR="91440" marT="45720" marB="45720" anchor="ctr">
                     <a:lnL w="12700" cap="flat" cmpd="sng" algn="ctr">
                       <a:solidFill>
-                        <a:srgbClr val="2C3844"/>
+                        <a:srgbClr val="4A1A5E"/>
                       </a:solidFill>
                       <a:prstDash val="solid"/>
                       <a:round/>
@@ -36346,7 +36346,7 @@
                     </a:lnL>
                     <a:lnR w="12700" cap="flat" cmpd="sng" algn="ctr">
                       <a:solidFill>
-                        <a:srgbClr val="2C3844"/>
+                        <a:srgbClr val="4A1A5E"/>
                       </a:solidFill>
                       <a:prstDash val="solid"/>
                       <a:round/>
@@ -36355,7 +36355,7 @@
                     </a:lnR>
                     <a:lnT w="12700" cap="flat" cmpd="sng" algn="ctr">
                       <a:solidFill>
-                        <a:srgbClr val="2C3844"/>
+                        <a:srgbClr val="4A1A5E"/>
                       </a:solidFill>
                       <a:prstDash val="solid"/>
                       <a:round/>
@@ -36364,7 +36364,7 @@
                     </a:lnT>
                     <a:lnB w="12700" cap="flat" cmpd="sng" algn="ctr">
                       <a:solidFill>
-                        <a:srgbClr val="2C3844"/>
+                        <a:srgbClr val="4A1A5E"/>
                       </a:solidFill>
                       <a:prstDash val="solid"/>
                       <a:round/>
@@ -36395,7 +36395,7 @@
                   <a:tcPr marL="91440" marR="91440" marT="45720" marB="45720" anchor="ctr">
                     <a:lnL w="12700" cap="flat" cmpd="sng" algn="ctr">
                       <a:solidFill>
-                        <a:srgbClr val="2C3844"/>
+                        <a:srgbClr val="4A1A5E"/>
                       </a:solidFill>
                       <a:prstDash val="solid"/>
                       <a:round/>
@@ -36404,7 +36404,7 @@
                     </a:lnL>
                     <a:lnR w="12700" cap="flat" cmpd="sng" algn="ctr">
                       <a:solidFill>
-                        <a:srgbClr val="2C3844"/>
+                        <a:srgbClr val="4A1A5E"/>
                       </a:solidFill>
                       <a:prstDash val="solid"/>
                       <a:round/>
@@ -36413,7 +36413,7 @@
                     </a:lnR>
                     <a:lnT w="12700" cap="flat" cmpd="sng" algn="ctr">
                       <a:solidFill>
-                        <a:srgbClr val="2C3844"/>
+                        <a:srgbClr val="4A1A5E"/>
                       </a:solidFill>
                       <a:prstDash val="solid"/>
                       <a:round/>
@@ -36422,7 +36422,7 @@
                     </a:lnT>
                     <a:lnB w="12700" cap="flat" cmpd="sng" algn="ctr">
                       <a:solidFill>
-                        <a:srgbClr val="2C3844"/>
+                        <a:srgbClr val="4A1A5E"/>
                       </a:solidFill>
                       <a:prstDash val="solid"/>
                       <a:round/>
@@ -36453,7 +36453,7 @@
                   <a:tcPr marL="91440" marR="91440" marT="45720" marB="45720" anchor="ctr">
                     <a:lnL w="12700" cap="flat" cmpd="sng" algn="ctr">
                       <a:solidFill>
-                        <a:srgbClr val="2C3844"/>
+                        <a:srgbClr val="4A1A5E"/>
                       </a:solidFill>
                       <a:prstDash val="solid"/>
                       <a:round/>
@@ -36462,7 +36462,7 @@
                     </a:lnL>
                     <a:lnR w="12700" cap="flat" cmpd="sng" algn="ctr">
                       <a:solidFill>
-                        <a:srgbClr val="2C3844"/>
+                        <a:srgbClr val="4A1A5E"/>
                       </a:solidFill>
                       <a:prstDash val="solid"/>
                       <a:round/>
@@ -36471,7 +36471,7 @@
                     </a:lnR>
                     <a:lnT w="12700" cap="flat" cmpd="sng" algn="ctr">
                       <a:solidFill>
-                        <a:srgbClr val="2C3844"/>
+                        <a:srgbClr val="4A1A5E"/>
                       </a:solidFill>
                       <a:prstDash val="solid"/>
                       <a:round/>
@@ -36480,7 +36480,7 @@
                     </a:lnT>
                     <a:lnB w="12700" cap="flat" cmpd="sng" algn="ctr">
                       <a:solidFill>
-                        <a:srgbClr val="2C3844"/>
+                        <a:srgbClr val="4A1A5E"/>
                       </a:solidFill>
                       <a:prstDash val="solid"/>
                       <a:round/>
@@ -36513,7 +36513,7 @@
                   <a:tcPr marL="91440" marR="91440" marT="45720" marB="45720" anchor="ctr">
                     <a:lnL w="12700" cap="flat" cmpd="sng" algn="ctr">
                       <a:solidFill>
-                        <a:srgbClr val="2C3844"/>
+                        <a:srgbClr val="4A1A5E"/>
                       </a:solidFill>
                       <a:prstDash val="solid"/>
                       <a:round/>
@@ -36522,7 +36522,7 @@
                     </a:lnL>
                     <a:lnR w="12700" cap="flat" cmpd="sng" algn="ctr">
                       <a:solidFill>
-                        <a:srgbClr val="2C3844"/>
+                        <a:srgbClr val="4A1A5E"/>
                       </a:solidFill>
                       <a:prstDash val="solid"/>
                       <a:round/>
@@ -36531,7 +36531,7 @@
                     </a:lnR>
                     <a:lnT w="12700" cap="flat" cmpd="sng" algn="ctr">
                       <a:solidFill>
-                        <a:srgbClr val="2C3844"/>
+                        <a:srgbClr val="4A1A5E"/>
                       </a:solidFill>
                       <a:prstDash val="solid"/>
                       <a:round/>
@@ -36540,7 +36540,7 @@
                     </a:lnT>
                     <a:lnB w="12700" cap="flat" cmpd="sng" algn="ctr">
                       <a:solidFill>
-                        <a:srgbClr val="2C3844"/>
+                        <a:srgbClr val="4A1A5E"/>
                       </a:solidFill>
                       <a:prstDash val="solid"/>
                       <a:round/>
@@ -36571,7 +36571,7 @@
                   <a:tcPr marL="91440" marR="91440" marT="45720" marB="45720" anchor="ctr">
                     <a:lnL w="12700" cap="flat" cmpd="sng" algn="ctr">
                       <a:solidFill>
-                        <a:srgbClr val="2C3844"/>
+                        <a:srgbClr val="4A1A5E"/>
                       </a:solidFill>
                       <a:prstDash val="solid"/>
                       <a:round/>
@@ -36580,7 +36580,7 @@
                     </a:lnL>
                     <a:lnR w="12700" cap="flat" cmpd="sng" algn="ctr">
                       <a:solidFill>
-                        <a:srgbClr val="2C3844"/>
+                        <a:srgbClr val="4A1A5E"/>
                       </a:solidFill>
                       <a:prstDash val="solid"/>
                       <a:round/>
@@ -36589,7 +36589,7 @@
                     </a:lnR>
                     <a:lnT w="12700" cap="flat" cmpd="sng" algn="ctr">
                       <a:solidFill>
-                        <a:srgbClr val="2C3844"/>
+                        <a:srgbClr val="4A1A5E"/>
                       </a:solidFill>
                       <a:prstDash val="solid"/>
                       <a:round/>
@@ -36598,7 +36598,7 @@
                     </a:lnT>
                     <a:lnB w="12700" cap="flat" cmpd="sng" algn="ctr">
                       <a:solidFill>
-                        <a:srgbClr val="2C3844"/>
+                        <a:srgbClr val="4A1A5E"/>
                       </a:solidFill>
                       <a:prstDash val="solid"/>
                       <a:round/>
@@ -36629,7 +36629,7 @@
                   <a:tcPr marL="91440" marR="91440" marT="45720" marB="45720" anchor="ctr">
                     <a:lnL w="12700" cap="flat" cmpd="sng" algn="ctr">
                       <a:solidFill>
-                        <a:srgbClr val="2C3844"/>
+                        <a:srgbClr val="4A1A5E"/>
                       </a:solidFill>
                       <a:prstDash val="solid"/>
                       <a:round/>
@@ -36638,7 +36638,7 @@
                     </a:lnL>
                     <a:lnR w="12700" cap="flat" cmpd="sng" algn="ctr">
                       <a:solidFill>
-                        <a:srgbClr val="2C3844"/>
+                        <a:srgbClr val="4A1A5E"/>
                       </a:solidFill>
                       <a:prstDash val="solid"/>
                       <a:round/>
@@ -36647,7 +36647,7 @@
                     </a:lnR>
                     <a:lnT w="12700" cap="flat" cmpd="sng" algn="ctr">
                       <a:solidFill>
-                        <a:srgbClr val="2C3844"/>
+                        <a:srgbClr val="4A1A5E"/>
                       </a:solidFill>
                       <a:prstDash val="solid"/>
                       <a:round/>
@@ -36656,7 +36656,7 @@
                     </a:lnT>
                     <a:lnB w="12700" cap="flat" cmpd="sng" algn="ctr">
                       <a:solidFill>
-                        <a:srgbClr val="2C3844"/>
+                        <a:srgbClr val="4A1A5E"/>
                       </a:solidFill>
                       <a:prstDash val="solid"/>
                       <a:round/>
@@ -36689,7 +36689,7 @@
                   <a:tcPr marL="91440" marR="91440" marT="45720" marB="45720" anchor="ctr">
                     <a:lnL w="12700" cap="flat" cmpd="sng" algn="ctr">
                       <a:solidFill>
-                        <a:srgbClr val="2C3844"/>
+                        <a:srgbClr val="4A1A5E"/>
                       </a:solidFill>
                       <a:prstDash val="solid"/>
                       <a:round/>
@@ -36698,7 +36698,7 @@
                     </a:lnL>
                     <a:lnR w="12700" cap="flat" cmpd="sng" algn="ctr">
                       <a:solidFill>
-                        <a:srgbClr val="2C3844"/>
+                        <a:srgbClr val="4A1A5E"/>
                       </a:solidFill>
                       <a:prstDash val="solid"/>
                       <a:round/>
@@ -36707,7 +36707,7 @@
                     </a:lnR>
                     <a:lnT w="12700" cap="flat" cmpd="sng" algn="ctr">
                       <a:solidFill>
-                        <a:srgbClr val="2C3844"/>
+                        <a:srgbClr val="4A1A5E"/>
                       </a:solidFill>
                       <a:prstDash val="solid"/>
                       <a:round/>
@@ -36716,7 +36716,7 @@
                     </a:lnT>
                     <a:lnB w="12700" cap="flat" cmpd="sng" algn="ctr">
                       <a:solidFill>
-                        <a:srgbClr val="2C3844"/>
+                        <a:srgbClr val="4A1A5E"/>
                       </a:solidFill>
                       <a:prstDash val="solid"/>
                       <a:round/>
@@ -36747,7 +36747,7 @@
                   <a:tcPr marL="91440" marR="91440" marT="45720" marB="45720" anchor="ctr">
                     <a:lnL w="12700" cap="flat" cmpd="sng" algn="ctr">
                       <a:solidFill>
-                        <a:srgbClr val="2C3844"/>
+                        <a:srgbClr val="4A1A5E"/>
                       </a:solidFill>
                       <a:prstDash val="solid"/>
                       <a:round/>
@@ -36756,7 +36756,7 @@
                     </a:lnL>
                     <a:lnR w="12700" cap="flat" cmpd="sng" algn="ctr">
                       <a:solidFill>
-                        <a:srgbClr val="2C3844"/>
+                        <a:srgbClr val="4A1A5E"/>
                       </a:solidFill>
                       <a:prstDash val="solid"/>
                       <a:round/>
@@ -36765,7 +36765,7 @@
                     </a:lnR>
                     <a:lnT w="12700" cap="flat" cmpd="sng" algn="ctr">
                       <a:solidFill>
-                        <a:srgbClr val="2C3844"/>
+                        <a:srgbClr val="4A1A5E"/>
                       </a:solidFill>
                       <a:prstDash val="solid"/>
                       <a:round/>
@@ -36774,7 +36774,7 @@
                     </a:lnT>
                     <a:lnB w="12700" cap="flat" cmpd="sng" algn="ctr">
                       <a:solidFill>
-                        <a:srgbClr val="2C3844"/>
+                        <a:srgbClr val="4A1A5E"/>
                       </a:solidFill>
                       <a:prstDash val="solid"/>
                       <a:round/>
@@ -36805,7 +36805,7 @@
                   <a:tcPr marL="91440" marR="91440" marT="45720" marB="45720" anchor="ctr">
                     <a:lnL w="12700" cap="flat" cmpd="sng" algn="ctr">
                       <a:solidFill>
-                        <a:srgbClr val="2C3844"/>
+                        <a:srgbClr val="4A1A5E"/>
                       </a:solidFill>
                       <a:prstDash val="solid"/>
                       <a:round/>
@@ -36814,7 +36814,7 @@
                     </a:lnL>
                     <a:lnR w="12700" cap="flat" cmpd="sng" algn="ctr">
                       <a:solidFill>
-                        <a:srgbClr val="2C3844"/>
+                        <a:srgbClr val="4A1A5E"/>
                       </a:solidFill>
                       <a:prstDash val="solid"/>
                       <a:round/>
@@ -36823,7 +36823,7 @@
                     </a:lnR>
                     <a:lnT w="12700" cap="flat" cmpd="sng" algn="ctr">
                       <a:solidFill>
-                        <a:srgbClr val="2C3844"/>
+                        <a:srgbClr val="4A1A5E"/>
                       </a:solidFill>
                       <a:prstDash val="solid"/>
                       <a:round/>
@@ -36832,7 +36832,7 @@
                     </a:lnT>
                     <a:lnB w="12700" cap="flat" cmpd="sng" algn="ctr">
                       <a:solidFill>
-                        <a:srgbClr val="2C3844"/>
+                        <a:srgbClr val="4A1A5E"/>
                       </a:solidFill>
                       <a:prstDash val="solid"/>
                       <a:round/>
@@ -36865,7 +36865,7 @@
                   <a:tcPr marL="91440" marR="91440" marT="45720" marB="45720" anchor="ctr">
                     <a:lnL w="12700" cap="flat" cmpd="sng" algn="ctr">
                       <a:solidFill>
-                        <a:srgbClr val="2C3844"/>
+                        <a:srgbClr val="4A1A5E"/>
                       </a:solidFill>
                       <a:prstDash val="solid"/>
                       <a:round/>
@@ -36874,7 +36874,7 @@
                     </a:lnL>
                     <a:lnR w="12700" cap="flat" cmpd="sng" algn="ctr">
                       <a:solidFill>
-                        <a:srgbClr val="2C3844"/>
+                        <a:srgbClr val="4A1A5E"/>
                       </a:solidFill>
                       <a:prstDash val="solid"/>
                       <a:round/>
@@ -36883,7 +36883,7 @@
                     </a:lnR>
                     <a:lnT w="12700" cap="flat" cmpd="sng" algn="ctr">
                       <a:solidFill>
-                        <a:srgbClr val="2C3844"/>
+                        <a:srgbClr val="4A1A5E"/>
                       </a:solidFill>
                       <a:prstDash val="solid"/>
                       <a:round/>
@@ -36892,7 +36892,7 @@
                     </a:lnT>
                     <a:lnB w="12700" cap="flat" cmpd="sng" algn="ctr">
                       <a:solidFill>
-                        <a:srgbClr val="2C3844"/>
+                        <a:srgbClr val="4A1A5E"/>
                       </a:solidFill>
                       <a:prstDash val="solid"/>
                       <a:round/>
@@ -36930,7 +36930,7 @@
                   <a:tcPr marL="91440" marR="91440" marT="45720" marB="45720" anchor="ctr">
                     <a:lnL w="12700" cap="flat" cmpd="sng" algn="ctr">
                       <a:solidFill>
-                        <a:srgbClr val="2C3844"/>
+                        <a:srgbClr val="4A1A5E"/>
                       </a:solidFill>
                       <a:prstDash val="solid"/>
                       <a:round/>
@@ -36939,7 +36939,7 @@
                     </a:lnL>
                     <a:lnR w="12700" cap="flat" cmpd="sng" algn="ctr">
                       <a:solidFill>
-                        <a:srgbClr val="2C3844"/>
+                        <a:srgbClr val="4A1A5E"/>
                       </a:solidFill>
                       <a:prstDash val="solid"/>
                       <a:round/>
@@ -36948,7 +36948,7 @@
                     </a:lnR>
                     <a:lnT w="12700" cap="flat" cmpd="sng" algn="ctr">
                       <a:solidFill>
-                        <a:srgbClr val="2C3844"/>
+                        <a:srgbClr val="4A1A5E"/>
                       </a:solidFill>
                       <a:prstDash val="solid"/>
                       <a:round/>
@@ -36957,7 +36957,7 @@
                     </a:lnT>
                     <a:lnB w="12700" cap="flat" cmpd="sng" algn="ctr">
                       <a:solidFill>
-                        <a:srgbClr val="2C3844"/>
+                        <a:srgbClr val="4A1A5E"/>
                       </a:solidFill>
                       <a:prstDash val="solid"/>
                       <a:round/>
@@ -36988,7 +36988,7 @@
                   <a:tcPr marL="91440" marR="91440" marT="45720" marB="45720" anchor="ctr">
                     <a:lnL w="12700" cap="flat" cmpd="sng" algn="ctr">
                       <a:solidFill>
-                        <a:srgbClr val="2C3844"/>
+                        <a:srgbClr val="4A1A5E"/>
                       </a:solidFill>
                       <a:prstDash val="solid"/>
                       <a:round/>
@@ -36997,7 +36997,7 @@
                     </a:lnL>
                     <a:lnR w="12700" cap="flat" cmpd="sng" algn="ctr">
                       <a:solidFill>
-                        <a:srgbClr val="2C3844"/>
+                        <a:srgbClr val="4A1A5E"/>
                       </a:solidFill>
                       <a:prstDash val="solid"/>
                       <a:round/>
@@ -37006,7 +37006,7 @@
                     </a:lnR>
                     <a:lnT w="12700" cap="flat" cmpd="sng" algn="ctr">
                       <a:solidFill>
-                        <a:srgbClr val="2C3844"/>
+                        <a:srgbClr val="4A1A5E"/>
                       </a:solidFill>
                       <a:prstDash val="solid"/>
                       <a:round/>
@@ -37015,7 +37015,7 @@
                     </a:lnT>
                     <a:lnB w="12700" cap="flat" cmpd="sng" algn="ctr">
                       <a:solidFill>
-                        <a:srgbClr val="2C3844"/>
+                        <a:srgbClr val="4A1A5E"/>
                       </a:solidFill>
                       <a:prstDash val="solid"/>
                       <a:round/>
@@ -37131,7 +37131,7 @@
             <a:r>
               <a:rPr lang="en-US" sz="3600" b="1" dirty="0">
                 <a:solidFill>
-                  <a:schemeClr val="accent4"/>
+                  <a:schemeClr val="bg2"/>
                 </a:solidFill>
               </a:rPr>
               <a:t>Measure it on your machine</a:t>
@@ -37167,7 +37167,7 @@
             <a:r>
               <a:rPr lang="en-US" sz="1200" dirty="0">
                 <a:solidFill>
-                  <a:schemeClr val="accent6"/>
+                  <a:schemeClr val="accent5"/>
                 </a:solidFill>
                 <a:latin typeface="Courier New" pitchFamily="34" charset="0"/>
                 <a:ea typeface="Courier New" pitchFamily="34" charset="-122"/>
@@ -37206,7 +37206,7 @@
             <a:r>
               <a:rPr lang="en-US" sz="2400" dirty="0">
                 <a:solidFill>
-                  <a:schemeClr val="accent4"/>
+                  <a:schemeClr val="bg2"/>
                 </a:solidFill>
               </a:rPr>
               <a:t>zsh-bench gives the first four numbers in one run. ps gives memory.</a:t>
@@ -37232,11 +37232,11 @@
             </a:avLst>
           </a:prstGeom>
           <a:solidFill>
-            <a:schemeClr val="accent4"/>
+            <a:schemeClr val="tx2"/>
           </a:solidFill>
           <a:ln w="12700">
             <a:solidFill>
-              <a:srgbClr val="2C3844"/>
+              <a:srgbClr val="4A1A5E"/>
             </a:solidFill>
             <a:prstDash val="solid"/>
           </a:ln>
@@ -37335,7 +37335,7 @@
             <a:r>
               <a:rPr lang="en-US" sz="3000" dirty="0">
                 <a:solidFill>
-                  <a:schemeClr val="accent4"/>
+                  <a:schemeClr val="bg2"/>
                 </a:solidFill>
               </a:rPr>
               <a:t>Run the same commands in your current shell and in zshrs</a:t>
@@ -37353,7 +37353,7 @@
             <a:r>
               <a:rPr lang="en-US" sz="3000" dirty="0">
                 <a:solidFill>
-                  <a:schemeClr val="accent4"/>
+                  <a:schemeClr val="bg2"/>
                 </a:solidFill>
               </a:rPr>
               <a:t>Report numbers in an issue if they miss the targets</a:t>
@@ -37392,7 +37392,7 @@
             <a:lvl1pPr>
               <a:defRPr sz="1200">
                 <a:solidFill>
-                  <a:schemeClr val="accent6"/>
+                  <a:schemeClr val="accent5"/>
                 </a:solidFill>
                 <a:latin typeface="Courier New"/>
                 <a:ea typeface="Courier New"/>
@@ -37423,40 +37423,40 @@
   <a:themeElements>
     <a:clrScheme name="zshrs talk">
       <a:dk1>
-        <a:srgbClr val="0F1419"/>
+        <a:srgbClr val="05050A"/>
       </a:dk1>
       <a:lt1>
-        <a:srgbClr val="F2F0E9"/>
+        <a:srgbClr val="0D0A1E"/>
       </a:lt1>
       <a:dk2>
-        <a:srgbClr val="1A222B"/>
+        <a:srgbClr val="11112A"/>
       </a:dk2>
       <a:lt2>
-        <a:srgbClr val="E8E6DF"/>
+        <a:srgbClr val="E6F4FF"/>
       </a:lt2>
       <a:accent1>
-        <a:srgbClr val="5CC8D7"/>
+        <a:srgbClr val="05D9E8"/>
       </a:accent1>
       <a:accent2>
-        <a:srgbClr val="1B7F8E"/>
+        <a:srgbClr val="05D9E8"/>
       </a:accent2>
       <a:accent3>
-        <a:srgbClr val="F2994A"/>
+        <a:srgbClr val="FF2A6D"/>
       </a:accent3>
       <a:accent4>
-        <a:srgbClr val="14181D"/>
+        <a:srgbClr val="D300C5"/>
       </a:accent4>
       <a:accent5>
-        <a:srgbClr val="9AA4AE"/>
+        <a:srgbClr val="9A9AB8"/>
       </a:accent5>
       <a:accent6>
-        <a:srgbClr val="4A5158"/>
+        <a:srgbClr val="6A6A8C"/>
       </a:accent6>
       <a:hlink>
-        <a:srgbClr val="5CC8D7"/>
+        <a:srgbClr val="05D9E8"/>
       </a:hlink>
       <a:folHlink>
-        <a:srgbClr val="9AA4AE"/>
+        <a:srgbClr val="9A9AB8"/>
       </a:folHlink>
     </a:clrScheme>
     <a:fontScheme name="zshrs talk">
